--- a/docs/Strata_Cobot_Presentation.pptx
+++ b/docs/Strata_Cobot_Presentation.pptx
@@ -18,9 +18,10 @@
     <p:sldId id="266" r:id="rId12"/>
     <p:sldId id="267" r:id="rId13"/>
     <p:sldId id="268" r:id="rId14"/>
+    <p:sldId id="269" r:id="rId15"/>
   </p:sldIdLst>
   <p:notesMasterIdLst>
-    <p:notesMasterId r:id="rId15"/>
+    <p:notesMasterId r:id="rId16"/>
   </p:notesMasterIdLst>
   <p:sldSz cx="12192000" cy="6858000"/>
   <p:notesSz cx="6858000" cy="12192000"/>
@@ -119,7 +120,7 @@
   <p:extLst>
     <p:ext uri="{521415D9-36F7-43E2-AB2F-B90AF26B5E84}">
       <p14:sectionLst xmlns:p14="http://schemas.microsoft.com/office/powerpoint/2010/main">
-        <p14:section name="Introduction" id="{1b3d20a9-c861-60a4-48bf-4d70a8437e1c}">
+        <p14:section name="Introduction" id="{1892766f-8e50-f5df-5acd-3cdf027a44ad}">
           <p14:sldIdLst>
             <p14:sldId id="256"/>
             <p14:sldId id="257"/>
@@ -127,25 +128,26 @@
             <p14:sldId id="259"/>
           </p14:sldIdLst>
         </p14:section>
-        <p14:section name="The manipulator" id="{5b03b27f-cb1d-4447-5009-c9e48ffdf872}">
+        <p14:section name="The manipulator" id="{5cee13d5-f814-f073-3ad7-da28232dfab8}">
           <p14:sldIdLst>
             <p14:sldId id="260"/>
             <p14:sldId id="261"/>
             <p14:sldId id="262"/>
             <p14:sldId id="263"/>
+            <p14:sldId id="264"/>
           </p14:sldIdLst>
         </p14:section>
-        <p14:section name="The mobile robot" id="{f163ed0b-b240-fd6e-08c0-dd1a25095f09}">
+        <p14:section name="The mobile robot" id="{2c1f0b5d-8a40-f1d9-3d32-a87f6de0c350}">
           <p14:sldIdLst>
-            <p14:sldId id="264"/>
             <p14:sldId id="265"/>
+            <p14:sldId id="266"/>
           </p14:sldIdLst>
         </p14:section>
-        <p14:section name="Results" id="{e25c9812-8f7d-80de-9a7d-6d94839f7e69}">
+        <p14:section name="Results" id="{ecff569d-d83d-6d74-f967-6c22d2b2e19c}">
           <p14:sldIdLst>
-            <p14:sldId id="266"/>
             <p14:sldId id="267"/>
             <p14:sldId id="268"/>
+            <p14:sldId id="269"/>
           </p14:sldIdLst>
         </p14:section>
       </p14:sectionLst>
@@ -982,7 +984,7 @@
           <a:p>
             <a:r>
               <a:rPr lang="en-US" dirty="0"/>
-              <a:t>We measure path quality against the shortest path for a 0.395 m circle that encloses the chassis. But when driving straight past a rock only the half-width must clear, so we can plan slightly inside that clearance and match the shortest length while keeping 13 cm to spare. Above 0.40 m narrow gaps close and the lap grows by up to 13 percent.</a:t>
+              <a:t>Home to the ore drop pose, then to the arm pose, then home. Every straight leg is re-checked on the full-resolution map. Tightening matters: without it, corners sit on 5 cm grid cells and the path is a few percent too long - which made our first version 2 percent too long.</a:t>
             </a:r>
             <a:endParaRPr lang="en-US" dirty="0"/>
           </a:p>
@@ -1070,7 +1072,7 @@
           <a:p>
             <a:r>
               <a:rPr lang="en-US" dirty="0"/>
-              <a:t>Every trial used a freshly launched world with randomised ores or rocks, checked by the automatic evaluator that comes with the simulation. Sorting was perfect in both trials on different ore mixes. Path efficiency reached 1.00; the small shortfall in one trial comes from the reference path varying between runs.</a:t>
+              <a:t>We measure path quality against the shortest path for a 0.395 m circle that encloses the chassis. But when driving straight past a rock only the half-width must clear, so we can plan slightly inside that clearance and match the shortest length while keeping 13 cm to spare. Above 0.40 m narrow gaps close and the lap grows by up to 13 percent.</a:t>
             </a:r>
             <a:endParaRPr lang="en-US" dirty="0"/>
           </a:p>
@@ -1158,7 +1160,7 @@
           <a:p>
             <a:r>
               <a:rPr lang="en-US" dirty="0"/>
-              <a:t>Most of these were invisible until we ran full trials with automatic checking, which is the main lesson: test end to end early. The others came from measuring the geometry ourselves instead of trusting the brief.</a:t>
+              <a:t>Every trial used a freshly launched world with randomised ores or rocks, checked by the automatic evaluator that comes with the simulation. Sorting was perfect in both trials on different ore mixes. Path efficiency reached 1.00; the small shortfall in one trial comes from the reference path varying between runs.</a:t>
             </a:r>
             <a:endParaRPr lang="en-US" dirty="0"/>
           </a:p>
@@ -1246,7 +1248,7 @@
           <a:p>
             <a:r>
               <a:rPr lang="en-US" dirty="0"/>
-              <a:t>To sum up: both halves of the mission work end to end in simulation, using only algorithms we wrote. The natural next step is the handoff, where the eBot delivers ore to the arm. Happy to take questions, and we can run a live demo.</a:t>
+              <a:t>Most of these were invisible until we ran full trials with automatic checking, which is the main lesson: test end to end early. The others came from measuring the geometry ourselves instead of trusting the brief.</a:t>
             </a:r>
             <a:endParaRPr lang="en-US" dirty="0"/>
           </a:p>
@@ -1270,6 +1272,94 @@
             <a:fld id="{F7021451-1387-4CA6-816F-3879F97B5CBC}" type="slidenum">
               <a:rPr lang="en-US"/>
               <a:t>13</a:t>
+            </a:fld>
+            <a:endParaRPr lang="en-US"/>
+          </a:p>
+        </p:txBody>
+      </p:sp>
+    </p:spTree>
+    <p:extLst>
+      <p:ext uri="{BB962C8B-B14F-4D97-AF65-F5344CB8AC3E}">
+        <p14:creationId xmlns:p14="http://schemas.microsoft.com/office/powerpoint/2010/main" val="1024086991"/>
+      </p:ext>
+    </p:extLst>
+  </p:cSld>
+  <p:clrMapOvr>
+    <a:masterClrMapping/>
+  </p:clrMapOvr>
+</p:notes>
+</file>
+
+<file path=ppt/notesSlides/notesSlide14.xml><?xml version="1.0" encoding="utf-8"?>
+<p:notes xmlns:a="http://schemas.openxmlformats.org/drawingml/2006/main" xmlns:r="http://schemas.openxmlformats.org/officeDocument/2006/relationships" xmlns:p="http://schemas.openxmlformats.org/presentationml/2006/main">
+  <p:cSld>
+    <p:spTree>
+      <p:nvGrpSpPr>
+        <p:cNvPr id="1" name=""/>
+        <p:cNvGrpSpPr/>
+        <p:nvPr/>
+      </p:nvGrpSpPr>
+      <p:grpSpPr>
+        <a:xfrm>
+          <a:off x="0" y="0"/>
+          <a:ext cx="0" cy="0"/>
+          <a:chOff x="0" y="0"/>
+          <a:chExt cx="0" cy="0"/>
+        </a:xfrm>
+      </p:grpSpPr>
+      <p:sp>
+        <p:nvSpPr>
+          <p:cNvPr id="2" name="Slide Image Placeholder 1"/>
+          <p:cNvSpPr>
+            <a:spLocks noGrp="1" noRot="1" noChangeAspect="1"/>
+          </p:cNvSpPr>
+          <p:nvPr>
+            <p:ph type="sldImg"/>
+          </p:nvPr>
+        </p:nvSpPr>
+        <p:spPr/>
+      </p:sp>
+      <p:sp>
+        <p:nvSpPr>
+          <p:cNvPr id="3" name="Notes Placeholder 2"/>
+          <p:cNvSpPr>
+            <a:spLocks noGrp="1"/>
+          </p:cNvSpPr>
+          <p:nvPr>
+            <p:ph type="body" idx="1"/>
+          </p:nvPr>
+        </p:nvSpPr>
+        <p:spPr/>
+        <p:txBody>
+          <a:bodyPr/>
+          <a:lstStyle/>
+          <a:p>
+            <a:r>
+              <a:rPr lang="en-US" dirty="0"/>
+              <a:t>To sum up: both halves of the mission work end to end in simulation, using only algorithms we wrote. The natural next step is the handoff, where the eBot delivers ore to the arm. Happy to take questions, and we can run a live demo.</a:t>
+            </a:r>
+            <a:endParaRPr lang="en-US" dirty="0"/>
+          </a:p>
+        </p:txBody>
+      </p:sp>
+      <p:sp>
+        <p:nvSpPr>
+          <p:cNvPr id="4" name="Slide Number Placeholder 3"/>
+          <p:cNvSpPr>
+            <a:spLocks noGrp="1"/>
+          </p:cNvSpPr>
+          <p:nvPr>
+            <p:ph type="sldNum" sz="quarter" idx="10"/>
+          </p:nvPr>
+        </p:nvSpPr>
+        <p:spPr/>
+        <p:txBody>
+          <a:bodyPr/>
+          <a:lstStyle/>
+          <a:p>
+            <a:fld id="{F7021451-1387-4CA6-816F-3879F97B5CBC}" type="slidenum">
+              <a:rPr lang="en-US"/>
+              <a:t>14</a:t>
             </a:fld>
             <a:endParaRPr lang="en-US"/>
           </a:p>
@@ -1598,7 +1688,7 @@
           <a:p>
             <a:r>
               <a:rPr lang="en-US" dirty="0"/>
-              <a:t>The median of back-projected pixels is robust to noisy depth at the face edges. Because the mix of minerals changes every launch, the node watches 20 frames, clusters detections within 5 cm, and numbers each kind from 1. Measured against Gazebo's true positions, the error was 1 to 3 mm, against a 50 mm scoring tolerance and about 10 mm the magnet needs.</a:t>
+              <a:t>Our first detector found ores by tight colour thresholds. Now we separate where an ore is from what it is. Where comes from the depth camera: every ore is a block standing 76 mm above the belt, so its top face is found whatever its colour. What comes from a vote: we count how much of the face shows each mineral's colour. Fitting a rectangle to the face, instead of taking a median, keeps the position within 2 to 3 mm.</a:t>
             </a:r>
             <a:endParaRPr lang="en-US" dirty="0"/>
           </a:p>
@@ -1686,7 +1776,7 @@
           <a:p>
             <a:r>
               <a:rPr lang="en-US" dirty="0"/>
-              <a:t>The container positions were not given. We parsed the rover's collision mesh to get exact walls. The surprise: the vanadinite container's centre is beyond the arm's reach with the tool vertical, so every ore is dropped at the reachable edge of its container. The crosses on the plot are the drop points.</a:t>
+              <a:t>Our lecturer pointed out that real ores are not pure colours. We tested that two ways. First, we painted impurities into a real camera frame: the old tight thresholds fall below half at 20 percent impurity, while the vote stays perfect up to 50 percent and never picks the wrong mineral. Second, we ran both on 180 real mineral photographs: tight thresholds recognise 11 percent, the vote 70 percent on photos it was not tuned on. Azurite is hardest, because real azurite is very dark and usually mixed with malachite. A trained classifier is the next step once real samples are available.</a:t>
             </a:r>
             <a:endParaRPr lang="en-US" dirty="0"/>
           </a:p>
@@ -1774,7 +1864,7 @@
           <a:p>
             <a:r>
               <a:rPr lang="en-US" dirty="0"/>
-              <a:t>The magnet only captures when its face is fully inside the ore face and parallel to it, so the descent is a straight vertical line with the tool held vertical. We do not trust the magnet service reply: after lifting, the force sensor must read the ore's weight, about 1.47 N, or the pick is retried. If a protective stop ever latches, the node unlocks, backs off upward and re-plans - but none happened in any trial.</a:t>
+              <a:t>The container positions were not given. We parsed the rover's collision mesh to get exact walls. The surprise: the vanadinite container's centre is beyond the arm's reach with the tool vertical, so every ore is dropped at the reachable edge of its container. The crosses on the plot are the drop points.</a:t>
             </a:r>
             <a:endParaRPr lang="en-US" dirty="0"/>
           </a:p>
@@ -1862,7 +1952,7 @@
           <a:p>
             <a:r>
               <a:rPr lang="en-US" dirty="0"/>
-              <a:t>Our first IK used a general constrained optimiser, and every gradient step re-ran the collision and singularity checks: minutes per plan. Damped least squares solves only what the problem needs - five constraints - and checks safety once at the end. Add a library of solved poses as seeds and planning drops to a fraction of a second.</a:t>
+              <a:t>The magnet only captures when its face is fully inside the ore face and parallel to it, so the descent is a straight vertical line with the tool held vertical. We do not trust the magnet service reply: after lifting, the force sensor must read the ore's weight, about 1.47 N, or the pick is retried. If a protective stop ever latches, the node unlocks, backs off upward and re-plans - but none happened in any trial.</a:t>
             </a:r>
             <a:endParaRPr lang="en-US" dirty="0"/>
           </a:p>
@@ -1950,7 +2040,7 @@
           <a:p>
             <a:r>
               <a:rPr lang="en-US" dirty="0"/>
-              <a:t>Home to the ore drop pose, then to the arm pose, then home. Every straight leg is re-checked on the full-resolution map. Tightening matters: without it, corners sit on 5 cm grid cells and the path is a few percent too long - which made our first version 2 percent too long.</a:t>
+              <a:t>Our first IK used a general constrained optimiser, and every gradient step re-ran the collision and singularity checks: minutes per plan. Damped least squares solves only what the problem needs - five constraints - and checks safety once at the end. Add a library of solved poses as seeds and planning drops to a fraction of a second.</a:t>
             </a:r>
             <a:endParaRPr lang="en-US" dirty="0"/>
           </a:p>
@@ -2958,63 +3048,60 @@
                   <a:schemeClr val="tx1"/>
                 </a:solidFill>
               </a:rPr>
-              <a:t>Below 0.40 m clearance, paths stop getting shorter</a:t>
+              <a:t>A*, then shortcut, then tighten</a:t>
             </a:r>
             <a:endParaRPr lang="en-US" sz="3200" dirty="0"/>
           </a:p>
         </p:txBody>
       </p:sp>
-      <p:graphicFrame>
-        <p:nvGraphicFramePr>
-          <p:cNvPr id="3" name="tradeoff-chart" descr=""/>
-          <p:cNvGraphicFramePr/>
-          <p:nvPr/>
-        </p:nvGraphicFramePr>
-        <p:xfrm>
-          <a:off x="548640" y="1325880"/>
-          <a:ext cx="6766560" cy="4480560"/>
-        </p:xfrm>
-        <a:graphic xmlns:a="http://schemas.openxmlformats.org/drawingml/2006/main">
-          <a:graphicData uri="http://schemas.openxmlformats.org/drawingml/2006/chart">
-            <c:chart xmlns:c="http://schemas.openxmlformats.org/drawingml/2006/chart" r:id="rId1"/>
-          </a:graphicData>
-        </a:graphic>
-      </p:graphicFrame>
-      <p:sp>
-        <p:nvSpPr>
-          <p:cNvPr id="4" name="stat-circle"/>
-          <p:cNvSpPr txBox="1"/>
-          <p:nvPr/>
-        </p:nvSpPr>
-        <p:spPr>
-          <a:xfrm>
-            <a:off x="7772400" y="1371600"/>
-            <a:ext cx="3840480" cy="868680"/>
-          </a:xfrm>
-          <a:prstGeom prst="rect">
-            <a:avLst/>
-          </a:prstGeom>
-          <a:noFill/>
-          <a:ln/>
-        </p:spPr>
-        <p:txBody>
-          <a:bodyPr wrap="square" lIns="0" tIns="0" rIns="0" bIns="0" rtlCol="0" anchor="b"/>
-          <a:lstStyle/>
-          <a:p>
-            <a:pPr indent="0" marL="0">
-              <a:buNone/>
-            </a:pPr>
-            <a:r>
-              <a:rPr lang="en-US" sz="4800" b="1" dirty="0">
-                <a:solidFill>
-                  <a:schemeClr val="accent5"/>
-                </a:solidFill>
-              </a:rPr>
-              <a:t>0.395 m</a:t>
-            </a:r>
-            <a:endParaRPr lang="en-US" sz="4800" dirty="0"/>
-          </a:p>
-        </p:txBody>
+      <p:pic>
+        <p:nvPicPr>
+          <p:cNvPr id="3" name="planned-paths" descr="Three planned paths on the arena occupancy grid between home, ore drop and arm poses">    </p:cNvPr>
+          <p:cNvPicPr>
+            <a:picLocks noChangeAspect="1"/>
+          </p:cNvPicPr>
+          <p:nvPr/>
+        </p:nvPicPr>
+        <p:blipFill>
+          <a:blip r:embed="rId1"/>
+          <a:stretch>
+            <a:fillRect/>
+          </a:stretch>
+        </p:blipFill>
+        <p:spPr>
+          <a:xfrm>
+            <a:off x="457200" y="1234440"/>
+            <a:ext cx="6949440" cy="4791456"/>
+          </a:xfrm>
+          <a:prstGeom prst="rect">
+            <a:avLst/>
+          </a:prstGeom>
+        </p:spPr>
+      </p:pic>
+      <p:sp>
+        <p:nvSpPr>
+          <p:cNvPr id="4" name="plan-dot-1"/>
+          <p:cNvSpPr/>
+          <p:nvPr/>
+        </p:nvSpPr>
+        <p:spPr>
+          <a:xfrm>
+            <a:off x="7772400" y="1417320"/>
+            <a:ext cx="457200" cy="457200"/>
+          </a:xfrm>
+          <a:prstGeom prst="ellipse">
+            <a:avLst/>
+          </a:prstGeom>
+          <a:solidFill>
+            <a:schemeClr val="accent1"/>
+          </a:solidFill>
+          <a:ln w="12700">
+            <a:solidFill>
+              <a:schemeClr val="accent1"/>
+            </a:solidFill>
+            <a:prstDash val="solid"/>
+          </a:ln>
+        </p:spPr>
       </p:sp>
       <p:sp>
         <p:nvSpPr>
@@ -3024,8 +3111,44 @@
         </p:nvSpPr>
         <p:spPr>
           <a:xfrm>
-            <a:off x="7772400" y="2286000"/>
-            <a:ext cx="3840480" cy="640080"/>
+            <a:off x="7772400" y="1417320"/>
+            <a:ext cx="457200" cy="457200"/>
+          </a:xfrm>
+          <a:prstGeom prst="rect">
+            <a:avLst/>
+          </a:prstGeom>
+          <a:noFill/>
+          <a:ln/>
+        </p:spPr>
+        <p:txBody>
+          <a:bodyPr wrap="square" lIns="0" tIns="0" rIns="0" bIns="0" rtlCol="0" anchor="ctr"/>
+          <a:lstStyle/>
+          <a:p>
+            <a:pPr algn="ctr" indent="0" marL="0">
+              <a:buNone/>
+            </a:pPr>
+            <a:r>
+              <a:rPr lang="en-US" sz="1600" b="1" dirty="0">
+                <a:solidFill>
+                  <a:schemeClr val="bg1"/>
+                </a:solidFill>
+              </a:rPr>
+              <a:t>1</a:t>
+            </a:r>
+            <a:endParaRPr lang="en-US" sz="1600" dirty="0"/>
+          </a:p>
+        </p:txBody>
+      </p:sp>
+      <p:sp>
+        <p:nvSpPr>
+          <p:cNvPr id="6" name="Text 3"/>
+          <p:cNvSpPr txBox="1"/>
+          <p:nvPr/>
+        </p:nvSpPr>
+        <p:spPr>
+          <a:xfrm>
+            <a:off x="8412480" y="1399032"/>
+            <a:ext cx="3200400" cy="365760"/>
           </a:xfrm>
           <a:prstGeom prst="rect">
             <a:avLst/>
@@ -3041,50 +3164,14 @@
               <a:buNone/>
             </a:pPr>
             <a:r>
-              <a:rPr lang="en-US" sz="1400" dirty="0">
-                <a:solidFill>
-                  <a:schemeClr val="tx2"/>
-                </a:solidFill>
-              </a:rPr>
-              <a:t>reference: a circle enclosing the 0.62 x 0.49 m chassis</a:t>
-            </a:r>
-            <a:endParaRPr lang="en-US" sz="1400" dirty="0"/>
-          </a:p>
-        </p:txBody>
-      </p:sp>
-      <p:sp>
-        <p:nvSpPr>
-          <p:cNvPr id="6" name="stat-halfwidth"/>
-          <p:cNvSpPr txBox="1"/>
-          <p:nvPr/>
-        </p:nvSpPr>
-        <p:spPr>
-          <a:xfrm>
-            <a:off x="7772400" y="2880360"/>
-            <a:ext cx="3840480" cy="868680"/>
-          </a:xfrm>
-          <a:prstGeom prst="rect">
-            <a:avLst/>
-          </a:prstGeom>
-          <a:noFill/>
-          <a:ln/>
-        </p:spPr>
-        <p:txBody>
-          <a:bodyPr wrap="square" lIns="0" tIns="0" rIns="0" bIns="0" rtlCol="0" anchor="b"/>
-          <a:lstStyle/>
-          <a:p>
-            <a:pPr indent="0" marL="0">
-              <a:buNone/>
-            </a:pPr>
-            <a:r>
-              <a:rPr lang="en-US" sz="4800" b="1" dirty="0">
-                <a:solidFill>
-                  <a:schemeClr val="accent1"/>
-                </a:solidFill>
-              </a:rPr>
-              <a:t>0.245 m</a:t>
-            </a:r>
-            <a:endParaRPr lang="en-US" sz="4800" dirty="0"/>
+              <a:rPr lang="en-US" sz="1800" b="1" dirty="0">
+                <a:solidFill>
+                  <a:schemeClr val="tx1"/>
+                </a:solidFill>
+              </a:rPr>
+              <a:t>Clearance map</a:t>
+            </a:r>
+            <a:endParaRPr lang="en-US" sz="1800" dirty="0"/>
           </a:p>
         </p:txBody>
       </p:sp>
@@ -3096,8 +3183,8 @@
         </p:nvSpPr>
         <p:spPr>
           <a:xfrm>
-            <a:off x="7772400" y="3794760"/>
-            <a:ext cx="3840480" cy="640080"/>
+            <a:off x="8412480" y="1783080"/>
+            <a:ext cx="3200400" cy="685800"/>
           </a:xfrm>
           <a:prstGeom prst="rect">
             <a:avLst/>
@@ -3113,27 +3200,88 @@
               <a:buNone/>
             </a:pPr>
             <a:r>
-              <a:rPr lang="en-US" sz="1400" dirty="0">
+              <a:rPr lang="en-US" sz="1350" dirty="0">
                 <a:solidFill>
                   <a:schemeClr val="tx2"/>
                 </a:solidFill>
               </a:rPr>
-              <a:t>what really has to clear driving straight: the half-width</a:t>
-            </a:r>
-            <a:endParaRPr lang="en-US" sz="1400" dirty="0"/>
-          </a:p>
-        </p:txBody>
-      </p:sp>
-      <p:sp>
-        <p:nvSpPr>
-          <p:cNvPr id="8" name="Text 5"/>
+              <a:t>Distance transform of the 5 mm /map: every cell knows its distance to a rock</a:t>
+            </a:r>
+            <a:endParaRPr lang="en-US" sz="1350" dirty="0"/>
+          </a:p>
+        </p:txBody>
+      </p:sp>
+      <p:sp>
+        <p:nvSpPr>
+          <p:cNvPr id="8" name="plan-dot-2"/>
+          <p:cNvSpPr/>
+          <p:nvPr/>
+        </p:nvSpPr>
+        <p:spPr>
+          <a:xfrm>
+            <a:off x="7772400" y="2560320"/>
+            <a:ext cx="457200" cy="457200"/>
+          </a:xfrm>
+          <a:prstGeom prst="ellipse">
+            <a:avLst/>
+          </a:prstGeom>
+          <a:solidFill>
+            <a:schemeClr val="accent1"/>
+          </a:solidFill>
+          <a:ln w="12700">
+            <a:solidFill>
+              <a:schemeClr val="accent1"/>
+            </a:solidFill>
+            <a:prstDash val="solid"/>
+          </a:ln>
+        </p:spPr>
+      </p:sp>
+      <p:sp>
+        <p:nvSpPr>
+          <p:cNvPr id="9" name="Text 6"/>
           <p:cNvSpPr txBox="1"/>
           <p:nvPr/>
         </p:nvSpPr>
         <p:spPr>
           <a:xfrm>
-            <a:off x="7772400" y="4480560"/>
-            <a:ext cx="3840480" cy="1371600"/>
+            <a:off x="7772400" y="2560320"/>
+            <a:ext cx="457200" cy="457200"/>
+          </a:xfrm>
+          <a:prstGeom prst="rect">
+            <a:avLst/>
+          </a:prstGeom>
+          <a:noFill/>
+          <a:ln/>
+        </p:spPr>
+        <p:txBody>
+          <a:bodyPr wrap="square" lIns="0" tIns="0" rIns="0" bIns="0" rtlCol="0" anchor="ctr"/>
+          <a:lstStyle/>
+          <a:p>
+            <a:pPr algn="ctr" indent="0" marL="0">
+              <a:buNone/>
+            </a:pPr>
+            <a:r>
+              <a:rPr lang="en-US" sz="1600" b="1" dirty="0">
+                <a:solidFill>
+                  <a:schemeClr val="bg1"/>
+                </a:solidFill>
+              </a:rPr>
+              <a:t>2</a:t>
+            </a:r>
+            <a:endParaRPr lang="en-US" sz="1600" dirty="0"/>
+          </a:p>
+        </p:txBody>
+      </p:sp>
+      <p:sp>
+        <p:nvSpPr>
+          <p:cNvPr id="10" name="Text 7"/>
+          <p:cNvSpPr txBox="1"/>
+          <p:nvPr/>
+        </p:nvSpPr>
+        <p:spPr>
+          <a:xfrm>
+            <a:off x="8412480" y="2542032"/>
+            <a:ext cx="3200400" cy="365760"/>
           </a:xfrm>
           <a:prstGeom prst="rect">
             <a:avLst/>
@@ -3149,14 +3297,316 @@
               <a:buNone/>
             </a:pPr>
             <a:r>
-              <a:rPr lang="en-US" sz="1400" dirty="0">
+              <a:rPr lang="en-US" sz="1800" b="1" dirty="0">
+                <a:solidFill>
+                  <a:schemeClr val="tx1"/>
+                </a:solidFill>
+              </a:rPr>
+              <a:t>A* search</a:t>
+            </a:r>
+            <a:endParaRPr lang="en-US" sz="1800" dirty="0"/>
+          </a:p>
+        </p:txBody>
+      </p:sp>
+      <p:sp>
+        <p:nvSpPr>
+          <p:cNvPr id="11" name="Text 8"/>
+          <p:cNvSpPr txBox="1"/>
+          <p:nvPr/>
+        </p:nvSpPr>
+        <p:spPr>
+          <a:xfrm>
+            <a:off x="8412480" y="2926080"/>
+            <a:ext cx="3200400" cy="685800"/>
+          </a:xfrm>
+          <a:prstGeom prst="rect">
+            <a:avLst/>
+          </a:prstGeom>
+          <a:noFill/>
+          <a:ln/>
+        </p:spPr>
+        <p:txBody>
+          <a:bodyPr wrap="square" lIns="0" tIns="0" rIns="0" bIns="0" rtlCol="0" anchor="t"/>
+          <a:lstStyle/>
+          <a:p>
+            <a:pPr indent="0" marL="0">
+              <a:buNone/>
+            </a:pPr>
+            <a:r>
+              <a:rPr lang="en-US" sz="1350" dirty="0">
                 <a:solidFill>
                   <a:schemeClr val="tx2"/>
                 </a:solidFill>
               </a:rPr>
-              <a:t>The planner estimates the reference path at 0.395 m, then takes the safest level from 0.40 to 0.34 m that is no longer. At 0.38 m the eBot keeps 13.5 cm each side; it tracked within 9 cm.</a:t>
-            </a:r>
-            <a:endParaRPr lang="en-US" sz="1400" dirty="0"/>
+              <a:t>8-connected on a 5 cm grid, over cells that keep the chosen clearance</a:t>
+            </a:r>
+            <a:endParaRPr lang="en-US" sz="1350" dirty="0"/>
+          </a:p>
+        </p:txBody>
+      </p:sp>
+      <p:sp>
+        <p:nvSpPr>
+          <p:cNvPr id="12" name="plan-dot-3"/>
+          <p:cNvSpPr/>
+          <p:nvPr/>
+        </p:nvSpPr>
+        <p:spPr>
+          <a:xfrm>
+            <a:off x="7772400" y="3703320"/>
+            <a:ext cx="457200" cy="457200"/>
+          </a:xfrm>
+          <a:prstGeom prst="ellipse">
+            <a:avLst/>
+          </a:prstGeom>
+          <a:solidFill>
+            <a:schemeClr val="accent1"/>
+          </a:solidFill>
+          <a:ln w="12700">
+            <a:solidFill>
+              <a:schemeClr val="accent1"/>
+            </a:solidFill>
+            <a:prstDash val="solid"/>
+          </a:ln>
+        </p:spPr>
+      </p:sp>
+      <p:sp>
+        <p:nvSpPr>
+          <p:cNvPr id="13" name="Text 10"/>
+          <p:cNvSpPr txBox="1"/>
+          <p:nvPr/>
+        </p:nvSpPr>
+        <p:spPr>
+          <a:xfrm>
+            <a:off x="7772400" y="3703320"/>
+            <a:ext cx="457200" cy="457200"/>
+          </a:xfrm>
+          <a:prstGeom prst="rect">
+            <a:avLst/>
+          </a:prstGeom>
+          <a:noFill/>
+          <a:ln/>
+        </p:spPr>
+        <p:txBody>
+          <a:bodyPr wrap="square" lIns="0" tIns="0" rIns="0" bIns="0" rtlCol="0" anchor="ctr"/>
+          <a:lstStyle/>
+          <a:p>
+            <a:pPr algn="ctr" indent="0" marL="0">
+              <a:buNone/>
+            </a:pPr>
+            <a:r>
+              <a:rPr lang="en-US" sz="1600" b="1" dirty="0">
+                <a:solidFill>
+                  <a:schemeClr val="bg1"/>
+                </a:solidFill>
+              </a:rPr>
+              <a:t>3</a:t>
+            </a:r>
+            <a:endParaRPr lang="en-US" sz="1600" dirty="0"/>
+          </a:p>
+        </p:txBody>
+      </p:sp>
+      <p:sp>
+        <p:nvSpPr>
+          <p:cNvPr id="14" name="Text 11"/>
+          <p:cNvSpPr txBox="1"/>
+          <p:nvPr/>
+        </p:nvSpPr>
+        <p:spPr>
+          <a:xfrm>
+            <a:off x="8412480" y="3685032"/>
+            <a:ext cx="3200400" cy="365760"/>
+          </a:xfrm>
+          <a:prstGeom prst="rect">
+            <a:avLst/>
+          </a:prstGeom>
+          <a:noFill/>
+          <a:ln/>
+        </p:spPr>
+        <p:txBody>
+          <a:bodyPr wrap="square" lIns="0" tIns="0" rIns="0" bIns="0" rtlCol="0" anchor="t"/>
+          <a:lstStyle/>
+          <a:p>
+            <a:pPr indent="0" marL="0">
+              <a:buNone/>
+            </a:pPr>
+            <a:r>
+              <a:rPr lang="en-US" sz="1800" b="1" dirty="0">
+                <a:solidFill>
+                  <a:schemeClr val="tx1"/>
+                </a:solidFill>
+              </a:rPr>
+              <a:t>Shortcut</a:t>
+            </a:r>
+            <a:endParaRPr lang="en-US" sz="1800" dirty="0"/>
+          </a:p>
+        </p:txBody>
+      </p:sp>
+      <p:sp>
+        <p:nvSpPr>
+          <p:cNvPr id="15" name="Text 12"/>
+          <p:cNvSpPr txBox="1"/>
+          <p:nvPr/>
+        </p:nvSpPr>
+        <p:spPr>
+          <a:xfrm>
+            <a:off x="8412480" y="4069080"/>
+            <a:ext cx="3200400" cy="685800"/>
+          </a:xfrm>
+          <a:prstGeom prst="rect">
+            <a:avLst/>
+          </a:prstGeom>
+          <a:noFill/>
+          <a:ln/>
+        </p:spPr>
+        <p:txBody>
+          <a:bodyPr wrap="square" lIns="0" tIns="0" rIns="0" bIns="0" rtlCol="0" anchor="t"/>
+          <a:lstStyle/>
+          <a:p>
+            <a:pPr indent="0" marL="0">
+              <a:buNone/>
+            </a:pPr>
+            <a:r>
+              <a:rPr lang="en-US" sz="1350" dirty="0">
+                <a:solidFill>
+                  <a:schemeClr val="tx2"/>
+                </a:solidFill>
+              </a:rPr>
+              <a:t>Jump to the furthest point visible with full clearance</a:t>
+            </a:r>
+            <a:endParaRPr lang="en-US" sz="1350" dirty="0"/>
+          </a:p>
+        </p:txBody>
+      </p:sp>
+      <p:sp>
+        <p:nvSpPr>
+          <p:cNvPr id="16" name="plan-dot-4"/>
+          <p:cNvSpPr/>
+          <p:nvPr/>
+        </p:nvSpPr>
+        <p:spPr>
+          <a:xfrm>
+            <a:off x="7772400" y="4846320"/>
+            <a:ext cx="457200" cy="457200"/>
+          </a:xfrm>
+          <a:prstGeom prst="ellipse">
+            <a:avLst/>
+          </a:prstGeom>
+          <a:solidFill>
+            <a:schemeClr val="accent1"/>
+          </a:solidFill>
+          <a:ln w="12700">
+            <a:solidFill>
+              <a:schemeClr val="accent1"/>
+            </a:solidFill>
+            <a:prstDash val="solid"/>
+          </a:ln>
+        </p:spPr>
+      </p:sp>
+      <p:sp>
+        <p:nvSpPr>
+          <p:cNvPr id="17" name="Text 14"/>
+          <p:cNvSpPr txBox="1"/>
+          <p:nvPr/>
+        </p:nvSpPr>
+        <p:spPr>
+          <a:xfrm>
+            <a:off x="7772400" y="4846320"/>
+            <a:ext cx="457200" cy="457200"/>
+          </a:xfrm>
+          <a:prstGeom prst="rect">
+            <a:avLst/>
+          </a:prstGeom>
+          <a:noFill/>
+          <a:ln/>
+        </p:spPr>
+        <p:txBody>
+          <a:bodyPr wrap="square" lIns="0" tIns="0" rIns="0" bIns="0" rtlCol="0" anchor="ctr"/>
+          <a:lstStyle/>
+          <a:p>
+            <a:pPr algn="ctr" indent="0" marL="0">
+              <a:buNone/>
+            </a:pPr>
+            <a:r>
+              <a:rPr lang="en-US" sz="1600" b="1" dirty="0">
+                <a:solidFill>
+                  <a:schemeClr val="bg1"/>
+                </a:solidFill>
+              </a:rPr>
+              <a:t>4</a:t>
+            </a:r>
+            <a:endParaRPr lang="en-US" sz="1600" dirty="0"/>
+          </a:p>
+        </p:txBody>
+      </p:sp>
+      <p:sp>
+        <p:nvSpPr>
+          <p:cNvPr id="18" name="Text 15"/>
+          <p:cNvSpPr txBox="1"/>
+          <p:nvPr/>
+        </p:nvSpPr>
+        <p:spPr>
+          <a:xfrm>
+            <a:off x="8412480" y="4828032"/>
+            <a:ext cx="3200400" cy="365760"/>
+          </a:xfrm>
+          <a:prstGeom prst="rect">
+            <a:avLst/>
+          </a:prstGeom>
+          <a:noFill/>
+          <a:ln/>
+        </p:spPr>
+        <p:txBody>
+          <a:bodyPr wrap="square" lIns="0" tIns="0" rIns="0" bIns="0" rtlCol="0" anchor="t"/>
+          <a:lstStyle/>
+          <a:p>
+            <a:pPr indent="0" marL="0">
+              <a:buNone/>
+            </a:pPr>
+            <a:r>
+              <a:rPr lang="en-US" sz="1800" b="1" dirty="0">
+                <a:solidFill>
+                  <a:schemeClr val="tx1"/>
+                </a:solidFill>
+              </a:rPr>
+              <a:t>Tighten</a:t>
+            </a:r>
+            <a:endParaRPr lang="en-US" sz="1800" dirty="0"/>
+          </a:p>
+        </p:txBody>
+      </p:sp>
+      <p:sp>
+        <p:nvSpPr>
+          <p:cNvPr id="19" name="Text 16"/>
+          <p:cNvSpPr txBox="1"/>
+          <p:nvPr/>
+        </p:nvSpPr>
+        <p:spPr>
+          <a:xfrm>
+            <a:off x="8412480" y="5212080"/>
+            <a:ext cx="3200400" cy="685800"/>
+          </a:xfrm>
+          <a:prstGeom prst="rect">
+            <a:avLst/>
+          </a:prstGeom>
+          <a:noFill/>
+          <a:ln/>
+        </p:spPr>
+        <p:txBody>
+          <a:bodyPr wrap="square" lIns="0" tIns="0" rIns="0" bIns="0" rtlCol="0" anchor="t"/>
+          <a:lstStyle/>
+          <a:p>
+            <a:pPr indent="0" marL="0">
+              <a:buNone/>
+            </a:pPr>
+            <a:r>
+              <a:rPr lang="en-US" sz="1350" dirty="0">
+                <a:solidFill>
+                  <a:schemeClr val="tx2"/>
+                </a:solidFill>
+              </a:rPr>
+              <a:t>Pull each corner toward its neighbours until the legs just clear</a:t>
+            </a:r>
+            <a:endParaRPr lang="en-US" sz="1350" dirty="0"/>
           </a:p>
         </p:txBody>
       </p:sp>
@@ -3262,6 +3712,310 @@
                   <a:schemeClr val="tx1"/>
                 </a:solidFill>
               </a:rPr>
+              <a:t>Below 0.40 m clearance, paths stop getting shorter</a:t>
+            </a:r>
+            <a:endParaRPr lang="en-US" sz="3200" dirty="0"/>
+          </a:p>
+        </p:txBody>
+      </p:sp>
+      <p:graphicFrame>
+        <p:nvGraphicFramePr>
+          <p:cNvPr id="3" name="tradeoff-chart" descr=""/>
+          <p:cNvGraphicFramePr/>
+          <p:nvPr/>
+        </p:nvGraphicFramePr>
+        <p:xfrm>
+          <a:off x="548640" y="1325880"/>
+          <a:ext cx="6766560" cy="4480560"/>
+        </p:xfrm>
+        <a:graphic xmlns:a="http://schemas.openxmlformats.org/drawingml/2006/main">
+          <a:graphicData uri="http://schemas.openxmlformats.org/drawingml/2006/chart">
+            <c:chart xmlns:c="http://schemas.openxmlformats.org/drawingml/2006/chart" r:id="rId1"/>
+          </a:graphicData>
+        </a:graphic>
+      </p:graphicFrame>
+      <p:sp>
+        <p:nvSpPr>
+          <p:cNvPr id="4" name="stat-circle"/>
+          <p:cNvSpPr txBox="1"/>
+          <p:nvPr/>
+        </p:nvSpPr>
+        <p:spPr>
+          <a:xfrm>
+            <a:off x="7772400" y="1371600"/>
+            <a:ext cx="3840480" cy="868680"/>
+          </a:xfrm>
+          <a:prstGeom prst="rect">
+            <a:avLst/>
+          </a:prstGeom>
+          <a:noFill/>
+          <a:ln/>
+        </p:spPr>
+        <p:txBody>
+          <a:bodyPr wrap="square" lIns="0" tIns="0" rIns="0" bIns="0" rtlCol="0" anchor="b"/>
+          <a:lstStyle/>
+          <a:p>
+            <a:pPr indent="0" marL="0">
+              <a:buNone/>
+            </a:pPr>
+            <a:r>
+              <a:rPr lang="en-US" sz="4800" b="1" dirty="0">
+                <a:solidFill>
+                  <a:schemeClr val="accent5"/>
+                </a:solidFill>
+              </a:rPr>
+              <a:t>0.395 m</a:t>
+            </a:r>
+            <a:endParaRPr lang="en-US" sz="4800" dirty="0"/>
+          </a:p>
+        </p:txBody>
+      </p:sp>
+      <p:sp>
+        <p:nvSpPr>
+          <p:cNvPr id="5" name="Text 2"/>
+          <p:cNvSpPr txBox="1"/>
+          <p:nvPr/>
+        </p:nvSpPr>
+        <p:spPr>
+          <a:xfrm>
+            <a:off x="7772400" y="2286000"/>
+            <a:ext cx="3840480" cy="640080"/>
+          </a:xfrm>
+          <a:prstGeom prst="rect">
+            <a:avLst/>
+          </a:prstGeom>
+          <a:noFill/>
+          <a:ln/>
+        </p:spPr>
+        <p:txBody>
+          <a:bodyPr wrap="square" lIns="0" tIns="0" rIns="0" bIns="0" rtlCol="0" anchor="t"/>
+          <a:lstStyle/>
+          <a:p>
+            <a:pPr indent="0" marL="0">
+              <a:buNone/>
+            </a:pPr>
+            <a:r>
+              <a:rPr lang="en-US" sz="1400" dirty="0">
+                <a:solidFill>
+                  <a:schemeClr val="tx2"/>
+                </a:solidFill>
+              </a:rPr>
+              <a:t>reference: a circle enclosing the 0.62 x 0.49 m chassis</a:t>
+            </a:r>
+            <a:endParaRPr lang="en-US" sz="1400" dirty="0"/>
+          </a:p>
+        </p:txBody>
+      </p:sp>
+      <p:sp>
+        <p:nvSpPr>
+          <p:cNvPr id="6" name="stat-halfwidth"/>
+          <p:cNvSpPr txBox="1"/>
+          <p:nvPr/>
+        </p:nvSpPr>
+        <p:spPr>
+          <a:xfrm>
+            <a:off x="7772400" y="2880360"/>
+            <a:ext cx="3840480" cy="868680"/>
+          </a:xfrm>
+          <a:prstGeom prst="rect">
+            <a:avLst/>
+          </a:prstGeom>
+          <a:noFill/>
+          <a:ln/>
+        </p:spPr>
+        <p:txBody>
+          <a:bodyPr wrap="square" lIns="0" tIns="0" rIns="0" bIns="0" rtlCol="0" anchor="b"/>
+          <a:lstStyle/>
+          <a:p>
+            <a:pPr indent="0" marL="0">
+              <a:buNone/>
+            </a:pPr>
+            <a:r>
+              <a:rPr lang="en-US" sz="4800" b="1" dirty="0">
+                <a:solidFill>
+                  <a:schemeClr val="accent1"/>
+                </a:solidFill>
+              </a:rPr>
+              <a:t>0.245 m</a:t>
+            </a:r>
+            <a:endParaRPr lang="en-US" sz="4800" dirty="0"/>
+          </a:p>
+        </p:txBody>
+      </p:sp>
+      <p:sp>
+        <p:nvSpPr>
+          <p:cNvPr id="7" name="Text 4"/>
+          <p:cNvSpPr txBox="1"/>
+          <p:nvPr/>
+        </p:nvSpPr>
+        <p:spPr>
+          <a:xfrm>
+            <a:off x="7772400" y="3794760"/>
+            <a:ext cx="3840480" cy="640080"/>
+          </a:xfrm>
+          <a:prstGeom prst="rect">
+            <a:avLst/>
+          </a:prstGeom>
+          <a:noFill/>
+          <a:ln/>
+        </p:spPr>
+        <p:txBody>
+          <a:bodyPr wrap="square" lIns="0" tIns="0" rIns="0" bIns="0" rtlCol="0" anchor="t"/>
+          <a:lstStyle/>
+          <a:p>
+            <a:pPr indent="0" marL="0">
+              <a:buNone/>
+            </a:pPr>
+            <a:r>
+              <a:rPr lang="en-US" sz="1400" dirty="0">
+                <a:solidFill>
+                  <a:schemeClr val="tx2"/>
+                </a:solidFill>
+              </a:rPr>
+              <a:t>what really has to clear driving straight: the half-width</a:t>
+            </a:r>
+            <a:endParaRPr lang="en-US" sz="1400" dirty="0"/>
+          </a:p>
+        </p:txBody>
+      </p:sp>
+      <p:sp>
+        <p:nvSpPr>
+          <p:cNvPr id="8" name="Text 5"/>
+          <p:cNvSpPr txBox="1"/>
+          <p:nvPr/>
+        </p:nvSpPr>
+        <p:spPr>
+          <a:xfrm>
+            <a:off x="7772400" y="4480560"/>
+            <a:ext cx="3840480" cy="1371600"/>
+          </a:xfrm>
+          <a:prstGeom prst="rect">
+            <a:avLst/>
+          </a:prstGeom>
+          <a:noFill/>
+          <a:ln/>
+        </p:spPr>
+        <p:txBody>
+          <a:bodyPr wrap="square" lIns="0" tIns="0" rIns="0" bIns="0" rtlCol="0" anchor="t"/>
+          <a:lstStyle/>
+          <a:p>
+            <a:pPr indent="0" marL="0">
+              <a:buNone/>
+            </a:pPr>
+            <a:r>
+              <a:rPr lang="en-US" sz="1400" dirty="0">
+                <a:solidFill>
+                  <a:schemeClr val="tx2"/>
+                </a:solidFill>
+              </a:rPr>
+              <a:t>The planner estimates the reference path at 0.395 m, then takes the safest level from 0.40 to 0.34 m that is no longer. At 0.38 m the eBot keeps 13.5 cm each side; it tracked within 9 cm.</a:t>
+            </a:r>
+            <a:endParaRPr lang="en-US" sz="1400" dirty="0"/>
+          </a:p>
+        </p:txBody>
+      </p:sp>
+      <p:sp>
+        <p:nvSpPr>
+          <p:cNvPr id="25" name="Slide Number Placeholder 0"/>
+          <p:cNvSpPr>
+            <a:spLocks noGrp="1"/>
+          </p:cNvSpPr>
+          <p:nvPr>
+            <p:ph type="sldNum" sz="quarter" idx="4294967295"/>
+          </p:nvPr>
+        </p:nvSpPr>
+        <p:spPr>
+          <a:xfrm>
+            <a:off x="11247120" y="6355080"/>
+            <a:ext cx="457200" cy="274320"/>
+          </a:xfrm>
+          <a:prstGeom prst="rect">
+            <a:avLst/>
+          </a:prstGeom>
+          <a:extLst>
+            <a:ext uri="{C572A759-6A51-4108-AA02-DFA0A04FC94B}">
+              <ma14:wrappingTextBoxFlag xmlns:ma14="http://schemas.microsoft.com/office/mac/drawingml/2011/main" val="0"/>
+            </a:ext>
+          </a:extLst>
+        </p:spPr>
+        <p:txBody>
+          <a:bodyPr/>
+          <a:lstStyle>
+            <a:lvl1pPr>
+              <a:defRPr sz="1000">
+                <a:solidFill>
+                  <a:srgbClr val="6B7280"/>
+                </a:solidFill>
+              </a:defRPr>
+            </a:lvl1pPr>
+          </a:lstStyle>
+          <a:p>
+            <a:pPr algn="r"/>
+            <a:fld id="{F7021451-1387-4CA6-816F-3879F97B5CBC}" type="slidenum">
+              <a:rPr b="0" lang="en-US"/>
+              <a:t>11</a:t>
+            </a:fld>
+            <a:endParaRPr lang="en-US"/>
+          </a:p>
+        </p:txBody>
+      </p:sp>
+    </p:spTree>
+  </p:cSld>
+  <p:clrMapOvr>
+    <a:masterClrMapping/>
+  </p:clrMapOvr>
+</p:sld>
+</file>
+
+<file path=ppt/slides/slide12.xml><?xml version="1.0" encoding="utf-8"?>
+<p:sld xmlns:a="http://schemas.openxmlformats.org/drawingml/2006/main" xmlns:r="http://schemas.openxmlformats.org/officeDocument/2006/relationships" xmlns:p="http://schemas.openxmlformats.org/presentationml/2006/main">
+  <p:cSld name="Slide 12">
+    <p:spTree>
+      <p:nvGrpSpPr>
+        <p:cNvPr id="1" name=""/>
+        <p:cNvGrpSpPr/>
+        <p:nvPr/>
+      </p:nvGrpSpPr>
+      <p:grpSpPr>
+        <a:xfrm>
+          <a:off x="0" y="0"/>
+          <a:ext cx="0" cy="0"/>
+          <a:chOff x="0" y="0"/>
+          <a:chExt cx="0" cy="0"/>
+        </a:xfrm>
+      </p:grpSpPr>
+      <p:sp>
+        <p:nvSpPr>
+          <p:cNvPr id="2" name="Text 0"/>
+          <p:cNvSpPr/>
+          <p:nvPr>
+            <p:ph idx="100" type="title" hasCustomPrompt="1"/>
+          </p:nvPr>
+        </p:nvSpPr>
+        <p:spPr>
+          <a:xfrm>
+            <a:off x="548640" y="320040"/>
+            <a:ext cx="11064240" cy="822960"/>
+          </a:xfrm>
+          <a:prstGeom prst="rect">
+            <a:avLst/>
+          </a:prstGeom>
+          <a:noFill/>
+          <a:ln/>
+        </p:spPr>
+        <p:txBody>
+          <a:bodyPr wrap="square" lIns="0" tIns="0" rIns="0" bIns="0" rtlCol="0" anchor="ctr"/>
+          <a:lstStyle/>
+          <a:p>
+            <a:pPr indent="0" marL="0">
+              <a:buNone/>
+            </a:pPr>
+            <a:r>
+              <a:rPr lang="en-US" sz="3200" b="1" dirty="0">
+                <a:solidFill>
+                  <a:schemeClr val="tx1"/>
+                </a:solidFill>
+              </a:rPr>
               <a:t>Every ore sorted, every lap completed, no collisions</a:t>
             </a:r>
             <a:endParaRPr lang="en-US" sz="3200" dirty="0"/>
@@ -3450,7 +4204,7 @@
       </p:sp>
       <p:graphicFrame>
         <p:nvGraphicFramePr>
-          <p:cNvPr id="12" name="Table 0"/>
+          <p:cNvPr id="13" name="Table 0"/>
           <p:cNvGraphicFramePr>
             <a:graphicFrameLocks noGrp="1"/>
           </p:cNvGraphicFramePr>
@@ -4351,708 +5105,6 @@
             <a:pPr algn="r"/>
             <a:fld id="{F7021451-1387-4CA6-816F-3879F97B5CBC}" type="slidenum">
               <a:rPr b="0" lang="en-US"/>
-              <a:t>11</a:t>
-            </a:fld>
-            <a:endParaRPr lang="en-US"/>
-          </a:p>
-        </p:txBody>
-      </p:sp>
-    </p:spTree>
-  </p:cSld>
-  <p:clrMapOvr>
-    <a:masterClrMapping/>
-  </p:clrMapOvr>
-</p:sld>
-</file>
-
-<file path=ppt/slides/slide12.xml><?xml version="1.0" encoding="utf-8"?>
-<p:sld xmlns:a="http://schemas.openxmlformats.org/drawingml/2006/main" xmlns:r="http://schemas.openxmlformats.org/officeDocument/2006/relationships" xmlns:p="http://schemas.openxmlformats.org/presentationml/2006/main">
-  <p:cSld name="Slide 12">
-    <p:spTree>
-      <p:nvGrpSpPr>
-        <p:cNvPr id="1" name=""/>
-        <p:cNvGrpSpPr/>
-        <p:nvPr/>
-      </p:nvGrpSpPr>
-      <p:grpSpPr>
-        <a:xfrm>
-          <a:off x="0" y="0"/>
-          <a:ext cx="0" cy="0"/>
-          <a:chOff x="0" y="0"/>
-          <a:chExt cx="0" cy="0"/>
-        </a:xfrm>
-      </p:grpSpPr>
-      <p:sp>
-        <p:nvSpPr>
-          <p:cNvPr id="2" name="Text 0"/>
-          <p:cNvSpPr/>
-          <p:nvPr>
-            <p:ph idx="100" type="title" hasCustomPrompt="1"/>
-          </p:nvPr>
-        </p:nvSpPr>
-        <p:spPr>
-          <a:xfrm>
-            <a:off x="548640" y="320040"/>
-            <a:ext cx="11064240" cy="822960"/>
-          </a:xfrm>
-          <a:prstGeom prst="rect">
-            <a:avLst/>
-          </a:prstGeom>
-          <a:noFill/>
-          <a:ln/>
-        </p:spPr>
-        <p:txBody>
-          <a:bodyPr wrap="square" lIns="0" tIns="0" rIns="0" bIns="0" rtlCol="0" anchor="ctr"/>
-          <a:lstStyle/>
-          <a:p>
-            <a:pPr indent="0" marL="0">
-              <a:buNone/>
-            </a:pPr>
-            <a:r>
-              <a:rPr lang="en-US" sz="3200" b="1" dirty="0">
-                <a:solidFill>
-                  <a:schemeClr val="tx1"/>
-                </a:solidFill>
-              </a:rPr>
-              <a:t>What broke, and how we fixed it</a:t>
-            </a:r>
-            <a:endParaRPr lang="en-US" sz="3200" dirty="0"/>
-          </a:p>
-        </p:txBody>
-      </p:sp>
-      <p:sp>
-        <p:nvSpPr>
-          <p:cNvPr id="3" name="issue-1"/>
-          <p:cNvSpPr/>
-          <p:nvPr/>
-        </p:nvSpPr>
-        <p:spPr>
-          <a:xfrm>
-            <a:off x="548640" y="1417320"/>
-            <a:ext cx="3520440" cy="2148840"/>
-          </a:xfrm>
-          <a:prstGeom prst="roundRect">
-            <a:avLst>
-              <a:gd name="adj" fmla="val 3404"/>
-            </a:avLst>
-          </a:prstGeom>
-          <a:solidFill>
-            <a:schemeClr val="bg2"/>
-          </a:solidFill>
-          <a:ln w="12700">
-            <a:solidFill>
-              <a:schemeClr val="bg2"/>
-            </a:solidFill>
-            <a:prstDash val="solid"/>
-          </a:ln>
-        </p:spPr>
-      </p:sp>
-      <p:sp>
-        <p:nvSpPr>
-          <p:cNvPr id="4" name="Text 2"/>
-          <p:cNvSpPr txBox="1"/>
-          <p:nvPr/>
-        </p:nvSpPr>
-        <p:spPr>
-          <a:xfrm>
-            <a:off x="777240" y="1618488"/>
-            <a:ext cx="3063240" cy="411480"/>
-          </a:xfrm>
-          <a:prstGeom prst="rect">
-            <a:avLst/>
-          </a:prstGeom>
-          <a:noFill/>
-          <a:ln/>
-        </p:spPr>
-        <p:txBody>
-          <a:bodyPr wrap="square" lIns="0" tIns="0" rIns="0" bIns="0" rtlCol="0" anchor="t"/>
-          <a:lstStyle/>
-          <a:p>
-            <a:pPr indent="0" marL="0">
-              <a:buNone/>
-            </a:pPr>
-            <a:r>
-              <a:rPr lang="en-US" sz="1800" b="1" dirty="0">
-                <a:solidFill>
-                  <a:schemeClr val="accent1"/>
-                </a:solidFill>
-              </a:rPr>
-              <a:t>No path at all</a:t>
-            </a:r>
-            <a:endParaRPr lang="en-US" sz="1800" dirty="0"/>
-          </a:p>
-        </p:txBody>
-      </p:sp>
-      <p:sp>
-        <p:nvSpPr>
-          <p:cNvPr id="5" name="Text 3"/>
-          <p:cNvSpPr txBox="1"/>
-          <p:nvPr/>
-        </p:nvSpPr>
-        <p:spPr>
-          <a:xfrm>
-            <a:off x="777240" y="2103120"/>
-            <a:ext cx="3063240" cy="1325880"/>
-          </a:xfrm>
-          <a:prstGeom prst="rect">
-            <a:avLst/>
-          </a:prstGeom>
-          <a:noFill/>
-          <a:ln/>
-        </p:spPr>
-        <p:txBody>
-          <a:bodyPr wrap="square" lIns="0" tIns="0" rIns="0" bIns="0" rtlCol="0" anchor="t"/>
-          <a:lstStyle/>
-          <a:p>
-            <a:pPr indent="0" marL="0">
-              <a:buNone/>
-            </a:pPr>
-            <a:r>
-              <a:rPr lang="en-US" sz="1450" dirty="0">
-                <a:solidFill>
-                  <a:schemeClr val="tx1"/>
-                </a:solidFill>
-              </a:rPr>
-              <a:t>Drop pose is 0.375 m from a wall; downsampling shaved 5 cm more. Full-resolution clearance fixed it.</a:t>
-            </a:r>
-            <a:endParaRPr lang="en-US" sz="1450" dirty="0"/>
-          </a:p>
-        </p:txBody>
-      </p:sp>
-      <p:sp>
-        <p:nvSpPr>
-          <p:cNvPr id="6" name="issue-2"/>
-          <p:cNvSpPr/>
-          <p:nvPr/>
-        </p:nvSpPr>
-        <p:spPr>
-          <a:xfrm>
-            <a:off x="4297680" y="1417320"/>
-            <a:ext cx="3520440" cy="2148840"/>
-          </a:xfrm>
-          <a:prstGeom prst="roundRect">
-            <a:avLst>
-              <a:gd name="adj" fmla="val 3404"/>
-            </a:avLst>
-          </a:prstGeom>
-          <a:solidFill>
-            <a:schemeClr val="bg2"/>
-          </a:solidFill>
-          <a:ln w="12700">
-            <a:solidFill>
-              <a:schemeClr val="bg2"/>
-            </a:solidFill>
-            <a:prstDash val="solid"/>
-          </a:ln>
-        </p:spPr>
-      </p:sp>
-      <p:sp>
-        <p:nvSpPr>
-          <p:cNvPr id="7" name="Text 5"/>
-          <p:cNvSpPr txBox="1"/>
-          <p:nvPr/>
-        </p:nvSpPr>
-        <p:spPr>
-          <a:xfrm>
-            <a:off x="4526280" y="1618488"/>
-            <a:ext cx="3063240" cy="411480"/>
-          </a:xfrm>
-          <a:prstGeom prst="rect">
-            <a:avLst/>
-          </a:prstGeom>
-          <a:noFill/>
-          <a:ln/>
-        </p:spPr>
-        <p:txBody>
-          <a:bodyPr wrap="square" lIns="0" tIns="0" rIns="0" bIns="0" rtlCol="0" anchor="t"/>
-          <a:lstStyle/>
-          <a:p>
-            <a:pPr indent="0" marL="0">
-              <a:buNone/>
-            </a:pPr>
-            <a:r>
-              <a:rPr lang="en-US" sz="1800" b="1" dirty="0">
-                <a:solidFill>
-                  <a:schemeClr val="accent1"/>
-                </a:solidFill>
-              </a:rPr>
-              <a:t>Paths 2% too long</a:t>
-            </a:r>
-            <a:endParaRPr lang="en-US" sz="1800" dirty="0"/>
-          </a:p>
-        </p:txBody>
-      </p:sp>
-      <p:sp>
-        <p:nvSpPr>
-          <p:cNvPr id="8" name="Text 6"/>
-          <p:cNvSpPr txBox="1"/>
-          <p:nvPr/>
-        </p:nvSpPr>
-        <p:spPr>
-          <a:xfrm>
-            <a:off x="4526280" y="2103120"/>
-            <a:ext cx="3063240" cy="1325880"/>
-          </a:xfrm>
-          <a:prstGeom prst="rect">
-            <a:avLst/>
-          </a:prstGeom>
-          <a:noFill/>
-          <a:ln/>
-        </p:spPr>
-        <p:txBody>
-          <a:bodyPr wrap="square" lIns="0" tIns="0" rIns="0" bIns="0" rtlCol="0" anchor="t"/>
-          <a:lstStyle/>
-          <a:p>
-            <a:pPr indent="0" marL="0">
-              <a:buNone/>
-            </a:pPr>
-            <a:r>
-              <a:rPr lang="en-US" sz="1450" dirty="0">
-                <a:solidFill>
-                  <a:schemeClr val="tx1"/>
-                </a:solidFill>
-              </a:rPr>
-              <a:t>Grid-snapped corners. Fine-map checks and corner tightening reached efficiency 1.00.</a:t>
-            </a:r>
-            <a:endParaRPr lang="en-US" sz="1450" dirty="0"/>
-          </a:p>
-        </p:txBody>
-      </p:sp>
-      <p:sp>
-        <p:nvSpPr>
-          <p:cNvPr id="9" name="issue-3"/>
-          <p:cNvSpPr/>
-          <p:nvPr/>
-        </p:nvSpPr>
-        <p:spPr>
-          <a:xfrm>
-            <a:off x="8046720" y="1417320"/>
-            <a:ext cx="3520440" cy="2148840"/>
-          </a:xfrm>
-          <a:prstGeom prst="roundRect">
-            <a:avLst>
-              <a:gd name="adj" fmla="val 3404"/>
-            </a:avLst>
-          </a:prstGeom>
-          <a:solidFill>
-            <a:schemeClr val="bg2"/>
-          </a:solidFill>
-          <a:ln w="12700">
-            <a:solidFill>
-              <a:schemeClr val="bg2"/>
-            </a:solidFill>
-            <a:prstDash val="solid"/>
-          </a:ln>
-        </p:spPr>
-      </p:sp>
-      <p:sp>
-        <p:nvSpPr>
-          <p:cNvPr id="10" name="Text 8"/>
-          <p:cNvSpPr txBox="1"/>
-          <p:nvPr/>
-        </p:nvSpPr>
-        <p:spPr>
-          <a:xfrm>
-            <a:off x="8275320" y="1618488"/>
-            <a:ext cx="3063240" cy="411480"/>
-          </a:xfrm>
-          <a:prstGeom prst="rect">
-            <a:avLst/>
-          </a:prstGeom>
-          <a:noFill/>
-          <a:ln/>
-        </p:spPr>
-        <p:txBody>
-          <a:bodyPr wrap="square" lIns="0" tIns="0" rIns="0" bIns="0" rtlCol="0" anchor="t"/>
-          <a:lstStyle/>
-          <a:p>
-            <a:pPr indent="0" marL="0">
-              <a:buNone/>
-            </a:pPr>
-            <a:r>
-              <a:rPr lang="en-US" sz="1800" b="1" dirty="0">
-                <a:solidFill>
-                  <a:schemeClr val="accent1"/>
-                </a:solidFill>
-              </a:rPr>
-              <a:t>IK took minutes</a:t>
-            </a:r>
-            <a:endParaRPr lang="en-US" sz="1800" dirty="0"/>
-          </a:p>
-        </p:txBody>
-      </p:sp>
-      <p:sp>
-        <p:nvSpPr>
-          <p:cNvPr id="11" name="Text 9"/>
-          <p:cNvSpPr txBox="1"/>
-          <p:nvPr/>
-        </p:nvSpPr>
-        <p:spPr>
-          <a:xfrm>
-            <a:off x="8275320" y="2103120"/>
-            <a:ext cx="3063240" cy="1325880"/>
-          </a:xfrm>
-          <a:prstGeom prst="rect">
-            <a:avLst/>
-          </a:prstGeom>
-          <a:noFill/>
-          <a:ln/>
-        </p:spPr>
-        <p:txBody>
-          <a:bodyPr wrap="square" lIns="0" tIns="0" rIns="0" bIns="0" rtlCol="0" anchor="t"/>
-          <a:lstStyle/>
-          <a:p>
-            <a:pPr indent="0" marL="0">
-              <a:buNone/>
-            </a:pPr>
-            <a:r>
-              <a:rPr lang="en-US" sz="1450" dirty="0">
-                <a:solidFill>
-                  <a:schemeClr val="tx1"/>
-                </a:solidFill>
-              </a:rPr>
-              <a:t>Checks inside every optimiser step. DLS with one final check: 0.1-0.4 s.</a:t>
-            </a:r>
-            <a:endParaRPr lang="en-US" sz="1450" dirty="0"/>
-          </a:p>
-        </p:txBody>
-      </p:sp>
-      <p:sp>
-        <p:nvSpPr>
-          <p:cNvPr id="12" name="issue-4"/>
-          <p:cNvSpPr/>
-          <p:nvPr/>
-        </p:nvSpPr>
-        <p:spPr>
-          <a:xfrm>
-            <a:off x="548640" y="3794760"/>
-            <a:ext cx="3520440" cy="2148840"/>
-          </a:xfrm>
-          <a:prstGeom prst="roundRect">
-            <a:avLst>
-              <a:gd name="adj" fmla="val 3404"/>
-            </a:avLst>
-          </a:prstGeom>
-          <a:solidFill>
-            <a:schemeClr val="bg2"/>
-          </a:solidFill>
-          <a:ln w="12700">
-            <a:solidFill>
-              <a:schemeClr val="bg2"/>
-            </a:solidFill>
-            <a:prstDash val="solid"/>
-          </a:ln>
-        </p:spPr>
-      </p:sp>
-      <p:sp>
-        <p:nvSpPr>
-          <p:cNvPr id="13" name="Text 11"/>
-          <p:cNvSpPr txBox="1"/>
-          <p:nvPr/>
-        </p:nvSpPr>
-        <p:spPr>
-          <a:xfrm>
-            <a:off x="777240" y="3995928"/>
-            <a:ext cx="3063240" cy="411480"/>
-          </a:xfrm>
-          <a:prstGeom prst="rect">
-            <a:avLst/>
-          </a:prstGeom>
-          <a:noFill/>
-          <a:ln/>
-        </p:spPr>
-        <p:txBody>
-          <a:bodyPr wrap="square" lIns="0" tIns="0" rIns="0" bIns="0" rtlCol="0" anchor="t"/>
-          <a:lstStyle/>
-          <a:p>
-            <a:pPr indent="0" marL="0">
-              <a:buNone/>
-            </a:pPr>
-            <a:r>
-              <a:rPr lang="en-US" sz="1800" b="1" dirty="0">
-                <a:solidFill>
-                  <a:schemeClr val="accent1"/>
-                </a:solidFill>
-              </a:rPr>
-              <a:t>Arm lost after a drop</a:t>
-            </a:r>
-            <a:endParaRPr lang="en-US" sz="1800" dirty="0"/>
-          </a:p>
-        </p:txBody>
-      </p:sp>
-      <p:sp>
-        <p:nvSpPr>
-          <p:cNvPr id="14" name="Text 12"/>
-          <p:cNvSpPr txBox="1"/>
-          <p:nvPr/>
-        </p:nvSpPr>
-        <p:spPr>
-          <a:xfrm>
-            <a:off x="777240" y="4480560"/>
-            <a:ext cx="3063240" cy="1325880"/>
-          </a:xfrm>
-          <a:prstGeom prst="rect">
-            <a:avLst/>
-          </a:prstGeom>
-          <a:noFill/>
-          <a:ln/>
-        </p:spPr>
-        <p:txBody>
-          <a:bodyPr wrap="square" lIns="0" tIns="0" rIns="0" bIns="0" rtlCol="0" anchor="t"/>
-          <a:lstStyle/>
-          <a:p>
-            <a:pPr indent="0" marL="0">
-              <a:buNone/>
-            </a:pPr>
-            <a:r>
-              <a:rPr lang="en-US" sz="1450" dirty="0">
-                <a:solidFill>
-                  <a:schemeClr val="tx1"/>
-                </a:solidFill>
-              </a:rPr>
-              <a:t>No IK seed back to the conveyor. A library of solved poses fixed it.</a:t>
-            </a:r>
-            <a:endParaRPr lang="en-US" sz="1450" dirty="0"/>
-          </a:p>
-        </p:txBody>
-      </p:sp>
-      <p:sp>
-        <p:nvSpPr>
-          <p:cNvPr id="15" name="issue-5"/>
-          <p:cNvSpPr/>
-          <p:nvPr/>
-        </p:nvSpPr>
-        <p:spPr>
-          <a:xfrm>
-            <a:off x="4297680" y="3794760"/>
-            <a:ext cx="3520440" cy="2148840"/>
-          </a:xfrm>
-          <a:prstGeom prst="roundRect">
-            <a:avLst>
-              <a:gd name="adj" fmla="val 3404"/>
-            </a:avLst>
-          </a:prstGeom>
-          <a:solidFill>
-            <a:schemeClr val="bg2"/>
-          </a:solidFill>
-          <a:ln w="12700">
-            <a:solidFill>
-              <a:schemeClr val="bg2"/>
-            </a:solidFill>
-            <a:prstDash val="solid"/>
-          </a:ln>
-        </p:spPr>
-      </p:sp>
-      <p:sp>
-        <p:nvSpPr>
-          <p:cNvPr id="16" name="Text 14"/>
-          <p:cNvSpPr txBox="1"/>
-          <p:nvPr/>
-        </p:nvSpPr>
-        <p:spPr>
-          <a:xfrm>
-            <a:off x="4526280" y="3995928"/>
-            <a:ext cx="3063240" cy="411480"/>
-          </a:xfrm>
-          <a:prstGeom prst="rect">
-            <a:avLst/>
-          </a:prstGeom>
-          <a:noFill/>
-          <a:ln/>
-        </p:spPr>
-        <p:txBody>
-          <a:bodyPr wrap="square" lIns="0" tIns="0" rIns="0" bIns="0" rtlCol="0" anchor="t"/>
-          <a:lstStyle/>
-          <a:p>
-            <a:pPr indent="0" marL="0">
-              <a:buNone/>
-            </a:pPr>
-            <a:r>
-              <a:rPr lang="en-US" sz="1800" b="1" dirty="0">
-                <a:solidFill>
-                  <a:schemeClr val="accent1"/>
-                </a:solidFill>
-              </a:rPr>
-              <a:t>Vanadinite unreachable</a:t>
-            </a:r>
-            <a:endParaRPr lang="en-US" sz="1800" dirty="0"/>
-          </a:p>
-        </p:txBody>
-      </p:sp>
-      <p:sp>
-        <p:nvSpPr>
-          <p:cNvPr id="17" name="Text 15"/>
-          <p:cNvSpPr txBox="1"/>
-          <p:nvPr/>
-        </p:nvSpPr>
-        <p:spPr>
-          <a:xfrm>
-            <a:off x="4526280" y="4480560"/>
-            <a:ext cx="3063240" cy="1325880"/>
-          </a:xfrm>
-          <a:prstGeom prst="rect">
-            <a:avLst/>
-          </a:prstGeom>
-          <a:noFill/>
-          <a:ln/>
-        </p:spPr>
-        <p:txBody>
-          <a:bodyPr wrap="square" lIns="0" tIns="0" rIns="0" bIns="0" rtlCol="0" anchor="t"/>
-          <a:lstStyle/>
-          <a:p>
-            <a:pPr indent="0" marL="0">
-              <a:buNone/>
-            </a:pPr>
-            <a:r>
-              <a:rPr lang="en-US" sz="1450" dirty="0">
-                <a:solidFill>
-                  <a:schemeClr val="tx1"/>
-                </a:solidFill>
-              </a:rPr>
-              <a:t>Container centre 0.93 m away. Release at its nearest reachable point.</a:t>
-            </a:r>
-            <a:endParaRPr lang="en-US" sz="1450" dirty="0"/>
-          </a:p>
-        </p:txBody>
-      </p:sp>
-      <p:sp>
-        <p:nvSpPr>
-          <p:cNvPr id="18" name="issue-6"/>
-          <p:cNvSpPr/>
-          <p:nvPr/>
-        </p:nvSpPr>
-        <p:spPr>
-          <a:xfrm>
-            <a:off x="8046720" y="3794760"/>
-            <a:ext cx="3520440" cy="2148840"/>
-          </a:xfrm>
-          <a:prstGeom prst="roundRect">
-            <a:avLst>
-              <a:gd name="adj" fmla="val 3404"/>
-            </a:avLst>
-          </a:prstGeom>
-          <a:solidFill>
-            <a:schemeClr val="bg2"/>
-          </a:solidFill>
-          <a:ln w="12700">
-            <a:solidFill>
-              <a:schemeClr val="bg2"/>
-            </a:solidFill>
-            <a:prstDash val="solid"/>
-          </a:ln>
-        </p:spPr>
-      </p:sp>
-      <p:sp>
-        <p:nvSpPr>
-          <p:cNvPr id="19" name="Text 17"/>
-          <p:cNvSpPr txBox="1"/>
-          <p:nvPr/>
-        </p:nvSpPr>
-        <p:spPr>
-          <a:xfrm>
-            <a:off x="8275320" y="3995928"/>
-            <a:ext cx="3063240" cy="411480"/>
-          </a:xfrm>
-          <a:prstGeom prst="rect">
-            <a:avLst/>
-          </a:prstGeom>
-          <a:noFill/>
-          <a:ln/>
-        </p:spPr>
-        <p:txBody>
-          <a:bodyPr wrap="square" lIns="0" tIns="0" rIns="0" bIns="0" rtlCol="0" anchor="t"/>
-          <a:lstStyle/>
-          <a:p>
-            <a:pPr indent="0" marL="0">
-              <a:buNone/>
-            </a:pPr>
-            <a:r>
-              <a:rPr lang="en-US" sz="1800" b="1" dirty="0">
-                <a:solidFill>
-                  <a:schemeClr val="accent1"/>
-                </a:solidFill>
-              </a:rPr>
-              <a:t>Two simulations clashed</a:t>
-            </a:r>
-            <a:endParaRPr lang="en-US" sz="1800" dirty="0"/>
-          </a:p>
-        </p:txBody>
-      </p:sp>
-      <p:sp>
-        <p:nvSpPr>
-          <p:cNvPr id="20" name="Text 18"/>
-          <p:cNvSpPr txBox="1"/>
-          <p:nvPr/>
-        </p:nvSpPr>
-        <p:spPr>
-          <a:xfrm>
-            <a:off x="8275320" y="4480560"/>
-            <a:ext cx="3063240" cy="1325880"/>
-          </a:xfrm>
-          <a:prstGeom prst="rect">
-            <a:avLst/>
-          </a:prstGeom>
-          <a:noFill/>
-          <a:ln/>
-        </p:spPr>
-        <p:txBody>
-          <a:bodyPr wrap="square" lIns="0" tIns="0" rIns="0" bIns="0" rtlCol="0" anchor="t"/>
-          <a:lstStyle/>
-          <a:p>
-            <a:pPr indent="0" marL="0">
-              <a:buNone/>
-            </a:pPr>
-            <a:r>
-              <a:rPr lang="en-US" sz="1450" dirty="0">
-                <a:solidFill>
-                  <a:schemeClr val="tx1"/>
-                </a:solidFill>
-              </a:rPr>
-              <a:t>A leftover simulation on the same ROS domain. One world at a time.</a:t>
-            </a:r>
-            <a:endParaRPr lang="en-US" sz="1450" dirty="0"/>
-          </a:p>
-        </p:txBody>
-      </p:sp>
-      <p:sp>
-        <p:nvSpPr>
-          <p:cNvPr id="25" name="Slide Number Placeholder 0"/>
-          <p:cNvSpPr>
-            <a:spLocks noGrp="1"/>
-          </p:cNvSpPr>
-          <p:nvPr>
-            <p:ph type="sldNum" sz="quarter" idx="4294967295"/>
-          </p:nvPr>
-        </p:nvSpPr>
-        <p:spPr>
-          <a:xfrm>
-            <a:off x="11247120" y="6355080"/>
-            <a:ext cx="457200" cy="274320"/>
-          </a:xfrm>
-          <a:prstGeom prst="rect">
-            <a:avLst/>
-          </a:prstGeom>
-          <a:extLst>
-            <a:ext uri="{C572A759-6A51-4108-AA02-DFA0A04FC94B}">
-              <ma14:wrappingTextBoxFlag xmlns:ma14="http://schemas.microsoft.com/office/mac/drawingml/2011/main" val="0"/>
-            </a:ext>
-          </a:extLst>
-        </p:spPr>
-        <p:txBody>
-          <a:bodyPr/>
-          <a:lstStyle>
-            <a:lvl1pPr>
-              <a:defRPr sz="1000">
-                <a:solidFill>
-                  <a:srgbClr val="6B7280"/>
-                </a:solidFill>
-              </a:defRPr>
-            </a:lvl1pPr>
-          </a:lstStyle>
-          <a:p>
-            <a:pPr algn="r"/>
-            <a:fld id="{F7021451-1387-4CA6-816F-3879F97B5CBC}" type="slidenum">
-              <a:rPr b="0" lang="en-US"/>
               <a:t>12</a:t>
             </a:fld>
             <a:endParaRPr lang="en-US"/>
@@ -5094,6 +5146,708 @@
         </p:nvSpPr>
         <p:spPr>
           <a:xfrm>
+            <a:off x="548640" y="320040"/>
+            <a:ext cx="11064240" cy="822960"/>
+          </a:xfrm>
+          <a:prstGeom prst="rect">
+            <a:avLst/>
+          </a:prstGeom>
+          <a:noFill/>
+          <a:ln/>
+        </p:spPr>
+        <p:txBody>
+          <a:bodyPr wrap="square" lIns="0" tIns="0" rIns="0" bIns="0" rtlCol="0" anchor="ctr"/>
+          <a:lstStyle/>
+          <a:p>
+            <a:pPr indent="0" marL="0">
+              <a:buNone/>
+            </a:pPr>
+            <a:r>
+              <a:rPr lang="en-US" sz="3200" b="1" dirty="0">
+                <a:solidFill>
+                  <a:schemeClr val="tx1"/>
+                </a:solidFill>
+              </a:rPr>
+              <a:t>What broke, and how we fixed it</a:t>
+            </a:r>
+            <a:endParaRPr lang="en-US" sz="3200" dirty="0"/>
+          </a:p>
+        </p:txBody>
+      </p:sp>
+      <p:sp>
+        <p:nvSpPr>
+          <p:cNvPr id="3" name="issue-1"/>
+          <p:cNvSpPr/>
+          <p:nvPr/>
+        </p:nvSpPr>
+        <p:spPr>
+          <a:xfrm>
+            <a:off x="548640" y="1417320"/>
+            <a:ext cx="3520440" cy="2148840"/>
+          </a:xfrm>
+          <a:prstGeom prst="roundRect">
+            <a:avLst>
+              <a:gd name="adj" fmla="val 3404"/>
+            </a:avLst>
+          </a:prstGeom>
+          <a:solidFill>
+            <a:schemeClr val="bg2"/>
+          </a:solidFill>
+          <a:ln w="12700">
+            <a:solidFill>
+              <a:schemeClr val="bg2"/>
+            </a:solidFill>
+            <a:prstDash val="solid"/>
+          </a:ln>
+        </p:spPr>
+      </p:sp>
+      <p:sp>
+        <p:nvSpPr>
+          <p:cNvPr id="4" name="Text 2"/>
+          <p:cNvSpPr txBox="1"/>
+          <p:nvPr/>
+        </p:nvSpPr>
+        <p:spPr>
+          <a:xfrm>
+            <a:off x="777240" y="1618488"/>
+            <a:ext cx="3063240" cy="411480"/>
+          </a:xfrm>
+          <a:prstGeom prst="rect">
+            <a:avLst/>
+          </a:prstGeom>
+          <a:noFill/>
+          <a:ln/>
+        </p:spPr>
+        <p:txBody>
+          <a:bodyPr wrap="square" lIns="0" tIns="0" rIns="0" bIns="0" rtlCol="0" anchor="t"/>
+          <a:lstStyle/>
+          <a:p>
+            <a:pPr indent="0" marL="0">
+              <a:buNone/>
+            </a:pPr>
+            <a:r>
+              <a:rPr lang="en-US" sz="1800" b="1" dirty="0">
+                <a:solidFill>
+                  <a:schemeClr val="accent1"/>
+                </a:solidFill>
+              </a:rPr>
+              <a:t>No path at all</a:t>
+            </a:r>
+            <a:endParaRPr lang="en-US" sz="1800" dirty="0"/>
+          </a:p>
+        </p:txBody>
+      </p:sp>
+      <p:sp>
+        <p:nvSpPr>
+          <p:cNvPr id="5" name="Text 3"/>
+          <p:cNvSpPr txBox="1"/>
+          <p:nvPr/>
+        </p:nvSpPr>
+        <p:spPr>
+          <a:xfrm>
+            <a:off x="777240" y="2103120"/>
+            <a:ext cx="3063240" cy="1325880"/>
+          </a:xfrm>
+          <a:prstGeom prst="rect">
+            <a:avLst/>
+          </a:prstGeom>
+          <a:noFill/>
+          <a:ln/>
+        </p:spPr>
+        <p:txBody>
+          <a:bodyPr wrap="square" lIns="0" tIns="0" rIns="0" bIns="0" rtlCol="0" anchor="t"/>
+          <a:lstStyle/>
+          <a:p>
+            <a:pPr indent="0" marL="0">
+              <a:buNone/>
+            </a:pPr>
+            <a:r>
+              <a:rPr lang="en-US" sz="1450" dirty="0">
+                <a:solidFill>
+                  <a:schemeClr val="tx1"/>
+                </a:solidFill>
+              </a:rPr>
+              <a:t>Drop pose is 0.375 m from a wall; downsampling shaved 5 cm more. Full-resolution clearance fixed it.</a:t>
+            </a:r>
+            <a:endParaRPr lang="en-US" sz="1450" dirty="0"/>
+          </a:p>
+        </p:txBody>
+      </p:sp>
+      <p:sp>
+        <p:nvSpPr>
+          <p:cNvPr id="6" name="issue-2"/>
+          <p:cNvSpPr/>
+          <p:nvPr/>
+        </p:nvSpPr>
+        <p:spPr>
+          <a:xfrm>
+            <a:off x="4297680" y="1417320"/>
+            <a:ext cx="3520440" cy="2148840"/>
+          </a:xfrm>
+          <a:prstGeom prst="roundRect">
+            <a:avLst>
+              <a:gd name="adj" fmla="val 3404"/>
+            </a:avLst>
+          </a:prstGeom>
+          <a:solidFill>
+            <a:schemeClr val="bg2"/>
+          </a:solidFill>
+          <a:ln w="12700">
+            <a:solidFill>
+              <a:schemeClr val="bg2"/>
+            </a:solidFill>
+            <a:prstDash val="solid"/>
+          </a:ln>
+        </p:spPr>
+      </p:sp>
+      <p:sp>
+        <p:nvSpPr>
+          <p:cNvPr id="7" name="Text 5"/>
+          <p:cNvSpPr txBox="1"/>
+          <p:nvPr/>
+        </p:nvSpPr>
+        <p:spPr>
+          <a:xfrm>
+            <a:off x="4526280" y="1618488"/>
+            <a:ext cx="3063240" cy="411480"/>
+          </a:xfrm>
+          <a:prstGeom prst="rect">
+            <a:avLst/>
+          </a:prstGeom>
+          <a:noFill/>
+          <a:ln/>
+        </p:spPr>
+        <p:txBody>
+          <a:bodyPr wrap="square" lIns="0" tIns="0" rIns="0" bIns="0" rtlCol="0" anchor="t"/>
+          <a:lstStyle/>
+          <a:p>
+            <a:pPr indent="0" marL="0">
+              <a:buNone/>
+            </a:pPr>
+            <a:r>
+              <a:rPr lang="en-US" sz="1800" b="1" dirty="0">
+                <a:solidFill>
+                  <a:schemeClr val="accent1"/>
+                </a:solidFill>
+              </a:rPr>
+              <a:t>Paths 2% too long</a:t>
+            </a:r>
+            <a:endParaRPr lang="en-US" sz="1800" dirty="0"/>
+          </a:p>
+        </p:txBody>
+      </p:sp>
+      <p:sp>
+        <p:nvSpPr>
+          <p:cNvPr id="8" name="Text 6"/>
+          <p:cNvSpPr txBox="1"/>
+          <p:nvPr/>
+        </p:nvSpPr>
+        <p:spPr>
+          <a:xfrm>
+            <a:off x="4526280" y="2103120"/>
+            <a:ext cx="3063240" cy="1325880"/>
+          </a:xfrm>
+          <a:prstGeom prst="rect">
+            <a:avLst/>
+          </a:prstGeom>
+          <a:noFill/>
+          <a:ln/>
+        </p:spPr>
+        <p:txBody>
+          <a:bodyPr wrap="square" lIns="0" tIns="0" rIns="0" bIns="0" rtlCol="0" anchor="t"/>
+          <a:lstStyle/>
+          <a:p>
+            <a:pPr indent="0" marL="0">
+              <a:buNone/>
+            </a:pPr>
+            <a:r>
+              <a:rPr lang="en-US" sz="1450" dirty="0">
+                <a:solidFill>
+                  <a:schemeClr val="tx1"/>
+                </a:solidFill>
+              </a:rPr>
+              <a:t>Grid-snapped corners. Fine-map checks and corner tightening reached efficiency 1.00.</a:t>
+            </a:r>
+            <a:endParaRPr lang="en-US" sz="1450" dirty="0"/>
+          </a:p>
+        </p:txBody>
+      </p:sp>
+      <p:sp>
+        <p:nvSpPr>
+          <p:cNvPr id="9" name="issue-3"/>
+          <p:cNvSpPr/>
+          <p:nvPr/>
+        </p:nvSpPr>
+        <p:spPr>
+          <a:xfrm>
+            <a:off x="8046720" y="1417320"/>
+            <a:ext cx="3520440" cy="2148840"/>
+          </a:xfrm>
+          <a:prstGeom prst="roundRect">
+            <a:avLst>
+              <a:gd name="adj" fmla="val 3404"/>
+            </a:avLst>
+          </a:prstGeom>
+          <a:solidFill>
+            <a:schemeClr val="bg2"/>
+          </a:solidFill>
+          <a:ln w="12700">
+            <a:solidFill>
+              <a:schemeClr val="bg2"/>
+            </a:solidFill>
+            <a:prstDash val="solid"/>
+          </a:ln>
+        </p:spPr>
+      </p:sp>
+      <p:sp>
+        <p:nvSpPr>
+          <p:cNvPr id="10" name="Text 8"/>
+          <p:cNvSpPr txBox="1"/>
+          <p:nvPr/>
+        </p:nvSpPr>
+        <p:spPr>
+          <a:xfrm>
+            <a:off x="8275320" y="1618488"/>
+            <a:ext cx="3063240" cy="411480"/>
+          </a:xfrm>
+          <a:prstGeom prst="rect">
+            <a:avLst/>
+          </a:prstGeom>
+          <a:noFill/>
+          <a:ln/>
+        </p:spPr>
+        <p:txBody>
+          <a:bodyPr wrap="square" lIns="0" tIns="0" rIns="0" bIns="0" rtlCol="0" anchor="t"/>
+          <a:lstStyle/>
+          <a:p>
+            <a:pPr indent="0" marL="0">
+              <a:buNone/>
+            </a:pPr>
+            <a:r>
+              <a:rPr lang="en-US" sz="1800" b="1" dirty="0">
+                <a:solidFill>
+                  <a:schemeClr val="accent1"/>
+                </a:solidFill>
+              </a:rPr>
+              <a:t>IK took minutes</a:t>
+            </a:r>
+            <a:endParaRPr lang="en-US" sz="1800" dirty="0"/>
+          </a:p>
+        </p:txBody>
+      </p:sp>
+      <p:sp>
+        <p:nvSpPr>
+          <p:cNvPr id="11" name="Text 9"/>
+          <p:cNvSpPr txBox="1"/>
+          <p:nvPr/>
+        </p:nvSpPr>
+        <p:spPr>
+          <a:xfrm>
+            <a:off x="8275320" y="2103120"/>
+            <a:ext cx="3063240" cy="1325880"/>
+          </a:xfrm>
+          <a:prstGeom prst="rect">
+            <a:avLst/>
+          </a:prstGeom>
+          <a:noFill/>
+          <a:ln/>
+        </p:spPr>
+        <p:txBody>
+          <a:bodyPr wrap="square" lIns="0" tIns="0" rIns="0" bIns="0" rtlCol="0" anchor="t"/>
+          <a:lstStyle/>
+          <a:p>
+            <a:pPr indent="0" marL="0">
+              <a:buNone/>
+            </a:pPr>
+            <a:r>
+              <a:rPr lang="en-US" sz="1450" dirty="0">
+                <a:solidFill>
+                  <a:schemeClr val="tx1"/>
+                </a:solidFill>
+              </a:rPr>
+              <a:t>Checks inside every optimiser step. DLS with one final check: 0.1-0.4 s.</a:t>
+            </a:r>
+            <a:endParaRPr lang="en-US" sz="1450" dirty="0"/>
+          </a:p>
+        </p:txBody>
+      </p:sp>
+      <p:sp>
+        <p:nvSpPr>
+          <p:cNvPr id="12" name="issue-4"/>
+          <p:cNvSpPr/>
+          <p:nvPr/>
+        </p:nvSpPr>
+        <p:spPr>
+          <a:xfrm>
+            <a:off x="548640" y="3794760"/>
+            <a:ext cx="3520440" cy="2148840"/>
+          </a:xfrm>
+          <a:prstGeom prst="roundRect">
+            <a:avLst>
+              <a:gd name="adj" fmla="val 3404"/>
+            </a:avLst>
+          </a:prstGeom>
+          <a:solidFill>
+            <a:schemeClr val="bg2"/>
+          </a:solidFill>
+          <a:ln w="12700">
+            <a:solidFill>
+              <a:schemeClr val="bg2"/>
+            </a:solidFill>
+            <a:prstDash val="solid"/>
+          </a:ln>
+        </p:spPr>
+      </p:sp>
+      <p:sp>
+        <p:nvSpPr>
+          <p:cNvPr id="13" name="Text 11"/>
+          <p:cNvSpPr txBox="1"/>
+          <p:nvPr/>
+        </p:nvSpPr>
+        <p:spPr>
+          <a:xfrm>
+            <a:off x="777240" y="3995928"/>
+            <a:ext cx="3063240" cy="411480"/>
+          </a:xfrm>
+          <a:prstGeom prst="rect">
+            <a:avLst/>
+          </a:prstGeom>
+          <a:noFill/>
+          <a:ln/>
+        </p:spPr>
+        <p:txBody>
+          <a:bodyPr wrap="square" lIns="0" tIns="0" rIns="0" bIns="0" rtlCol="0" anchor="t"/>
+          <a:lstStyle/>
+          <a:p>
+            <a:pPr indent="0" marL="0">
+              <a:buNone/>
+            </a:pPr>
+            <a:r>
+              <a:rPr lang="en-US" sz="1800" b="1" dirty="0">
+                <a:solidFill>
+                  <a:schemeClr val="accent1"/>
+                </a:solidFill>
+              </a:rPr>
+              <a:t>Arm lost after a drop</a:t>
+            </a:r>
+            <a:endParaRPr lang="en-US" sz="1800" dirty="0"/>
+          </a:p>
+        </p:txBody>
+      </p:sp>
+      <p:sp>
+        <p:nvSpPr>
+          <p:cNvPr id="14" name="Text 12"/>
+          <p:cNvSpPr txBox="1"/>
+          <p:nvPr/>
+        </p:nvSpPr>
+        <p:spPr>
+          <a:xfrm>
+            <a:off x="777240" y="4480560"/>
+            <a:ext cx="3063240" cy="1325880"/>
+          </a:xfrm>
+          <a:prstGeom prst="rect">
+            <a:avLst/>
+          </a:prstGeom>
+          <a:noFill/>
+          <a:ln/>
+        </p:spPr>
+        <p:txBody>
+          <a:bodyPr wrap="square" lIns="0" tIns="0" rIns="0" bIns="0" rtlCol="0" anchor="t"/>
+          <a:lstStyle/>
+          <a:p>
+            <a:pPr indent="0" marL="0">
+              <a:buNone/>
+            </a:pPr>
+            <a:r>
+              <a:rPr lang="en-US" sz="1450" dirty="0">
+                <a:solidFill>
+                  <a:schemeClr val="tx1"/>
+                </a:solidFill>
+              </a:rPr>
+              <a:t>No IK seed back to the conveyor. A library of solved poses fixed it.</a:t>
+            </a:r>
+            <a:endParaRPr lang="en-US" sz="1450" dirty="0"/>
+          </a:p>
+        </p:txBody>
+      </p:sp>
+      <p:sp>
+        <p:nvSpPr>
+          <p:cNvPr id="15" name="issue-5"/>
+          <p:cNvSpPr/>
+          <p:nvPr/>
+        </p:nvSpPr>
+        <p:spPr>
+          <a:xfrm>
+            <a:off x="4297680" y="3794760"/>
+            <a:ext cx="3520440" cy="2148840"/>
+          </a:xfrm>
+          <a:prstGeom prst="roundRect">
+            <a:avLst>
+              <a:gd name="adj" fmla="val 3404"/>
+            </a:avLst>
+          </a:prstGeom>
+          <a:solidFill>
+            <a:schemeClr val="bg2"/>
+          </a:solidFill>
+          <a:ln w="12700">
+            <a:solidFill>
+              <a:schemeClr val="bg2"/>
+            </a:solidFill>
+            <a:prstDash val="solid"/>
+          </a:ln>
+        </p:spPr>
+      </p:sp>
+      <p:sp>
+        <p:nvSpPr>
+          <p:cNvPr id="16" name="Text 14"/>
+          <p:cNvSpPr txBox="1"/>
+          <p:nvPr/>
+        </p:nvSpPr>
+        <p:spPr>
+          <a:xfrm>
+            <a:off x="4526280" y="3995928"/>
+            <a:ext cx="3063240" cy="411480"/>
+          </a:xfrm>
+          <a:prstGeom prst="rect">
+            <a:avLst/>
+          </a:prstGeom>
+          <a:noFill/>
+          <a:ln/>
+        </p:spPr>
+        <p:txBody>
+          <a:bodyPr wrap="square" lIns="0" tIns="0" rIns="0" bIns="0" rtlCol="0" anchor="t"/>
+          <a:lstStyle/>
+          <a:p>
+            <a:pPr indent="0" marL="0">
+              <a:buNone/>
+            </a:pPr>
+            <a:r>
+              <a:rPr lang="en-US" sz="1800" b="1" dirty="0">
+                <a:solidFill>
+                  <a:schemeClr val="accent1"/>
+                </a:solidFill>
+              </a:rPr>
+              <a:t>Vanadinite unreachable</a:t>
+            </a:r>
+            <a:endParaRPr lang="en-US" sz="1800" dirty="0"/>
+          </a:p>
+        </p:txBody>
+      </p:sp>
+      <p:sp>
+        <p:nvSpPr>
+          <p:cNvPr id="17" name="Text 15"/>
+          <p:cNvSpPr txBox="1"/>
+          <p:nvPr/>
+        </p:nvSpPr>
+        <p:spPr>
+          <a:xfrm>
+            <a:off x="4526280" y="4480560"/>
+            <a:ext cx="3063240" cy="1325880"/>
+          </a:xfrm>
+          <a:prstGeom prst="rect">
+            <a:avLst/>
+          </a:prstGeom>
+          <a:noFill/>
+          <a:ln/>
+        </p:spPr>
+        <p:txBody>
+          <a:bodyPr wrap="square" lIns="0" tIns="0" rIns="0" bIns="0" rtlCol="0" anchor="t"/>
+          <a:lstStyle/>
+          <a:p>
+            <a:pPr indent="0" marL="0">
+              <a:buNone/>
+            </a:pPr>
+            <a:r>
+              <a:rPr lang="en-US" sz="1450" dirty="0">
+                <a:solidFill>
+                  <a:schemeClr val="tx1"/>
+                </a:solidFill>
+              </a:rPr>
+              <a:t>Container centre 0.93 m away. Release at its nearest reachable point.</a:t>
+            </a:r>
+            <a:endParaRPr lang="en-US" sz="1450" dirty="0"/>
+          </a:p>
+        </p:txBody>
+      </p:sp>
+      <p:sp>
+        <p:nvSpPr>
+          <p:cNvPr id="18" name="issue-6"/>
+          <p:cNvSpPr/>
+          <p:nvPr/>
+        </p:nvSpPr>
+        <p:spPr>
+          <a:xfrm>
+            <a:off x="8046720" y="3794760"/>
+            <a:ext cx="3520440" cy="2148840"/>
+          </a:xfrm>
+          <a:prstGeom prst="roundRect">
+            <a:avLst>
+              <a:gd name="adj" fmla="val 3404"/>
+            </a:avLst>
+          </a:prstGeom>
+          <a:solidFill>
+            <a:schemeClr val="bg2"/>
+          </a:solidFill>
+          <a:ln w="12700">
+            <a:solidFill>
+              <a:schemeClr val="bg2"/>
+            </a:solidFill>
+            <a:prstDash val="solid"/>
+          </a:ln>
+        </p:spPr>
+      </p:sp>
+      <p:sp>
+        <p:nvSpPr>
+          <p:cNvPr id="19" name="Text 17"/>
+          <p:cNvSpPr txBox="1"/>
+          <p:nvPr/>
+        </p:nvSpPr>
+        <p:spPr>
+          <a:xfrm>
+            <a:off x="8275320" y="3995928"/>
+            <a:ext cx="3063240" cy="411480"/>
+          </a:xfrm>
+          <a:prstGeom prst="rect">
+            <a:avLst/>
+          </a:prstGeom>
+          <a:noFill/>
+          <a:ln/>
+        </p:spPr>
+        <p:txBody>
+          <a:bodyPr wrap="square" lIns="0" tIns="0" rIns="0" bIns="0" rtlCol="0" anchor="t"/>
+          <a:lstStyle/>
+          <a:p>
+            <a:pPr indent="0" marL="0">
+              <a:buNone/>
+            </a:pPr>
+            <a:r>
+              <a:rPr lang="en-US" sz="1800" b="1" dirty="0">
+                <a:solidFill>
+                  <a:schemeClr val="accent1"/>
+                </a:solidFill>
+              </a:rPr>
+              <a:t>Two simulations clashed</a:t>
+            </a:r>
+            <a:endParaRPr lang="en-US" sz="1800" dirty="0"/>
+          </a:p>
+        </p:txBody>
+      </p:sp>
+      <p:sp>
+        <p:nvSpPr>
+          <p:cNvPr id="20" name="Text 18"/>
+          <p:cNvSpPr txBox="1"/>
+          <p:nvPr/>
+        </p:nvSpPr>
+        <p:spPr>
+          <a:xfrm>
+            <a:off x="8275320" y="4480560"/>
+            <a:ext cx="3063240" cy="1325880"/>
+          </a:xfrm>
+          <a:prstGeom prst="rect">
+            <a:avLst/>
+          </a:prstGeom>
+          <a:noFill/>
+          <a:ln/>
+        </p:spPr>
+        <p:txBody>
+          <a:bodyPr wrap="square" lIns="0" tIns="0" rIns="0" bIns="0" rtlCol="0" anchor="t"/>
+          <a:lstStyle/>
+          <a:p>
+            <a:pPr indent="0" marL="0">
+              <a:buNone/>
+            </a:pPr>
+            <a:r>
+              <a:rPr lang="en-US" sz="1450" dirty="0">
+                <a:solidFill>
+                  <a:schemeClr val="tx1"/>
+                </a:solidFill>
+              </a:rPr>
+              <a:t>A leftover simulation on the same ROS domain. One world at a time.</a:t>
+            </a:r>
+            <a:endParaRPr lang="en-US" sz="1450" dirty="0"/>
+          </a:p>
+        </p:txBody>
+      </p:sp>
+      <p:sp>
+        <p:nvSpPr>
+          <p:cNvPr id="25" name="Slide Number Placeholder 0"/>
+          <p:cNvSpPr>
+            <a:spLocks noGrp="1"/>
+          </p:cNvSpPr>
+          <p:nvPr>
+            <p:ph type="sldNum" sz="quarter" idx="4294967295"/>
+          </p:nvPr>
+        </p:nvSpPr>
+        <p:spPr>
+          <a:xfrm>
+            <a:off x="11247120" y="6355080"/>
+            <a:ext cx="457200" cy="274320"/>
+          </a:xfrm>
+          <a:prstGeom prst="rect">
+            <a:avLst/>
+          </a:prstGeom>
+          <a:extLst>
+            <a:ext uri="{C572A759-6A51-4108-AA02-DFA0A04FC94B}">
+              <ma14:wrappingTextBoxFlag xmlns:ma14="http://schemas.microsoft.com/office/mac/drawingml/2011/main" val="0"/>
+            </a:ext>
+          </a:extLst>
+        </p:spPr>
+        <p:txBody>
+          <a:bodyPr/>
+          <a:lstStyle>
+            <a:lvl1pPr>
+              <a:defRPr sz="1000">
+                <a:solidFill>
+                  <a:srgbClr val="6B7280"/>
+                </a:solidFill>
+              </a:defRPr>
+            </a:lvl1pPr>
+          </a:lstStyle>
+          <a:p>
+            <a:pPr algn="r"/>
+            <a:fld id="{F7021451-1387-4CA6-816F-3879F97B5CBC}" type="slidenum">
+              <a:rPr b="0" lang="en-US"/>
+              <a:t>13</a:t>
+            </a:fld>
+            <a:endParaRPr lang="en-US"/>
+          </a:p>
+        </p:txBody>
+      </p:sp>
+    </p:spTree>
+  </p:cSld>
+  <p:clrMapOvr>
+    <a:masterClrMapping/>
+  </p:clrMapOvr>
+</p:sld>
+</file>
+
+<file path=ppt/slides/slide14.xml><?xml version="1.0" encoding="utf-8"?>
+<p:sld xmlns:a="http://schemas.openxmlformats.org/drawingml/2006/main" xmlns:r="http://schemas.openxmlformats.org/officeDocument/2006/relationships" xmlns:p="http://schemas.openxmlformats.org/presentationml/2006/main">
+  <p:cSld name="Slide 14">
+    <p:spTree>
+      <p:nvGrpSpPr>
+        <p:cNvPr id="1" name=""/>
+        <p:cNvGrpSpPr/>
+        <p:nvPr/>
+      </p:nvGrpSpPr>
+      <p:grpSpPr>
+        <a:xfrm>
+          <a:off x="0" y="0"/>
+          <a:ext cx="0" cy="0"/>
+          <a:chOff x="0" y="0"/>
+          <a:chExt cx="0" cy="0"/>
+        </a:xfrm>
+      </p:grpSpPr>
+      <p:sp>
+        <p:nvSpPr>
+          <p:cNvPr id="2" name="Text 0"/>
+          <p:cNvSpPr/>
+          <p:nvPr>
+            <p:ph idx="100" type="title" hasCustomPrompt="1"/>
+          </p:nvPr>
+        </p:nvSpPr>
+        <p:spPr>
+          <a:xfrm>
             <a:off x="640080" y="548640"/>
             <a:ext cx="10881360" cy="914400"/>
           </a:xfrm>
@@ -5519,7 +6273,7 @@
                   <a:schemeClr val="bg2"/>
                 </a:solidFill>
               </a:rPr>
-              <a:t>Faster sorting by blending moves</a:t>
+              <a:t>Train a classifier on real ore samples</a:t>
             </a:r>
             <a:endParaRPr lang="en-US" sz="1800" dirty="0"/>
           </a:p>
@@ -9389,7 +10143,7 @@
                   <a:schemeClr val="tx1"/>
                 </a:solidFill>
               </a:rPr>
-              <a:t>Perception lands within 3 mm of every ore</a:t>
+              <a:t>Find each ore by shape, name it by a colour vote</a:t>
             </a:r>
             <a:endParaRPr lang="en-US" sz="3200" dirty="0"/>
           </a:p>
@@ -9449,7 +10203,7 @@
                   <a:schemeClr val="accent1"/>
                 </a:solidFill>
               </a:rPr>
-              <a:t>1-3 mm</a:t>
+              <a:t>2-3 mm</a:t>
             </a:r>
             <a:endParaRPr lang="en-US" sz="4800" dirty="0"/>
           </a:p>
@@ -9485,7 +10239,7 @@
                   <a:schemeClr val="tx2"/>
                 </a:solidFill>
               </a:rPr>
-              <a:t>error vs. Gazebo ground truth</a:t>
+              <a:t>position error vs. ground truth</a:t>
             </a:r>
             <a:endParaRPr lang="en-US" sz="1400" dirty="0"/>
           </a:p>
@@ -9521,7 +10275,7 @@
                   <a:schemeClr val="accent5"/>
                 </a:solidFill>
               </a:rPr>
-              <a:t>50 mm</a:t>
+              <a:t>10 mm</a:t>
             </a:r>
             <a:endParaRPr lang="en-US" sz="4800" dirty="0"/>
           </a:p>
@@ -9557,7 +10311,7 @@
                   <a:schemeClr val="tx2"/>
                 </a:solidFill>
               </a:rPr>
-              <a:t>scoring tolerance</a:t>
+              <a:t>about what the magnet tolerates</a:t>
             </a:r>
             <a:endParaRPr lang="en-US" sz="1400" dirty="0"/>
           </a:p>
@@ -9597,7 +10351,7 @@
                   <a:schemeClr val="tx1"/>
                 </a:solidFill>
               </a:rPr>
-              <a:t>HSV threshold per mineral: faces are far more saturated than the orange terrain</a:t>
+              <a:t>Where: an ore's top face is the only surface 66-86 mm above the belt in the depth image</a:t>
             </a:r>
             <a:endParaRPr lang="en-US" sz="1500" dirty="0"/>
           </a:p>
@@ -9615,7 +10369,7 @@
                   <a:schemeClr val="tx1"/>
                 </a:solidFill>
               </a:rPr>
-              <a:t>Every face pixel back-projected with its own depth, then the median point</a:t>
+              <a:t>Centre of a rectangle fitted to that face, checked against the 101.6 mm size</a:t>
             </a:r>
             <a:endParaRPr lang="en-US" sz="1500" dirty="0"/>
           </a:p>
@@ -9633,7 +10387,7 @@
                   <a:schemeClr val="tx1"/>
                 </a:solidFill>
               </a:rPr>
-              <a:t>Ore counts vary by launch: 20 frames are clustered before ores are named</a:t>
+              <a:t>What: the share of the face in each mineral's colour; the winner needs 2x the next</a:t>
             </a:r>
             <a:endParaRPr lang="en-US" sz="1500" dirty="0"/>
           </a:p>
@@ -9651,7 +10405,7 @@
                   <a:schemeClr val="tx1"/>
                 </a:solidFill>
               </a:rPr>
-              <a:t>Only faces on the conveyor count, so a picked ore never moves its frame</a:t>
+              <a:t>Majority vote over 20 frames; no clear winner = "uncertain", never a guess</a:t>
             </a:r>
             <a:endParaRPr lang="en-US" sz="1500" dirty="0"/>
           </a:p>
@@ -9759,7 +10513,7 @@
                   <a:schemeClr val="tx1"/>
                 </a:solidFill>
               </a:rPr>
-              <a:t>The containers were found by measuring the rover mesh</a:t>
+              <a:t>Real ores are rarely one colour, so we vote</a:t>
             </a:r>
             <a:endParaRPr lang="en-US" sz="3200" dirty="0"/>
           </a:p>
@@ -9767,7 +10521,7 @@
       </p:sp>
       <p:pic>
         <p:nvPicPr>
-          <p:cNvPr id="3" name="workspace-top-view" descr="Top view of the arm workspace with conveyor, crusher, cargo rover containers and drop points">    </p:cNvPr>
+          <p:cNvPr id="3" name="impurity-chart" descr="Accuracy against impurity: the voting detector stays at 100% up to 50% impurity while tight thresholds fall to 48% at 20%">    </p:cNvPr>
           <p:cNvPicPr>
             <a:picLocks noChangeAspect="1"/>
           </p:cNvPicPr>
@@ -9781,8 +10535,8 @@
         </p:blipFill>
         <p:spPr>
           <a:xfrm>
-            <a:off x="548640" y="1280160"/>
-            <a:ext cx="5029200" cy="4690872"/>
+            <a:off x="457200" y="1325880"/>
+            <a:ext cx="6583680" cy="3758184"/>
           </a:xfrm>
           <a:prstGeom prst="rect">
             <a:avLst/>
@@ -9791,30 +10545,39 @@
       </p:pic>
       <p:sp>
         <p:nvSpPr>
-          <p:cNvPr id="4" name="fact-1"/>
-          <p:cNvSpPr/>
-          <p:nvPr/>
-        </p:nvSpPr>
-        <p:spPr>
-          <a:xfrm>
-            <a:off x="6126480" y="1417320"/>
-            <a:ext cx="5486400" cy="1325880"/>
-          </a:xfrm>
-          <a:prstGeom prst="roundRect">
-            <a:avLst>
-              <a:gd name="adj" fmla="val 5517"/>
-            </a:avLst>
-          </a:prstGeom>
-          <a:solidFill>
-            <a:schemeClr val="bg2"/>
-          </a:solidFill>
-          <a:ln w="12700">
-            <a:solidFill>
-              <a:schemeClr val="bg2"/>
-            </a:solidFill>
-            <a:prstDash val="solid"/>
-          </a:ln>
-        </p:spPr>
+          <p:cNvPr id="4" name="Text 1"/>
+          <p:cNvSpPr txBox="1"/>
+          <p:nvPr/>
+        </p:nvSpPr>
+        <p:spPr>
+          <a:xfrm>
+            <a:off x="457200" y="5212080"/>
+            <a:ext cx="6583680" cy="640080"/>
+          </a:xfrm>
+          <a:prstGeom prst="rect">
+            <a:avLst/>
+          </a:prstGeom>
+          <a:noFill/>
+          <a:ln/>
+        </p:spPr>
+        <p:txBody>
+          <a:bodyPr wrap="square" lIns="0" tIns="0" rIns="0" bIns="0" rtlCol="0" anchor="t"/>
+          <a:lstStyle/>
+          <a:p>
+            <a:pPr indent="0" marL="0">
+              <a:buNone/>
+            </a:pPr>
+            <a:r>
+              <a:rPr lang="en-US" sz="1300" dirty="0">
+                <a:solidFill>
+                  <a:schemeClr val="tx2"/>
+                </a:solidFill>
+              </a:rPr>
+              <a:t>Impurities painted into a real camera frame: dark rock, brown matrix, quartz and veins of other minerals, under varied lighting. 160 ores per level.</a:t>
+            </a:r>
+            <a:endParaRPr lang="en-US" sz="1300" dirty="0"/>
+          </a:p>
+        </p:txBody>
       </p:sp>
       <p:sp>
         <p:nvSpPr>
@@ -9824,8 +10587,8 @@
         </p:nvSpPr>
         <p:spPr>
           <a:xfrm>
-            <a:off x="6355080" y="1554480"/>
-            <a:ext cx="5029200" cy="365760"/>
+            <a:off x="7406640" y="1371600"/>
+            <a:ext cx="4206240" cy="365760"/>
           </a:xfrm>
           <a:prstGeom prst="rect">
             <a:avLst/>
@@ -9841,27 +10604,1052 @@
               <a:buNone/>
             </a:pPr>
             <a:r>
-              <a:rPr lang="en-US" sz="1800" b="1" dirty="0">
+              <a:rPr lang="en-US" sz="1600" b="1" dirty="0">
                 <a:solidFill>
                   <a:schemeClr val="tx1"/>
                 </a:solidFill>
               </a:rPr>
-              <a:t>Not given to us</a:t>
-            </a:r>
-            <a:endParaRPr lang="en-US" sz="1800" dirty="0"/>
-          </a:p>
-        </p:txBody>
-      </p:sp>
-      <p:sp>
-        <p:nvSpPr>
-          <p:cNvPr id="6" name="Text 3"/>
+              <a:t>180 real mineral photos</a:t>
+            </a:r>
+            <a:endParaRPr lang="en-US" sz="1600" dirty="0"/>
+          </a:p>
+        </p:txBody>
+      </p:sp>
+      <p:graphicFrame>
+        <p:nvGraphicFramePr>
+          <p:cNvPr id="7" name="Table 0"/>
+          <p:cNvGraphicFramePr>
+            <a:graphicFrameLocks noGrp="1"/>
+          </p:cNvGraphicFramePr>
+          <p:nvPr>
+            <p:extLst>
+              <p:ext uri="{D42A27DB-BD31-4B8C-83A1-F6EECF244321}">
+                <p14:modId xmlns:p14="http://schemas.microsoft.com/office/powerpoint/2010/main" val="1579011935"/>
+              </p:ext>
+            </p:extLst>
+          </p:nvPr>
+        </p:nvGraphicFramePr>
+        <p:xfrm>
+          <a:off x="7406640" y="1828800"/>
+          <a:ext cx="4206240" cy="914400"/>
+        </p:xfrm>
+        <a:graphic>
+          <a:graphicData uri="http://schemas.openxmlformats.org/drawingml/2006/table">
+            <a:tbl>
+              <a:tblPr/>
+              <a:tblGrid>
+                <a:gridCol w="2011680"/>
+                <a:gridCol w="1097280"/>
+                <a:gridCol w="1097280"/>
+              </a:tblGrid>
+              <a:tr h="457200">
+                <a:tc>
+                  <a:txBody>
+                    <a:bodyPr/>
+                    <a:lstStyle/>
+                    <a:p>
+                      <a:pPr indent="0" marL="0">
+                        <a:buNone/>
+                      </a:pPr>
+                      <a:r>
+                        <a:rPr lang="en-US" sz="1500" b="1" dirty="0">
+                          <a:solidFill>
+                            <a:srgbClr val="FFFFFF"/>
+                          </a:solidFill>
+                          <a:latin typeface="Calibri" pitchFamily="34" charset="0"/>
+                          <a:ea typeface="Calibri" pitchFamily="34" charset="-122"/>
+                          <a:cs typeface="Calibri" pitchFamily="34" charset="-120"/>
+                        </a:rPr>
+                        <a:t>Held-out photos</a:t>
+                      </a:r>
+                      <a:endParaRPr lang="en-US" sz="1500" dirty="0">
+                        <a:latin typeface="Calibri" charset="0"/>
+                        <a:ea typeface="Calibri" charset="0"/>
+                        <a:cs typeface="Calibri" charset="0"/>
+                      </a:endParaRPr>
+                    </a:p>
+                  </a:txBody>
+                  <a:tcPr marL="109728" marR="109728" marT="45720" marB="45720" anchor="ctr">
+                    <a:lnL w="9525" cap="flat" cmpd="sng" algn="ctr">
+                      <a:solidFill>
+                        <a:srgbClr val="D9D4CF"/>
+                      </a:solidFill>
+                      <a:prstDash val="solid"/>
+                      <a:round/>
+                      <a:headEnd type="none" w="med" len="med"/>
+                      <a:tailEnd type="none" w="med" len="med"/>
+                    </a:lnL>
+                    <a:lnR w="9525" cap="flat" cmpd="sng" algn="ctr">
+                      <a:solidFill>
+                        <a:srgbClr val="D9D4CF"/>
+                      </a:solidFill>
+                      <a:prstDash val="solid"/>
+                      <a:round/>
+                      <a:headEnd type="none" w="med" len="med"/>
+                      <a:tailEnd type="none" w="med" len="med"/>
+                    </a:lnR>
+                    <a:lnT w="9525" cap="flat" cmpd="sng" algn="ctr">
+                      <a:solidFill>
+                        <a:srgbClr val="D9D4CF"/>
+                      </a:solidFill>
+                      <a:prstDash val="solid"/>
+                      <a:round/>
+                      <a:headEnd type="none" w="med" len="med"/>
+                      <a:tailEnd type="none" w="med" len="med"/>
+                    </a:lnT>
+                    <a:lnB w="9525" cap="flat" cmpd="sng" algn="ctr">
+                      <a:solidFill>
+                        <a:srgbClr val="D9D4CF"/>
+                      </a:solidFill>
+                      <a:prstDash val="solid"/>
+                      <a:round/>
+                      <a:headEnd type="none" w="med" len="med"/>
+                      <a:tailEnd type="none" w="med" len="med"/>
+                    </a:lnB>
+                    <a:solidFill>
+                      <a:srgbClr val="1E2226"/>
+                    </a:solidFill>
+                  </a:tcPr>
+                </a:tc>
+                <a:tc>
+                  <a:txBody>
+                    <a:bodyPr/>
+                    <a:lstStyle/>
+                    <a:p>
+                      <a:pPr indent="0" marL="0">
+                        <a:buNone/>
+                      </a:pPr>
+                      <a:r>
+                        <a:rPr lang="en-US" sz="1500" b="1" dirty="0">
+                          <a:solidFill>
+                            <a:srgbClr val="FFFFFF"/>
+                          </a:solidFill>
+                          <a:latin typeface="Calibri" pitchFamily="34" charset="0"/>
+                          <a:ea typeface="Calibri" pitchFamily="34" charset="-122"/>
+                          <a:cs typeface="Calibri" pitchFamily="34" charset="-120"/>
+                        </a:rPr>
+                        <a:t>Tight</a:t>
+                      </a:r>
+                      <a:endParaRPr lang="en-US" sz="1500" dirty="0">
+                        <a:latin typeface="Calibri" charset="0"/>
+                        <a:ea typeface="Calibri" charset="0"/>
+                        <a:cs typeface="Calibri" charset="0"/>
+                      </a:endParaRPr>
+                    </a:p>
+                  </a:txBody>
+                  <a:tcPr marL="109728" marR="109728" marT="45720" marB="45720" anchor="ctr">
+                    <a:lnL w="9525" cap="flat" cmpd="sng" algn="ctr">
+                      <a:solidFill>
+                        <a:srgbClr val="D9D4CF"/>
+                      </a:solidFill>
+                      <a:prstDash val="solid"/>
+                      <a:round/>
+                      <a:headEnd type="none" w="med" len="med"/>
+                      <a:tailEnd type="none" w="med" len="med"/>
+                    </a:lnL>
+                    <a:lnR w="9525" cap="flat" cmpd="sng" algn="ctr">
+                      <a:solidFill>
+                        <a:srgbClr val="D9D4CF"/>
+                      </a:solidFill>
+                      <a:prstDash val="solid"/>
+                      <a:round/>
+                      <a:headEnd type="none" w="med" len="med"/>
+                      <a:tailEnd type="none" w="med" len="med"/>
+                    </a:lnR>
+                    <a:lnT w="9525" cap="flat" cmpd="sng" algn="ctr">
+                      <a:solidFill>
+                        <a:srgbClr val="D9D4CF"/>
+                      </a:solidFill>
+                      <a:prstDash val="solid"/>
+                      <a:round/>
+                      <a:headEnd type="none" w="med" len="med"/>
+                      <a:tailEnd type="none" w="med" len="med"/>
+                    </a:lnT>
+                    <a:lnB w="9525" cap="flat" cmpd="sng" algn="ctr">
+                      <a:solidFill>
+                        <a:srgbClr val="D9D4CF"/>
+                      </a:solidFill>
+                      <a:prstDash val="solid"/>
+                      <a:round/>
+                      <a:headEnd type="none" w="med" len="med"/>
+                      <a:tailEnd type="none" w="med" len="med"/>
+                    </a:lnB>
+                    <a:solidFill>
+                      <a:srgbClr val="1E2226"/>
+                    </a:solidFill>
+                  </a:tcPr>
+                </a:tc>
+                <a:tc>
+                  <a:txBody>
+                    <a:bodyPr/>
+                    <a:lstStyle/>
+                    <a:p>
+                      <a:pPr indent="0" marL="0">
+                        <a:buNone/>
+                      </a:pPr>
+                      <a:r>
+                        <a:rPr lang="en-US" sz="1500" b="1" dirty="0">
+                          <a:solidFill>
+                            <a:srgbClr val="FFFFFF"/>
+                          </a:solidFill>
+                          <a:latin typeface="Calibri" pitchFamily="34" charset="0"/>
+                          <a:ea typeface="Calibri" pitchFamily="34" charset="-122"/>
+                          <a:cs typeface="Calibri" pitchFamily="34" charset="-120"/>
+                        </a:rPr>
+                        <a:t>Vote</a:t>
+                      </a:r>
+                      <a:endParaRPr lang="en-US" sz="1500" dirty="0">
+                        <a:latin typeface="Calibri" charset="0"/>
+                        <a:ea typeface="Calibri" charset="0"/>
+                        <a:cs typeface="Calibri" charset="0"/>
+                      </a:endParaRPr>
+                    </a:p>
+                  </a:txBody>
+                  <a:tcPr marL="109728" marR="109728" marT="45720" marB="45720" anchor="ctr">
+                    <a:lnL w="9525" cap="flat" cmpd="sng" algn="ctr">
+                      <a:solidFill>
+                        <a:srgbClr val="D9D4CF"/>
+                      </a:solidFill>
+                      <a:prstDash val="solid"/>
+                      <a:round/>
+                      <a:headEnd type="none" w="med" len="med"/>
+                      <a:tailEnd type="none" w="med" len="med"/>
+                    </a:lnL>
+                    <a:lnR w="9525" cap="flat" cmpd="sng" algn="ctr">
+                      <a:solidFill>
+                        <a:srgbClr val="D9D4CF"/>
+                      </a:solidFill>
+                      <a:prstDash val="solid"/>
+                      <a:round/>
+                      <a:headEnd type="none" w="med" len="med"/>
+                      <a:tailEnd type="none" w="med" len="med"/>
+                    </a:lnR>
+                    <a:lnT w="9525" cap="flat" cmpd="sng" algn="ctr">
+                      <a:solidFill>
+                        <a:srgbClr val="D9D4CF"/>
+                      </a:solidFill>
+                      <a:prstDash val="solid"/>
+                      <a:round/>
+                      <a:headEnd type="none" w="med" len="med"/>
+                      <a:tailEnd type="none" w="med" len="med"/>
+                    </a:lnT>
+                    <a:lnB w="9525" cap="flat" cmpd="sng" algn="ctr">
+                      <a:solidFill>
+                        <a:srgbClr val="D9D4CF"/>
+                      </a:solidFill>
+                      <a:prstDash val="solid"/>
+                      <a:round/>
+                      <a:headEnd type="none" w="med" len="med"/>
+                      <a:tailEnd type="none" w="med" len="med"/>
+                    </a:lnB>
+                    <a:solidFill>
+                      <a:srgbClr val="1E2226"/>
+                    </a:solidFill>
+                  </a:tcPr>
+                </a:tc>
+              </a:tr>
+              <a:tr h="457200">
+                <a:tc>
+                  <a:txBody>
+                    <a:bodyPr/>
+                    <a:lstStyle/>
+                    <a:p>
+                      <a:pPr indent="0" marL="0">
+                        <a:buNone/>
+                      </a:pPr>
+                      <a:r>
+                        <a:rPr lang="en-US" sz="1500" dirty="0">
+                          <a:solidFill>
+                            <a:srgbClr val="1E2226"/>
+                          </a:solidFill>
+                          <a:latin typeface="Calibri" pitchFamily="34" charset="0"/>
+                          <a:ea typeface="Calibri" pitchFamily="34" charset="-122"/>
+                          <a:cs typeface="Calibri" pitchFamily="34" charset="-120"/>
+                        </a:rPr>
+                        <a:t>Azurite</a:t>
+                      </a:r>
+                      <a:endParaRPr lang="en-US" sz="1500" dirty="0">
+                        <a:latin typeface="Calibri" charset="0"/>
+                        <a:ea typeface="Calibri" charset="0"/>
+                        <a:cs typeface="Calibri" charset="0"/>
+                      </a:endParaRPr>
+                    </a:p>
+                  </a:txBody>
+                  <a:tcPr marL="109728" marR="109728" marT="45720" marB="45720" anchor="ctr">
+                    <a:lnL w="9525" cap="flat" cmpd="sng" algn="ctr">
+                      <a:solidFill>
+                        <a:srgbClr val="D9D4CF"/>
+                      </a:solidFill>
+                      <a:prstDash val="solid"/>
+                      <a:round/>
+                      <a:headEnd type="none" w="med" len="med"/>
+                      <a:tailEnd type="none" w="med" len="med"/>
+                    </a:lnL>
+                    <a:lnR w="9525" cap="flat" cmpd="sng" algn="ctr">
+                      <a:solidFill>
+                        <a:srgbClr val="D9D4CF"/>
+                      </a:solidFill>
+                      <a:prstDash val="solid"/>
+                      <a:round/>
+                      <a:headEnd type="none" w="med" len="med"/>
+                      <a:tailEnd type="none" w="med" len="med"/>
+                    </a:lnR>
+                    <a:lnT w="9525" cap="flat" cmpd="sng" algn="ctr">
+                      <a:solidFill>
+                        <a:srgbClr val="D9D4CF"/>
+                      </a:solidFill>
+                      <a:prstDash val="solid"/>
+                      <a:round/>
+                      <a:headEnd type="none" w="med" len="med"/>
+                      <a:tailEnd type="none" w="med" len="med"/>
+                    </a:lnT>
+                    <a:lnB w="9525" cap="flat" cmpd="sng" algn="ctr">
+                      <a:solidFill>
+                        <a:srgbClr val="D9D4CF"/>
+                      </a:solidFill>
+                      <a:prstDash val="solid"/>
+                      <a:round/>
+                      <a:headEnd type="none" w="med" len="med"/>
+                      <a:tailEnd type="none" w="med" len="med"/>
+                    </a:lnB>
+                  </a:tcPr>
+                </a:tc>
+                <a:tc>
+                  <a:txBody>
+                    <a:bodyPr/>
+                    <a:lstStyle/>
+                    <a:p>
+                      <a:pPr indent="0" marL="0">
+                        <a:buNone/>
+                      </a:pPr>
+                      <a:r>
+                        <a:rPr lang="en-US" sz="1500" dirty="0">
+                          <a:solidFill>
+                            <a:srgbClr val="1E2226"/>
+                          </a:solidFill>
+                          <a:latin typeface="Calibri" pitchFamily="34" charset="0"/>
+                          <a:ea typeface="Calibri" pitchFamily="34" charset="-122"/>
+                          <a:cs typeface="Calibri" pitchFamily="34" charset="-120"/>
+                        </a:rPr>
+                        <a:t>10%</a:t>
+                      </a:r>
+                      <a:endParaRPr lang="en-US" sz="1500" dirty="0">
+                        <a:latin typeface="Calibri" charset="0"/>
+                        <a:ea typeface="Calibri" charset="0"/>
+                        <a:cs typeface="Calibri" charset="0"/>
+                      </a:endParaRPr>
+                    </a:p>
+                  </a:txBody>
+                  <a:tcPr marL="109728" marR="109728" marT="45720" marB="45720" anchor="ctr">
+                    <a:lnL w="9525" cap="flat" cmpd="sng" algn="ctr">
+                      <a:solidFill>
+                        <a:srgbClr val="D9D4CF"/>
+                      </a:solidFill>
+                      <a:prstDash val="solid"/>
+                      <a:round/>
+                      <a:headEnd type="none" w="med" len="med"/>
+                      <a:tailEnd type="none" w="med" len="med"/>
+                    </a:lnL>
+                    <a:lnR w="9525" cap="flat" cmpd="sng" algn="ctr">
+                      <a:solidFill>
+                        <a:srgbClr val="D9D4CF"/>
+                      </a:solidFill>
+                      <a:prstDash val="solid"/>
+                      <a:round/>
+                      <a:headEnd type="none" w="med" len="med"/>
+                      <a:tailEnd type="none" w="med" len="med"/>
+                    </a:lnR>
+                    <a:lnT w="9525" cap="flat" cmpd="sng" algn="ctr">
+                      <a:solidFill>
+                        <a:srgbClr val="D9D4CF"/>
+                      </a:solidFill>
+                      <a:prstDash val="solid"/>
+                      <a:round/>
+                      <a:headEnd type="none" w="med" len="med"/>
+                      <a:tailEnd type="none" w="med" len="med"/>
+                    </a:lnT>
+                    <a:lnB w="9525" cap="flat" cmpd="sng" algn="ctr">
+                      <a:solidFill>
+                        <a:srgbClr val="D9D4CF"/>
+                      </a:solidFill>
+                      <a:prstDash val="solid"/>
+                      <a:round/>
+                      <a:headEnd type="none" w="med" len="med"/>
+                      <a:tailEnd type="none" w="med" len="med"/>
+                    </a:lnB>
+                  </a:tcPr>
+                </a:tc>
+                <a:tc>
+                  <a:txBody>
+                    <a:bodyPr/>
+                    <a:lstStyle/>
+                    <a:p>
+                      <a:pPr indent="0" marL="0">
+                        <a:buNone/>
+                      </a:pPr>
+                      <a:r>
+                        <a:rPr lang="en-US" sz="1500" dirty="0">
+                          <a:solidFill>
+                            <a:srgbClr val="C4501F"/>
+                          </a:solidFill>
+                          <a:latin typeface="Calibri" pitchFamily="34" charset="0"/>
+                          <a:ea typeface="Calibri" pitchFamily="34" charset="-122"/>
+                          <a:cs typeface="Calibri" pitchFamily="34" charset="-120"/>
+                        </a:rPr>
+                        <a:t>37%</a:t>
+                      </a:r>
+                      <a:endParaRPr lang="en-US" sz="1500" dirty="0">
+                        <a:latin typeface="Calibri" charset="0"/>
+                        <a:ea typeface="Calibri" charset="0"/>
+                        <a:cs typeface="Calibri" charset="0"/>
+                      </a:endParaRPr>
+                    </a:p>
+                  </a:txBody>
+                  <a:tcPr marL="109728" marR="109728" marT="45720" marB="45720" anchor="ctr">
+                    <a:lnL w="9525" cap="flat" cmpd="sng" algn="ctr">
+                      <a:solidFill>
+                        <a:srgbClr val="D9D4CF"/>
+                      </a:solidFill>
+                      <a:prstDash val="solid"/>
+                      <a:round/>
+                      <a:headEnd type="none" w="med" len="med"/>
+                      <a:tailEnd type="none" w="med" len="med"/>
+                    </a:lnL>
+                    <a:lnR w="9525" cap="flat" cmpd="sng" algn="ctr">
+                      <a:solidFill>
+                        <a:srgbClr val="D9D4CF"/>
+                      </a:solidFill>
+                      <a:prstDash val="solid"/>
+                      <a:round/>
+                      <a:headEnd type="none" w="med" len="med"/>
+                      <a:tailEnd type="none" w="med" len="med"/>
+                    </a:lnR>
+                    <a:lnT w="9525" cap="flat" cmpd="sng" algn="ctr">
+                      <a:solidFill>
+                        <a:srgbClr val="D9D4CF"/>
+                      </a:solidFill>
+                      <a:prstDash val="solid"/>
+                      <a:round/>
+                      <a:headEnd type="none" w="med" len="med"/>
+                      <a:tailEnd type="none" w="med" len="med"/>
+                    </a:lnT>
+                    <a:lnB w="9525" cap="flat" cmpd="sng" algn="ctr">
+                      <a:solidFill>
+                        <a:srgbClr val="D9D4CF"/>
+                      </a:solidFill>
+                      <a:prstDash val="solid"/>
+                      <a:round/>
+                      <a:headEnd type="none" w="med" len="med"/>
+                      <a:tailEnd type="none" w="med" len="med"/>
+                    </a:lnB>
+                  </a:tcPr>
+                </a:tc>
+              </a:tr>
+              <a:tr h="457200">
+                <a:tc>
+                  <a:txBody>
+                    <a:bodyPr/>
+                    <a:lstStyle/>
+                    <a:p>
+                      <a:pPr indent="0" marL="0">
+                        <a:buNone/>
+                      </a:pPr>
+                      <a:r>
+                        <a:rPr lang="en-US" sz="1500" dirty="0">
+                          <a:solidFill>
+                            <a:srgbClr val="1E2226"/>
+                          </a:solidFill>
+                          <a:latin typeface="Calibri" pitchFamily="34" charset="0"/>
+                          <a:ea typeface="Calibri" pitchFamily="34" charset="-122"/>
+                          <a:cs typeface="Calibri" pitchFamily="34" charset="-120"/>
+                        </a:rPr>
+                        <a:t>Malachite</a:t>
+                      </a:r>
+                      <a:endParaRPr lang="en-US" sz="1500" dirty="0">
+                        <a:latin typeface="Calibri" charset="0"/>
+                        <a:ea typeface="Calibri" charset="0"/>
+                        <a:cs typeface="Calibri" charset="0"/>
+                      </a:endParaRPr>
+                    </a:p>
+                  </a:txBody>
+                  <a:tcPr marL="109728" marR="109728" marT="45720" marB="45720" anchor="ctr">
+                    <a:lnL w="9525" cap="flat" cmpd="sng" algn="ctr">
+                      <a:solidFill>
+                        <a:srgbClr val="D9D4CF"/>
+                      </a:solidFill>
+                      <a:prstDash val="solid"/>
+                      <a:round/>
+                      <a:headEnd type="none" w="med" len="med"/>
+                      <a:tailEnd type="none" w="med" len="med"/>
+                    </a:lnL>
+                    <a:lnR w="9525" cap="flat" cmpd="sng" algn="ctr">
+                      <a:solidFill>
+                        <a:srgbClr val="D9D4CF"/>
+                      </a:solidFill>
+                      <a:prstDash val="solid"/>
+                      <a:round/>
+                      <a:headEnd type="none" w="med" len="med"/>
+                      <a:tailEnd type="none" w="med" len="med"/>
+                    </a:lnR>
+                    <a:lnT w="9525" cap="flat" cmpd="sng" algn="ctr">
+                      <a:solidFill>
+                        <a:srgbClr val="D9D4CF"/>
+                      </a:solidFill>
+                      <a:prstDash val="solid"/>
+                      <a:round/>
+                      <a:headEnd type="none" w="med" len="med"/>
+                      <a:tailEnd type="none" w="med" len="med"/>
+                    </a:lnT>
+                    <a:lnB w="9525" cap="flat" cmpd="sng" algn="ctr">
+                      <a:solidFill>
+                        <a:srgbClr val="D9D4CF"/>
+                      </a:solidFill>
+                      <a:prstDash val="solid"/>
+                      <a:round/>
+                      <a:headEnd type="none" w="med" len="med"/>
+                      <a:tailEnd type="none" w="med" len="med"/>
+                    </a:lnB>
+                  </a:tcPr>
+                </a:tc>
+                <a:tc>
+                  <a:txBody>
+                    <a:bodyPr/>
+                    <a:lstStyle/>
+                    <a:p>
+                      <a:pPr indent="0" marL="0">
+                        <a:buNone/>
+                      </a:pPr>
+                      <a:r>
+                        <a:rPr lang="en-US" sz="1500" dirty="0">
+                          <a:solidFill>
+                            <a:srgbClr val="1E2226"/>
+                          </a:solidFill>
+                          <a:latin typeface="Calibri" pitchFamily="34" charset="0"/>
+                          <a:ea typeface="Calibri" pitchFamily="34" charset="-122"/>
+                          <a:cs typeface="Calibri" pitchFamily="34" charset="-120"/>
+                        </a:rPr>
+                        <a:t>7%</a:t>
+                      </a:r>
+                      <a:endParaRPr lang="en-US" sz="1500" dirty="0">
+                        <a:latin typeface="Calibri" charset="0"/>
+                        <a:ea typeface="Calibri" charset="0"/>
+                        <a:cs typeface="Calibri" charset="0"/>
+                      </a:endParaRPr>
+                    </a:p>
+                  </a:txBody>
+                  <a:tcPr marL="109728" marR="109728" marT="45720" marB="45720" anchor="ctr">
+                    <a:lnL w="9525" cap="flat" cmpd="sng" algn="ctr">
+                      <a:solidFill>
+                        <a:srgbClr val="D9D4CF"/>
+                      </a:solidFill>
+                      <a:prstDash val="solid"/>
+                      <a:round/>
+                      <a:headEnd type="none" w="med" len="med"/>
+                      <a:tailEnd type="none" w="med" len="med"/>
+                    </a:lnL>
+                    <a:lnR w="9525" cap="flat" cmpd="sng" algn="ctr">
+                      <a:solidFill>
+                        <a:srgbClr val="D9D4CF"/>
+                      </a:solidFill>
+                      <a:prstDash val="solid"/>
+                      <a:round/>
+                      <a:headEnd type="none" w="med" len="med"/>
+                      <a:tailEnd type="none" w="med" len="med"/>
+                    </a:lnR>
+                    <a:lnT w="9525" cap="flat" cmpd="sng" algn="ctr">
+                      <a:solidFill>
+                        <a:srgbClr val="D9D4CF"/>
+                      </a:solidFill>
+                      <a:prstDash val="solid"/>
+                      <a:round/>
+                      <a:headEnd type="none" w="med" len="med"/>
+                      <a:tailEnd type="none" w="med" len="med"/>
+                    </a:lnT>
+                    <a:lnB w="9525" cap="flat" cmpd="sng" algn="ctr">
+                      <a:solidFill>
+                        <a:srgbClr val="D9D4CF"/>
+                      </a:solidFill>
+                      <a:prstDash val="solid"/>
+                      <a:round/>
+                      <a:headEnd type="none" w="med" len="med"/>
+                      <a:tailEnd type="none" w="med" len="med"/>
+                    </a:lnB>
+                  </a:tcPr>
+                </a:tc>
+                <a:tc>
+                  <a:txBody>
+                    <a:bodyPr/>
+                    <a:lstStyle/>
+                    <a:p>
+                      <a:pPr indent="0" marL="0">
+                        <a:buNone/>
+                      </a:pPr>
+                      <a:r>
+                        <a:rPr lang="en-US" sz="1500" dirty="0">
+                          <a:solidFill>
+                            <a:srgbClr val="C4501F"/>
+                          </a:solidFill>
+                          <a:latin typeface="Calibri" pitchFamily="34" charset="0"/>
+                          <a:ea typeface="Calibri" pitchFamily="34" charset="-122"/>
+                          <a:cs typeface="Calibri" pitchFamily="34" charset="-120"/>
+                        </a:rPr>
+                        <a:t>80%</a:t>
+                      </a:r>
+                      <a:endParaRPr lang="en-US" sz="1500" dirty="0">
+                        <a:latin typeface="Calibri" charset="0"/>
+                        <a:ea typeface="Calibri" charset="0"/>
+                        <a:cs typeface="Calibri" charset="0"/>
+                      </a:endParaRPr>
+                    </a:p>
+                  </a:txBody>
+                  <a:tcPr marL="109728" marR="109728" marT="45720" marB="45720" anchor="ctr">
+                    <a:lnL w="9525" cap="flat" cmpd="sng" algn="ctr">
+                      <a:solidFill>
+                        <a:srgbClr val="D9D4CF"/>
+                      </a:solidFill>
+                      <a:prstDash val="solid"/>
+                      <a:round/>
+                      <a:headEnd type="none" w="med" len="med"/>
+                      <a:tailEnd type="none" w="med" len="med"/>
+                    </a:lnL>
+                    <a:lnR w="9525" cap="flat" cmpd="sng" algn="ctr">
+                      <a:solidFill>
+                        <a:srgbClr val="D9D4CF"/>
+                      </a:solidFill>
+                      <a:prstDash val="solid"/>
+                      <a:round/>
+                      <a:headEnd type="none" w="med" len="med"/>
+                      <a:tailEnd type="none" w="med" len="med"/>
+                    </a:lnR>
+                    <a:lnT w="9525" cap="flat" cmpd="sng" algn="ctr">
+                      <a:solidFill>
+                        <a:srgbClr val="D9D4CF"/>
+                      </a:solidFill>
+                      <a:prstDash val="solid"/>
+                      <a:round/>
+                      <a:headEnd type="none" w="med" len="med"/>
+                      <a:tailEnd type="none" w="med" len="med"/>
+                    </a:lnT>
+                    <a:lnB w="9525" cap="flat" cmpd="sng" algn="ctr">
+                      <a:solidFill>
+                        <a:srgbClr val="D9D4CF"/>
+                      </a:solidFill>
+                      <a:prstDash val="solid"/>
+                      <a:round/>
+                      <a:headEnd type="none" w="med" len="med"/>
+                      <a:tailEnd type="none" w="med" len="med"/>
+                    </a:lnB>
+                  </a:tcPr>
+                </a:tc>
+              </a:tr>
+              <a:tr h="457200">
+                <a:tc>
+                  <a:txBody>
+                    <a:bodyPr/>
+                    <a:lstStyle/>
+                    <a:p>
+                      <a:pPr indent="0" marL="0">
+                        <a:buNone/>
+                      </a:pPr>
+                      <a:r>
+                        <a:rPr lang="en-US" sz="1500" dirty="0">
+                          <a:solidFill>
+                            <a:srgbClr val="1E2226"/>
+                          </a:solidFill>
+                          <a:latin typeface="Calibri" pitchFamily="34" charset="0"/>
+                          <a:ea typeface="Calibri" pitchFamily="34" charset="-122"/>
+                          <a:cs typeface="Calibri" pitchFamily="34" charset="-120"/>
+                        </a:rPr>
+                        <a:t>Vanadinite</a:t>
+                      </a:r>
+                      <a:endParaRPr lang="en-US" sz="1500" dirty="0">
+                        <a:latin typeface="Calibri" charset="0"/>
+                        <a:ea typeface="Calibri" charset="0"/>
+                        <a:cs typeface="Calibri" charset="0"/>
+                      </a:endParaRPr>
+                    </a:p>
+                  </a:txBody>
+                  <a:tcPr marL="109728" marR="109728" marT="45720" marB="45720" anchor="ctr">
+                    <a:lnL w="9525" cap="flat" cmpd="sng" algn="ctr">
+                      <a:solidFill>
+                        <a:srgbClr val="D9D4CF"/>
+                      </a:solidFill>
+                      <a:prstDash val="solid"/>
+                      <a:round/>
+                      <a:headEnd type="none" w="med" len="med"/>
+                      <a:tailEnd type="none" w="med" len="med"/>
+                    </a:lnL>
+                    <a:lnR w="9525" cap="flat" cmpd="sng" algn="ctr">
+                      <a:solidFill>
+                        <a:srgbClr val="D9D4CF"/>
+                      </a:solidFill>
+                      <a:prstDash val="solid"/>
+                      <a:round/>
+                      <a:headEnd type="none" w="med" len="med"/>
+                      <a:tailEnd type="none" w="med" len="med"/>
+                    </a:lnR>
+                    <a:lnT w="9525" cap="flat" cmpd="sng" algn="ctr">
+                      <a:solidFill>
+                        <a:srgbClr val="D9D4CF"/>
+                      </a:solidFill>
+                      <a:prstDash val="solid"/>
+                      <a:round/>
+                      <a:headEnd type="none" w="med" len="med"/>
+                      <a:tailEnd type="none" w="med" len="med"/>
+                    </a:lnT>
+                    <a:lnB w="9525" cap="flat" cmpd="sng" algn="ctr">
+                      <a:solidFill>
+                        <a:srgbClr val="D9D4CF"/>
+                      </a:solidFill>
+                      <a:prstDash val="solid"/>
+                      <a:round/>
+                      <a:headEnd type="none" w="med" len="med"/>
+                      <a:tailEnd type="none" w="med" len="med"/>
+                    </a:lnB>
+                  </a:tcPr>
+                </a:tc>
+                <a:tc>
+                  <a:txBody>
+                    <a:bodyPr/>
+                    <a:lstStyle/>
+                    <a:p>
+                      <a:pPr indent="0" marL="0">
+                        <a:buNone/>
+                      </a:pPr>
+                      <a:r>
+                        <a:rPr lang="en-US" sz="1500" dirty="0">
+                          <a:solidFill>
+                            <a:srgbClr val="1E2226"/>
+                          </a:solidFill>
+                          <a:latin typeface="Calibri" pitchFamily="34" charset="0"/>
+                          <a:ea typeface="Calibri" pitchFamily="34" charset="-122"/>
+                          <a:cs typeface="Calibri" pitchFamily="34" charset="-120"/>
+                        </a:rPr>
+                        <a:t>17%</a:t>
+                      </a:r>
+                      <a:endParaRPr lang="en-US" sz="1500" dirty="0">
+                        <a:latin typeface="Calibri" charset="0"/>
+                        <a:ea typeface="Calibri" charset="0"/>
+                        <a:cs typeface="Calibri" charset="0"/>
+                      </a:endParaRPr>
+                    </a:p>
+                  </a:txBody>
+                  <a:tcPr marL="109728" marR="109728" marT="45720" marB="45720" anchor="ctr">
+                    <a:lnL w="9525" cap="flat" cmpd="sng" algn="ctr">
+                      <a:solidFill>
+                        <a:srgbClr val="D9D4CF"/>
+                      </a:solidFill>
+                      <a:prstDash val="solid"/>
+                      <a:round/>
+                      <a:headEnd type="none" w="med" len="med"/>
+                      <a:tailEnd type="none" w="med" len="med"/>
+                    </a:lnL>
+                    <a:lnR w="9525" cap="flat" cmpd="sng" algn="ctr">
+                      <a:solidFill>
+                        <a:srgbClr val="D9D4CF"/>
+                      </a:solidFill>
+                      <a:prstDash val="solid"/>
+                      <a:round/>
+                      <a:headEnd type="none" w="med" len="med"/>
+                      <a:tailEnd type="none" w="med" len="med"/>
+                    </a:lnR>
+                    <a:lnT w="9525" cap="flat" cmpd="sng" algn="ctr">
+                      <a:solidFill>
+                        <a:srgbClr val="D9D4CF"/>
+                      </a:solidFill>
+                      <a:prstDash val="solid"/>
+                      <a:round/>
+                      <a:headEnd type="none" w="med" len="med"/>
+                      <a:tailEnd type="none" w="med" len="med"/>
+                    </a:lnT>
+                    <a:lnB w="9525" cap="flat" cmpd="sng" algn="ctr">
+                      <a:solidFill>
+                        <a:srgbClr val="D9D4CF"/>
+                      </a:solidFill>
+                      <a:prstDash val="solid"/>
+                      <a:round/>
+                      <a:headEnd type="none" w="med" len="med"/>
+                      <a:tailEnd type="none" w="med" len="med"/>
+                    </a:lnB>
+                  </a:tcPr>
+                </a:tc>
+                <a:tc>
+                  <a:txBody>
+                    <a:bodyPr/>
+                    <a:lstStyle/>
+                    <a:p>
+                      <a:pPr indent="0" marL="0">
+                        <a:buNone/>
+                      </a:pPr>
+                      <a:r>
+                        <a:rPr lang="en-US" sz="1500" dirty="0">
+                          <a:solidFill>
+                            <a:srgbClr val="C4501F"/>
+                          </a:solidFill>
+                          <a:latin typeface="Calibri" pitchFamily="34" charset="0"/>
+                          <a:ea typeface="Calibri" pitchFamily="34" charset="-122"/>
+                          <a:cs typeface="Calibri" pitchFamily="34" charset="-120"/>
+                        </a:rPr>
+                        <a:t>93%</a:t>
+                      </a:r>
+                      <a:endParaRPr lang="en-US" sz="1500" dirty="0">
+                        <a:latin typeface="Calibri" charset="0"/>
+                        <a:ea typeface="Calibri" charset="0"/>
+                        <a:cs typeface="Calibri" charset="0"/>
+                      </a:endParaRPr>
+                    </a:p>
+                  </a:txBody>
+                  <a:tcPr marL="109728" marR="109728" marT="45720" marB="45720" anchor="ctr">
+                    <a:lnL w="9525" cap="flat" cmpd="sng" algn="ctr">
+                      <a:solidFill>
+                        <a:srgbClr val="D9D4CF"/>
+                      </a:solidFill>
+                      <a:prstDash val="solid"/>
+                      <a:round/>
+                      <a:headEnd type="none" w="med" len="med"/>
+                      <a:tailEnd type="none" w="med" len="med"/>
+                    </a:lnL>
+                    <a:lnR w="9525" cap="flat" cmpd="sng" algn="ctr">
+                      <a:solidFill>
+                        <a:srgbClr val="D9D4CF"/>
+                      </a:solidFill>
+                      <a:prstDash val="solid"/>
+                      <a:round/>
+                      <a:headEnd type="none" w="med" len="med"/>
+                      <a:tailEnd type="none" w="med" len="med"/>
+                    </a:lnR>
+                    <a:lnT w="9525" cap="flat" cmpd="sng" algn="ctr">
+                      <a:solidFill>
+                        <a:srgbClr val="D9D4CF"/>
+                      </a:solidFill>
+                      <a:prstDash val="solid"/>
+                      <a:round/>
+                      <a:headEnd type="none" w="med" len="med"/>
+                      <a:tailEnd type="none" w="med" len="med"/>
+                    </a:lnT>
+                    <a:lnB w="9525" cap="flat" cmpd="sng" algn="ctr">
+                      <a:solidFill>
+                        <a:srgbClr val="D9D4CF"/>
+                      </a:solidFill>
+                      <a:prstDash val="solid"/>
+                      <a:round/>
+                      <a:headEnd type="none" w="med" len="med"/>
+                      <a:tailEnd type="none" w="med" len="med"/>
+                    </a:lnB>
+                  </a:tcPr>
+                </a:tc>
+              </a:tr>
+              <a:tr h="457200">
+                <a:tc>
+                  <a:txBody>
+                    <a:bodyPr/>
+                    <a:lstStyle/>
+                    <a:p>
+                      <a:pPr indent="0" marL="0">
+                        <a:buNone/>
+                      </a:pPr>
+                      <a:r>
+                        <a:rPr lang="en-US" sz="1500" b="1" dirty="0">
+                          <a:solidFill>
+                            <a:srgbClr val="1E2226"/>
+                          </a:solidFill>
+                          <a:latin typeface="Calibri" pitchFamily="34" charset="0"/>
+                          <a:ea typeface="Calibri" pitchFamily="34" charset="-122"/>
+                          <a:cs typeface="Calibri" pitchFamily="34" charset="-120"/>
+                        </a:rPr>
+                        <a:t>All</a:t>
+                      </a:r>
+                      <a:endParaRPr lang="en-US" sz="1500" dirty="0">
+                        <a:latin typeface="Calibri" charset="0"/>
+                        <a:ea typeface="Calibri" charset="0"/>
+                        <a:cs typeface="Calibri" charset="0"/>
+                      </a:endParaRPr>
+                    </a:p>
+                  </a:txBody>
+                  <a:tcPr marL="109728" marR="109728" marT="45720" marB="45720" anchor="ctr">
+                    <a:lnL w="9525" cap="flat" cmpd="sng" algn="ctr">
+                      <a:solidFill>
+                        <a:srgbClr val="D9D4CF"/>
+                      </a:solidFill>
+                      <a:prstDash val="solid"/>
+                      <a:round/>
+                      <a:headEnd type="none" w="med" len="med"/>
+                      <a:tailEnd type="none" w="med" len="med"/>
+                    </a:lnL>
+                    <a:lnR w="9525" cap="flat" cmpd="sng" algn="ctr">
+                      <a:solidFill>
+                        <a:srgbClr val="D9D4CF"/>
+                      </a:solidFill>
+                      <a:prstDash val="solid"/>
+                      <a:round/>
+                      <a:headEnd type="none" w="med" len="med"/>
+                      <a:tailEnd type="none" w="med" len="med"/>
+                    </a:lnR>
+                    <a:lnT w="9525" cap="flat" cmpd="sng" algn="ctr">
+                      <a:solidFill>
+                        <a:srgbClr val="D9D4CF"/>
+                      </a:solidFill>
+                      <a:prstDash val="solid"/>
+                      <a:round/>
+                      <a:headEnd type="none" w="med" len="med"/>
+                      <a:tailEnd type="none" w="med" len="med"/>
+                    </a:lnT>
+                    <a:lnB w="9525" cap="flat" cmpd="sng" algn="ctr">
+                      <a:solidFill>
+                        <a:srgbClr val="D9D4CF"/>
+                      </a:solidFill>
+                      <a:prstDash val="solid"/>
+                      <a:round/>
+                      <a:headEnd type="none" w="med" len="med"/>
+                      <a:tailEnd type="none" w="med" len="med"/>
+                    </a:lnB>
+                  </a:tcPr>
+                </a:tc>
+                <a:tc>
+                  <a:txBody>
+                    <a:bodyPr/>
+                    <a:lstStyle/>
+                    <a:p>
+                      <a:pPr indent="0" marL="0">
+                        <a:buNone/>
+                      </a:pPr>
+                      <a:r>
+                        <a:rPr lang="en-US" sz="1500" b="1" dirty="0">
+                          <a:solidFill>
+                            <a:srgbClr val="1E2226"/>
+                          </a:solidFill>
+                          <a:latin typeface="Calibri" pitchFamily="34" charset="0"/>
+                          <a:ea typeface="Calibri" pitchFamily="34" charset="-122"/>
+                          <a:cs typeface="Calibri" pitchFamily="34" charset="-120"/>
+                        </a:rPr>
+                        <a:t>11%</a:t>
+                      </a:r>
+                      <a:endParaRPr lang="en-US" sz="1500" dirty="0">
+                        <a:latin typeface="Calibri" charset="0"/>
+                        <a:ea typeface="Calibri" charset="0"/>
+                        <a:cs typeface="Calibri" charset="0"/>
+                      </a:endParaRPr>
+                    </a:p>
+                  </a:txBody>
+                  <a:tcPr marL="109728" marR="109728" marT="45720" marB="45720" anchor="ctr">
+                    <a:lnL w="9525" cap="flat" cmpd="sng" algn="ctr">
+                      <a:solidFill>
+                        <a:srgbClr val="D9D4CF"/>
+                      </a:solidFill>
+                      <a:prstDash val="solid"/>
+                      <a:round/>
+                      <a:headEnd type="none" w="med" len="med"/>
+                      <a:tailEnd type="none" w="med" len="med"/>
+                    </a:lnL>
+                    <a:lnR w="9525" cap="flat" cmpd="sng" algn="ctr">
+                      <a:solidFill>
+                        <a:srgbClr val="D9D4CF"/>
+                      </a:solidFill>
+                      <a:prstDash val="solid"/>
+                      <a:round/>
+                      <a:headEnd type="none" w="med" len="med"/>
+                      <a:tailEnd type="none" w="med" len="med"/>
+                    </a:lnR>
+                    <a:lnT w="9525" cap="flat" cmpd="sng" algn="ctr">
+                      <a:solidFill>
+                        <a:srgbClr val="D9D4CF"/>
+                      </a:solidFill>
+                      <a:prstDash val="solid"/>
+                      <a:round/>
+                      <a:headEnd type="none" w="med" len="med"/>
+                      <a:tailEnd type="none" w="med" len="med"/>
+                    </a:lnT>
+                    <a:lnB w="9525" cap="flat" cmpd="sng" algn="ctr">
+                      <a:solidFill>
+                        <a:srgbClr val="D9D4CF"/>
+                      </a:solidFill>
+                      <a:prstDash val="solid"/>
+                      <a:round/>
+                      <a:headEnd type="none" w="med" len="med"/>
+                      <a:tailEnd type="none" w="med" len="med"/>
+                    </a:lnB>
+                  </a:tcPr>
+                </a:tc>
+                <a:tc>
+                  <a:txBody>
+                    <a:bodyPr/>
+                    <a:lstStyle/>
+                    <a:p>
+                      <a:pPr indent="0" marL="0">
+                        <a:buNone/>
+                      </a:pPr>
+                      <a:r>
+                        <a:rPr lang="en-US" sz="1500" b="1" dirty="0">
+                          <a:solidFill>
+                            <a:srgbClr val="C4501F"/>
+                          </a:solidFill>
+                          <a:latin typeface="Calibri" pitchFamily="34" charset="0"/>
+                          <a:ea typeface="Calibri" pitchFamily="34" charset="-122"/>
+                          <a:cs typeface="Calibri" pitchFamily="34" charset="-120"/>
+                        </a:rPr>
+                        <a:t>70%</a:t>
+                      </a:r>
+                      <a:endParaRPr lang="en-US" sz="1500" dirty="0">
+                        <a:latin typeface="Calibri" charset="0"/>
+                        <a:ea typeface="Calibri" charset="0"/>
+                        <a:cs typeface="Calibri" charset="0"/>
+                      </a:endParaRPr>
+                    </a:p>
+                  </a:txBody>
+                  <a:tcPr marL="109728" marR="109728" marT="45720" marB="45720" anchor="ctr">
+                    <a:lnL w="9525" cap="flat" cmpd="sng" algn="ctr">
+                      <a:solidFill>
+                        <a:srgbClr val="D9D4CF"/>
+                      </a:solidFill>
+                      <a:prstDash val="solid"/>
+                      <a:round/>
+                      <a:headEnd type="none" w="med" len="med"/>
+                      <a:tailEnd type="none" w="med" len="med"/>
+                    </a:lnL>
+                    <a:lnR w="9525" cap="flat" cmpd="sng" algn="ctr">
+                      <a:solidFill>
+                        <a:srgbClr val="D9D4CF"/>
+                      </a:solidFill>
+                      <a:prstDash val="solid"/>
+                      <a:round/>
+                      <a:headEnd type="none" w="med" len="med"/>
+                      <a:tailEnd type="none" w="med" len="med"/>
+                    </a:lnR>
+                    <a:lnT w="9525" cap="flat" cmpd="sng" algn="ctr">
+                      <a:solidFill>
+                        <a:srgbClr val="D9D4CF"/>
+                      </a:solidFill>
+                      <a:prstDash val="solid"/>
+                      <a:round/>
+                      <a:headEnd type="none" w="med" len="med"/>
+                      <a:tailEnd type="none" w="med" len="med"/>
+                    </a:lnT>
+                    <a:lnB w="9525" cap="flat" cmpd="sng" algn="ctr">
+                      <a:solidFill>
+                        <a:srgbClr val="D9D4CF"/>
+                      </a:solidFill>
+                      <a:prstDash val="solid"/>
+                      <a:round/>
+                      <a:headEnd type="none" w="med" len="med"/>
+                      <a:tailEnd type="none" w="med" len="med"/>
+                    </a:lnB>
+                  </a:tcPr>
+                </a:tc>
+              </a:tr>
+            </a:tbl>
+          </a:graphicData>
+        </a:graphic>
+      </p:graphicFrame>
+      <p:sp>
+        <p:nvSpPr>
+          <p:cNvPr id="7" name="Text 3"/>
           <p:cNvSpPr txBox="1"/>
           <p:nvPr/>
         </p:nvSpPr>
         <p:spPr>
           <a:xfrm>
-            <a:off x="6355080" y="1947672"/>
-            <a:ext cx="5029200" cy="731520"/>
+            <a:off x="7406640" y="4343400"/>
+            <a:ext cx="4206240" cy="1097280"/>
           </a:xfrm>
           <a:prstGeom prst="rect">
             <a:avLst/>
@@ -9877,212 +11665,14 @@
               <a:buNone/>
             </a:pPr>
             <a:r>
-              <a:rPr lang="en-US" sz="1400" dirty="0">
+              <a:rPr lang="en-US" sz="1300" dirty="0">
                 <a:solidFill>
                   <a:schemeClr val="tx2"/>
                 </a:solidFill>
               </a:rPr>
-              <a:t>The cargo rover's collision mesh (GLB) was parsed and moved into base_link: three containers, 0.26-0.31 m by 0.40 m.</a:t>
-            </a:r>
-            <a:endParaRPr lang="en-US" sz="1400" dirty="0"/>
-          </a:p>
-        </p:txBody>
-      </p:sp>
-      <p:sp>
-        <p:nvSpPr>
-          <p:cNvPr id="7" name="fact-2"/>
-          <p:cNvSpPr/>
-          <p:nvPr/>
-        </p:nvSpPr>
-        <p:spPr>
-          <a:xfrm>
-            <a:off x="6126480" y="2926080"/>
-            <a:ext cx="5486400" cy="1325880"/>
-          </a:xfrm>
-          <a:prstGeom prst="roundRect">
-            <a:avLst>
-              <a:gd name="adj" fmla="val 5517"/>
-            </a:avLst>
-          </a:prstGeom>
-          <a:solidFill>
-            <a:schemeClr val="bg2"/>
-          </a:solidFill>
-          <a:ln w="12700">
-            <a:solidFill>
-              <a:schemeClr val="bg2"/>
-            </a:solidFill>
-            <a:prstDash val="solid"/>
-          </a:ln>
-        </p:spPr>
-      </p:sp>
-      <p:sp>
-        <p:nvSpPr>
-          <p:cNvPr id="8" name="Text 5"/>
-          <p:cNvSpPr txBox="1"/>
-          <p:nvPr/>
-        </p:nvSpPr>
-        <p:spPr>
-          <a:xfrm>
-            <a:off x="6355080" y="3063240"/>
-            <a:ext cx="5029200" cy="365760"/>
-          </a:xfrm>
-          <a:prstGeom prst="rect">
-            <a:avLst/>
-          </a:prstGeom>
-          <a:noFill/>
-          <a:ln/>
-        </p:spPr>
-        <p:txBody>
-          <a:bodyPr wrap="square" lIns="0" tIns="0" rIns="0" bIns="0" rtlCol="0" anchor="t"/>
-          <a:lstStyle/>
-          <a:p>
-            <a:pPr indent="0" marL="0">
-              <a:buNone/>
-            </a:pPr>
-            <a:r>
-              <a:rPr lang="en-US" sz="1800" b="1" dirty="0">
-                <a:solidFill>
-                  <a:schemeClr val="tx1"/>
-                </a:solidFill>
-              </a:rPr>
-              <a:t>Which is which</a:t>
-            </a:r>
-            <a:endParaRPr lang="en-US" sz="1800" dirty="0"/>
-          </a:p>
-        </p:txBody>
-      </p:sp>
-      <p:sp>
-        <p:nvSpPr>
-          <p:cNvPr id="9" name="Text 6"/>
-          <p:cNvSpPr txBox="1"/>
-          <p:nvPr/>
-        </p:nvSpPr>
-        <p:spPr>
-          <a:xfrm>
-            <a:off x="6355080" y="3456432"/>
-            <a:ext cx="5029200" cy="731520"/>
-          </a:xfrm>
-          <a:prstGeom prst="rect">
-            <a:avLst/>
-          </a:prstGeom>
-          <a:noFill/>
-          <a:ln/>
-        </p:spPr>
-        <p:txBody>
-          <a:bodyPr wrap="square" lIns="0" tIns="0" rIns="0" bIns="0" rtlCol="0" anchor="t"/>
-          <a:lstStyle/>
-          <a:p>
-            <a:pPr indent="0" marL="0">
-              <a:buNone/>
-            </a:pPr>
-            <a:r>
-              <a:rPr lang="en-US" sz="1400" dirty="0">
-                <a:solidFill>
-                  <a:schemeClr val="tx2"/>
-                </a:solidFill>
-              </a:rPr>
-              <a:t>Gazebo's default camera looks along +x: vanadinite nearest, malachite middle, azurite farthest.</a:t>
-            </a:r>
-            <a:endParaRPr lang="en-US" sz="1400" dirty="0"/>
-          </a:p>
-        </p:txBody>
-      </p:sp>
-      <p:sp>
-        <p:nvSpPr>
-          <p:cNvPr id="10" name="fact-3"/>
-          <p:cNvSpPr/>
-          <p:nvPr/>
-        </p:nvSpPr>
-        <p:spPr>
-          <a:xfrm>
-            <a:off x="6126480" y="4434840"/>
-            <a:ext cx="5486400" cy="1325880"/>
-          </a:xfrm>
-          <a:prstGeom prst="roundRect">
-            <a:avLst>
-              <a:gd name="adj" fmla="val 5517"/>
-            </a:avLst>
-          </a:prstGeom>
-          <a:solidFill>
-            <a:schemeClr val="bg2"/>
-          </a:solidFill>
-          <a:ln w="12700">
-            <a:solidFill>
-              <a:schemeClr val="bg2"/>
-            </a:solidFill>
-            <a:prstDash val="solid"/>
-          </a:ln>
-        </p:spPr>
-      </p:sp>
-      <p:sp>
-        <p:nvSpPr>
-          <p:cNvPr id="11" name="Text 8"/>
-          <p:cNvSpPr txBox="1"/>
-          <p:nvPr/>
-        </p:nvSpPr>
-        <p:spPr>
-          <a:xfrm>
-            <a:off x="6355080" y="4572000"/>
-            <a:ext cx="5029200" cy="365760"/>
-          </a:xfrm>
-          <a:prstGeom prst="rect">
-            <a:avLst/>
-          </a:prstGeom>
-          <a:noFill/>
-          <a:ln/>
-        </p:spPr>
-        <p:txBody>
-          <a:bodyPr wrap="square" lIns="0" tIns="0" rIns="0" bIns="0" rtlCol="0" anchor="t"/>
-          <a:lstStyle/>
-          <a:p>
-            <a:pPr indent="0" marL="0">
-              <a:buNone/>
-            </a:pPr>
-            <a:r>
-              <a:rPr lang="en-US" sz="1800" b="1" dirty="0">
-                <a:solidFill>
-                  <a:schemeClr val="accent1"/>
-                </a:solidFill>
-              </a:rPr>
-              <a:t>One is out of reach</a:t>
-            </a:r>
-            <a:endParaRPr lang="en-US" sz="1800" dirty="0"/>
-          </a:p>
-        </p:txBody>
-      </p:sp>
-      <p:sp>
-        <p:nvSpPr>
-          <p:cNvPr id="12" name="Text 9"/>
-          <p:cNvSpPr txBox="1"/>
-          <p:nvPr/>
-        </p:nvSpPr>
-        <p:spPr>
-          <a:xfrm>
-            <a:off x="6355080" y="4965192"/>
-            <a:ext cx="5029200" cy="731520"/>
-          </a:xfrm>
-          <a:prstGeom prst="rect">
-            <a:avLst/>
-          </a:prstGeom>
-          <a:noFill/>
-          <a:ln/>
-        </p:spPr>
-        <p:txBody>
-          <a:bodyPr wrap="square" lIns="0" tIns="0" rIns="0" bIns="0" rtlCol="0" anchor="t"/>
-          <a:lstStyle/>
-          <a:p>
-            <a:pPr indent="0" marL="0">
-              <a:buNone/>
-            </a:pPr>
-            <a:r>
-              <a:rPr lang="en-US" sz="1400" dirty="0">
-                <a:solidFill>
-                  <a:schemeClr val="tx2"/>
-                </a:solidFill>
-              </a:rPr>
-              <a:t>The vanadinite centre is 0.93 m from the base. Each ore is released at the nearest point inside its container, 8 cm from the walls.</a:t>
-            </a:r>
-            <a:endParaRPr lang="en-US" sz="1400" dirty="0"/>
+              <a:t>Museum photos from Wikimedia Commons. Limits calibrated on 90, tested on 90 others. Azurite is hardest: very dark, and often crusted with green malachite.</a:t>
+            </a:r>
+            <a:endParaRPr lang="en-US" sz="1300" dirty="0"/>
           </a:p>
         </p:txBody>
       </p:sp>
@@ -10188,34 +11778,58 @@
                   <a:schemeClr val="tx1"/>
                 </a:solidFill>
               </a:rPr>
-              <a:t>Every pick is confirmed by the force sensor</a:t>
+              <a:t>The containers were found by measuring the rover mesh</a:t>
             </a:r>
             <a:endParaRPr lang="en-US" sz="3200" dirty="0"/>
           </a:p>
         </p:txBody>
       </p:sp>
-      <p:sp>
-        <p:nvSpPr>
-          <p:cNvPr id="3" name="pick-step-1"/>
+      <p:pic>
+        <p:nvPicPr>
+          <p:cNvPr id="3" name="workspace-top-view" descr="Top view of the arm workspace with conveyor, crusher, cargo rover containers and drop points">    </p:cNvPr>
+          <p:cNvPicPr>
+            <a:picLocks noChangeAspect="1"/>
+          </p:cNvPicPr>
+          <p:nvPr/>
+        </p:nvPicPr>
+        <p:blipFill>
+          <a:blip r:embed="rId1"/>
+          <a:stretch>
+            <a:fillRect/>
+          </a:stretch>
+        </p:blipFill>
+        <p:spPr>
+          <a:xfrm>
+            <a:off x="548640" y="1280160"/>
+            <a:ext cx="5029200" cy="4690872"/>
+          </a:xfrm>
+          <a:prstGeom prst="rect">
+            <a:avLst/>
+          </a:prstGeom>
+        </p:spPr>
+      </p:pic>
+      <p:sp>
+        <p:nvSpPr>
+          <p:cNvPr id="4" name="fact-1"/>
           <p:cNvSpPr/>
           <p:nvPr/>
         </p:nvSpPr>
         <p:spPr>
           <a:xfrm>
-            <a:off x="548640" y="1737360"/>
-            <a:ext cx="2011680" cy="2103120"/>
+            <a:off x="6126480" y="1417320"/>
+            <a:ext cx="5486400" cy="1325880"/>
           </a:xfrm>
           <a:prstGeom prst="roundRect">
             <a:avLst>
-              <a:gd name="adj" fmla="val 3636"/>
+              <a:gd name="adj" fmla="val 5517"/>
             </a:avLst>
           </a:prstGeom>
           <a:solidFill>
-            <a:srgbClr val="F1ECE8"/>
+            <a:schemeClr val="bg2"/>
           </a:solidFill>
-          <a:ln w="19050">
+          <a:ln w="12700">
             <a:solidFill>
-              <a:srgbClr val="F1ECE8"/>
+              <a:schemeClr val="bg2"/>
             </a:solidFill>
             <a:prstDash val="solid"/>
           </a:ln>
@@ -10223,24 +11837,98 @@
       </p:sp>
       <p:sp>
         <p:nvSpPr>
-          <p:cNvPr id="4" name="pick-dot-1"/>
+          <p:cNvPr id="5" name="Text 2"/>
+          <p:cNvSpPr txBox="1"/>
+          <p:nvPr/>
+        </p:nvSpPr>
+        <p:spPr>
+          <a:xfrm>
+            <a:off x="6355080" y="1554480"/>
+            <a:ext cx="5029200" cy="365760"/>
+          </a:xfrm>
+          <a:prstGeom prst="rect">
+            <a:avLst/>
+          </a:prstGeom>
+          <a:noFill/>
+          <a:ln/>
+        </p:spPr>
+        <p:txBody>
+          <a:bodyPr wrap="square" lIns="0" tIns="0" rIns="0" bIns="0" rtlCol="0" anchor="t"/>
+          <a:lstStyle/>
+          <a:p>
+            <a:pPr indent="0" marL="0">
+              <a:buNone/>
+            </a:pPr>
+            <a:r>
+              <a:rPr lang="en-US" sz="1800" b="1" dirty="0">
+                <a:solidFill>
+                  <a:schemeClr val="tx1"/>
+                </a:solidFill>
+              </a:rPr>
+              <a:t>Not given to us</a:t>
+            </a:r>
+            <a:endParaRPr lang="en-US" sz="1800" dirty="0"/>
+          </a:p>
+        </p:txBody>
+      </p:sp>
+      <p:sp>
+        <p:nvSpPr>
+          <p:cNvPr id="6" name="Text 3"/>
+          <p:cNvSpPr txBox="1"/>
+          <p:nvPr/>
+        </p:nvSpPr>
+        <p:spPr>
+          <a:xfrm>
+            <a:off x="6355080" y="1947672"/>
+            <a:ext cx="5029200" cy="731520"/>
+          </a:xfrm>
+          <a:prstGeom prst="rect">
+            <a:avLst/>
+          </a:prstGeom>
+          <a:noFill/>
+          <a:ln/>
+        </p:spPr>
+        <p:txBody>
+          <a:bodyPr wrap="square" lIns="0" tIns="0" rIns="0" bIns="0" rtlCol="0" anchor="t"/>
+          <a:lstStyle/>
+          <a:p>
+            <a:pPr indent="0" marL="0">
+              <a:buNone/>
+            </a:pPr>
+            <a:r>
+              <a:rPr lang="en-US" sz="1400" dirty="0">
+                <a:solidFill>
+                  <a:schemeClr val="tx2"/>
+                </a:solidFill>
+              </a:rPr>
+              <a:t>The cargo rover's collision mesh (GLB) was parsed and moved into base_link: three containers, 0.26-0.31 m by 0.40 m.</a:t>
+            </a:r>
+            <a:endParaRPr lang="en-US" sz="1400" dirty="0"/>
+          </a:p>
+        </p:txBody>
+      </p:sp>
+      <p:sp>
+        <p:nvSpPr>
+          <p:cNvPr id="7" name="fact-2"/>
           <p:cNvSpPr/>
           <p:nvPr/>
         </p:nvSpPr>
         <p:spPr>
           <a:xfrm>
-            <a:off x="731520" y="1920240"/>
-            <a:ext cx="457200" cy="457200"/>
-          </a:xfrm>
-          <a:prstGeom prst="ellipse">
-            <a:avLst/>
+            <a:off x="6126480" y="2926080"/>
+            <a:ext cx="5486400" cy="1325880"/>
+          </a:xfrm>
+          <a:prstGeom prst="roundRect">
+            <a:avLst>
+              <a:gd name="adj" fmla="val 5517"/>
+            </a:avLst>
           </a:prstGeom>
           <a:solidFill>
-            <a:schemeClr val="accent1"/>
+            <a:schemeClr val="bg2"/>
           </a:solidFill>
           <a:ln w="12700">
             <a:solidFill>
-              <a:schemeClr val="accent1"/>
+              <a:schemeClr val="bg2"/>
             </a:solidFill>
             <a:prstDash val="solid"/>
           </a:ln>
@@ -10248,50 +11936,50 @@
       </p:sp>
       <p:sp>
         <p:nvSpPr>
-          <p:cNvPr id="5" name="Text 3"/>
+          <p:cNvPr id="8" name="Text 5"/>
           <p:cNvSpPr txBox="1"/>
           <p:nvPr/>
         </p:nvSpPr>
         <p:spPr>
           <a:xfrm>
-            <a:off x="731520" y="1920240"/>
-            <a:ext cx="457200" cy="457200"/>
-          </a:xfrm>
-          <a:prstGeom prst="rect">
-            <a:avLst/>
-          </a:prstGeom>
-          <a:noFill/>
-          <a:ln/>
-        </p:spPr>
-        <p:txBody>
-          <a:bodyPr wrap="square" lIns="0" tIns="0" rIns="0" bIns="0" rtlCol="0" anchor="ctr"/>
-          <a:lstStyle/>
-          <a:p>
-            <a:pPr algn="ctr" indent="0" marL="0">
-              <a:buNone/>
-            </a:pPr>
-            <a:r>
-              <a:rPr lang="en-US" sz="1600" b="1" dirty="0">
-                <a:solidFill>
-                  <a:schemeClr val="bg1"/>
-                </a:solidFill>
-              </a:rPr>
-              <a:t>1</a:t>
-            </a:r>
-            <a:endParaRPr lang="en-US" sz="1600" dirty="0"/>
-          </a:p>
-        </p:txBody>
-      </p:sp>
-      <p:sp>
-        <p:nvSpPr>
-          <p:cNvPr id="6" name="Text 4"/>
+            <a:off x="6355080" y="3063240"/>
+            <a:ext cx="5029200" cy="365760"/>
+          </a:xfrm>
+          <a:prstGeom prst="rect">
+            <a:avLst/>
+          </a:prstGeom>
+          <a:noFill/>
+          <a:ln/>
+        </p:spPr>
+        <p:txBody>
+          <a:bodyPr wrap="square" lIns="0" tIns="0" rIns="0" bIns="0" rtlCol="0" anchor="t"/>
+          <a:lstStyle/>
+          <a:p>
+            <a:pPr indent="0" marL="0">
+              <a:buNone/>
+            </a:pPr>
+            <a:r>
+              <a:rPr lang="en-US" sz="1800" b="1" dirty="0">
+                <a:solidFill>
+                  <a:schemeClr val="tx1"/>
+                </a:solidFill>
+              </a:rPr>
+              <a:t>Which is which</a:t>
+            </a:r>
+            <a:endParaRPr lang="en-US" sz="1800" dirty="0"/>
+          </a:p>
+        </p:txBody>
+      </p:sp>
+      <p:sp>
+        <p:nvSpPr>
+          <p:cNvPr id="9" name="Text 6"/>
           <p:cNvSpPr txBox="1"/>
           <p:nvPr/>
         </p:nvSpPr>
         <p:spPr>
           <a:xfrm>
-            <a:off x="731520" y="2514600"/>
-            <a:ext cx="1645920" cy="411480"/>
+            <a:off x="6355080" y="3456432"/>
+            <a:ext cx="5029200" cy="731520"/>
           </a:xfrm>
           <a:prstGeom prst="rect">
             <a:avLst/>
@@ -10307,48 +11995,12 @@
               <a:buNone/>
             </a:pPr>
             <a:r>
-              <a:rPr lang="en-US" sz="1800" b="1" dirty="0">
-                <a:solidFill>
-                  <a:schemeClr val="tx1"/>
-                </a:solidFill>
-              </a:rPr>
-              <a:t>Hover</a:t>
-            </a:r>
-            <a:endParaRPr lang="en-US" sz="1800" dirty="0"/>
-          </a:p>
-        </p:txBody>
-      </p:sp>
-      <p:sp>
-        <p:nvSpPr>
-          <p:cNvPr id="7" name="Text 5"/>
-          <p:cNvSpPr txBox="1"/>
-          <p:nvPr/>
-        </p:nvSpPr>
-        <p:spPr>
-          <a:xfrm>
-            <a:off x="731520" y="2971800"/>
-            <a:ext cx="1645920" cy="822960"/>
-          </a:xfrm>
-          <a:prstGeom prst="rect">
-            <a:avLst/>
-          </a:prstGeom>
-          <a:noFill/>
-          <a:ln/>
-        </p:spPr>
-        <p:txBody>
-          <a:bodyPr wrap="square" lIns="0" tIns="0" rIns="0" bIns="0" rtlCol="0" anchor="t"/>
-          <a:lstStyle/>
-          <a:p>
-            <a:pPr indent="0" marL="0">
-              <a:buNone/>
-            </a:pPr>
-            <a:r>
               <a:rPr lang="en-US" sz="1400" dirty="0">
                 <a:solidFill>
                   <a:schemeClr val="tx2"/>
                 </a:solidFill>
               </a:rPr>
-              <a:t>10 cm above the face, tool vertical</a:t>
+              <a:t>Gazebo's default camera looks along +x: vanadinite nearest, malachite middle, azurite farthest.</a:t>
             </a:r>
             <a:endParaRPr lang="en-US" sz="1400" dirty="0"/>
           </a:p>
@@ -10356,50 +12008,26 @@
       </p:sp>
       <p:sp>
         <p:nvSpPr>
-          <p:cNvPr id="8" name="pick-arrow-1"/>
+          <p:cNvPr id="10" name="fact-3"/>
           <p:cNvSpPr/>
           <p:nvPr/>
         </p:nvSpPr>
         <p:spPr>
           <a:xfrm>
-            <a:off x="2578608" y="2788920"/>
-            <a:ext cx="214884" cy="0"/>
-          </a:xfrm>
-          <a:prstGeom prst="line">
-            <a:avLst/>
-          </a:prstGeom>
-          <a:noFill/>
-          <a:ln w="19050">
-            <a:solidFill>
-              <a:srgbClr val="6B7280"/>
-            </a:solidFill>
-            <a:prstDash val="solid"/>
-            <a:tailEnd type="triangle"/>
-          </a:ln>
-        </p:spPr>
-      </p:sp>
-      <p:sp>
-        <p:nvSpPr>
-          <p:cNvPr id="9" name="pick-step-2"/>
-          <p:cNvSpPr/>
-          <p:nvPr/>
-        </p:nvSpPr>
-        <p:spPr>
-          <a:xfrm>
-            <a:off x="2811780" y="1737360"/>
-            <a:ext cx="2011680" cy="2103120"/>
+            <a:off x="6126480" y="4434840"/>
+            <a:ext cx="5486400" cy="1325880"/>
           </a:xfrm>
           <a:prstGeom prst="roundRect">
             <a:avLst>
-              <a:gd name="adj" fmla="val 3636"/>
+              <a:gd name="adj" fmla="val 5517"/>
             </a:avLst>
           </a:prstGeom>
           <a:solidFill>
-            <a:srgbClr val="F1ECE8"/>
+            <a:schemeClr val="bg2"/>
           </a:solidFill>
-          <a:ln w="19050">
+          <a:ln w="12700">
             <a:solidFill>
-              <a:srgbClr val="F1ECE8"/>
+              <a:schemeClr val="bg2"/>
             </a:solidFill>
             <a:prstDash val="solid"/>
           </a:ln>
@@ -10407,75 +12035,50 @@
       </p:sp>
       <p:sp>
         <p:nvSpPr>
-          <p:cNvPr id="10" name="pick-dot-2"/>
-          <p:cNvSpPr/>
-          <p:nvPr/>
-        </p:nvSpPr>
-        <p:spPr>
-          <a:xfrm>
-            <a:off x="2994660" y="1920240"/>
-            <a:ext cx="457200" cy="457200"/>
-          </a:xfrm>
-          <a:prstGeom prst="ellipse">
-            <a:avLst/>
-          </a:prstGeom>
-          <a:solidFill>
-            <a:schemeClr val="accent1"/>
-          </a:solidFill>
-          <a:ln w="12700">
-            <a:solidFill>
-              <a:schemeClr val="accent1"/>
-            </a:solidFill>
-            <a:prstDash val="solid"/>
-          </a:ln>
-        </p:spPr>
-      </p:sp>
-      <p:sp>
-        <p:nvSpPr>
-          <p:cNvPr id="11" name="Text 9"/>
+          <p:cNvPr id="11" name="Text 8"/>
           <p:cNvSpPr txBox="1"/>
           <p:nvPr/>
         </p:nvSpPr>
         <p:spPr>
           <a:xfrm>
-            <a:off x="2994660" y="1920240"/>
-            <a:ext cx="457200" cy="457200"/>
-          </a:xfrm>
-          <a:prstGeom prst="rect">
-            <a:avLst/>
-          </a:prstGeom>
-          <a:noFill/>
-          <a:ln/>
-        </p:spPr>
-        <p:txBody>
-          <a:bodyPr wrap="square" lIns="0" tIns="0" rIns="0" bIns="0" rtlCol="0" anchor="ctr"/>
-          <a:lstStyle/>
-          <a:p>
-            <a:pPr algn="ctr" indent="0" marL="0">
-              <a:buNone/>
-            </a:pPr>
-            <a:r>
-              <a:rPr lang="en-US" sz="1600" b="1" dirty="0">
-                <a:solidFill>
-                  <a:schemeClr val="bg1"/>
-                </a:solidFill>
-              </a:rPr>
-              <a:t>2</a:t>
-            </a:r>
-            <a:endParaRPr lang="en-US" sz="1600" dirty="0"/>
-          </a:p>
-        </p:txBody>
-      </p:sp>
-      <p:sp>
-        <p:nvSpPr>
-          <p:cNvPr id="12" name="Text 10"/>
+            <a:off x="6355080" y="4572000"/>
+            <a:ext cx="5029200" cy="365760"/>
+          </a:xfrm>
+          <a:prstGeom prst="rect">
+            <a:avLst/>
+          </a:prstGeom>
+          <a:noFill/>
+          <a:ln/>
+        </p:spPr>
+        <p:txBody>
+          <a:bodyPr wrap="square" lIns="0" tIns="0" rIns="0" bIns="0" rtlCol="0" anchor="t"/>
+          <a:lstStyle/>
+          <a:p>
+            <a:pPr indent="0" marL="0">
+              <a:buNone/>
+            </a:pPr>
+            <a:r>
+              <a:rPr lang="en-US" sz="1800" b="1" dirty="0">
+                <a:solidFill>
+                  <a:schemeClr val="accent1"/>
+                </a:solidFill>
+              </a:rPr>
+              <a:t>One is out of reach</a:t>
+            </a:r>
+            <a:endParaRPr lang="en-US" sz="1800" dirty="0"/>
+          </a:p>
+        </p:txBody>
+      </p:sp>
+      <p:sp>
+        <p:nvSpPr>
+          <p:cNvPr id="12" name="Text 9"/>
           <p:cNvSpPr txBox="1"/>
           <p:nvPr/>
         </p:nvSpPr>
         <p:spPr>
           <a:xfrm>
-            <a:off x="2994660" y="2514600"/>
-            <a:ext cx="1645920" cy="411480"/>
+            <a:off x="6355080" y="4965192"/>
+            <a:ext cx="5029200" cy="731520"/>
           </a:xfrm>
           <a:prstGeom prst="rect">
             <a:avLst/>
@@ -10491,816 +12094,12 @@
               <a:buNone/>
             </a:pPr>
             <a:r>
-              <a:rPr lang="en-US" sz="1800" b="1" dirty="0">
-                <a:solidFill>
-                  <a:schemeClr val="tx1"/>
-                </a:solidFill>
-              </a:rPr>
-              <a:t>Align</a:t>
-            </a:r>
-            <a:endParaRPr lang="en-US" sz="1800" dirty="0"/>
-          </a:p>
-        </p:txBody>
-      </p:sp>
-      <p:sp>
-        <p:nvSpPr>
-          <p:cNvPr id="13" name="Text 11"/>
-          <p:cNvSpPr txBox="1"/>
-          <p:nvPr/>
-        </p:nvSpPr>
-        <p:spPr>
-          <a:xfrm>
-            <a:off x="2994660" y="2971800"/>
-            <a:ext cx="1645920" cy="822960"/>
-          </a:xfrm>
-          <a:prstGeom prst="rect">
-            <a:avLst/>
-          </a:prstGeom>
-          <a:noFill/>
-          <a:ln/>
-        </p:spPr>
-        <p:txBody>
-          <a:bodyPr wrap="square" lIns="0" tIns="0" rIns="0" bIns="0" rtlCol="0" anchor="t"/>
-          <a:lstStyle/>
-          <a:p>
-            <a:pPr indent="0" marL="0">
-              <a:buNone/>
-            </a:pPr>
-            <a:r>
               <a:rPr lang="en-US" sz="1400" dirty="0">
                 <a:solidFill>
                   <a:schemeClr val="tx2"/>
                 </a:solidFill>
               </a:rPr>
-              <a:t>close the last mm on /tcp_pose_raw; magnet on</a:t>
-            </a:r>
-            <a:endParaRPr lang="en-US" sz="1400" dirty="0"/>
-          </a:p>
-        </p:txBody>
-      </p:sp>
-      <p:sp>
-        <p:nvSpPr>
-          <p:cNvPr id="14" name="pick-arrow-2"/>
-          <p:cNvSpPr/>
-          <p:nvPr/>
-        </p:nvSpPr>
-        <p:spPr>
-          <a:xfrm>
-            <a:off x="4841748" y="2788920"/>
-            <a:ext cx="214884" cy="0"/>
-          </a:xfrm>
-          <a:prstGeom prst="line">
-            <a:avLst/>
-          </a:prstGeom>
-          <a:noFill/>
-          <a:ln w="19050">
-            <a:solidFill>
-              <a:srgbClr val="6B7280"/>
-            </a:solidFill>
-            <a:prstDash val="solid"/>
-            <a:tailEnd type="triangle"/>
-          </a:ln>
-        </p:spPr>
-      </p:sp>
-      <p:sp>
-        <p:nvSpPr>
-          <p:cNvPr id="15" name="pick-step-3"/>
-          <p:cNvSpPr/>
-          <p:nvPr/>
-        </p:nvSpPr>
-        <p:spPr>
-          <a:xfrm>
-            <a:off x="5074920" y="1737360"/>
-            <a:ext cx="2011680" cy="2103120"/>
-          </a:xfrm>
-          <a:prstGeom prst="roundRect">
-            <a:avLst>
-              <a:gd name="adj" fmla="val 3636"/>
-            </a:avLst>
-          </a:prstGeom>
-          <a:solidFill>
-            <a:srgbClr val="F1ECE8"/>
-          </a:solidFill>
-          <a:ln w="19050">
-            <a:solidFill>
-              <a:srgbClr val="F1ECE8"/>
-            </a:solidFill>
-            <a:prstDash val="solid"/>
-          </a:ln>
-        </p:spPr>
-      </p:sp>
-      <p:sp>
-        <p:nvSpPr>
-          <p:cNvPr id="16" name="pick-dot-3"/>
-          <p:cNvSpPr/>
-          <p:nvPr/>
-        </p:nvSpPr>
-        <p:spPr>
-          <a:xfrm>
-            <a:off x="5257800" y="1920240"/>
-            <a:ext cx="457200" cy="457200"/>
-          </a:xfrm>
-          <a:prstGeom prst="ellipse">
-            <a:avLst/>
-          </a:prstGeom>
-          <a:solidFill>
-            <a:schemeClr val="accent1"/>
-          </a:solidFill>
-          <a:ln w="12700">
-            <a:solidFill>
-              <a:schemeClr val="accent1"/>
-            </a:solidFill>
-            <a:prstDash val="solid"/>
-          </a:ln>
-        </p:spPr>
-      </p:sp>
-      <p:sp>
-        <p:nvSpPr>
-          <p:cNvPr id="17" name="Text 15"/>
-          <p:cNvSpPr txBox="1"/>
-          <p:nvPr/>
-        </p:nvSpPr>
-        <p:spPr>
-          <a:xfrm>
-            <a:off x="5257800" y="1920240"/>
-            <a:ext cx="457200" cy="457200"/>
-          </a:xfrm>
-          <a:prstGeom prst="rect">
-            <a:avLst/>
-          </a:prstGeom>
-          <a:noFill/>
-          <a:ln/>
-        </p:spPr>
-        <p:txBody>
-          <a:bodyPr wrap="square" lIns="0" tIns="0" rIns="0" bIns="0" rtlCol="0" anchor="ctr"/>
-          <a:lstStyle/>
-          <a:p>
-            <a:pPr algn="ctr" indent="0" marL="0">
-              <a:buNone/>
-            </a:pPr>
-            <a:r>
-              <a:rPr lang="en-US" sz="1600" b="1" dirty="0">
-                <a:solidFill>
-                  <a:schemeClr val="bg1"/>
-                </a:solidFill>
-              </a:rPr>
-              <a:t>3</a:t>
-            </a:r>
-            <a:endParaRPr lang="en-US" sz="1600" dirty="0"/>
-          </a:p>
-        </p:txBody>
-      </p:sp>
-      <p:sp>
-        <p:nvSpPr>
-          <p:cNvPr id="18" name="Text 16"/>
-          <p:cNvSpPr txBox="1"/>
-          <p:nvPr/>
-        </p:nvSpPr>
-        <p:spPr>
-          <a:xfrm>
-            <a:off x="5257800" y="2514600"/>
-            <a:ext cx="1645920" cy="411480"/>
-          </a:xfrm>
-          <a:prstGeom prst="rect">
-            <a:avLst/>
-          </a:prstGeom>
-          <a:noFill/>
-          <a:ln/>
-        </p:spPr>
-        <p:txBody>
-          <a:bodyPr wrap="square" lIns="0" tIns="0" rIns="0" bIns="0" rtlCol="0" anchor="t"/>
-          <a:lstStyle/>
-          <a:p>
-            <a:pPr indent="0" marL="0">
-              <a:buNone/>
-            </a:pPr>
-            <a:r>
-              <a:rPr lang="en-US" sz="1800" b="1" dirty="0">
-                <a:solidFill>
-                  <a:schemeClr val="tx1"/>
-                </a:solidFill>
-              </a:rPr>
-              <a:t>Descend</a:t>
-            </a:r>
-            <a:endParaRPr lang="en-US" sz="1800" dirty="0"/>
-          </a:p>
-        </p:txBody>
-      </p:sp>
-      <p:sp>
-        <p:nvSpPr>
-          <p:cNvPr id="19" name="Text 17"/>
-          <p:cNvSpPr txBox="1"/>
-          <p:nvPr/>
-        </p:nvSpPr>
-        <p:spPr>
-          <a:xfrm>
-            <a:off x="5257800" y="2971800"/>
-            <a:ext cx="1645920" cy="822960"/>
-          </a:xfrm>
-          <a:prstGeom prst="rect">
-            <a:avLst/>
-          </a:prstGeom>
-          <a:noFill/>
-          <a:ln/>
-        </p:spPr>
-        <p:txBody>
-          <a:bodyPr wrap="square" lIns="0" tIns="0" rIns="0" bIns="0" rtlCol="0" anchor="t"/>
-          <a:lstStyle/>
-          <a:p>
-            <a:pPr indent="0" marL="0">
-              <a:buNone/>
-            </a:pPr>
-            <a:r>
-              <a:rPr lang="en-US" sz="1400" dirty="0">
-                <a:solidFill>
-                  <a:schemeClr val="tx2"/>
-                </a:solidFill>
-              </a:rPr>
-              <a:t>4 then 1.2 cm/s; stop at the face or 2.5 N</a:t>
-            </a:r>
-            <a:endParaRPr lang="en-US" sz="1400" dirty="0"/>
-          </a:p>
-        </p:txBody>
-      </p:sp>
-      <p:sp>
-        <p:nvSpPr>
-          <p:cNvPr id="20" name="pick-arrow-3"/>
-          <p:cNvSpPr/>
-          <p:nvPr/>
-        </p:nvSpPr>
-        <p:spPr>
-          <a:xfrm>
-            <a:off x="7104888" y="2788920"/>
-            <a:ext cx="214884" cy="0"/>
-          </a:xfrm>
-          <a:prstGeom prst="line">
-            <a:avLst/>
-          </a:prstGeom>
-          <a:noFill/>
-          <a:ln w="19050">
-            <a:solidFill>
-              <a:srgbClr val="6B7280"/>
-            </a:solidFill>
-            <a:prstDash val="solid"/>
-            <a:tailEnd type="triangle"/>
-          </a:ln>
-        </p:spPr>
-      </p:sp>
-      <p:sp>
-        <p:nvSpPr>
-          <p:cNvPr id="21" name="pick-step-4"/>
-          <p:cNvSpPr/>
-          <p:nvPr/>
-        </p:nvSpPr>
-        <p:spPr>
-          <a:xfrm>
-            <a:off x="7338060" y="1737360"/>
-            <a:ext cx="2011680" cy="2103120"/>
-          </a:xfrm>
-          <a:prstGeom prst="roundRect">
-            <a:avLst>
-              <a:gd name="adj" fmla="val 3636"/>
-            </a:avLst>
-          </a:prstGeom>
-          <a:solidFill>
-            <a:srgbClr val="FBEDE6"/>
-          </a:solidFill>
-          <a:ln w="19050">
-            <a:solidFill>
-              <a:srgbClr val="C4501F"/>
-            </a:solidFill>
-            <a:prstDash val="solid"/>
-          </a:ln>
-        </p:spPr>
-      </p:sp>
-      <p:sp>
-        <p:nvSpPr>
-          <p:cNvPr id="22" name="pick-dot-4"/>
-          <p:cNvSpPr/>
-          <p:nvPr/>
-        </p:nvSpPr>
-        <p:spPr>
-          <a:xfrm>
-            <a:off x="7520940" y="1920240"/>
-            <a:ext cx="457200" cy="457200"/>
-          </a:xfrm>
-          <a:prstGeom prst="ellipse">
-            <a:avLst/>
-          </a:prstGeom>
-          <a:solidFill>
-            <a:schemeClr val="accent1"/>
-          </a:solidFill>
-          <a:ln w="12700">
-            <a:solidFill>
-              <a:schemeClr val="accent1"/>
-            </a:solidFill>
-            <a:prstDash val="solid"/>
-          </a:ln>
-        </p:spPr>
-      </p:sp>
-      <p:sp>
-        <p:nvSpPr>
-          <p:cNvPr id="23" name="Text 21"/>
-          <p:cNvSpPr txBox="1"/>
-          <p:nvPr/>
-        </p:nvSpPr>
-        <p:spPr>
-          <a:xfrm>
-            <a:off x="7520940" y="1920240"/>
-            <a:ext cx="457200" cy="457200"/>
-          </a:xfrm>
-          <a:prstGeom prst="rect">
-            <a:avLst/>
-          </a:prstGeom>
-          <a:noFill/>
-          <a:ln/>
-        </p:spPr>
-        <p:txBody>
-          <a:bodyPr wrap="square" lIns="0" tIns="0" rIns="0" bIns="0" rtlCol="0" anchor="ctr"/>
-          <a:lstStyle/>
-          <a:p>
-            <a:pPr algn="ctr" indent="0" marL="0">
-              <a:buNone/>
-            </a:pPr>
-            <a:r>
-              <a:rPr lang="en-US" sz="1600" b="1" dirty="0">
-                <a:solidFill>
-                  <a:schemeClr val="bg1"/>
-                </a:solidFill>
-              </a:rPr>
-              <a:t>4</a:t>
-            </a:r>
-            <a:endParaRPr lang="en-US" sz="1600" dirty="0"/>
-          </a:p>
-        </p:txBody>
-      </p:sp>
-      <p:sp>
-        <p:nvSpPr>
-          <p:cNvPr id="24" name="Text 22"/>
-          <p:cNvSpPr txBox="1"/>
-          <p:nvPr/>
-        </p:nvSpPr>
-        <p:spPr>
-          <a:xfrm>
-            <a:off x="7520940" y="2514600"/>
-            <a:ext cx="1645920" cy="411480"/>
-          </a:xfrm>
-          <a:prstGeom prst="rect">
-            <a:avLst/>
-          </a:prstGeom>
-          <a:noFill/>
-          <a:ln/>
-        </p:spPr>
-        <p:txBody>
-          <a:bodyPr wrap="square" lIns="0" tIns="0" rIns="0" bIns="0" rtlCol="0" anchor="t"/>
-          <a:lstStyle/>
-          <a:p>
-            <a:pPr indent="0" marL="0">
-              <a:buNone/>
-            </a:pPr>
-            <a:r>
-              <a:rPr lang="en-US" sz="1800" b="1" dirty="0">
-                <a:solidFill>
-                  <a:schemeClr val="tx1"/>
-                </a:solidFill>
-              </a:rPr>
-              <a:t>Lift + check</a:t>
-            </a:r>
-            <a:endParaRPr lang="en-US" sz="1800" dirty="0"/>
-          </a:p>
-        </p:txBody>
-      </p:sp>
-      <p:sp>
-        <p:nvSpPr>
-          <p:cNvPr id="25" name="Text 23"/>
-          <p:cNvSpPr txBox="1"/>
-          <p:nvPr/>
-        </p:nvSpPr>
-        <p:spPr>
-          <a:xfrm>
-            <a:off x="7520940" y="2971800"/>
-            <a:ext cx="1645920" cy="822960"/>
-          </a:xfrm>
-          <a:prstGeom prst="rect">
-            <a:avLst/>
-          </a:prstGeom>
-          <a:noFill/>
-          <a:ln/>
-        </p:spPr>
-        <p:txBody>
-          <a:bodyPr wrap="square" lIns="0" tIns="0" rIns="0" bIns="0" rtlCol="0" anchor="t"/>
-          <a:lstStyle/>
-          <a:p>
-            <a:pPr indent="0" marL="0">
-              <a:buNone/>
-            </a:pPr>
-            <a:r>
-              <a:rPr lang="en-US" sz="1400" dirty="0">
-                <a:solidFill>
-                  <a:schemeClr val="tx2"/>
-                </a:solidFill>
-              </a:rPr>
-              <a:t>1.47 N = ore held; under 0.8 N, retry</a:t>
-            </a:r>
-            <a:endParaRPr lang="en-US" sz="1400" dirty="0"/>
-          </a:p>
-        </p:txBody>
-      </p:sp>
-      <p:sp>
-        <p:nvSpPr>
-          <p:cNvPr id="26" name="pick-arrow-4"/>
-          <p:cNvSpPr/>
-          <p:nvPr/>
-        </p:nvSpPr>
-        <p:spPr>
-          <a:xfrm>
-            <a:off x="9368028" y="2788920"/>
-            <a:ext cx="214884" cy="0"/>
-          </a:xfrm>
-          <a:prstGeom prst="line">
-            <a:avLst/>
-          </a:prstGeom>
-          <a:noFill/>
-          <a:ln w="19050">
-            <a:solidFill>
-              <a:srgbClr val="6B7280"/>
-            </a:solidFill>
-            <a:prstDash val="solid"/>
-            <a:tailEnd type="triangle"/>
-          </a:ln>
-        </p:spPr>
-      </p:sp>
-      <p:sp>
-        <p:nvSpPr>
-          <p:cNvPr id="27" name="pick-step-5"/>
-          <p:cNvSpPr/>
-          <p:nvPr/>
-        </p:nvSpPr>
-        <p:spPr>
-          <a:xfrm>
-            <a:off x="9601200" y="1737360"/>
-            <a:ext cx="2011680" cy="2103120"/>
-          </a:xfrm>
-          <a:prstGeom prst="roundRect">
-            <a:avLst>
-              <a:gd name="adj" fmla="val 3636"/>
-            </a:avLst>
-          </a:prstGeom>
-          <a:solidFill>
-            <a:srgbClr val="F1ECE8"/>
-          </a:solidFill>
-          <a:ln w="19050">
-            <a:solidFill>
-              <a:srgbClr val="F1ECE8"/>
-            </a:solidFill>
-            <a:prstDash val="solid"/>
-          </a:ln>
-        </p:spPr>
-      </p:sp>
-      <p:sp>
-        <p:nvSpPr>
-          <p:cNvPr id="28" name="pick-dot-5"/>
-          <p:cNvSpPr/>
-          <p:nvPr/>
-        </p:nvSpPr>
-        <p:spPr>
-          <a:xfrm>
-            <a:off x="9784080" y="1920240"/>
-            <a:ext cx="457200" cy="457200"/>
-          </a:xfrm>
-          <a:prstGeom prst="ellipse">
-            <a:avLst/>
-          </a:prstGeom>
-          <a:solidFill>
-            <a:schemeClr val="accent1"/>
-          </a:solidFill>
-          <a:ln w="12700">
-            <a:solidFill>
-              <a:schemeClr val="accent1"/>
-            </a:solidFill>
-            <a:prstDash val="solid"/>
-          </a:ln>
-        </p:spPr>
-      </p:sp>
-      <p:sp>
-        <p:nvSpPr>
-          <p:cNvPr id="29" name="Text 27"/>
-          <p:cNvSpPr txBox="1"/>
-          <p:nvPr/>
-        </p:nvSpPr>
-        <p:spPr>
-          <a:xfrm>
-            <a:off x="9784080" y="1920240"/>
-            <a:ext cx="457200" cy="457200"/>
-          </a:xfrm>
-          <a:prstGeom prst="rect">
-            <a:avLst/>
-          </a:prstGeom>
-          <a:noFill/>
-          <a:ln/>
-        </p:spPr>
-        <p:txBody>
-          <a:bodyPr wrap="square" lIns="0" tIns="0" rIns="0" bIns="0" rtlCol="0" anchor="ctr"/>
-          <a:lstStyle/>
-          <a:p>
-            <a:pPr algn="ctr" indent="0" marL="0">
-              <a:buNone/>
-            </a:pPr>
-            <a:r>
-              <a:rPr lang="en-US" sz="1600" b="1" dirty="0">
-                <a:solidFill>
-                  <a:schemeClr val="bg1"/>
-                </a:solidFill>
-              </a:rPr>
-              <a:t>5</a:t>
-            </a:r>
-            <a:endParaRPr lang="en-US" sz="1600" dirty="0"/>
-          </a:p>
-        </p:txBody>
-      </p:sp>
-      <p:sp>
-        <p:nvSpPr>
-          <p:cNvPr id="30" name="Text 28"/>
-          <p:cNvSpPr txBox="1"/>
-          <p:nvPr/>
-        </p:nvSpPr>
-        <p:spPr>
-          <a:xfrm>
-            <a:off x="9784080" y="2514600"/>
-            <a:ext cx="1645920" cy="411480"/>
-          </a:xfrm>
-          <a:prstGeom prst="rect">
-            <a:avLst/>
-          </a:prstGeom>
-          <a:noFill/>
-          <a:ln/>
-        </p:spPr>
-        <p:txBody>
-          <a:bodyPr wrap="square" lIns="0" tIns="0" rIns="0" bIns="0" rtlCol="0" anchor="t"/>
-          <a:lstStyle/>
-          <a:p>
-            <a:pPr indent="0" marL="0">
-              <a:buNone/>
-            </a:pPr>
-            <a:r>
-              <a:rPr lang="en-US" sz="1800" b="1" dirty="0">
-                <a:solidFill>
-                  <a:schemeClr val="tx1"/>
-                </a:solidFill>
-              </a:rPr>
-              <a:t>Drop</a:t>
-            </a:r>
-            <a:endParaRPr lang="en-US" sz="1800" dirty="0"/>
-          </a:p>
-        </p:txBody>
-      </p:sp>
-      <p:sp>
-        <p:nvSpPr>
-          <p:cNvPr id="31" name="Text 29"/>
-          <p:cNvSpPr txBox="1"/>
-          <p:nvPr/>
-        </p:nvSpPr>
-        <p:spPr>
-          <a:xfrm>
-            <a:off x="9784080" y="2971800"/>
-            <a:ext cx="1645920" cy="822960"/>
-          </a:xfrm>
-          <a:prstGeom prst="rect">
-            <a:avLst/>
-          </a:prstGeom>
-          <a:noFill/>
-          <a:ln/>
-        </p:spPr>
-        <p:txBody>
-          <a:bodyPr wrap="square" lIns="0" tIns="0" rIns="0" bIns="0" rtlCol="0" anchor="t"/>
-          <a:lstStyle/>
-          <a:p>
-            <a:pPr indent="0" marL="0">
-              <a:buNone/>
-            </a:pPr>
-            <a:r>
-              <a:rPr lang="en-US" sz="1400" dirty="0">
-                <a:solidFill>
-                  <a:schemeClr val="tx2"/>
-                </a:solidFill>
-              </a:rPr>
-              <a:t>carry with the ore in the collision model; release</a:t>
-            </a:r>
-            <a:endParaRPr lang="en-US" sz="1400" dirty="0"/>
-          </a:p>
-        </p:txBody>
-      </p:sp>
-      <p:sp>
-        <p:nvSpPr>
-          <p:cNvPr id="32" name="stat-magnet"/>
-          <p:cNvSpPr txBox="1"/>
-          <p:nvPr/>
-        </p:nvSpPr>
-        <p:spPr>
-          <a:xfrm>
-            <a:off x="548640" y="4343400"/>
-            <a:ext cx="3291840" cy="868680"/>
-          </a:xfrm>
-          <a:prstGeom prst="rect">
-            <a:avLst/>
-          </a:prstGeom>
-          <a:noFill/>
-          <a:ln/>
-        </p:spPr>
-        <p:txBody>
-          <a:bodyPr wrap="square" lIns="0" tIns="0" rIns="0" bIns="0" rtlCol="0" anchor="b"/>
-          <a:lstStyle/>
-          <a:p>
-            <a:pPr indent="0" marL="0">
-              <a:buNone/>
-            </a:pPr>
-            <a:r>
-              <a:rPr lang="en-US" sz="4800" b="1" dirty="0">
-                <a:solidFill>
-                  <a:schemeClr val="accent1"/>
-                </a:solidFill>
-              </a:rPr>
-              <a:t>81 mm</a:t>
-            </a:r>
-            <a:endParaRPr lang="en-US" sz="4800" dirty="0"/>
-          </a:p>
-        </p:txBody>
-      </p:sp>
-      <p:sp>
-        <p:nvSpPr>
-          <p:cNvPr id="33" name="Text 31"/>
-          <p:cNvSpPr txBox="1"/>
-          <p:nvPr/>
-        </p:nvSpPr>
-        <p:spPr>
-          <a:xfrm>
-            <a:off x="548640" y="5257800"/>
-            <a:ext cx="3291840" cy="640080"/>
-          </a:xfrm>
-          <a:prstGeom prst="rect">
-            <a:avLst/>
-          </a:prstGeom>
-          <a:noFill/>
-          <a:ln/>
-        </p:spPr>
-        <p:txBody>
-          <a:bodyPr wrap="square" lIns="0" tIns="0" rIns="0" bIns="0" rtlCol="0" anchor="t"/>
-          <a:lstStyle/>
-          <a:p>
-            <a:pPr indent="0" marL="0">
-              <a:buNone/>
-            </a:pPr>
-            <a:r>
-              <a:rPr lang="en-US" sz="1400" dirty="0">
-                <a:solidFill>
-                  <a:schemeClr val="tx2"/>
-                </a:solidFill>
-              </a:rPr>
-              <a:t>magnet disc on a 101.6 mm face: about 10 mm to spare</a:t>
-            </a:r>
-            <a:endParaRPr lang="en-US" sz="1400" dirty="0"/>
-          </a:p>
-        </p:txBody>
-      </p:sp>
-      <p:sp>
-        <p:nvSpPr>
-          <p:cNvPr id="34" name="stat-force"/>
-          <p:cNvSpPr txBox="1"/>
-          <p:nvPr/>
-        </p:nvSpPr>
-        <p:spPr>
-          <a:xfrm>
-            <a:off x="4297680" y="4343400"/>
-            <a:ext cx="3291840" cy="868680"/>
-          </a:xfrm>
-          <a:prstGeom prst="rect">
-            <a:avLst/>
-          </a:prstGeom>
-          <a:noFill/>
-          <a:ln/>
-        </p:spPr>
-        <p:txBody>
-          <a:bodyPr wrap="square" lIns="0" tIns="0" rIns="0" bIns="0" rtlCol="0" anchor="b"/>
-          <a:lstStyle/>
-          <a:p>
-            <a:pPr indent="0" marL="0">
-              <a:buNone/>
-            </a:pPr>
-            <a:r>
-              <a:rPr lang="en-US" sz="4800" b="1" dirty="0">
-                <a:solidFill>
-                  <a:schemeClr val="accent1"/>
-                </a:solidFill>
-              </a:rPr>
-              <a:t>1.47 N</a:t>
-            </a:r>
-            <a:endParaRPr lang="en-US" sz="4800" dirty="0"/>
-          </a:p>
-        </p:txBody>
-      </p:sp>
-      <p:sp>
-        <p:nvSpPr>
-          <p:cNvPr id="35" name="Text 33"/>
-          <p:cNvSpPr txBox="1"/>
-          <p:nvPr/>
-        </p:nvSpPr>
-        <p:spPr>
-          <a:xfrm>
-            <a:off x="4297680" y="5257800"/>
-            <a:ext cx="3291840" cy="640080"/>
-          </a:xfrm>
-          <a:prstGeom prst="rect">
-            <a:avLst/>
-          </a:prstGeom>
-          <a:noFill/>
-          <a:ln/>
-        </p:spPr>
-        <p:txBody>
-          <a:bodyPr wrap="square" lIns="0" tIns="0" rIns="0" bIns="0" rtlCol="0" anchor="t"/>
-          <a:lstStyle/>
-          <a:p>
-            <a:pPr indent="0" marL="0">
-              <a:buNone/>
-            </a:pPr>
-            <a:r>
-              <a:rPr lang="en-US" sz="1400" dirty="0">
-                <a:solidFill>
-                  <a:schemeClr val="tx2"/>
-                </a:solidFill>
-              </a:rPr>
-              <a:t>force reading for a held 0.15 kg ore</a:t>
-            </a:r>
-            <a:endParaRPr lang="en-US" sz="1400" dirty="0"/>
-          </a:p>
-        </p:txBody>
-      </p:sp>
-      <p:sp>
-        <p:nvSpPr>
-          <p:cNvPr id="36" name="stat-stops"/>
-          <p:cNvSpPr txBox="1"/>
-          <p:nvPr/>
-        </p:nvSpPr>
-        <p:spPr>
-          <a:xfrm>
-            <a:off x="8046720" y="4343400"/>
-            <a:ext cx="3566160" cy="868680"/>
-          </a:xfrm>
-          <a:prstGeom prst="rect">
-            <a:avLst/>
-          </a:prstGeom>
-          <a:noFill/>
-          <a:ln/>
-        </p:spPr>
-        <p:txBody>
-          <a:bodyPr wrap="square" lIns="0" tIns="0" rIns="0" bIns="0" rtlCol="0" anchor="b"/>
-          <a:lstStyle/>
-          <a:p>
-            <a:pPr indent="0" marL="0">
-              <a:buNone/>
-            </a:pPr>
-            <a:r>
-              <a:rPr lang="en-US" sz="4800" b="1" dirty="0">
-                <a:solidFill>
-                  <a:schemeClr val="accent3"/>
-                </a:solidFill>
-              </a:rPr>
-              <a:t>0 stops</a:t>
-            </a:r>
-            <a:endParaRPr lang="en-US" sz="4800" dirty="0"/>
-          </a:p>
-        </p:txBody>
-      </p:sp>
-      <p:sp>
-        <p:nvSpPr>
-          <p:cNvPr id="37" name="Text 35"/>
-          <p:cNvSpPr txBox="1"/>
-          <p:nvPr/>
-        </p:nvSpPr>
-        <p:spPr>
-          <a:xfrm>
-            <a:off x="8046720" y="5257800"/>
-            <a:ext cx="3566160" cy="640080"/>
-          </a:xfrm>
-          <a:prstGeom prst="rect">
-            <a:avLst/>
-          </a:prstGeom>
-          <a:noFill/>
-          <a:ln/>
-        </p:spPr>
-        <p:txBody>
-          <a:bodyPr wrap="square" lIns="0" tIns="0" rIns="0" bIns="0" rtlCol="0" anchor="t"/>
-          <a:lstStyle/>
-          <a:p>
-            <a:pPr indent="0" marL="0">
-              <a:buNone/>
-            </a:pPr>
-            <a:r>
-              <a:rPr lang="en-US" sz="1400" dirty="0">
-                <a:solidFill>
-                  <a:schemeClr val="tx2"/>
-                </a:solidFill>
-              </a:rPr>
-              <a:t>safety stops across every trial</a:t>
+              <a:t>The vanadinite centre is 0.93 m from the base. Each ore is released at the nearest point inside its container, 8 cm from the walls.</a:t>
             </a:r>
             <a:endParaRPr lang="en-US" sz="1400" dirty="0"/>
           </a:p>
@@ -11408,7 +12207,7 @@
                   <a:schemeClr val="tx1"/>
                 </a:solidFill>
               </a:rPr>
-              <a:t>A purpose-built IK solver plans 300x faster</a:t>
+              <a:t>Every pick is confirmed by the force sensor</a:t>
             </a:r>
             <a:endParaRPr lang="en-US" sz="3200" dirty="0"/>
           </a:p>
@@ -11416,26 +12215,51 @@
       </p:sp>
       <p:sp>
         <p:nvSpPr>
-          <p:cNvPr id="3" name="before-card"/>
+          <p:cNvPr id="3" name="pick-step-1"/>
           <p:cNvSpPr/>
           <p:nvPr/>
         </p:nvSpPr>
         <p:spPr>
           <a:xfrm>
-            <a:off x="548640" y="1463040"/>
-            <a:ext cx="3291840" cy="2377440"/>
+            <a:off x="548640" y="1737360"/>
+            <a:ext cx="2011680" cy="2103120"/>
           </a:xfrm>
           <a:prstGeom prst="roundRect">
             <a:avLst>
-              <a:gd name="adj" fmla="val 3077"/>
+              <a:gd name="adj" fmla="val 3636"/>
             </a:avLst>
           </a:prstGeom>
           <a:solidFill>
-            <a:schemeClr val="bg2"/>
+            <a:srgbClr val="F1ECE8"/>
+          </a:solidFill>
+          <a:ln w="19050">
+            <a:solidFill>
+              <a:srgbClr val="F1ECE8"/>
+            </a:solidFill>
+            <a:prstDash val="solid"/>
+          </a:ln>
+        </p:spPr>
+      </p:sp>
+      <p:sp>
+        <p:nvSpPr>
+          <p:cNvPr id="4" name="pick-dot-1"/>
+          <p:cNvSpPr/>
+          <p:nvPr/>
+        </p:nvSpPr>
+        <p:spPr>
+          <a:xfrm>
+            <a:off x="731520" y="1920240"/>
+            <a:ext cx="457200" cy="457200"/>
+          </a:xfrm>
+          <a:prstGeom prst="ellipse">
+            <a:avLst/>
+          </a:prstGeom>
+          <a:solidFill>
+            <a:schemeClr val="accent1"/>
           </a:solidFill>
           <a:ln w="12700">
             <a:solidFill>
-              <a:schemeClr val="bg2"/>
+              <a:schemeClr val="accent1"/>
             </a:solidFill>
             <a:prstDash val="solid"/>
           </a:ln>
@@ -11443,73 +12267,37 @@
       </p:sp>
       <p:sp>
         <p:nvSpPr>
-          <p:cNvPr id="4" name="Text 2"/>
-          <p:cNvSpPr txBox="1"/>
-          <p:nvPr/>
-        </p:nvSpPr>
-        <p:spPr>
-          <a:xfrm>
-            <a:off x="777240" y="1645920"/>
-            <a:ext cx="2926080" cy="365760"/>
-          </a:xfrm>
-          <a:prstGeom prst="rect">
-            <a:avLst/>
-          </a:prstGeom>
-          <a:noFill/>
-          <a:ln/>
-        </p:spPr>
-        <p:txBody>
-          <a:bodyPr wrap="square" lIns="0" tIns="0" rIns="0" bIns="0" rtlCol="0" anchor="t"/>
-          <a:lstStyle/>
-          <a:p>
-            <a:pPr indent="0" marL="0">
-              <a:buNone/>
-            </a:pPr>
-            <a:r>
-              <a:rPr lang="en-US" sz="1600" b="1" dirty="0">
-                <a:solidFill>
-                  <a:schemeClr val="tx2"/>
-                </a:solidFill>
-              </a:rPr>
-              <a:t>Before: SLSQP optimiser</a:t>
-            </a:r>
-            <a:endParaRPr lang="en-US" sz="1600" dirty="0"/>
-          </a:p>
-        </p:txBody>
-      </p:sp>
-      <p:sp>
-        <p:nvSpPr>
           <p:cNvPr id="5" name="Text 3"/>
           <p:cNvSpPr txBox="1"/>
           <p:nvPr/>
         </p:nvSpPr>
         <p:spPr>
           <a:xfrm>
-            <a:off x="777240" y="2103120"/>
-            <a:ext cx="2926080" cy="914400"/>
-          </a:xfrm>
-          <a:prstGeom prst="rect">
-            <a:avLst/>
-          </a:prstGeom>
-          <a:noFill/>
-          <a:ln/>
-        </p:spPr>
-        <p:txBody>
-          <a:bodyPr wrap="square" lIns="0" tIns="0" rIns="0" bIns="0" rtlCol="0" anchor="t"/>
-          <a:lstStyle/>
-          <a:p>
-            <a:pPr indent="0" marL="0">
-              <a:buNone/>
-            </a:pPr>
-            <a:r>
-              <a:rPr lang="en-US" sz="4800" b="1" dirty="0">
-                <a:solidFill>
-                  <a:schemeClr val="accent5"/>
-                </a:solidFill>
-              </a:rPr>
-              <a:t>minutes</a:t>
-            </a:r>
-            <a:endParaRPr lang="en-US" sz="4800" dirty="0"/>
+            <a:off x="731520" y="1920240"/>
+            <a:ext cx="457200" cy="457200"/>
+          </a:xfrm>
+          <a:prstGeom prst="rect">
+            <a:avLst/>
+          </a:prstGeom>
+          <a:noFill/>
+          <a:ln/>
+        </p:spPr>
+        <p:txBody>
+          <a:bodyPr wrap="square" lIns="0" tIns="0" rIns="0" bIns="0" rtlCol="0" anchor="ctr"/>
+          <a:lstStyle/>
+          <a:p>
+            <a:pPr algn="ctr" indent="0" marL="0">
+              <a:buNone/>
+            </a:pPr>
+            <a:r>
+              <a:rPr lang="en-US" sz="1600" b="1" dirty="0">
+                <a:solidFill>
+                  <a:schemeClr val="bg1"/>
+                </a:solidFill>
+              </a:rPr>
+              <a:t>1</a:t>
+            </a:r>
+            <a:endParaRPr lang="en-US" sz="1600" dirty="0"/>
           </a:p>
         </p:txBody>
       </p:sp>
@@ -11521,8 +12309,8 @@
         </p:nvSpPr>
         <p:spPr>
           <a:xfrm>
-            <a:off x="777240" y="3063240"/>
-            <a:ext cx="2926080" cy="640080"/>
+            <a:off x="731520" y="2514600"/>
+            <a:ext cx="1645920" cy="411480"/>
           </a:xfrm>
           <a:prstGeom prst="rect">
             <a:avLst/>
@@ -11538,12 +12326,48 @@
               <a:buNone/>
             </a:pPr>
             <a:r>
+              <a:rPr lang="en-US" sz="1800" b="1" dirty="0">
+                <a:solidFill>
+                  <a:schemeClr val="tx1"/>
+                </a:solidFill>
+              </a:rPr>
+              <a:t>Hover</a:t>
+            </a:r>
+            <a:endParaRPr lang="en-US" sz="1800" dirty="0"/>
+          </a:p>
+        </p:txBody>
+      </p:sp>
+      <p:sp>
+        <p:nvSpPr>
+          <p:cNvPr id="7" name="Text 5"/>
+          <p:cNvSpPr txBox="1"/>
+          <p:nvPr/>
+        </p:nvSpPr>
+        <p:spPr>
+          <a:xfrm>
+            <a:off x="731520" y="2971800"/>
+            <a:ext cx="1645920" cy="822960"/>
+          </a:xfrm>
+          <a:prstGeom prst="rect">
+            <a:avLst/>
+          </a:prstGeom>
+          <a:noFill/>
+          <a:ln/>
+        </p:spPr>
+        <p:txBody>
+          <a:bodyPr wrap="square" lIns="0" tIns="0" rIns="0" bIns="0" rtlCol="0" anchor="t"/>
+          <a:lstStyle/>
+          <a:p>
+            <a:pPr indent="0" marL="0">
+              <a:buNone/>
+            </a:pPr>
+            <a:r>
               <a:rPr lang="en-US" sz="1400" dirty="0">
                 <a:solidFill>
                   <a:schemeClr val="tx2"/>
                 </a:solidFill>
               </a:rPr>
-              <a:t>per plan; stuck when starting above the containers</a:t>
+              <a:t>10 cm above the face, tool vertical</a:t>
             </a:r>
             <a:endParaRPr lang="en-US" sz="1400" dirty="0"/>
           </a:p>
@@ -11551,24 +12375,416 @@
       </p:sp>
       <p:sp>
         <p:nvSpPr>
-          <p:cNvPr id="7" name="after-card"/>
+          <p:cNvPr id="8" name="pick-arrow-1"/>
           <p:cNvSpPr/>
           <p:nvPr/>
         </p:nvSpPr>
         <p:spPr>
           <a:xfrm>
-            <a:off x="4206240" y="1463040"/>
-            <a:ext cx="3291840" cy="2377440"/>
+            <a:off x="2578608" y="2788920"/>
+            <a:ext cx="214884" cy="0"/>
+          </a:xfrm>
+          <a:prstGeom prst="line">
+            <a:avLst/>
+          </a:prstGeom>
+          <a:noFill/>
+          <a:ln w="19050">
+            <a:solidFill>
+              <a:srgbClr val="6B7280"/>
+            </a:solidFill>
+            <a:prstDash val="solid"/>
+            <a:tailEnd type="triangle"/>
+          </a:ln>
+        </p:spPr>
+      </p:sp>
+      <p:sp>
+        <p:nvSpPr>
+          <p:cNvPr id="9" name="pick-step-2"/>
+          <p:cNvSpPr/>
+          <p:nvPr/>
+        </p:nvSpPr>
+        <p:spPr>
+          <a:xfrm>
+            <a:off x="2811780" y="1737360"/>
+            <a:ext cx="2011680" cy="2103120"/>
           </a:xfrm>
           <a:prstGeom prst="roundRect">
             <a:avLst>
-              <a:gd name="adj" fmla="val 3077"/>
+              <a:gd name="adj" fmla="val 3636"/>
+            </a:avLst>
+          </a:prstGeom>
+          <a:solidFill>
+            <a:srgbClr val="F1ECE8"/>
+          </a:solidFill>
+          <a:ln w="19050">
+            <a:solidFill>
+              <a:srgbClr val="F1ECE8"/>
+            </a:solidFill>
+            <a:prstDash val="solid"/>
+          </a:ln>
+        </p:spPr>
+      </p:sp>
+      <p:sp>
+        <p:nvSpPr>
+          <p:cNvPr id="10" name="pick-dot-2"/>
+          <p:cNvSpPr/>
+          <p:nvPr/>
+        </p:nvSpPr>
+        <p:spPr>
+          <a:xfrm>
+            <a:off x="2994660" y="1920240"/>
+            <a:ext cx="457200" cy="457200"/>
+          </a:xfrm>
+          <a:prstGeom prst="ellipse">
+            <a:avLst/>
+          </a:prstGeom>
+          <a:solidFill>
+            <a:schemeClr val="accent1"/>
+          </a:solidFill>
+          <a:ln w="12700">
+            <a:solidFill>
+              <a:schemeClr val="accent1"/>
+            </a:solidFill>
+            <a:prstDash val="solid"/>
+          </a:ln>
+        </p:spPr>
+      </p:sp>
+      <p:sp>
+        <p:nvSpPr>
+          <p:cNvPr id="11" name="Text 9"/>
+          <p:cNvSpPr txBox="1"/>
+          <p:nvPr/>
+        </p:nvSpPr>
+        <p:spPr>
+          <a:xfrm>
+            <a:off x="2994660" y="1920240"/>
+            <a:ext cx="457200" cy="457200"/>
+          </a:xfrm>
+          <a:prstGeom prst="rect">
+            <a:avLst/>
+          </a:prstGeom>
+          <a:noFill/>
+          <a:ln/>
+        </p:spPr>
+        <p:txBody>
+          <a:bodyPr wrap="square" lIns="0" tIns="0" rIns="0" bIns="0" rtlCol="0" anchor="ctr"/>
+          <a:lstStyle/>
+          <a:p>
+            <a:pPr algn="ctr" indent="0" marL="0">
+              <a:buNone/>
+            </a:pPr>
+            <a:r>
+              <a:rPr lang="en-US" sz="1600" b="1" dirty="0">
+                <a:solidFill>
+                  <a:schemeClr val="bg1"/>
+                </a:solidFill>
+              </a:rPr>
+              <a:t>2</a:t>
+            </a:r>
+            <a:endParaRPr lang="en-US" sz="1600" dirty="0"/>
+          </a:p>
+        </p:txBody>
+      </p:sp>
+      <p:sp>
+        <p:nvSpPr>
+          <p:cNvPr id="12" name="Text 10"/>
+          <p:cNvSpPr txBox="1"/>
+          <p:nvPr/>
+        </p:nvSpPr>
+        <p:spPr>
+          <a:xfrm>
+            <a:off x="2994660" y="2514600"/>
+            <a:ext cx="1645920" cy="411480"/>
+          </a:xfrm>
+          <a:prstGeom prst="rect">
+            <a:avLst/>
+          </a:prstGeom>
+          <a:noFill/>
+          <a:ln/>
+        </p:spPr>
+        <p:txBody>
+          <a:bodyPr wrap="square" lIns="0" tIns="0" rIns="0" bIns="0" rtlCol="0" anchor="t"/>
+          <a:lstStyle/>
+          <a:p>
+            <a:pPr indent="0" marL="0">
+              <a:buNone/>
+            </a:pPr>
+            <a:r>
+              <a:rPr lang="en-US" sz="1800" b="1" dirty="0">
+                <a:solidFill>
+                  <a:schemeClr val="tx1"/>
+                </a:solidFill>
+              </a:rPr>
+              <a:t>Align</a:t>
+            </a:r>
+            <a:endParaRPr lang="en-US" sz="1800" dirty="0"/>
+          </a:p>
+        </p:txBody>
+      </p:sp>
+      <p:sp>
+        <p:nvSpPr>
+          <p:cNvPr id="13" name="Text 11"/>
+          <p:cNvSpPr txBox="1"/>
+          <p:nvPr/>
+        </p:nvSpPr>
+        <p:spPr>
+          <a:xfrm>
+            <a:off x="2994660" y="2971800"/>
+            <a:ext cx="1645920" cy="822960"/>
+          </a:xfrm>
+          <a:prstGeom prst="rect">
+            <a:avLst/>
+          </a:prstGeom>
+          <a:noFill/>
+          <a:ln/>
+        </p:spPr>
+        <p:txBody>
+          <a:bodyPr wrap="square" lIns="0" tIns="0" rIns="0" bIns="0" rtlCol="0" anchor="t"/>
+          <a:lstStyle/>
+          <a:p>
+            <a:pPr indent="0" marL="0">
+              <a:buNone/>
+            </a:pPr>
+            <a:r>
+              <a:rPr lang="en-US" sz="1400" dirty="0">
+                <a:solidFill>
+                  <a:schemeClr val="tx2"/>
+                </a:solidFill>
+              </a:rPr>
+              <a:t>close the last mm on /tcp_pose_raw; magnet on</a:t>
+            </a:r>
+            <a:endParaRPr lang="en-US" sz="1400" dirty="0"/>
+          </a:p>
+        </p:txBody>
+      </p:sp>
+      <p:sp>
+        <p:nvSpPr>
+          <p:cNvPr id="14" name="pick-arrow-2"/>
+          <p:cNvSpPr/>
+          <p:nvPr/>
+        </p:nvSpPr>
+        <p:spPr>
+          <a:xfrm>
+            <a:off x="4841748" y="2788920"/>
+            <a:ext cx="214884" cy="0"/>
+          </a:xfrm>
+          <a:prstGeom prst="line">
+            <a:avLst/>
+          </a:prstGeom>
+          <a:noFill/>
+          <a:ln w="19050">
+            <a:solidFill>
+              <a:srgbClr val="6B7280"/>
+            </a:solidFill>
+            <a:prstDash val="solid"/>
+            <a:tailEnd type="triangle"/>
+          </a:ln>
+        </p:spPr>
+      </p:sp>
+      <p:sp>
+        <p:nvSpPr>
+          <p:cNvPr id="15" name="pick-step-3"/>
+          <p:cNvSpPr/>
+          <p:nvPr/>
+        </p:nvSpPr>
+        <p:spPr>
+          <a:xfrm>
+            <a:off x="5074920" y="1737360"/>
+            <a:ext cx="2011680" cy="2103120"/>
+          </a:xfrm>
+          <a:prstGeom prst="roundRect">
+            <a:avLst>
+              <a:gd name="adj" fmla="val 3636"/>
+            </a:avLst>
+          </a:prstGeom>
+          <a:solidFill>
+            <a:srgbClr val="F1ECE8"/>
+          </a:solidFill>
+          <a:ln w="19050">
+            <a:solidFill>
+              <a:srgbClr val="F1ECE8"/>
+            </a:solidFill>
+            <a:prstDash val="solid"/>
+          </a:ln>
+        </p:spPr>
+      </p:sp>
+      <p:sp>
+        <p:nvSpPr>
+          <p:cNvPr id="16" name="pick-dot-3"/>
+          <p:cNvSpPr/>
+          <p:nvPr/>
+        </p:nvSpPr>
+        <p:spPr>
+          <a:xfrm>
+            <a:off x="5257800" y="1920240"/>
+            <a:ext cx="457200" cy="457200"/>
+          </a:xfrm>
+          <a:prstGeom prst="ellipse">
+            <a:avLst/>
+          </a:prstGeom>
+          <a:solidFill>
+            <a:schemeClr val="accent1"/>
+          </a:solidFill>
+          <a:ln w="12700">
+            <a:solidFill>
+              <a:schemeClr val="accent1"/>
+            </a:solidFill>
+            <a:prstDash val="solid"/>
+          </a:ln>
+        </p:spPr>
+      </p:sp>
+      <p:sp>
+        <p:nvSpPr>
+          <p:cNvPr id="17" name="Text 15"/>
+          <p:cNvSpPr txBox="1"/>
+          <p:nvPr/>
+        </p:nvSpPr>
+        <p:spPr>
+          <a:xfrm>
+            <a:off x="5257800" y="1920240"/>
+            <a:ext cx="457200" cy="457200"/>
+          </a:xfrm>
+          <a:prstGeom prst="rect">
+            <a:avLst/>
+          </a:prstGeom>
+          <a:noFill/>
+          <a:ln/>
+        </p:spPr>
+        <p:txBody>
+          <a:bodyPr wrap="square" lIns="0" tIns="0" rIns="0" bIns="0" rtlCol="0" anchor="ctr"/>
+          <a:lstStyle/>
+          <a:p>
+            <a:pPr algn="ctr" indent="0" marL="0">
+              <a:buNone/>
+            </a:pPr>
+            <a:r>
+              <a:rPr lang="en-US" sz="1600" b="1" dirty="0">
+                <a:solidFill>
+                  <a:schemeClr val="bg1"/>
+                </a:solidFill>
+              </a:rPr>
+              <a:t>3</a:t>
+            </a:r>
+            <a:endParaRPr lang="en-US" sz="1600" dirty="0"/>
+          </a:p>
+        </p:txBody>
+      </p:sp>
+      <p:sp>
+        <p:nvSpPr>
+          <p:cNvPr id="18" name="Text 16"/>
+          <p:cNvSpPr txBox="1"/>
+          <p:nvPr/>
+        </p:nvSpPr>
+        <p:spPr>
+          <a:xfrm>
+            <a:off x="5257800" y="2514600"/>
+            <a:ext cx="1645920" cy="411480"/>
+          </a:xfrm>
+          <a:prstGeom prst="rect">
+            <a:avLst/>
+          </a:prstGeom>
+          <a:noFill/>
+          <a:ln/>
+        </p:spPr>
+        <p:txBody>
+          <a:bodyPr wrap="square" lIns="0" tIns="0" rIns="0" bIns="0" rtlCol="0" anchor="t"/>
+          <a:lstStyle/>
+          <a:p>
+            <a:pPr indent="0" marL="0">
+              <a:buNone/>
+            </a:pPr>
+            <a:r>
+              <a:rPr lang="en-US" sz="1800" b="1" dirty="0">
+                <a:solidFill>
+                  <a:schemeClr val="tx1"/>
+                </a:solidFill>
+              </a:rPr>
+              <a:t>Descend</a:t>
+            </a:r>
+            <a:endParaRPr lang="en-US" sz="1800" dirty="0"/>
+          </a:p>
+        </p:txBody>
+      </p:sp>
+      <p:sp>
+        <p:nvSpPr>
+          <p:cNvPr id="19" name="Text 17"/>
+          <p:cNvSpPr txBox="1"/>
+          <p:nvPr/>
+        </p:nvSpPr>
+        <p:spPr>
+          <a:xfrm>
+            <a:off x="5257800" y="2971800"/>
+            <a:ext cx="1645920" cy="822960"/>
+          </a:xfrm>
+          <a:prstGeom prst="rect">
+            <a:avLst/>
+          </a:prstGeom>
+          <a:noFill/>
+          <a:ln/>
+        </p:spPr>
+        <p:txBody>
+          <a:bodyPr wrap="square" lIns="0" tIns="0" rIns="0" bIns="0" rtlCol="0" anchor="t"/>
+          <a:lstStyle/>
+          <a:p>
+            <a:pPr indent="0" marL="0">
+              <a:buNone/>
+            </a:pPr>
+            <a:r>
+              <a:rPr lang="en-US" sz="1400" dirty="0">
+                <a:solidFill>
+                  <a:schemeClr val="tx2"/>
+                </a:solidFill>
+              </a:rPr>
+              <a:t>4 then 1.2 cm/s; stop at the face or 2.5 N</a:t>
+            </a:r>
+            <a:endParaRPr lang="en-US" sz="1400" dirty="0"/>
+          </a:p>
+        </p:txBody>
+      </p:sp>
+      <p:sp>
+        <p:nvSpPr>
+          <p:cNvPr id="20" name="pick-arrow-3"/>
+          <p:cNvSpPr/>
+          <p:nvPr/>
+        </p:nvSpPr>
+        <p:spPr>
+          <a:xfrm>
+            <a:off x="7104888" y="2788920"/>
+            <a:ext cx="214884" cy="0"/>
+          </a:xfrm>
+          <a:prstGeom prst="line">
+            <a:avLst/>
+          </a:prstGeom>
+          <a:noFill/>
+          <a:ln w="19050">
+            <a:solidFill>
+              <a:srgbClr val="6B7280"/>
+            </a:solidFill>
+            <a:prstDash val="solid"/>
+            <a:tailEnd type="triangle"/>
+          </a:ln>
+        </p:spPr>
+      </p:sp>
+      <p:sp>
+        <p:nvSpPr>
+          <p:cNvPr id="21" name="pick-step-4"/>
+          <p:cNvSpPr/>
+          <p:nvPr/>
+        </p:nvSpPr>
+        <p:spPr>
+          <a:xfrm>
+            <a:off x="7338060" y="1737360"/>
+            <a:ext cx="2011680" cy="2103120"/>
+          </a:xfrm>
+          <a:prstGeom prst="roundRect">
+            <a:avLst>
+              <a:gd name="adj" fmla="val 3636"/>
             </a:avLst>
           </a:prstGeom>
           <a:solidFill>
             <a:srgbClr val="FBEDE6"/>
           </a:solidFill>
-          <a:ln w="22225">
+          <a:ln w="19050">
             <a:solidFill>
               <a:srgbClr val="C4501F"/>
             </a:solidFill>
@@ -11578,14 +12794,75 @@
       </p:sp>
       <p:sp>
         <p:nvSpPr>
-          <p:cNvPr id="8" name="Text 6"/>
+          <p:cNvPr id="22" name="pick-dot-4"/>
+          <p:cNvSpPr/>
+          <p:nvPr/>
+        </p:nvSpPr>
+        <p:spPr>
+          <a:xfrm>
+            <a:off x="7520940" y="1920240"/>
+            <a:ext cx="457200" cy="457200"/>
+          </a:xfrm>
+          <a:prstGeom prst="ellipse">
+            <a:avLst/>
+          </a:prstGeom>
+          <a:solidFill>
+            <a:schemeClr val="accent1"/>
+          </a:solidFill>
+          <a:ln w="12700">
+            <a:solidFill>
+              <a:schemeClr val="accent1"/>
+            </a:solidFill>
+            <a:prstDash val="solid"/>
+          </a:ln>
+        </p:spPr>
+      </p:sp>
+      <p:sp>
+        <p:nvSpPr>
+          <p:cNvPr id="23" name="Text 21"/>
           <p:cNvSpPr txBox="1"/>
           <p:nvPr/>
         </p:nvSpPr>
         <p:spPr>
           <a:xfrm>
-            <a:off x="4434840" y="1645920"/>
-            <a:ext cx="2926080" cy="365760"/>
+            <a:off x="7520940" y="1920240"/>
+            <a:ext cx="457200" cy="457200"/>
+          </a:xfrm>
+          <a:prstGeom prst="rect">
+            <a:avLst/>
+          </a:prstGeom>
+          <a:noFill/>
+          <a:ln/>
+        </p:spPr>
+        <p:txBody>
+          <a:bodyPr wrap="square" lIns="0" tIns="0" rIns="0" bIns="0" rtlCol="0" anchor="ctr"/>
+          <a:lstStyle/>
+          <a:p>
+            <a:pPr algn="ctr" indent="0" marL="0">
+              <a:buNone/>
+            </a:pPr>
+            <a:r>
+              <a:rPr lang="en-US" sz="1600" b="1" dirty="0">
+                <a:solidFill>
+                  <a:schemeClr val="bg1"/>
+                </a:solidFill>
+              </a:rPr>
+              <a:t>4</a:t>
+            </a:r>
+            <a:endParaRPr lang="en-US" sz="1600" dirty="0"/>
+          </a:p>
+        </p:txBody>
+      </p:sp>
+      <p:sp>
+        <p:nvSpPr>
+          <p:cNvPr id="24" name="Text 22"/>
+          <p:cNvSpPr txBox="1"/>
+          <p:nvPr/>
+        </p:nvSpPr>
+        <p:spPr>
+          <a:xfrm>
+            <a:off x="7520940" y="2514600"/>
+            <a:ext cx="1645920" cy="411480"/>
           </a:xfrm>
           <a:prstGeom prst="rect">
             <a:avLst/>
@@ -11601,27 +12878,283 @@
               <a:buNone/>
             </a:pPr>
             <a:r>
+              <a:rPr lang="en-US" sz="1800" b="1" dirty="0">
+                <a:solidFill>
+                  <a:schemeClr val="tx1"/>
+                </a:solidFill>
+              </a:rPr>
+              <a:t>Lift + check</a:t>
+            </a:r>
+            <a:endParaRPr lang="en-US" sz="1800" dirty="0"/>
+          </a:p>
+        </p:txBody>
+      </p:sp>
+      <p:sp>
+        <p:nvSpPr>
+          <p:cNvPr id="25" name="Text 23"/>
+          <p:cNvSpPr txBox="1"/>
+          <p:nvPr/>
+        </p:nvSpPr>
+        <p:spPr>
+          <a:xfrm>
+            <a:off x="7520940" y="2971800"/>
+            <a:ext cx="1645920" cy="822960"/>
+          </a:xfrm>
+          <a:prstGeom prst="rect">
+            <a:avLst/>
+          </a:prstGeom>
+          <a:noFill/>
+          <a:ln/>
+        </p:spPr>
+        <p:txBody>
+          <a:bodyPr wrap="square" lIns="0" tIns="0" rIns="0" bIns="0" rtlCol="0" anchor="t"/>
+          <a:lstStyle/>
+          <a:p>
+            <a:pPr indent="0" marL="0">
+              <a:buNone/>
+            </a:pPr>
+            <a:r>
+              <a:rPr lang="en-US" sz="1400" dirty="0">
+                <a:solidFill>
+                  <a:schemeClr val="tx2"/>
+                </a:solidFill>
+              </a:rPr>
+              <a:t>1.47 N = ore held; under 0.8 N, retry</a:t>
+            </a:r>
+            <a:endParaRPr lang="en-US" sz="1400" dirty="0"/>
+          </a:p>
+        </p:txBody>
+      </p:sp>
+      <p:sp>
+        <p:nvSpPr>
+          <p:cNvPr id="26" name="pick-arrow-4"/>
+          <p:cNvSpPr/>
+          <p:nvPr/>
+        </p:nvSpPr>
+        <p:spPr>
+          <a:xfrm>
+            <a:off x="9368028" y="2788920"/>
+            <a:ext cx="214884" cy="0"/>
+          </a:xfrm>
+          <a:prstGeom prst="line">
+            <a:avLst/>
+          </a:prstGeom>
+          <a:noFill/>
+          <a:ln w="19050">
+            <a:solidFill>
+              <a:srgbClr val="6B7280"/>
+            </a:solidFill>
+            <a:prstDash val="solid"/>
+            <a:tailEnd type="triangle"/>
+          </a:ln>
+        </p:spPr>
+      </p:sp>
+      <p:sp>
+        <p:nvSpPr>
+          <p:cNvPr id="27" name="pick-step-5"/>
+          <p:cNvSpPr/>
+          <p:nvPr/>
+        </p:nvSpPr>
+        <p:spPr>
+          <a:xfrm>
+            <a:off x="9601200" y="1737360"/>
+            <a:ext cx="2011680" cy="2103120"/>
+          </a:xfrm>
+          <a:prstGeom prst="roundRect">
+            <a:avLst>
+              <a:gd name="adj" fmla="val 3636"/>
+            </a:avLst>
+          </a:prstGeom>
+          <a:solidFill>
+            <a:srgbClr val="F1ECE8"/>
+          </a:solidFill>
+          <a:ln w="19050">
+            <a:solidFill>
+              <a:srgbClr val="F1ECE8"/>
+            </a:solidFill>
+            <a:prstDash val="solid"/>
+          </a:ln>
+        </p:spPr>
+      </p:sp>
+      <p:sp>
+        <p:nvSpPr>
+          <p:cNvPr id="28" name="pick-dot-5"/>
+          <p:cNvSpPr/>
+          <p:nvPr/>
+        </p:nvSpPr>
+        <p:spPr>
+          <a:xfrm>
+            <a:off x="9784080" y="1920240"/>
+            <a:ext cx="457200" cy="457200"/>
+          </a:xfrm>
+          <a:prstGeom prst="ellipse">
+            <a:avLst/>
+          </a:prstGeom>
+          <a:solidFill>
+            <a:schemeClr val="accent1"/>
+          </a:solidFill>
+          <a:ln w="12700">
+            <a:solidFill>
+              <a:schemeClr val="accent1"/>
+            </a:solidFill>
+            <a:prstDash val="solid"/>
+          </a:ln>
+        </p:spPr>
+      </p:sp>
+      <p:sp>
+        <p:nvSpPr>
+          <p:cNvPr id="29" name="Text 27"/>
+          <p:cNvSpPr txBox="1"/>
+          <p:nvPr/>
+        </p:nvSpPr>
+        <p:spPr>
+          <a:xfrm>
+            <a:off x="9784080" y="1920240"/>
+            <a:ext cx="457200" cy="457200"/>
+          </a:xfrm>
+          <a:prstGeom prst="rect">
+            <a:avLst/>
+          </a:prstGeom>
+          <a:noFill/>
+          <a:ln/>
+        </p:spPr>
+        <p:txBody>
+          <a:bodyPr wrap="square" lIns="0" tIns="0" rIns="0" bIns="0" rtlCol="0" anchor="ctr"/>
+          <a:lstStyle/>
+          <a:p>
+            <a:pPr algn="ctr" indent="0" marL="0">
+              <a:buNone/>
+            </a:pPr>
+            <a:r>
               <a:rPr lang="en-US" sz="1600" b="1" dirty="0">
                 <a:solidFill>
+                  <a:schemeClr val="bg1"/>
+                </a:solidFill>
+              </a:rPr>
+              <a:t>5</a:t>
+            </a:r>
+            <a:endParaRPr lang="en-US" sz="1600" dirty="0"/>
+          </a:p>
+        </p:txBody>
+      </p:sp>
+      <p:sp>
+        <p:nvSpPr>
+          <p:cNvPr id="30" name="Text 28"/>
+          <p:cNvSpPr txBox="1"/>
+          <p:nvPr/>
+        </p:nvSpPr>
+        <p:spPr>
+          <a:xfrm>
+            <a:off x="9784080" y="2514600"/>
+            <a:ext cx="1645920" cy="411480"/>
+          </a:xfrm>
+          <a:prstGeom prst="rect">
+            <a:avLst/>
+          </a:prstGeom>
+          <a:noFill/>
+          <a:ln/>
+        </p:spPr>
+        <p:txBody>
+          <a:bodyPr wrap="square" lIns="0" tIns="0" rIns="0" bIns="0" rtlCol="0" anchor="t"/>
+          <a:lstStyle/>
+          <a:p>
+            <a:pPr indent="0" marL="0">
+              <a:buNone/>
+            </a:pPr>
+            <a:r>
+              <a:rPr lang="en-US" sz="1800" b="1" dirty="0">
+                <a:solidFill>
+                  <a:schemeClr val="tx1"/>
+                </a:solidFill>
+              </a:rPr>
+              <a:t>Drop</a:t>
+            </a:r>
+            <a:endParaRPr lang="en-US" sz="1800" dirty="0"/>
+          </a:p>
+        </p:txBody>
+      </p:sp>
+      <p:sp>
+        <p:nvSpPr>
+          <p:cNvPr id="31" name="Text 29"/>
+          <p:cNvSpPr txBox="1"/>
+          <p:nvPr/>
+        </p:nvSpPr>
+        <p:spPr>
+          <a:xfrm>
+            <a:off x="9784080" y="2971800"/>
+            <a:ext cx="1645920" cy="822960"/>
+          </a:xfrm>
+          <a:prstGeom prst="rect">
+            <a:avLst/>
+          </a:prstGeom>
+          <a:noFill/>
+          <a:ln/>
+        </p:spPr>
+        <p:txBody>
+          <a:bodyPr wrap="square" lIns="0" tIns="0" rIns="0" bIns="0" rtlCol="0" anchor="t"/>
+          <a:lstStyle/>
+          <a:p>
+            <a:pPr indent="0" marL="0">
+              <a:buNone/>
+            </a:pPr>
+            <a:r>
+              <a:rPr lang="en-US" sz="1400" dirty="0">
+                <a:solidFill>
+                  <a:schemeClr val="tx2"/>
+                </a:solidFill>
+              </a:rPr>
+              <a:t>carry with the ore in the collision model; release</a:t>
+            </a:r>
+            <a:endParaRPr lang="en-US" sz="1400" dirty="0"/>
+          </a:p>
+        </p:txBody>
+      </p:sp>
+      <p:sp>
+        <p:nvSpPr>
+          <p:cNvPr id="32" name="stat-magnet"/>
+          <p:cNvSpPr txBox="1"/>
+          <p:nvPr/>
+        </p:nvSpPr>
+        <p:spPr>
+          <a:xfrm>
+            <a:off x="548640" y="4343400"/>
+            <a:ext cx="3291840" cy="868680"/>
+          </a:xfrm>
+          <a:prstGeom prst="rect">
+            <a:avLst/>
+          </a:prstGeom>
+          <a:noFill/>
+          <a:ln/>
+        </p:spPr>
+        <p:txBody>
+          <a:bodyPr wrap="square" lIns="0" tIns="0" rIns="0" bIns="0" rtlCol="0" anchor="b"/>
+          <a:lstStyle/>
+          <a:p>
+            <a:pPr indent="0" marL="0">
+              <a:buNone/>
+            </a:pPr>
+            <a:r>
+              <a:rPr lang="en-US" sz="4800" b="1" dirty="0">
+                <a:solidFill>
                   <a:schemeClr val="accent1"/>
                 </a:solidFill>
               </a:rPr>
-              <a:t>After: damped least squares</a:t>
-            </a:r>
-            <a:endParaRPr lang="en-US" sz="1600" dirty="0"/>
-          </a:p>
-        </p:txBody>
-      </p:sp>
-      <p:sp>
-        <p:nvSpPr>
-          <p:cNvPr id="9" name="Text 7"/>
+              <a:t>81 mm</a:t>
+            </a:r>
+            <a:endParaRPr lang="en-US" sz="4800" dirty="0"/>
+          </a:p>
+        </p:txBody>
+      </p:sp>
+      <p:sp>
+        <p:nvSpPr>
+          <p:cNvPr id="33" name="Text 31"/>
           <p:cNvSpPr txBox="1"/>
           <p:nvPr/>
         </p:nvSpPr>
         <p:spPr>
           <a:xfrm>
-            <a:off x="4434840" y="2103120"/>
-            <a:ext cx="2926080" cy="914400"/>
+            <a:off x="548640" y="5257800"/>
+            <a:ext cx="3291840" cy="640080"/>
           </a:xfrm>
           <a:prstGeom prst="rect">
             <a:avLst/>
@@ -11637,12 +13170,48 @@
               <a:buNone/>
             </a:pPr>
             <a:r>
+              <a:rPr lang="en-US" sz="1400" dirty="0">
+                <a:solidFill>
+                  <a:schemeClr val="tx2"/>
+                </a:solidFill>
+              </a:rPr>
+              <a:t>magnet disc on a 101.6 mm face: about 10 mm to spare</a:t>
+            </a:r>
+            <a:endParaRPr lang="en-US" sz="1400" dirty="0"/>
+          </a:p>
+        </p:txBody>
+      </p:sp>
+      <p:sp>
+        <p:nvSpPr>
+          <p:cNvPr id="34" name="stat-force"/>
+          <p:cNvSpPr txBox="1"/>
+          <p:nvPr/>
+        </p:nvSpPr>
+        <p:spPr>
+          <a:xfrm>
+            <a:off x="4297680" y="4343400"/>
+            <a:ext cx="3291840" cy="868680"/>
+          </a:xfrm>
+          <a:prstGeom prst="rect">
+            <a:avLst/>
+          </a:prstGeom>
+          <a:noFill/>
+          <a:ln/>
+        </p:spPr>
+        <p:txBody>
+          <a:bodyPr wrap="square" lIns="0" tIns="0" rIns="0" bIns="0" rtlCol="0" anchor="b"/>
+          <a:lstStyle/>
+          <a:p>
+            <a:pPr indent="0" marL="0">
+              <a:buNone/>
+            </a:pPr>
+            <a:r>
               <a:rPr lang="en-US" sz="4800" b="1" dirty="0">
                 <a:solidFill>
                   <a:schemeClr val="accent1"/>
                 </a:solidFill>
               </a:rPr>
-              <a:t>0.1-0.4 s</a:t>
+              <a:t>1.47 N</a:t>
             </a:r>
             <a:endParaRPr lang="en-US" sz="4800" dirty="0"/>
           </a:p>
@@ -11650,14 +13219,14 @@
       </p:sp>
       <p:sp>
         <p:nvSpPr>
-          <p:cNvPr id="10" name="Text 8"/>
+          <p:cNvPr id="35" name="Text 33"/>
           <p:cNvSpPr txBox="1"/>
           <p:nvPr/>
         </p:nvSpPr>
         <p:spPr>
           <a:xfrm>
-            <a:off x="4434840" y="3063240"/>
-            <a:ext cx="2926080" cy="640080"/>
+            <a:off x="4297680" y="5257800"/>
+            <a:ext cx="3291840" cy="640080"/>
           </a:xfrm>
           <a:prstGeom prst="rect">
             <a:avLst/>
@@ -11678,7 +13247,7 @@
                   <a:schemeClr val="tx2"/>
                 </a:solidFill>
               </a:rPr>
-              <a:t>per plan, with every safety check kept</a:t>
+              <a:t>force reading for a held 0.15 kg ore</a:t>
             </a:r>
             <a:endParaRPr lang="en-US" sz="1400" dirty="0"/>
           </a:p>
@@ -11686,14 +13255,50 @@
       </p:sp>
       <p:sp>
         <p:nvSpPr>
-          <p:cNvPr id="11" name="Text 9"/>
+          <p:cNvPr id="36" name="stat-stops"/>
           <p:cNvSpPr txBox="1"/>
           <p:nvPr/>
         </p:nvSpPr>
         <p:spPr>
           <a:xfrm>
-            <a:off x="7955280" y="1463040"/>
-            <a:ext cx="3657600" cy="365760"/>
+            <a:off x="8046720" y="4343400"/>
+            <a:ext cx="3566160" cy="868680"/>
+          </a:xfrm>
+          <a:prstGeom prst="rect">
+            <a:avLst/>
+          </a:prstGeom>
+          <a:noFill/>
+          <a:ln/>
+        </p:spPr>
+        <p:txBody>
+          <a:bodyPr wrap="square" lIns="0" tIns="0" rIns="0" bIns="0" rtlCol="0" anchor="b"/>
+          <a:lstStyle/>
+          <a:p>
+            <a:pPr indent="0" marL="0">
+              <a:buNone/>
+            </a:pPr>
+            <a:r>
+              <a:rPr lang="en-US" sz="4800" b="1" dirty="0">
+                <a:solidFill>
+                  <a:schemeClr val="accent3"/>
+                </a:solidFill>
+              </a:rPr>
+              <a:t>0 stops</a:t>
+            </a:r>
+            <a:endParaRPr lang="en-US" sz="4800" dirty="0"/>
+          </a:p>
+        </p:txBody>
+      </p:sp>
+      <p:sp>
+        <p:nvSpPr>
+          <p:cNvPr id="37" name="Text 35"/>
+          <p:cNvSpPr txBox="1"/>
+          <p:nvPr/>
+        </p:nvSpPr>
+        <p:spPr>
+          <a:xfrm>
+            <a:off x="8046720" y="5257800"/>
+            <a:ext cx="3566160" cy="640080"/>
           </a:xfrm>
           <a:prstGeom prst="rect">
             <a:avLst/>
@@ -11709,424 +13314,12 @@
               <a:buNone/>
             </a:pPr>
             <a:r>
-              <a:rPr lang="en-US" sz="1700" b="1" dirty="0">
-                <a:solidFill>
-                  <a:schemeClr val="tx1"/>
-                </a:solidFill>
-              </a:rPr>
-              <a:t>5 constraints, not 6</a:t>
-            </a:r>
-            <a:endParaRPr lang="en-US" sz="1700" dirty="0"/>
-          </a:p>
-        </p:txBody>
-      </p:sp>
-      <p:sp>
-        <p:nvSpPr>
-          <p:cNvPr id="12" name="Text 10"/>
-          <p:cNvSpPr txBox="1"/>
-          <p:nvPr/>
-        </p:nvSpPr>
-        <p:spPr>
-          <a:xfrm>
-            <a:off x="7955280" y="1828800"/>
-            <a:ext cx="3657600" cy="685800"/>
-          </a:xfrm>
-          <a:prstGeom prst="rect">
-            <a:avLst/>
-          </a:prstGeom>
-          <a:noFill/>
-          <a:ln/>
-        </p:spPr>
-        <p:txBody>
-          <a:bodyPr wrap="square" lIns="0" tIns="0" rIns="0" bIns="0" rtlCol="0" anchor="t"/>
-          <a:lstStyle/>
-          <a:p>
-            <a:pPr indent="0" marL="0">
-              <a:buNone/>
-            </a:pPr>
-            <a:r>
-              <a:rPr lang="en-US" sz="1350" dirty="0">
+              <a:rPr lang="en-US" sz="1400" dirty="0">
                 <a:solidFill>
                   <a:schemeClr val="tx2"/>
                 </a:solidFill>
               </a:rPr>
-              <a:t>Tool position + vertical axis; rotation about vertical is free because the magnet is round</a:t>
-            </a:r>
-            <a:endParaRPr lang="en-US" sz="1350" dirty="0"/>
-          </a:p>
-        </p:txBody>
-      </p:sp>
-      <p:sp>
-        <p:nvSpPr>
-          <p:cNvPr id="13" name="Text 11"/>
-          <p:cNvSpPr txBox="1"/>
-          <p:nvPr/>
-        </p:nvSpPr>
-        <p:spPr>
-          <a:xfrm>
-            <a:off x="7955280" y="2578608"/>
-            <a:ext cx="3657600" cy="365760"/>
-          </a:xfrm>
-          <a:prstGeom prst="rect">
-            <a:avLst/>
-          </a:prstGeom>
-          <a:noFill/>
-          <a:ln/>
-        </p:spPr>
-        <p:txBody>
-          <a:bodyPr wrap="square" lIns="0" tIns="0" rIns="0" bIns="0" rtlCol="0" anchor="t"/>
-          <a:lstStyle/>
-          <a:p>
-            <a:pPr indent="0" marL="0">
-              <a:buNone/>
-            </a:pPr>
-            <a:r>
-              <a:rPr lang="en-US" sz="1700" b="1" dirty="0">
-                <a:solidFill>
-                  <a:schemeClr val="tx1"/>
-                </a:solidFill>
-              </a:rPr>
-              <a:t>Checks once, not every step</a:t>
-            </a:r>
-            <a:endParaRPr lang="en-US" sz="1700" dirty="0"/>
-          </a:p>
-        </p:txBody>
-      </p:sp>
-      <p:sp>
-        <p:nvSpPr>
-          <p:cNvPr id="14" name="Text 12"/>
-          <p:cNvSpPr txBox="1"/>
-          <p:nvPr/>
-        </p:nvSpPr>
-        <p:spPr>
-          <a:xfrm>
-            <a:off x="7955280" y="2944368"/>
-            <a:ext cx="3657600" cy="685800"/>
-          </a:xfrm>
-          <a:prstGeom prst="rect">
-            <a:avLst/>
-          </a:prstGeom>
-          <a:noFill/>
-          <a:ln/>
-        </p:spPr>
-        <p:txBody>
-          <a:bodyPr wrap="square" lIns="0" tIns="0" rIns="0" bIns="0" rtlCol="0" anchor="t"/>
-          <a:lstStyle/>
-          <a:p>
-            <a:pPr indent="0" marL="0">
-              <a:buNone/>
-            </a:pPr>
-            <a:r>
-              <a:rPr lang="en-US" sz="1350" dirty="0">
-                <a:solidFill>
-                  <a:schemeClr val="tx2"/>
-                </a:solidFill>
-              </a:rPr>
-              <a:t>Limits, 3 cm clearance, singularity and tilt are tested on the converged result</a:t>
-            </a:r>
-            <a:endParaRPr lang="en-US" sz="1350" dirty="0"/>
-          </a:p>
-        </p:txBody>
-      </p:sp>
-      <p:sp>
-        <p:nvSpPr>
-          <p:cNvPr id="15" name="Text 13"/>
-          <p:cNvSpPr txBox="1"/>
-          <p:nvPr/>
-        </p:nvSpPr>
-        <p:spPr>
-          <a:xfrm>
-            <a:off x="7955280" y="3694176"/>
-            <a:ext cx="3657600" cy="365760"/>
-          </a:xfrm>
-          <a:prstGeom prst="rect">
-            <a:avLst/>
-          </a:prstGeom>
-          <a:noFill/>
-          <a:ln/>
-        </p:spPr>
-        <p:txBody>
-          <a:bodyPr wrap="square" lIns="0" tIns="0" rIns="0" bIns="0" rtlCol="0" anchor="t"/>
-          <a:lstStyle/>
-          <a:p>
-            <a:pPr indent="0" marL="0">
-              <a:buNone/>
-            </a:pPr>
-            <a:r>
-              <a:rPr lang="en-US" sz="1700" b="1" dirty="0">
-                <a:solidFill>
-                  <a:schemeClr val="tx1"/>
-                </a:solidFill>
-              </a:rPr>
-              <a:t>A memory of solutions</a:t>
-            </a:r>
-            <a:endParaRPr lang="en-US" sz="1700" dirty="0"/>
-          </a:p>
-        </p:txBody>
-      </p:sp>
-      <p:sp>
-        <p:nvSpPr>
-          <p:cNvPr id="16" name="Text 14"/>
-          <p:cNvSpPr txBox="1"/>
-          <p:nvPr/>
-        </p:nvSpPr>
-        <p:spPr>
-          <a:xfrm>
-            <a:off x="7955280" y="4059936"/>
-            <a:ext cx="3657600" cy="685800"/>
-          </a:xfrm>
-          <a:prstGeom prst="rect">
-            <a:avLst/>
-          </a:prstGeom>
-          <a:noFill/>
-          <a:ln/>
-        </p:spPr>
-        <p:txBody>
-          <a:bodyPr wrap="square" lIns="0" tIns="0" rIns="0" bIns="0" rtlCol="0" anchor="t"/>
-          <a:lstStyle/>
-          <a:p>
-            <a:pPr indent="0" marL="0">
-              <a:buNone/>
-            </a:pPr>
-            <a:r>
-              <a:rPr lang="en-US" sz="1350" dirty="0">
-                <a:solidFill>
-                  <a:schemeClr val="tx2"/>
-                </a:solidFill>
-              </a:rPr>
-              <a:t>Every solved pose is reused as a seed, so the arm always finds its way back</a:t>
-            </a:r>
-            <a:endParaRPr lang="en-US" sz="1350" dirty="0"/>
-          </a:p>
-        </p:txBody>
-      </p:sp>
-      <p:sp>
-        <p:nvSpPr>
-          <p:cNvPr id="17" name="Text 15"/>
-          <p:cNvSpPr txBox="1"/>
-          <p:nvPr/>
-        </p:nvSpPr>
-        <p:spPr>
-          <a:xfrm>
-            <a:off x="7955280" y="4809744"/>
-            <a:ext cx="3657600" cy="365760"/>
-          </a:xfrm>
-          <a:prstGeom prst="rect">
-            <a:avLst/>
-          </a:prstGeom>
-          <a:noFill/>
-          <a:ln/>
-        </p:spPr>
-        <p:txBody>
-          <a:bodyPr wrap="square" lIns="0" tIns="0" rIns="0" bIns="0" rtlCol="0" anchor="t"/>
-          <a:lstStyle/>
-          <a:p>
-            <a:pPr indent="0" marL="0">
-              <a:buNone/>
-            </a:pPr>
-            <a:r>
-              <a:rPr lang="en-US" sz="1700" b="1" dirty="0">
-                <a:solidFill>
-                  <a:schemeClr val="tx1"/>
-                </a:solidFill>
-              </a:rPr>
-              <a:t>Straight vertical moves</a:t>
-            </a:r>
-            <a:endParaRPr lang="en-US" sz="1700" dirty="0"/>
-          </a:p>
-        </p:txBody>
-      </p:sp>
-      <p:sp>
-        <p:nvSpPr>
-          <p:cNvPr id="18" name="Text 16"/>
-          <p:cNvSpPr txBox="1"/>
-          <p:nvPr/>
-        </p:nvSpPr>
-        <p:spPr>
-          <a:xfrm>
-            <a:off x="7955280" y="5175504"/>
-            <a:ext cx="3657600" cy="685800"/>
-          </a:xfrm>
-          <a:prstGeom prst="rect">
-            <a:avLst/>
-          </a:prstGeom>
-          <a:noFill/>
-          <a:ln/>
-        </p:spPr>
-        <p:txBody>
-          <a:bodyPr wrap="square" lIns="0" tIns="0" rIns="0" bIns="0" rtlCol="0" anchor="t"/>
-          <a:lstStyle/>
-          <a:p>
-            <a:pPr indent="0" marL="0">
-              <a:buNone/>
-            </a:pPr>
-            <a:r>
-              <a:rPr lang="en-US" sz="1350" dirty="0">
-                <a:solidFill>
-                  <a:schemeClr val="tx2"/>
-                </a:solidFill>
-              </a:rPr>
-              <a:t>Resolved-rate control: tool velocity mapped to joints through the Jacobian</a:t>
-            </a:r>
-            <a:endParaRPr lang="en-US" sz="1350" dirty="0"/>
-          </a:p>
-        </p:txBody>
-      </p:sp>
-      <p:sp>
-        <p:nvSpPr>
-          <p:cNvPr id="19" name="dls-equation"/>
-          <p:cNvSpPr txBox="1"/>
-          <p:nvPr/>
-        </p:nvSpPr>
-        <p:spPr>
-          <a:xfrm>
-            <a:off x="548640" y="4343400"/>
-            <a:ext cx="6949440" cy="548640"/>
-          </a:xfrm>
-          <a:prstGeom prst="rect">
-            <a:avLst/>
-          </a:prstGeom>
-          <a:noFill/>
-          <a:ln/>
-        </p:spPr>
-        <p:txBody>
-          <a:bodyPr wrap="square" lIns="0" tIns="0" rIns="0" bIns="0" rtlCol="0" anchor="t"/>
-          <a:lstStyle/>
-          <a:p>
-            <a:pPr indent="0" marL="0">
-              <a:buNone/>
-            </a:pPr>
-            <a:r>
-              <a:rPr lang="en-US" sz="2200" dirty="0">
-                <a:solidFill>
-                  <a:schemeClr val="tx1"/>
-                </a:solidFill>
-              </a:rPr>
-              <a:t>Δq = J</a:t>
-            </a:r>
-            <a:pPr indent="0" marL="0">
-              <a:buNone/>
-            </a:pPr>
-            <a:r>
-              <a:rPr lang="en-US" sz="2200" baseline="30000" dirty="0">
-                <a:solidFill>
-                  <a:schemeClr val="tx1"/>
-                </a:solidFill>
-              </a:rPr>
-              <a:t>T</a:t>
-            </a:r>
-            <a:pPr indent="0" marL="0">
-              <a:buNone/>
-            </a:pPr>
-            <a:r>
-              <a:rPr lang="en-US" sz="2200" dirty="0">
-                <a:solidFill>
-                  <a:schemeClr val="tx1"/>
-                </a:solidFill>
-              </a:rPr>
-              <a:t> (J J</a:t>
-            </a:r>
-            <a:pPr indent="0" marL="0">
-              <a:buNone/>
-            </a:pPr>
-            <a:r>
-              <a:rPr lang="en-US" sz="2200" baseline="30000" dirty="0">
-                <a:solidFill>
-                  <a:schemeClr val="tx1"/>
-                </a:solidFill>
-              </a:rPr>
-              <a:t>T</a:t>
-            </a:r>
-            <a:pPr indent="0" marL="0">
-              <a:buNone/>
-            </a:pPr>
-            <a:r>
-              <a:rPr lang="en-US" sz="2200" dirty="0">
-                <a:solidFill>
-                  <a:schemeClr val="tx1"/>
-                </a:solidFill>
-              </a:rPr>
-              <a:t> + λ</a:t>
-            </a:r>
-            <a:pPr indent="0" marL="0">
-              <a:buNone/>
-            </a:pPr>
-            <a:r>
-              <a:rPr lang="en-US" sz="2200" baseline="30000" dirty="0">
-                <a:solidFill>
-                  <a:schemeClr val="tx1"/>
-                </a:solidFill>
-              </a:rPr>
-              <a:t>2</a:t>
-            </a:r>
-            <a:pPr indent="0" marL="0">
-              <a:buNone/>
-            </a:pPr>
-            <a:r>
-              <a:rPr lang="en-US" sz="2200" dirty="0">
-                <a:solidFill>
-                  <a:schemeClr val="tx1"/>
-                </a:solidFill>
-              </a:rPr>
-              <a:t> I)</a:t>
-            </a:r>
-            <a:pPr indent="0" marL="0">
-              <a:buNone/>
-            </a:pPr>
-            <a:r>
-              <a:rPr lang="en-US" sz="2200" baseline="30000" dirty="0">
-                <a:solidFill>
-                  <a:schemeClr val="tx1"/>
-                </a:solidFill>
-              </a:rPr>
-              <a:t>−1</a:t>
-            </a:r>
-            <a:pPr indent="0" marL="0">
-              <a:buNone/>
-            </a:pPr>
-            <a:r>
-              <a:rPr lang="en-US" sz="2200" dirty="0">
-                <a:solidFill>
-                  <a:schemeClr val="tx1"/>
-                </a:solidFill>
-              </a:rPr>
-              <a:t> e,   λ = 0.02</a:t>
-            </a:r>
-            <a:endParaRPr lang="en-US" sz="2200" dirty="0"/>
-          </a:p>
-        </p:txBody>
-      </p:sp>
-      <p:sp>
-        <p:nvSpPr>
-          <p:cNvPr id="20" name="Text 18"/>
-          <p:cNvSpPr txBox="1"/>
-          <p:nvPr/>
-        </p:nvSpPr>
-        <p:spPr>
-          <a:xfrm>
-            <a:off x="548640" y="4937760"/>
-            <a:ext cx="6949440" cy="457200"/>
-          </a:xfrm>
-          <a:prstGeom prst="rect">
-            <a:avLst/>
-          </a:prstGeom>
-          <a:noFill/>
-          <a:ln/>
-        </p:spPr>
-        <p:txBody>
-          <a:bodyPr wrap="square" lIns="0" tIns="0" rIns="0" bIns="0" rtlCol="0" anchor="t"/>
-          <a:lstStyle/>
-          <a:p>
-            <a:pPr indent="0" marL="0">
-              <a:buNone/>
-            </a:pPr>
-            <a:r>
-              <a:rPr lang="en-US" sz="1400" dirty="0">
-                <a:solidFill>
-                  <a:schemeClr val="tx2"/>
-                </a:solidFill>
-              </a:rPr>
-              <a:t>e = position error and tool-axis tilt; J = the matching 5 rows of the arm's Jacobian</a:t>
+              <a:t>safety stops across every trial</a:t>
             </a:r>
             <a:endParaRPr lang="en-US" sz="1400" dirty="0"/>
           </a:p>
@@ -12234,56 +13427,34 @@
                   <a:schemeClr val="tx1"/>
                 </a:solidFill>
               </a:rPr>
-              <a:t>A*, then shortcut, then tighten</a:t>
+              <a:t>A purpose-built IK solver plans 300x faster</a:t>
             </a:r>
             <a:endParaRPr lang="en-US" sz="3200" dirty="0"/>
           </a:p>
         </p:txBody>
       </p:sp>
-      <p:pic>
-        <p:nvPicPr>
-          <p:cNvPr id="3" name="planned-paths" descr="Three planned paths on the arena occupancy grid between home, ore drop and arm poses">    </p:cNvPr>
-          <p:cNvPicPr>
-            <a:picLocks noChangeAspect="1"/>
-          </p:cNvPicPr>
-          <p:nvPr/>
-        </p:nvPicPr>
-        <p:blipFill>
-          <a:blip r:embed="rId1"/>
-          <a:stretch>
-            <a:fillRect/>
-          </a:stretch>
-        </p:blipFill>
-        <p:spPr>
-          <a:xfrm>
-            <a:off x="457200" y="1234440"/>
-            <a:ext cx="6949440" cy="4791456"/>
-          </a:xfrm>
-          <a:prstGeom prst="rect">
-            <a:avLst/>
-          </a:prstGeom>
-        </p:spPr>
-      </p:pic>
-      <p:sp>
-        <p:nvSpPr>
-          <p:cNvPr id="4" name="plan-dot-1"/>
+      <p:sp>
+        <p:nvSpPr>
+          <p:cNvPr id="3" name="before-card"/>
           <p:cNvSpPr/>
           <p:nvPr/>
         </p:nvSpPr>
         <p:spPr>
           <a:xfrm>
-            <a:off x="7772400" y="1417320"/>
-            <a:ext cx="457200" cy="457200"/>
-          </a:xfrm>
-          <a:prstGeom prst="ellipse">
-            <a:avLst/>
+            <a:off x="548640" y="1463040"/>
+            <a:ext cx="3291840" cy="2377440"/>
+          </a:xfrm>
+          <a:prstGeom prst="roundRect">
+            <a:avLst>
+              <a:gd name="adj" fmla="val 3077"/>
+            </a:avLst>
           </a:prstGeom>
           <a:solidFill>
-            <a:schemeClr val="accent1"/>
+            <a:schemeClr val="bg2"/>
           </a:solidFill>
           <a:ln w="12700">
             <a:solidFill>
-              <a:schemeClr val="accent1"/>
+              <a:schemeClr val="bg2"/>
             </a:solidFill>
             <a:prstDash val="solid"/>
           </a:ln>
@@ -12291,35 +13462,35 @@
       </p:sp>
       <p:sp>
         <p:nvSpPr>
-          <p:cNvPr id="5" name="Text 2"/>
+          <p:cNvPr id="4" name="Text 2"/>
           <p:cNvSpPr txBox="1"/>
           <p:nvPr/>
         </p:nvSpPr>
         <p:spPr>
           <a:xfrm>
-            <a:off x="7772400" y="1417320"/>
-            <a:ext cx="457200" cy="457200"/>
-          </a:xfrm>
-          <a:prstGeom prst="rect">
-            <a:avLst/>
-          </a:prstGeom>
-          <a:noFill/>
-          <a:ln/>
-        </p:spPr>
-        <p:txBody>
-          <a:bodyPr wrap="square" lIns="0" tIns="0" rIns="0" bIns="0" rtlCol="0" anchor="ctr"/>
-          <a:lstStyle/>
-          <a:p>
-            <a:pPr algn="ctr" indent="0" marL="0">
+            <a:off x="777240" y="1645920"/>
+            <a:ext cx="2926080" cy="365760"/>
+          </a:xfrm>
+          <a:prstGeom prst="rect">
+            <a:avLst/>
+          </a:prstGeom>
+          <a:noFill/>
+          <a:ln/>
+        </p:spPr>
+        <p:txBody>
+          <a:bodyPr wrap="square" lIns="0" tIns="0" rIns="0" bIns="0" rtlCol="0" anchor="t"/>
+          <a:lstStyle/>
+          <a:p>
+            <a:pPr indent="0" marL="0">
               <a:buNone/>
             </a:pPr>
             <a:r>
               <a:rPr lang="en-US" sz="1600" b="1" dirty="0">
                 <a:solidFill>
-                  <a:schemeClr val="bg1"/>
-                </a:solidFill>
-              </a:rPr>
-              <a:t>1</a:t>
+                  <a:schemeClr val="tx2"/>
+                </a:solidFill>
+              </a:rPr>
+              <a:t>Before: SLSQP optimiser</a:t>
             </a:r>
             <a:endParaRPr lang="en-US" sz="1600" dirty="0"/>
           </a:p>
@@ -12327,14 +13498,14 @@
       </p:sp>
       <p:sp>
         <p:nvSpPr>
-          <p:cNvPr id="6" name="Text 3"/>
+          <p:cNvPr id="5" name="Text 3"/>
           <p:cNvSpPr txBox="1"/>
           <p:nvPr/>
         </p:nvSpPr>
         <p:spPr>
           <a:xfrm>
-            <a:off x="8412480" y="1399032"/>
-            <a:ext cx="3200400" cy="365760"/>
+            <a:off x="777240" y="2103120"/>
+            <a:ext cx="2926080" cy="914400"/>
           </a:xfrm>
           <a:prstGeom prst="rect">
             <a:avLst/>
@@ -12350,27 +13521,27 @@
               <a:buNone/>
             </a:pPr>
             <a:r>
-              <a:rPr lang="en-US" sz="1800" b="1" dirty="0">
-                <a:solidFill>
-                  <a:schemeClr val="tx1"/>
-                </a:solidFill>
-              </a:rPr>
-              <a:t>Clearance map</a:t>
-            </a:r>
-            <a:endParaRPr lang="en-US" sz="1800" dirty="0"/>
-          </a:p>
-        </p:txBody>
-      </p:sp>
-      <p:sp>
-        <p:nvSpPr>
-          <p:cNvPr id="7" name="Text 4"/>
+              <a:rPr lang="en-US" sz="4800" b="1" dirty="0">
+                <a:solidFill>
+                  <a:schemeClr val="accent5"/>
+                </a:solidFill>
+              </a:rPr>
+              <a:t>minutes</a:t>
+            </a:r>
+            <a:endParaRPr lang="en-US" sz="4800" dirty="0"/>
+          </a:p>
+        </p:txBody>
+      </p:sp>
+      <p:sp>
+        <p:nvSpPr>
+          <p:cNvPr id="6" name="Text 4"/>
           <p:cNvSpPr txBox="1"/>
           <p:nvPr/>
         </p:nvSpPr>
         <p:spPr>
           <a:xfrm>
-            <a:off x="8412480" y="1783080"/>
-            <a:ext cx="3200400" cy="685800"/>
+            <a:off x="777240" y="3063240"/>
+            <a:ext cx="2926080" cy="640080"/>
           </a:xfrm>
           <a:prstGeom prst="rect">
             <a:avLst/>
@@ -12386,37 +13557,39 @@
               <a:buNone/>
             </a:pPr>
             <a:r>
-              <a:rPr lang="en-US" sz="1350" dirty="0">
+              <a:rPr lang="en-US" sz="1400" dirty="0">
                 <a:solidFill>
                   <a:schemeClr val="tx2"/>
                 </a:solidFill>
               </a:rPr>
-              <a:t>Distance transform of the 5 mm /map: every cell knows its distance to a rock</a:t>
-            </a:r>
-            <a:endParaRPr lang="en-US" sz="1350" dirty="0"/>
-          </a:p>
-        </p:txBody>
-      </p:sp>
-      <p:sp>
-        <p:nvSpPr>
-          <p:cNvPr id="8" name="plan-dot-2"/>
+              <a:t>per plan; stuck when starting above the containers</a:t>
+            </a:r>
+            <a:endParaRPr lang="en-US" sz="1400" dirty="0"/>
+          </a:p>
+        </p:txBody>
+      </p:sp>
+      <p:sp>
+        <p:nvSpPr>
+          <p:cNvPr id="7" name="after-card"/>
           <p:cNvSpPr/>
           <p:nvPr/>
         </p:nvSpPr>
         <p:spPr>
           <a:xfrm>
-            <a:off x="7772400" y="2560320"/>
-            <a:ext cx="457200" cy="457200"/>
-          </a:xfrm>
-          <a:prstGeom prst="ellipse">
-            <a:avLst/>
+            <a:off x="4206240" y="1463040"/>
+            <a:ext cx="3291840" cy="2377440"/>
+          </a:xfrm>
+          <a:prstGeom prst="roundRect">
+            <a:avLst>
+              <a:gd name="adj" fmla="val 3077"/>
+            </a:avLst>
           </a:prstGeom>
           <a:solidFill>
-            <a:schemeClr val="accent1"/>
+            <a:srgbClr val="FBEDE6"/>
           </a:solidFill>
-          <a:ln w="12700">
+          <a:ln w="22225">
             <a:solidFill>
-              <a:schemeClr val="accent1"/>
+              <a:srgbClr val="C4501F"/>
             </a:solidFill>
             <a:prstDash val="solid"/>
           </a:ln>
@@ -12424,50 +13597,534 @@
       </p:sp>
       <p:sp>
         <p:nvSpPr>
-          <p:cNvPr id="9" name="Text 6"/>
+          <p:cNvPr id="8" name="Text 6"/>
           <p:cNvSpPr txBox="1"/>
           <p:nvPr/>
         </p:nvSpPr>
         <p:spPr>
           <a:xfrm>
-            <a:off x="7772400" y="2560320"/>
-            <a:ext cx="457200" cy="457200"/>
-          </a:xfrm>
-          <a:prstGeom prst="rect">
-            <a:avLst/>
-          </a:prstGeom>
-          <a:noFill/>
-          <a:ln/>
-        </p:spPr>
-        <p:txBody>
-          <a:bodyPr wrap="square" lIns="0" tIns="0" rIns="0" bIns="0" rtlCol="0" anchor="ctr"/>
-          <a:lstStyle/>
-          <a:p>
-            <a:pPr algn="ctr" indent="0" marL="0">
+            <a:off x="4434840" y="1645920"/>
+            <a:ext cx="2926080" cy="365760"/>
+          </a:xfrm>
+          <a:prstGeom prst="rect">
+            <a:avLst/>
+          </a:prstGeom>
+          <a:noFill/>
+          <a:ln/>
+        </p:spPr>
+        <p:txBody>
+          <a:bodyPr wrap="square" lIns="0" tIns="0" rIns="0" bIns="0" rtlCol="0" anchor="t"/>
+          <a:lstStyle/>
+          <a:p>
+            <a:pPr indent="0" marL="0">
               <a:buNone/>
             </a:pPr>
             <a:r>
               <a:rPr lang="en-US" sz="1600" b="1" dirty="0">
                 <a:solidFill>
-                  <a:schemeClr val="bg1"/>
+                  <a:schemeClr val="accent1"/>
+                </a:solidFill>
+              </a:rPr>
+              <a:t>After: damped least squares</a:t>
+            </a:r>
+            <a:endParaRPr lang="en-US" sz="1600" dirty="0"/>
+          </a:p>
+        </p:txBody>
+      </p:sp>
+      <p:sp>
+        <p:nvSpPr>
+          <p:cNvPr id="9" name="Text 7"/>
+          <p:cNvSpPr txBox="1"/>
+          <p:nvPr/>
+        </p:nvSpPr>
+        <p:spPr>
+          <a:xfrm>
+            <a:off x="4434840" y="2103120"/>
+            <a:ext cx="2926080" cy="914400"/>
+          </a:xfrm>
+          <a:prstGeom prst="rect">
+            <a:avLst/>
+          </a:prstGeom>
+          <a:noFill/>
+          <a:ln/>
+        </p:spPr>
+        <p:txBody>
+          <a:bodyPr wrap="square" lIns="0" tIns="0" rIns="0" bIns="0" rtlCol="0" anchor="t"/>
+          <a:lstStyle/>
+          <a:p>
+            <a:pPr indent="0" marL="0">
+              <a:buNone/>
+            </a:pPr>
+            <a:r>
+              <a:rPr lang="en-US" sz="4800" b="1" dirty="0">
+                <a:solidFill>
+                  <a:schemeClr val="accent1"/>
+                </a:solidFill>
+              </a:rPr>
+              <a:t>0.1-0.4 s</a:t>
+            </a:r>
+            <a:endParaRPr lang="en-US" sz="4800" dirty="0"/>
+          </a:p>
+        </p:txBody>
+      </p:sp>
+      <p:sp>
+        <p:nvSpPr>
+          <p:cNvPr id="10" name="Text 8"/>
+          <p:cNvSpPr txBox="1"/>
+          <p:nvPr/>
+        </p:nvSpPr>
+        <p:spPr>
+          <a:xfrm>
+            <a:off x="4434840" y="3063240"/>
+            <a:ext cx="2926080" cy="640080"/>
+          </a:xfrm>
+          <a:prstGeom prst="rect">
+            <a:avLst/>
+          </a:prstGeom>
+          <a:noFill/>
+          <a:ln/>
+        </p:spPr>
+        <p:txBody>
+          <a:bodyPr wrap="square" lIns="0" tIns="0" rIns="0" bIns="0" rtlCol="0" anchor="t"/>
+          <a:lstStyle/>
+          <a:p>
+            <a:pPr indent="0" marL="0">
+              <a:buNone/>
+            </a:pPr>
+            <a:r>
+              <a:rPr lang="en-US" sz="1400" dirty="0">
+                <a:solidFill>
+                  <a:schemeClr val="tx2"/>
+                </a:solidFill>
+              </a:rPr>
+              <a:t>per plan, with every safety check kept</a:t>
+            </a:r>
+            <a:endParaRPr lang="en-US" sz="1400" dirty="0"/>
+          </a:p>
+        </p:txBody>
+      </p:sp>
+      <p:sp>
+        <p:nvSpPr>
+          <p:cNvPr id="11" name="Text 9"/>
+          <p:cNvSpPr txBox="1"/>
+          <p:nvPr/>
+        </p:nvSpPr>
+        <p:spPr>
+          <a:xfrm>
+            <a:off x="7955280" y="1463040"/>
+            <a:ext cx="3657600" cy="365760"/>
+          </a:xfrm>
+          <a:prstGeom prst="rect">
+            <a:avLst/>
+          </a:prstGeom>
+          <a:noFill/>
+          <a:ln/>
+        </p:spPr>
+        <p:txBody>
+          <a:bodyPr wrap="square" lIns="0" tIns="0" rIns="0" bIns="0" rtlCol="0" anchor="t"/>
+          <a:lstStyle/>
+          <a:p>
+            <a:pPr indent="0" marL="0">
+              <a:buNone/>
+            </a:pPr>
+            <a:r>
+              <a:rPr lang="en-US" sz="1700" b="1" dirty="0">
+                <a:solidFill>
+                  <a:schemeClr val="tx1"/>
+                </a:solidFill>
+              </a:rPr>
+              <a:t>5 constraints, not 6</a:t>
+            </a:r>
+            <a:endParaRPr lang="en-US" sz="1700" dirty="0"/>
+          </a:p>
+        </p:txBody>
+      </p:sp>
+      <p:sp>
+        <p:nvSpPr>
+          <p:cNvPr id="12" name="Text 10"/>
+          <p:cNvSpPr txBox="1"/>
+          <p:nvPr/>
+        </p:nvSpPr>
+        <p:spPr>
+          <a:xfrm>
+            <a:off x="7955280" y="1828800"/>
+            <a:ext cx="3657600" cy="685800"/>
+          </a:xfrm>
+          <a:prstGeom prst="rect">
+            <a:avLst/>
+          </a:prstGeom>
+          <a:noFill/>
+          <a:ln/>
+        </p:spPr>
+        <p:txBody>
+          <a:bodyPr wrap="square" lIns="0" tIns="0" rIns="0" bIns="0" rtlCol="0" anchor="t"/>
+          <a:lstStyle/>
+          <a:p>
+            <a:pPr indent="0" marL="0">
+              <a:buNone/>
+            </a:pPr>
+            <a:r>
+              <a:rPr lang="en-US" sz="1350" dirty="0">
+                <a:solidFill>
+                  <a:schemeClr val="tx2"/>
+                </a:solidFill>
+              </a:rPr>
+              <a:t>Tool position + vertical axis; rotation about vertical is free because the magnet is round</a:t>
+            </a:r>
+            <a:endParaRPr lang="en-US" sz="1350" dirty="0"/>
+          </a:p>
+        </p:txBody>
+      </p:sp>
+      <p:sp>
+        <p:nvSpPr>
+          <p:cNvPr id="13" name="Text 11"/>
+          <p:cNvSpPr txBox="1"/>
+          <p:nvPr/>
+        </p:nvSpPr>
+        <p:spPr>
+          <a:xfrm>
+            <a:off x="7955280" y="2578608"/>
+            <a:ext cx="3657600" cy="365760"/>
+          </a:xfrm>
+          <a:prstGeom prst="rect">
+            <a:avLst/>
+          </a:prstGeom>
+          <a:noFill/>
+          <a:ln/>
+        </p:spPr>
+        <p:txBody>
+          <a:bodyPr wrap="square" lIns="0" tIns="0" rIns="0" bIns="0" rtlCol="0" anchor="t"/>
+          <a:lstStyle/>
+          <a:p>
+            <a:pPr indent="0" marL="0">
+              <a:buNone/>
+            </a:pPr>
+            <a:r>
+              <a:rPr lang="en-US" sz="1700" b="1" dirty="0">
+                <a:solidFill>
+                  <a:schemeClr val="tx1"/>
+                </a:solidFill>
+              </a:rPr>
+              <a:t>Checks once, not every step</a:t>
+            </a:r>
+            <a:endParaRPr lang="en-US" sz="1700" dirty="0"/>
+          </a:p>
+        </p:txBody>
+      </p:sp>
+      <p:sp>
+        <p:nvSpPr>
+          <p:cNvPr id="14" name="Text 12"/>
+          <p:cNvSpPr txBox="1"/>
+          <p:nvPr/>
+        </p:nvSpPr>
+        <p:spPr>
+          <a:xfrm>
+            <a:off x="7955280" y="2944368"/>
+            <a:ext cx="3657600" cy="685800"/>
+          </a:xfrm>
+          <a:prstGeom prst="rect">
+            <a:avLst/>
+          </a:prstGeom>
+          <a:noFill/>
+          <a:ln/>
+        </p:spPr>
+        <p:txBody>
+          <a:bodyPr wrap="square" lIns="0" tIns="0" rIns="0" bIns="0" rtlCol="0" anchor="t"/>
+          <a:lstStyle/>
+          <a:p>
+            <a:pPr indent="0" marL="0">
+              <a:buNone/>
+            </a:pPr>
+            <a:r>
+              <a:rPr lang="en-US" sz="1350" dirty="0">
+                <a:solidFill>
+                  <a:schemeClr val="tx2"/>
+                </a:solidFill>
+              </a:rPr>
+              <a:t>Limits, 3 cm clearance, singularity and tilt are tested on the converged result</a:t>
+            </a:r>
+            <a:endParaRPr lang="en-US" sz="1350" dirty="0"/>
+          </a:p>
+        </p:txBody>
+      </p:sp>
+      <p:sp>
+        <p:nvSpPr>
+          <p:cNvPr id="15" name="Text 13"/>
+          <p:cNvSpPr txBox="1"/>
+          <p:nvPr/>
+        </p:nvSpPr>
+        <p:spPr>
+          <a:xfrm>
+            <a:off x="7955280" y="3694176"/>
+            <a:ext cx="3657600" cy="365760"/>
+          </a:xfrm>
+          <a:prstGeom prst="rect">
+            <a:avLst/>
+          </a:prstGeom>
+          <a:noFill/>
+          <a:ln/>
+        </p:spPr>
+        <p:txBody>
+          <a:bodyPr wrap="square" lIns="0" tIns="0" rIns="0" bIns="0" rtlCol="0" anchor="t"/>
+          <a:lstStyle/>
+          <a:p>
+            <a:pPr indent="0" marL="0">
+              <a:buNone/>
+            </a:pPr>
+            <a:r>
+              <a:rPr lang="en-US" sz="1700" b="1" dirty="0">
+                <a:solidFill>
+                  <a:schemeClr val="tx1"/>
+                </a:solidFill>
+              </a:rPr>
+              <a:t>A memory of solutions</a:t>
+            </a:r>
+            <a:endParaRPr lang="en-US" sz="1700" dirty="0"/>
+          </a:p>
+        </p:txBody>
+      </p:sp>
+      <p:sp>
+        <p:nvSpPr>
+          <p:cNvPr id="16" name="Text 14"/>
+          <p:cNvSpPr txBox="1"/>
+          <p:nvPr/>
+        </p:nvSpPr>
+        <p:spPr>
+          <a:xfrm>
+            <a:off x="7955280" y="4059936"/>
+            <a:ext cx="3657600" cy="685800"/>
+          </a:xfrm>
+          <a:prstGeom prst="rect">
+            <a:avLst/>
+          </a:prstGeom>
+          <a:noFill/>
+          <a:ln/>
+        </p:spPr>
+        <p:txBody>
+          <a:bodyPr wrap="square" lIns="0" tIns="0" rIns="0" bIns="0" rtlCol="0" anchor="t"/>
+          <a:lstStyle/>
+          <a:p>
+            <a:pPr indent="0" marL="0">
+              <a:buNone/>
+            </a:pPr>
+            <a:r>
+              <a:rPr lang="en-US" sz="1350" dirty="0">
+                <a:solidFill>
+                  <a:schemeClr val="tx2"/>
+                </a:solidFill>
+              </a:rPr>
+              <a:t>Every solved pose is reused as a seed, so the arm always finds its way back</a:t>
+            </a:r>
+            <a:endParaRPr lang="en-US" sz="1350" dirty="0"/>
+          </a:p>
+        </p:txBody>
+      </p:sp>
+      <p:sp>
+        <p:nvSpPr>
+          <p:cNvPr id="17" name="Text 15"/>
+          <p:cNvSpPr txBox="1"/>
+          <p:nvPr/>
+        </p:nvSpPr>
+        <p:spPr>
+          <a:xfrm>
+            <a:off x="7955280" y="4809744"/>
+            <a:ext cx="3657600" cy="365760"/>
+          </a:xfrm>
+          <a:prstGeom prst="rect">
+            <a:avLst/>
+          </a:prstGeom>
+          <a:noFill/>
+          <a:ln/>
+        </p:spPr>
+        <p:txBody>
+          <a:bodyPr wrap="square" lIns="0" tIns="0" rIns="0" bIns="0" rtlCol="0" anchor="t"/>
+          <a:lstStyle/>
+          <a:p>
+            <a:pPr indent="0" marL="0">
+              <a:buNone/>
+            </a:pPr>
+            <a:r>
+              <a:rPr lang="en-US" sz="1700" b="1" dirty="0">
+                <a:solidFill>
+                  <a:schemeClr val="tx1"/>
+                </a:solidFill>
+              </a:rPr>
+              <a:t>Straight vertical moves</a:t>
+            </a:r>
+            <a:endParaRPr lang="en-US" sz="1700" dirty="0"/>
+          </a:p>
+        </p:txBody>
+      </p:sp>
+      <p:sp>
+        <p:nvSpPr>
+          <p:cNvPr id="18" name="Text 16"/>
+          <p:cNvSpPr txBox="1"/>
+          <p:nvPr/>
+        </p:nvSpPr>
+        <p:spPr>
+          <a:xfrm>
+            <a:off x="7955280" y="5175504"/>
+            <a:ext cx="3657600" cy="685800"/>
+          </a:xfrm>
+          <a:prstGeom prst="rect">
+            <a:avLst/>
+          </a:prstGeom>
+          <a:noFill/>
+          <a:ln/>
+        </p:spPr>
+        <p:txBody>
+          <a:bodyPr wrap="square" lIns="0" tIns="0" rIns="0" bIns="0" rtlCol="0" anchor="t"/>
+          <a:lstStyle/>
+          <a:p>
+            <a:pPr indent="0" marL="0">
+              <a:buNone/>
+            </a:pPr>
+            <a:r>
+              <a:rPr lang="en-US" sz="1350" dirty="0">
+                <a:solidFill>
+                  <a:schemeClr val="tx2"/>
+                </a:solidFill>
+              </a:rPr>
+              <a:t>Resolved-rate control: tool velocity mapped to joints through the Jacobian</a:t>
+            </a:r>
+            <a:endParaRPr lang="en-US" sz="1350" dirty="0"/>
+          </a:p>
+        </p:txBody>
+      </p:sp>
+      <p:sp>
+        <p:nvSpPr>
+          <p:cNvPr id="19" name="dls-equation"/>
+          <p:cNvSpPr txBox="1"/>
+          <p:nvPr/>
+        </p:nvSpPr>
+        <p:spPr>
+          <a:xfrm>
+            <a:off x="548640" y="4343400"/>
+            <a:ext cx="6949440" cy="548640"/>
+          </a:xfrm>
+          <a:prstGeom prst="rect">
+            <a:avLst/>
+          </a:prstGeom>
+          <a:noFill/>
+          <a:ln/>
+        </p:spPr>
+        <p:txBody>
+          <a:bodyPr wrap="square" lIns="0" tIns="0" rIns="0" bIns="0" rtlCol="0" anchor="t"/>
+          <a:lstStyle/>
+          <a:p>
+            <a:pPr indent="0" marL="0">
+              <a:buNone/>
+            </a:pPr>
+            <a:r>
+              <a:rPr lang="en-US" sz="2200" dirty="0">
+                <a:solidFill>
+                  <a:schemeClr val="tx1"/>
+                </a:solidFill>
+              </a:rPr>
+              <a:t>Δq = J</a:t>
+            </a:r>
+            <a:pPr indent="0" marL="0">
+              <a:buNone/>
+            </a:pPr>
+            <a:r>
+              <a:rPr lang="en-US" sz="2200" baseline="30000" dirty="0">
+                <a:solidFill>
+                  <a:schemeClr val="tx1"/>
+                </a:solidFill>
+              </a:rPr>
+              <a:t>T</a:t>
+            </a:r>
+            <a:pPr indent="0" marL="0">
+              <a:buNone/>
+            </a:pPr>
+            <a:r>
+              <a:rPr lang="en-US" sz="2200" dirty="0">
+                <a:solidFill>
+                  <a:schemeClr val="tx1"/>
+                </a:solidFill>
+              </a:rPr>
+              <a:t> (J J</a:t>
+            </a:r>
+            <a:pPr indent="0" marL="0">
+              <a:buNone/>
+            </a:pPr>
+            <a:r>
+              <a:rPr lang="en-US" sz="2200" baseline="30000" dirty="0">
+                <a:solidFill>
+                  <a:schemeClr val="tx1"/>
+                </a:solidFill>
+              </a:rPr>
+              <a:t>T</a:t>
+            </a:r>
+            <a:pPr indent="0" marL="0">
+              <a:buNone/>
+            </a:pPr>
+            <a:r>
+              <a:rPr lang="en-US" sz="2200" dirty="0">
+                <a:solidFill>
+                  <a:schemeClr val="tx1"/>
+                </a:solidFill>
+              </a:rPr>
+              <a:t> + λ</a:t>
+            </a:r>
+            <a:pPr indent="0" marL="0">
+              <a:buNone/>
+            </a:pPr>
+            <a:r>
+              <a:rPr lang="en-US" sz="2200" baseline="30000" dirty="0">
+                <a:solidFill>
+                  <a:schemeClr val="tx1"/>
                 </a:solidFill>
               </a:rPr>
               <a:t>2</a:t>
             </a:r>
-            <a:endParaRPr lang="en-US" sz="1600" dirty="0"/>
-          </a:p>
-        </p:txBody>
-      </p:sp>
-      <p:sp>
-        <p:nvSpPr>
-          <p:cNvPr id="10" name="Text 7"/>
+            <a:pPr indent="0" marL="0">
+              <a:buNone/>
+            </a:pPr>
+            <a:r>
+              <a:rPr lang="en-US" sz="2200" dirty="0">
+                <a:solidFill>
+                  <a:schemeClr val="tx1"/>
+                </a:solidFill>
+              </a:rPr>
+              <a:t> I)</a:t>
+            </a:r>
+            <a:pPr indent="0" marL="0">
+              <a:buNone/>
+            </a:pPr>
+            <a:r>
+              <a:rPr lang="en-US" sz="2200" baseline="30000" dirty="0">
+                <a:solidFill>
+                  <a:schemeClr val="tx1"/>
+                </a:solidFill>
+              </a:rPr>
+              <a:t>−1</a:t>
+            </a:r>
+            <a:pPr indent="0" marL="0">
+              <a:buNone/>
+            </a:pPr>
+            <a:r>
+              <a:rPr lang="en-US" sz="2200" dirty="0">
+                <a:solidFill>
+                  <a:schemeClr val="tx1"/>
+                </a:solidFill>
+              </a:rPr>
+              <a:t> e,   λ = 0.02</a:t>
+            </a:r>
+            <a:endParaRPr lang="en-US" sz="2200" dirty="0"/>
+          </a:p>
+        </p:txBody>
+      </p:sp>
+      <p:sp>
+        <p:nvSpPr>
+          <p:cNvPr id="20" name="Text 18"/>
           <p:cNvSpPr txBox="1"/>
           <p:nvPr/>
         </p:nvSpPr>
         <p:spPr>
           <a:xfrm>
-            <a:off x="8412480" y="2542032"/>
-            <a:ext cx="3200400" cy="365760"/>
+            <a:off x="548640" y="4937760"/>
+            <a:ext cx="6949440" cy="457200"/>
           </a:xfrm>
           <a:prstGeom prst="rect">
             <a:avLst/>
@@ -12483,316 +14140,14 @@
               <a:buNone/>
             </a:pPr>
             <a:r>
-              <a:rPr lang="en-US" sz="1800" b="1" dirty="0">
-                <a:solidFill>
-                  <a:schemeClr val="tx1"/>
-                </a:solidFill>
-              </a:rPr>
-              <a:t>A* search</a:t>
-            </a:r>
-            <a:endParaRPr lang="en-US" sz="1800" dirty="0"/>
-          </a:p>
-        </p:txBody>
-      </p:sp>
-      <p:sp>
-        <p:nvSpPr>
-          <p:cNvPr id="11" name="Text 8"/>
-          <p:cNvSpPr txBox="1"/>
-          <p:nvPr/>
-        </p:nvSpPr>
-        <p:spPr>
-          <a:xfrm>
-            <a:off x="8412480" y="2926080"/>
-            <a:ext cx="3200400" cy="685800"/>
-          </a:xfrm>
-          <a:prstGeom prst="rect">
-            <a:avLst/>
-          </a:prstGeom>
-          <a:noFill/>
-          <a:ln/>
-        </p:spPr>
-        <p:txBody>
-          <a:bodyPr wrap="square" lIns="0" tIns="0" rIns="0" bIns="0" rtlCol="0" anchor="t"/>
-          <a:lstStyle/>
-          <a:p>
-            <a:pPr indent="0" marL="0">
-              <a:buNone/>
-            </a:pPr>
-            <a:r>
-              <a:rPr lang="en-US" sz="1350" dirty="0">
+              <a:rPr lang="en-US" sz="1400" dirty="0">
                 <a:solidFill>
                   <a:schemeClr val="tx2"/>
                 </a:solidFill>
               </a:rPr>
-              <a:t>8-connected on a 5 cm grid, over cells that keep the chosen clearance</a:t>
-            </a:r>
-            <a:endParaRPr lang="en-US" sz="1350" dirty="0"/>
-          </a:p>
-        </p:txBody>
-      </p:sp>
-      <p:sp>
-        <p:nvSpPr>
-          <p:cNvPr id="12" name="plan-dot-3"/>
-          <p:cNvSpPr/>
-          <p:nvPr/>
-        </p:nvSpPr>
-        <p:spPr>
-          <a:xfrm>
-            <a:off x="7772400" y="3703320"/>
-            <a:ext cx="457200" cy="457200"/>
-          </a:xfrm>
-          <a:prstGeom prst="ellipse">
-            <a:avLst/>
-          </a:prstGeom>
-          <a:solidFill>
-            <a:schemeClr val="accent1"/>
-          </a:solidFill>
-          <a:ln w="12700">
-            <a:solidFill>
-              <a:schemeClr val="accent1"/>
-            </a:solidFill>
-            <a:prstDash val="solid"/>
-          </a:ln>
-        </p:spPr>
-      </p:sp>
-      <p:sp>
-        <p:nvSpPr>
-          <p:cNvPr id="13" name="Text 10"/>
-          <p:cNvSpPr txBox="1"/>
-          <p:nvPr/>
-        </p:nvSpPr>
-        <p:spPr>
-          <a:xfrm>
-            <a:off x="7772400" y="3703320"/>
-            <a:ext cx="457200" cy="457200"/>
-          </a:xfrm>
-          <a:prstGeom prst="rect">
-            <a:avLst/>
-          </a:prstGeom>
-          <a:noFill/>
-          <a:ln/>
-        </p:spPr>
-        <p:txBody>
-          <a:bodyPr wrap="square" lIns="0" tIns="0" rIns="0" bIns="0" rtlCol="0" anchor="ctr"/>
-          <a:lstStyle/>
-          <a:p>
-            <a:pPr algn="ctr" indent="0" marL="0">
-              <a:buNone/>
-            </a:pPr>
-            <a:r>
-              <a:rPr lang="en-US" sz="1600" b="1" dirty="0">
-                <a:solidFill>
-                  <a:schemeClr val="bg1"/>
-                </a:solidFill>
-              </a:rPr>
-              <a:t>3</a:t>
-            </a:r>
-            <a:endParaRPr lang="en-US" sz="1600" dirty="0"/>
-          </a:p>
-        </p:txBody>
-      </p:sp>
-      <p:sp>
-        <p:nvSpPr>
-          <p:cNvPr id="14" name="Text 11"/>
-          <p:cNvSpPr txBox="1"/>
-          <p:nvPr/>
-        </p:nvSpPr>
-        <p:spPr>
-          <a:xfrm>
-            <a:off x="8412480" y="3685032"/>
-            <a:ext cx="3200400" cy="365760"/>
-          </a:xfrm>
-          <a:prstGeom prst="rect">
-            <a:avLst/>
-          </a:prstGeom>
-          <a:noFill/>
-          <a:ln/>
-        </p:spPr>
-        <p:txBody>
-          <a:bodyPr wrap="square" lIns="0" tIns="0" rIns="0" bIns="0" rtlCol="0" anchor="t"/>
-          <a:lstStyle/>
-          <a:p>
-            <a:pPr indent="0" marL="0">
-              <a:buNone/>
-            </a:pPr>
-            <a:r>
-              <a:rPr lang="en-US" sz="1800" b="1" dirty="0">
-                <a:solidFill>
-                  <a:schemeClr val="tx1"/>
-                </a:solidFill>
-              </a:rPr>
-              <a:t>Shortcut</a:t>
-            </a:r>
-            <a:endParaRPr lang="en-US" sz="1800" dirty="0"/>
-          </a:p>
-        </p:txBody>
-      </p:sp>
-      <p:sp>
-        <p:nvSpPr>
-          <p:cNvPr id="15" name="Text 12"/>
-          <p:cNvSpPr txBox="1"/>
-          <p:nvPr/>
-        </p:nvSpPr>
-        <p:spPr>
-          <a:xfrm>
-            <a:off x="8412480" y="4069080"/>
-            <a:ext cx="3200400" cy="685800"/>
-          </a:xfrm>
-          <a:prstGeom prst="rect">
-            <a:avLst/>
-          </a:prstGeom>
-          <a:noFill/>
-          <a:ln/>
-        </p:spPr>
-        <p:txBody>
-          <a:bodyPr wrap="square" lIns="0" tIns="0" rIns="0" bIns="0" rtlCol="0" anchor="t"/>
-          <a:lstStyle/>
-          <a:p>
-            <a:pPr indent="0" marL="0">
-              <a:buNone/>
-            </a:pPr>
-            <a:r>
-              <a:rPr lang="en-US" sz="1350" dirty="0">
-                <a:solidFill>
-                  <a:schemeClr val="tx2"/>
-                </a:solidFill>
-              </a:rPr>
-              <a:t>Jump to the furthest point visible with full clearance</a:t>
-            </a:r>
-            <a:endParaRPr lang="en-US" sz="1350" dirty="0"/>
-          </a:p>
-        </p:txBody>
-      </p:sp>
-      <p:sp>
-        <p:nvSpPr>
-          <p:cNvPr id="16" name="plan-dot-4"/>
-          <p:cNvSpPr/>
-          <p:nvPr/>
-        </p:nvSpPr>
-        <p:spPr>
-          <a:xfrm>
-            <a:off x="7772400" y="4846320"/>
-            <a:ext cx="457200" cy="457200"/>
-          </a:xfrm>
-          <a:prstGeom prst="ellipse">
-            <a:avLst/>
-          </a:prstGeom>
-          <a:solidFill>
-            <a:schemeClr val="accent1"/>
-          </a:solidFill>
-          <a:ln w="12700">
-            <a:solidFill>
-              <a:schemeClr val="accent1"/>
-            </a:solidFill>
-            <a:prstDash val="solid"/>
-          </a:ln>
-        </p:spPr>
-      </p:sp>
-      <p:sp>
-        <p:nvSpPr>
-          <p:cNvPr id="17" name="Text 14"/>
-          <p:cNvSpPr txBox="1"/>
-          <p:nvPr/>
-        </p:nvSpPr>
-        <p:spPr>
-          <a:xfrm>
-            <a:off x="7772400" y="4846320"/>
-            <a:ext cx="457200" cy="457200"/>
-          </a:xfrm>
-          <a:prstGeom prst="rect">
-            <a:avLst/>
-          </a:prstGeom>
-          <a:noFill/>
-          <a:ln/>
-        </p:spPr>
-        <p:txBody>
-          <a:bodyPr wrap="square" lIns="0" tIns="0" rIns="0" bIns="0" rtlCol="0" anchor="ctr"/>
-          <a:lstStyle/>
-          <a:p>
-            <a:pPr algn="ctr" indent="0" marL="0">
-              <a:buNone/>
-            </a:pPr>
-            <a:r>
-              <a:rPr lang="en-US" sz="1600" b="1" dirty="0">
-                <a:solidFill>
-                  <a:schemeClr val="bg1"/>
-                </a:solidFill>
-              </a:rPr>
-              <a:t>4</a:t>
-            </a:r>
-            <a:endParaRPr lang="en-US" sz="1600" dirty="0"/>
-          </a:p>
-        </p:txBody>
-      </p:sp>
-      <p:sp>
-        <p:nvSpPr>
-          <p:cNvPr id="18" name="Text 15"/>
-          <p:cNvSpPr txBox="1"/>
-          <p:nvPr/>
-        </p:nvSpPr>
-        <p:spPr>
-          <a:xfrm>
-            <a:off x="8412480" y="4828032"/>
-            <a:ext cx="3200400" cy="365760"/>
-          </a:xfrm>
-          <a:prstGeom prst="rect">
-            <a:avLst/>
-          </a:prstGeom>
-          <a:noFill/>
-          <a:ln/>
-        </p:spPr>
-        <p:txBody>
-          <a:bodyPr wrap="square" lIns="0" tIns="0" rIns="0" bIns="0" rtlCol="0" anchor="t"/>
-          <a:lstStyle/>
-          <a:p>
-            <a:pPr indent="0" marL="0">
-              <a:buNone/>
-            </a:pPr>
-            <a:r>
-              <a:rPr lang="en-US" sz="1800" b="1" dirty="0">
-                <a:solidFill>
-                  <a:schemeClr val="tx1"/>
-                </a:solidFill>
-              </a:rPr>
-              <a:t>Tighten</a:t>
-            </a:r>
-            <a:endParaRPr lang="en-US" sz="1800" dirty="0"/>
-          </a:p>
-        </p:txBody>
-      </p:sp>
-      <p:sp>
-        <p:nvSpPr>
-          <p:cNvPr id="19" name="Text 16"/>
-          <p:cNvSpPr txBox="1"/>
-          <p:nvPr/>
-        </p:nvSpPr>
-        <p:spPr>
-          <a:xfrm>
-            <a:off x="8412480" y="5212080"/>
-            <a:ext cx="3200400" cy="685800"/>
-          </a:xfrm>
-          <a:prstGeom prst="rect">
-            <a:avLst/>
-          </a:prstGeom>
-          <a:noFill/>
-          <a:ln/>
-        </p:spPr>
-        <p:txBody>
-          <a:bodyPr wrap="square" lIns="0" tIns="0" rIns="0" bIns="0" rtlCol="0" anchor="t"/>
-          <a:lstStyle/>
-          <a:p>
-            <a:pPr indent="0" marL="0">
-              <a:buNone/>
-            </a:pPr>
-            <a:r>
-              <a:rPr lang="en-US" sz="1350" dirty="0">
-                <a:solidFill>
-                  <a:schemeClr val="tx2"/>
-                </a:solidFill>
-              </a:rPr>
-              <a:t>Pull each corner toward its neighbours until the legs just clear</a:t>
-            </a:r>
-            <a:endParaRPr lang="en-US" sz="1350" dirty="0"/>
+              <a:t>e = position error and tool-axis tilt; J = the matching 5 rows of the arm's Jacobian</a:t>
+            </a:r>
+            <a:endParaRPr lang="en-US" sz="1400" dirty="0"/>
           </a:p>
         </p:txBody>
       </p:sp>

--- a/docs/Strata_Cobot_Presentation.pptx
+++ b/docs/Strata_Cobot_Presentation.pptx
@@ -19,9 +19,10 @@
     <p:sldId id="267" r:id="rId13"/>
     <p:sldId id="268" r:id="rId14"/>
     <p:sldId id="269" r:id="rId15"/>
+    <p:sldId id="270" r:id="rId16"/>
   </p:sldIdLst>
   <p:notesMasterIdLst>
-    <p:notesMasterId r:id="rId16"/>
+    <p:notesMasterId r:id="rId17"/>
   </p:notesMasterIdLst>
   <p:sldSz cx="12192000" cy="6858000"/>
   <p:notesSz cx="6858000" cy="12192000"/>
@@ -120,7 +121,7 @@
   <p:extLst>
     <p:ext uri="{521415D9-36F7-43E2-AB2F-B90AF26B5E84}">
       <p14:sectionLst xmlns:p14="http://schemas.microsoft.com/office/powerpoint/2010/main">
-        <p14:section name="Introduction" id="{1892766f-8e50-f5df-5acd-3cdf027a44ad}">
+        <p14:section name="Introduction" id="{5de1d366-0854-39de-df3d-80345f57665a}">
           <p14:sldIdLst>
             <p14:sldId id="256"/>
             <p14:sldId id="257"/>
@@ -128,7 +129,7 @@
             <p14:sldId id="259"/>
           </p14:sldIdLst>
         </p14:section>
-        <p14:section name="The manipulator" id="{5cee13d5-f814-f073-3ad7-da28232dfab8}">
+        <p14:section name="The manipulator" id="{0b24578b-af5f-b63a-0c6f-c4f7f6269597}">
           <p14:sldIdLst>
             <p14:sldId id="260"/>
             <p14:sldId id="261"/>
@@ -137,17 +138,18 @@
             <p14:sldId id="264"/>
           </p14:sldIdLst>
         </p14:section>
-        <p14:section name="The mobile robot" id="{2c1f0b5d-8a40-f1d9-3d32-a87f6de0c350}">
+        <p14:section name="The mobile robot" id="{4a278b7f-aede-0643-606a-1fe985082213}">
           <p14:sldIdLst>
             <p14:sldId id="265"/>
             <p14:sldId id="266"/>
           </p14:sldIdLst>
         </p14:section>
-        <p14:section name="Results" id="{ecff569d-d83d-6d74-f967-6c22d2b2e19c}">
+        <p14:section name="Results" id="{c8b2878b-80dd-81fb-30b4-7f7645fd9d21}">
           <p14:sldIdLst>
             <p14:sldId id="267"/>
             <p14:sldId id="268"/>
             <p14:sldId id="269"/>
+            <p14:sldId id="270"/>
           </p14:sldIdLst>
         </p14:section>
       </p14:sectionLst>
@@ -1248,7 +1250,7 @@
           <a:p>
             <a:r>
               <a:rPr lang="en-US" dirty="0"/>
-              <a:t>Most of these were invisible until we ran full trials with automatic checking, which is the main lesson: test end to end early. The others came from measuring the geometry ourselves instead of trusting the brief.</a:t>
+              <a:t>Two things the first version could not do. First, the full loop: the eBot hauls the ore package to the arm, the arm finds it with odometry and the depth camera, lifts it off the deck and places it on the conveyor, then the eBot drives home. Second, obstacles the map does not have: our paths always keep 30 cm from mapped rocks, so anything the lidar sees closer than 26 cm to the path is new. The robot stops, the planner adds it to the map and re-plans in a tenth of a second.</a:t>
             </a:r>
             <a:endParaRPr lang="en-US" dirty="0"/>
           </a:p>
@@ -1336,7 +1338,7 @@
           <a:p>
             <a:r>
               <a:rPr lang="en-US" dirty="0"/>
-              <a:t>To sum up: both halves of the mission work end to end in simulation, using only algorithms we wrote. The natural next step is the handoff, where the eBot delivers ore to the arm. Happy to take questions, and we can run a live demo.</a:t>
+              <a:t>Most of these were invisible until we ran full trials with automatic checking, which is the main lesson: test end to end early. The others came from measuring the geometry ourselves instead of trusting the brief.</a:t>
             </a:r>
             <a:endParaRPr lang="en-US" dirty="0"/>
           </a:p>
@@ -1360,6 +1362,94 @@
             <a:fld id="{F7021451-1387-4CA6-816F-3879F97B5CBC}" type="slidenum">
               <a:rPr lang="en-US"/>
               <a:t>14</a:t>
+            </a:fld>
+            <a:endParaRPr lang="en-US"/>
+          </a:p>
+        </p:txBody>
+      </p:sp>
+    </p:spTree>
+    <p:extLst>
+      <p:ext uri="{BB962C8B-B14F-4D97-AF65-F5344CB8AC3E}">
+        <p14:creationId xmlns:p14="http://schemas.microsoft.com/office/powerpoint/2010/main" val="1024086991"/>
+      </p:ext>
+    </p:extLst>
+  </p:cSld>
+  <p:clrMapOvr>
+    <a:masterClrMapping/>
+  </p:clrMapOvr>
+</p:notes>
+</file>
+
+<file path=ppt/notesSlides/notesSlide15.xml><?xml version="1.0" encoding="utf-8"?>
+<p:notes xmlns:a="http://schemas.openxmlformats.org/drawingml/2006/main" xmlns:r="http://schemas.openxmlformats.org/officeDocument/2006/relationships" xmlns:p="http://schemas.openxmlformats.org/presentationml/2006/main">
+  <p:cSld>
+    <p:spTree>
+      <p:nvGrpSpPr>
+        <p:cNvPr id="1" name=""/>
+        <p:cNvGrpSpPr/>
+        <p:nvPr/>
+      </p:nvGrpSpPr>
+      <p:grpSpPr>
+        <a:xfrm>
+          <a:off x="0" y="0"/>
+          <a:ext cx="0" cy="0"/>
+          <a:chOff x="0" y="0"/>
+          <a:chExt cx="0" cy="0"/>
+        </a:xfrm>
+      </p:grpSpPr>
+      <p:sp>
+        <p:nvSpPr>
+          <p:cNvPr id="2" name="Slide Image Placeholder 1"/>
+          <p:cNvSpPr>
+            <a:spLocks noGrp="1" noRot="1" noChangeAspect="1"/>
+          </p:cNvSpPr>
+          <p:nvPr>
+            <p:ph type="sldImg"/>
+          </p:nvPr>
+        </p:nvSpPr>
+        <p:spPr/>
+      </p:sp>
+      <p:sp>
+        <p:nvSpPr>
+          <p:cNvPr id="3" name="Notes Placeholder 2"/>
+          <p:cNvSpPr>
+            <a:spLocks noGrp="1"/>
+          </p:cNvSpPr>
+          <p:nvPr>
+            <p:ph type="body" idx="1"/>
+          </p:nvPr>
+        </p:nvSpPr>
+        <p:spPr/>
+        <p:txBody>
+          <a:bodyPr/>
+          <a:lstStyle/>
+          <a:p>
+            <a:r>
+              <a:rPr lang="en-US" dirty="0"/>
+              <a:t>To sum up: both halves of the mission work end to end in simulation, using only algorithms we wrote. The natural next step is the handoff, where the eBot delivers ore to the arm. Happy to take questions, and we can run a live demo.</a:t>
+            </a:r>
+            <a:endParaRPr lang="en-US" dirty="0"/>
+          </a:p>
+        </p:txBody>
+      </p:sp>
+      <p:sp>
+        <p:nvSpPr>
+          <p:cNvPr id="4" name="Slide Number Placeholder 3"/>
+          <p:cNvSpPr>
+            <a:spLocks noGrp="1"/>
+          </p:cNvSpPr>
+          <p:nvPr>
+            <p:ph type="sldNum" sz="quarter" idx="10"/>
+          </p:nvPr>
+        </p:nvSpPr>
+        <p:spPr/>
+        <p:txBody>
+          <a:bodyPr/>
+          <a:lstStyle/>
+          <a:p>
+            <a:fld id="{F7021451-1387-4CA6-816F-3879F97B5CBC}" type="slidenum">
+              <a:rPr lang="en-US"/>
+              <a:t>15</a:t>
             </a:fld>
             <a:endParaRPr lang="en-US"/>
           </a:p>
@@ -5168,49 +5258,70 @@
                   <a:schemeClr val="tx1"/>
                 </a:solidFill>
               </a:rPr>
-              <a:t>What broke, and how we fixed it</a:t>
+              <a:t>The full loop: hand-off and re-planning</a:t>
             </a:r>
             <a:endParaRPr lang="en-US" sz="3200" dirty="0"/>
           </a:p>
         </p:txBody>
       </p:sp>
-      <p:sp>
-        <p:nvSpPr>
-          <p:cNvPr id="3" name="issue-1"/>
-          <p:cNvSpPr/>
-          <p:nvPr/>
-        </p:nvSpPr>
-        <p:spPr>
-          <a:xfrm>
-            <a:off x="548640" y="1417320"/>
-            <a:ext cx="3520440" cy="2148840"/>
-          </a:xfrm>
-          <a:prstGeom prst="roundRect">
-            <a:avLst>
-              <a:gd name="adj" fmla="val 3404"/>
-            </a:avLst>
-          </a:prstGeom>
-          <a:solidFill>
-            <a:schemeClr val="bg2"/>
-          </a:solidFill>
-          <a:ln w="12700">
-            <a:solidFill>
-              <a:schemeClr val="bg2"/>
-            </a:solidFill>
-            <a:prstDash val="solid"/>
-          </a:ln>
-        </p:spPr>
-      </p:sp>
-      <p:sp>
-        <p:nvSpPr>
-          <p:cNvPr id="4" name="Text 2"/>
+      <p:pic>
+        <p:nvPicPr>
+          <p:cNvPr id="3" name="mission-shot" descr="Dashboard after a full mission: all five stages ticked, the package on the conveyor">    </p:cNvPr>
+          <p:cNvPicPr>
+            <a:picLocks noChangeAspect="1"/>
+          </p:cNvPicPr>
+          <p:nvPr/>
+        </p:nvPicPr>
+        <p:blipFill>
+          <a:blip r:embed="rId1"/>
+          <a:stretch>
+            <a:fillRect/>
+          </a:stretch>
+        </p:blipFill>
+        <p:spPr>
+          <a:xfrm>
+            <a:off x="548640" y="1325880"/>
+            <a:ext cx="5394960" cy="3374136"/>
+          </a:xfrm>
+          <a:prstGeom prst="rect">
+            <a:avLst/>
+          </a:prstGeom>
+        </p:spPr>
+      </p:pic>
+      <p:pic>
+        <p:nvPicPr>
+          <p:cNvPr id="4" name="replan-shot" descr="Dashboard map with an abandoned path, a surprise rock and the new path around it">    </p:cNvPr>
+          <p:cNvPicPr>
+            <a:picLocks noChangeAspect="1"/>
+          </p:cNvPicPr>
+          <p:nvPr/>
+        </p:nvPicPr>
+        <p:blipFill>
+          <a:blip r:embed="rId2"/>
+          <a:stretch>
+            <a:fillRect/>
+          </a:stretch>
+        </p:blipFill>
+        <p:spPr>
+          <a:xfrm>
+            <a:off x="6217920" y="1325880"/>
+            <a:ext cx="5394960" cy="4050792"/>
+          </a:xfrm>
+          <a:prstGeom prst="rect">
+            <a:avLst/>
+          </a:prstGeom>
+        </p:spPr>
+      </p:pic>
+      <p:sp>
+        <p:nvSpPr>
+          <p:cNvPr id="5" name="Text 1"/>
           <p:cNvSpPr txBox="1"/>
           <p:nvPr/>
         </p:nvSpPr>
         <p:spPr>
           <a:xfrm>
-            <a:off x="777240" y="1618488"/>
-            <a:ext cx="3063240" cy="411480"/>
+            <a:off x="548640" y="4846320"/>
+            <a:ext cx="5394960" cy="1097280"/>
           </a:xfrm>
           <a:prstGeom prst="rect">
             <a:avLst/>
@@ -5226,27 +5337,27 @@
               <a:buNone/>
             </a:pPr>
             <a:r>
-              <a:rPr lang="en-US" sz="1800" b="1" dirty="0">
-                <a:solidFill>
-                  <a:schemeClr val="accent1"/>
-                </a:solidFill>
-              </a:rPr>
-              <a:t>No path at all</a:t>
-            </a:r>
-            <a:endParaRPr lang="en-US" sz="1800" dirty="0"/>
-          </a:p>
-        </p:txBody>
-      </p:sp>
-      <p:sp>
-        <p:nvSpPr>
-          <p:cNvPr id="5" name="Text 3"/>
+              <a:rPr lang="en-US" sz="1400" dirty="0">
+                <a:solidFill>
+                  <a:schemeClr val="tx2"/>
+                </a:solidFill>
+              </a:rPr>
+              <a:t>Full mission, one click, about 2 min: the eBot brings the ore package, the arm lifts it onto the conveyor (2.94 N = 0.30 kg held), the eBot drives home.</a:t>
+            </a:r>
+            <a:endParaRPr lang="en-US" sz="1400" dirty="0"/>
+          </a:p>
+        </p:txBody>
+      </p:sp>
+      <p:sp>
+        <p:nvSpPr>
+          <p:cNvPr id="6" name="Text 2"/>
           <p:cNvSpPr txBox="1"/>
           <p:nvPr/>
         </p:nvSpPr>
         <p:spPr>
           <a:xfrm>
-            <a:off x="777240" y="2103120"/>
-            <a:ext cx="3063240" cy="1325880"/>
+            <a:off x="6217920" y="5486400"/>
+            <a:ext cx="5394960" cy="822960"/>
           </a:xfrm>
           <a:prstGeom prst="rect">
             <a:avLst/>
@@ -5262,509 +5373,14 @@
               <a:buNone/>
             </a:pPr>
             <a:r>
-              <a:rPr lang="en-US" sz="1450" dirty="0">
-                <a:solidFill>
-                  <a:schemeClr val="tx1"/>
-                </a:solidFill>
-              </a:rPr>
-              <a:t>Drop pose is 0.375 m from a wall; downsampling shaved 5 cm more. Full-resolution clearance fixed it.</a:t>
-            </a:r>
-            <a:endParaRPr lang="en-US" sz="1450" dirty="0"/>
-          </a:p>
-        </p:txBody>
-      </p:sp>
-      <p:sp>
-        <p:nvSpPr>
-          <p:cNvPr id="6" name="issue-2"/>
-          <p:cNvSpPr/>
-          <p:nvPr/>
-        </p:nvSpPr>
-        <p:spPr>
-          <a:xfrm>
-            <a:off x="4297680" y="1417320"/>
-            <a:ext cx="3520440" cy="2148840"/>
-          </a:xfrm>
-          <a:prstGeom prst="roundRect">
-            <a:avLst>
-              <a:gd name="adj" fmla="val 3404"/>
-            </a:avLst>
-          </a:prstGeom>
-          <a:solidFill>
-            <a:schemeClr val="bg2"/>
-          </a:solidFill>
-          <a:ln w="12700">
-            <a:solidFill>
-              <a:schemeClr val="bg2"/>
-            </a:solidFill>
-            <a:prstDash val="solid"/>
-          </a:ln>
-        </p:spPr>
-      </p:sp>
-      <p:sp>
-        <p:nvSpPr>
-          <p:cNvPr id="7" name="Text 5"/>
-          <p:cNvSpPr txBox="1"/>
-          <p:nvPr/>
-        </p:nvSpPr>
-        <p:spPr>
-          <a:xfrm>
-            <a:off x="4526280" y="1618488"/>
-            <a:ext cx="3063240" cy="411480"/>
-          </a:xfrm>
-          <a:prstGeom prst="rect">
-            <a:avLst/>
-          </a:prstGeom>
-          <a:noFill/>
-          <a:ln/>
-        </p:spPr>
-        <p:txBody>
-          <a:bodyPr wrap="square" lIns="0" tIns="0" rIns="0" bIns="0" rtlCol="0" anchor="t"/>
-          <a:lstStyle/>
-          <a:p>
-            <a:pPr indent="0" marL="0">
-              <a:buNone/>
-            </a:pPr>
-            <a:r>
-              <a:rPr lang="en-US" sz="1800" b="1" dirty="0">
-                <a:solidFill>
-                  <a:schemeClr val="accent1"/>
-                </a:solidFill>
-              </a:rPr>
-              <a:t>Paths 2% too long</a:t>
-            </a:r>
-            <a:endParaRPr lang="en-US" sz="1800" dirty="0"/>
-          </a:p>
-        </p:txBody>
-      </p:sp>
-      <p:sp>
-        <p:nvSpPr>
-          <p:cNvPr id="8" name="Text 6"/>
-          <p:cNvSpPr txBox="1"/>
-          <p:nvPr/>
-        </p:nvSpPr>
-        <p:spPr>
-          <a:xfrm>
-            <a:off x="4526280" y="2103120"/>
-            <a:ext cx="3063240" cy="1325880"/>
-          </a:xfrm>
-          <a:prstGeom prst="rect">
-            <a:avLst/>
-          </a:prstGeom>
-          <a:noFill/>
-          <a:ln/>
-        </p:spPr>
-        <p:txBody>
-          <a:bodyPr wrap="square" lIns="0" tIns="0" rIns="0" bIns="0" rtlCol="0" anchor="t"/>
-          <a:lstStyle/>
-          <a:p>
-            <a:pPr indent="0" marL="0">
-              <a:buNone/>
-            </a:pPr>
-            <a:r>
-              <a:rPr lang="en-US" sz="1450" dirty="0">
-                <a:solidFill>
-                  <a:schemeClr val="tx1"/>
-                </a:solidFill>
-              </a:rPr>
-              <a:t>Grid-snapped corners. Fine-map checks and corner tightening reached efficiency 1.00.</a:t>
-            </a:r>
-            <a:endParaRPr lang="en-US" sz="1450" dirty="0"/>
-          </a:p>
-        </p:txBody>
-      </p:sp>
-      <p:sp>
-        <p:nvSpPr>
-          <p:cNvPr id="9" name="issue-3"/>
-          <p:cNvSpPr/>
-          <p:nvPr/>
-        </p:nvSpPr>
-        <p:spPr>
-          <a:xfrm>
-            <a:off x="8046720" y="1417320"/>
-            <a:ext cx="3520440" cy="2148840"/>
-          </a:xfrm>
-          <a:prstGeom prst="roundRect">
-            <a:avLst>
-              <a:gd name="adj" fmla="val 3404"/>
-            </a:avLst>
-          </a:prstGeom>
-          <a:solidFill>
-            <a:schemeClr val="bg2"/>
-          </a:solidFill>
-          <a:ln w="12700">
-            <a:solidFill>
-              <a:schemeClr val="bg2"/>
-            </a:solidFill>
-            <a:prstDash val="solid"/>
-          </a:ln>
-        </p:spPr>
-      </p:sp>
-      <p:sp>
-        <p:nvSpPr>
-          <p:cNvPr id="10" name="Text 8"/>
-          <p:cNvSpPr txBox="1"/>
-          <p:nvPr/>
-        </p:nvSpPr>
-        <p:spPr>
-          <a:xfrm>
-            <a:off x="8275320" y="1618488"/>
-            <a:ext cx="3063240" cy="411480"/>
-          </a:xfrm>
-          <a:prstGeom prst="rect">
-            <a:avLst/>
-          </a:prstGeom>
-          <a:noFill/>
-          <a:ln/>
-        </p:spPr>
-        <p:txBody>
-          <a:bodyPr wrap="square" lIns="0" tIns="0" rIns="0" bIns="0" rtlCol="0" anchor="t"/>
-          <a:lstStyle/>
-          <a:p>
-            <a:pPr indent="0" marL="0">
-              <a:buNone/>
-            </a:pPr>
-            <a:r>
-              <a:rPr lang="en-US" sz="1800" b="1" dirty="0">
-                <a:solidFill>
-                  <a:schemeClr val="accent1"/>
-                </a:solidFill>
-              </a:rPr>
-              <a:t>IK took minutes</a:t>
-            </a:r>
-            <a:endParaRPr lang="en-US" sz="1800" dirty="0"/>
-          </a:p>
-        </p:txBody>
-      </p:sp>
-      <p:sp>
-        <p:nvSpPr>
-          <p:cNvPr id="11" name="Text 9"/>
-          <p:cNvSpPr txBox="1"/>
-          <p:nvPr/>
-        </p:nvSpPr>
-        <p:spPr>
-          <a:xfrm>
-            <a:off x="8275320" y="2103120"/>
-            <a:ext cx="3063240" cy="1325880"/>
-          </a:xfrm>
-          <a:prstGeom prst="rect">
-            <a:avLst/>
-          </a:prstGeom>
-          <a:noFill/>
-          <a:ln/>
-        </p:spPr>
-        <p:txBody>
-          <a:bodyPr wrap="square" lIns="0" tIns="0" rIns="0" bIns="0" rtlCol="0" anchor="t"/>
-          <a:lstStyle/>
-          <a:p>
-            <a:pPr indent="0" marL="0">
-              <a:buNone/>
-            </a:pPr>
-            <a:r>
-              <a:rPr lang="en-US" sz="1450" dirty="0">
-                <a:solidFill>
-                  <a:schemeClr val="tx1"/>
-                </a:solidFill>
-              </a:rPr>
-              <a:t>Checks inside every optimiser step. DLS with one final check: 0.1-0.4 s.</a:t>
-            </a:r>
-            <a:endParaRPr lang="en-US" sz="1450" dirty="0"/>
-          </a:p>
-        </p:txBody>
-      </p:sp>
-      <p:sp>
-        <p:nvSpPr>
-          <p:cNvPr id="12" name="issue-4"/>
-          <p:cNvSpPr/>
-          <p:nvPr/>
-        </p:nvSpPr>
-        <p:spPr>
-          <a:xfrm>
-            <a:off x="548640" y="3794760"/>
-            <a:ext cx="3520440" cy="2148840"/>
-          </a:xfrm>
-          <a:prstGeom prst="roundRect">
-            <a:avLst>
-              <a:gd name="adj" fmla="val 3404"/>
-            </a:avLst>
-          </a:prstGeom>
-          <a:solidFill>
-            <a:schemeClr val="bg2"/>
-          </a:solidFill>
-          <a:ln w="12700">
-            <a:solidFill>
-              <a:schemeClr val="bg2"/>
-            </a:solidFill>
-            <a:prstDash val="solid"/>
-          </a:ln>
-        </p:spPr>
-      </p:sp>
-      <p:sp>
-        <p:nvSpPr>
-          <p:cNvPr id="13" name="Text 11"/>
-          <p:cNvSpPr txBox="1"/>
-          <p:nvPr/>
-        </p:nvSpPr>
-        <p:spPr>
-          <a:xfrm>
-            <a:off x="777240" y="3995928"/>
-            <a:ext cx="3063240" cy="411480"/>
-          </a:xfrm>
-          <a:prstGeom prst="rect">
-            <a:avLst/>
-          </a:prstGeom>
-          <a:noFill/>
-          <a:ln/>
-        </p:spPr>
-        <p:txBody>
-          <a:bodyPr wrap="square" lIns="0" tIns="0" rIns="0" bIns="0" rtlCol="0" anchor="t"/>
-          <a:lstStyle/>
-          <a:p>
-            <a:pPr indent="0" marL="0">
-              <a:buNone/>
-            </a:pPr>
-            <a:r>
-              <a:rPr lang="en-US" sz="1800" b="1" dirty="0">
-                <a:solidFill>
-                  <a:schemeClr val="accent1"/>
-                </a:solidFill>
-              </a:rPr>
-              <a:t>Arm lost after a drop</a:t>
-            </a:r>
-            <a:endParaRPr lang="en-US" sz="1800" dirty="0"/>
-          </a:p>
-        </p:txBody>
-      </p:sp>
-      <p:sp>
-        <p:nvSpPr>
-          <p:cNvPr id="14" name="Text 12"/>
-          <p:cNvSpPr txBox="1"/>
-          <p:nvPr/>
-        </p:nvSpPr>
-        <p:spPr>
-          <a:xfrm>
-            <a:off x="777240" y="4480560"/>
-            <a:ext cx="3063240" cy="1325880"/>
-          </a:xfrm>
-          <a:prstGeom prst="rect">
-            <a:avLst/>
-          </a:prstGeom>
-          <a:noFill/>
-          <a:ln/>
-        </p:spPr>
-        <p:txBody>
-          <a:bodyPr wrap="square" lIns="0" tIns="0" rIns="0" bIns="0" rtlCol="0" anchor="t"/>
-          <a:lstStyle/>
-          <a:p>
-            <a:pPr indent="0" marL="0">
-              <a:buNone/>
-            </a:pPr>
-            <a:r>
-              <a:rPr lang="en-US" sz="1450" dirty="0">
-                <a:solidFill>
-                  <a:schemeClr val="tx1"/>
-                </a:solidFill>
-              </a:rPr>
-              <a:t>No IK seed back to the conveyor. A library of solved poses fixed it.</a:t>
-            </a:r>
-            <a:endParaRPr lang="en-US" sz="1450" dirty="0"/>
-          </a:p>
-        </p:txBody>
-      </p:sp>
-      <p:sp>
-        <p:nvSpPr>
-          <p:cNvPr id="15" name="issue-5"/>
-          <p:cNvSpPr/>
-          <p:nvPr/>
-        </p:nvSpPr>
-        <p:spPr>
-          <a:xfrm>
-            <a:off x="4297680" y="3794760"/>
-            <a:ext cx="3520440" cy="2148840"/>
-          </a:xfrm>
-          <a:prstGeom prst="roundRect">
-            <a:avLst>
-              <a:gd name="adj" fmla="val 3404"/>
-            </a:avLst>
-          </a:prstGeom>
-          <a:solidFill>
-            <a:schemeClr val="bg2"/>
-          </a:solidFill>
-          <a:ln w="12700">
-            <a:solidFill>
-              <a:schemeClr val="bg2"/>
-            </a:solidFill>
-            <a:prstDash val="solid"/>
-          </a:ln>
-        </p:spPr>
-      </p:sp>
-      <p:sp>
-        <p:nvSpPr>
-          <p:cNvPr id="16" name="Text 14"/>
-          <p:cNvSpPr txBox="1"/>
-          <p:nvPr/>
-        </p:nvSpPr>
-        <p:spPr>
-          <a:xfrm>
-            <a:off x="4526280" y="3995928"/>
-            <a:ext cx="3063240" cy="411480"/>
-          </a:xfrm>
-          <a:prstGeom prst="rect">
-            <a:avLst/>
-          </a:prstGeom>
-          <a:noFill/>
-          <a:ln/>
-        </p:spPr>
-        <p:txBody>
-          <a:bodyPr wrap="square" lIns="0" tIns="0" rIns="0" bIns="0" rtlCol="0" anchor="t"/>
-          <a:lstStyle/>
-          <a:p>
-            <a:pPr indent="0" marL="0">
-              <a:buNone/>
-            </a:pPr>
-            <a:r>
-              <a:rPr lang="en-US" sz="1800" b="1" dirty="0">
-                <a:solidFill>
-                  <a:schemeClr val="accent1"/>
-                </a:solidFill>
-              </a:rPr>
-              <a:t>Vanadinite unreachable</a:t>
-            </a:r>
-            <a:endParaRPr lang="en-US" sz="1800" dirty="0"/>
-          </a:p>
-        </p:txBody>
-      </p:sp>
-      <p:sp>
-        <p:nvSpPr>
-          <p:cNvPr id="17" name="Text 15"/>
-          <p:cNvSpPr txBox="1"/>
-          <p:nvPr/>
-        </p:nvSpPr>
-        <p:spPr>
-          <a:xfrm>
-            <a:off x="4526280" y="4480560"/>
-            <a:ext cx="3063240" cy="1325880"/>
-          </a:xfrm>
-          <a:prstGeom prst="rect">
-            <a:avLst/>
-          </a:prstGeom>
-          <a:noFill/>
-          <a:ln/>
-        </p:spPr>
-        <p:txBody>
-          <a:bodyPr wrap="square" lIns="0" tIns="0" rIns="0" bIns="0" rtlCol="0" anchor="t"/>
-          <a:lstStyle/>
-          <a:p>
-            <a:pPr indent="0" marL="0">
-              <a:buNone/>
-            </a:pPr>
-            <a:r>
-              <a:rPr lang="en-US" sz="1450" dirty="0">
-                <a:solidFill>
-                  <a:schemeClr val="tx1"/>
-                </a:solidFill>
-              </a:rPr>
-              <a:t>Container centre 0.93 m away. Release at its nearest reachable point.</a:t>
-            </a:r>
-            <a:endParaRPr lang="en-US" sz="1450" dirty="0"/>
-          </a:p>
-        </p:txBody>
-      </p:sp>
-      <p:sp>
-        <p:nvSpPr>
-          <p:cNvPr id="18" name="issue-6"/>
-          <p:cNvSpPr/>
-          <p:nvPr/>
-        </p:nvSpPr>
-        <p:spPr>
-          <a:xfrm>
-            <a:off x="8046720" y="3794760"/>
-            <a:ext cx="3520440" cy="2148840"/>
-          </a:xfrm>
-          <a:prstGeom prst="roundRect">
-            <a:avLst>
-              <a:gd name="adj" fmla="val 3404"/>
-            </a:avLst>
-          </a:prstGeom>
-          <a:solidFill>
-            <a:schemeClr val="bg2"/>
-          </a:solidFill>
-          <a:ln w="12700">
-            <a:solidFill>
-              <a:schemeClr val="bg2"/>
-            </a:solidFill>
-            <a:prstDash val="solid"/>
-          </a:ln>
-        </p:spPr>
-      </p:sp>
-      <p:sp>
-        <p:nvSpPr>
-          <p:cNvPr id="19" name="Text 17"/>
-          <p:cNvSpPr txBox="1"/>
-          <p:nvPr/>
-        </p:nvSpPr>
-        <p:spPr>
-          <a:xfrm>
-            <a:off x="8275320" y="3995928"/>
-            <a:ext cx="3063240" cy="411480"/>
-          </a:xfrm>
-          <a:prstGeom prst="rect">
-            <a:avLst/>
-          </a:prstGeom>
-          <a:noFill/>
-          <a:ln/>
-        </p:spPr>
-        <p:txBody>
-          <a:bodyPr wrap="square" lIns="0" tIns="0" rIns="0" bIns="0" rtlCol="0" anchor="t"/>
-          <a:lstStyle/>
-          <a:p>
-            <a:pPr indent="0" marL="0">
-              <a:buNone/>
-            </a:pPr>
-            <a:r>
-              <a:rPr lang="en-US" sz="1800" b="1" dirty="0">
-                <a:solidFill>
-                  <a:schemeClr val="accent1"/>
-                </a:solidFill>
-              </a:rPr>
-              <a:t>Two simulations clashed</a:t>
-            </a:r>
-            <a:endParaRPr lang="en-US" sz="1800" dirty="0"/>
-          </a:p>
-        </p:txBody>
-      </p:sp>
-      <p:sp>
-        <p:nvSpPr>
-          <p:cNvPr id="20" name="Text 18"/>
-          <p:cNvSpPr txBox="1"/>
-          <p:nvPr/>
-        </p:nvSpPr>
-        <p:spPr>
-          <a:xfrm>
-            <a:off x="8275320" y="4480560"/>
-            <a:ext cx="3063240" cy="1325880"/>
-          </a:xfrm>
-          <a:prstGeom prst="rect">
-            <a:avLst/>
-          </a:prstGeom>
-          <a:noFill/>
-          <a:ln/>
-        </p:spPr>
-        <p:txBody>
-          <a:bodyPr wrap="square" lIns="0" tIns="0" rIns="0" bIns="0" rtlCol="0" anchor="t"/>
-          <a:lstStyle/>
-          <a:p>
-            <a:pPr indent="0" marL="0">
-              <a:buNone/>
-            </a:pPr>
-            <a:r>
-              <a:rPr lang="en-US" sz="1450" dirty="0">
-                <a:solidFill>
-                  <a:schemeClr val="tx1"/>
-                </a:solidFill>
-              </a:rPr>
-              <a:t>A leftover simulation on the same ROS domain. One world at a time.</a:t>
-            </a:r>
-            <a:endParaRPr lang="en-US" sz="1450" dirty="0"/>
+              <a:rPr lang="en-US" sz="1400" dirty="0">
+                <a:solidFill>
+                  <a:schemeClr val="tx2"/>
+                </a:solidFill>
+              </a:rPr>
+              <a:t>Surprise rock: the lidar sees it within 0.26 m of the path, the eBot stops and the planner re-plans in 0.1 s.</a:t>
+            </a:r>
+            <a:endParaRPr lang="en-US" sz="1400" dirty="0"/>
           </a:p>
         </p:txBody>
       </p:sp>
@@ -5848,6 +5464,708 @@
         </p:nvSpPr>
         <p:spPr>
           <a:xfrm>
+            <a:off x="548640" y="320040"/>
+            <a:ext cx="11064240" cy="822960"/>
+          </a:xfrm>
+          <a:prstGeom prst="rect">
+            <a:avLst/>
+          </a:prstGeom>
+          <a:noFill/>
+          <a:ln/>
+        </p:spPr>
+        <p:txBody>
+          <a:bodyPr wrap="square" lIns="0" tIns="0" rIns="0" bIns="0" rtlCol="0" anchor="ctr"/>
+          <a:lstStyle/>
+          <a:p>
+            <a:pPr indent="0" marL="0">
+              <a:buNone/>
+            </a:pPr>
+            <a:r>
+              <a:rPr lang="en-US" sz="3200" b="1" dirty="0">
+                <a:solidFill>
+                  <a:schemeClr val="tx1"/>
+                </a:solidFill>
+              </a:rPr>
+              <a:t>What broke, and how we fixed it</a:t>
+            </a:r>
+            <a:endParaRPr lang="en-US" sz="3200" dirty="0"/>
+          </a:p>
+        </p:txBody>
+      </p:sp>
+      <p:sp>
+        <p:nvSpPr>
+          <p:cNvPr id="3" name="issue-1"/>
+          <p:cNvSpPr/>
+          <p:nvPr/>
+        </p:nvSpPr>
+        <p:spPr>
+          <a:xfrm>
+            <a:off x="548640" y="1417320"/>
+            <a:ext cx="3520440" cy="2148840"/>
+          </a:xfrm>
+          <a:prstGeom prst="roundRect">
+            <a:avLst>
+              <a:gd name="adj" fmla="val 3404"/>
+            </a:avLst>
+          </a:prstGeom>
+          <a:solidFill>
+            <a:schemeClr val="bg2"/>
+          </a:solidFill>
+          <a:ln w="12700">
+            <a:solidFill>
+              <a:schemeClr val="bg2"/>
+            </a:solidFill>
+            <a:prstDash val="solid"/>
+          </a:ln>
+        </p:spPr>
+      </p:sp>
+      <p:sp>
+        <p:nvSpPr>
+          <p:cNvPr id="4" name="Text 2"/>
+          <p:cNvSpPr txBox="1"/>
+          <p:nvPr/>
+        </p:nvSpPr>
+        <p:spPr>
+          <a:xfrm>
+            <a:off x="777240" y="1618488"/>
+            <a:ext cx="3063240" cy="411480"/>
+          </a:xfrm>
+          <a:prstGeom prst="rect">
+            <a:avLst/>
+          </a:prstGeom>
+          <a:noFill/>
+          <a:ln/>
+        </p:spPr>
+        <p:txBody>
+          <a:bodyPr wrap="square" lIns="0" tIns="0" rIns="0" bIns="0" rtlCol="0" anchor="t"/>
+          <a:lstStyle/>
+          <a:p>
+            <a:pPr indent="0" marL="0">
+              <a:buNone/>
+            </a:pPr>
+            <a:r>
+              <a:rPr lang="en-US" sz="1800" b="1" dirty="0">
+                <a:solidFill>
+                  <a:schemeClr val="accent1"/>
+                </a:solidFill>
+              </a:rPr>
+              <a:t>No path at all</a:t>
+            </a:r>
+            <a:endParaRPr lang="en-US" sz="1800" dirty="0"/>
+          </a:p>
+        </p:txBody>
+      </p:sp>
+      <p:sp>
+        <p:nvSpPr>
+          <p:cNvPr id="5" name="Text 3"/>
+          <p:cNvSpPr txBox="1"/>
+          <p:nvPr/>
+        </p:nvSpPr>
+        <p:spPr>
+          <a:xfrm>
+            <a:off x="777240" y="2103120"/>
+            <a:ext cx="3063240" cy="1325880"/>
+          </a:xfrm>
+          <a:prstGeom prst="rect">
+            <a:avLst/>
+          </a:prstGeom>
+          <a:noFill/>
+          <a:ln/>
+        </p:spPr>
+        <p:txBody>
+          <a:bodyPr wrap="square" lIns="0" tIns="0" rIns="0" bIns="0" rtlCol="0" anchor="t"/>
+          <a:lstStyle/>
+          <a:p>
+            <a:pPr indent="0" marL="0">
+              <a:buNone/>
+            </a:pPr>
+            <a:r>
+              <a:rPr lang="en-US" sz="1450" dirty="0">
+                <a:solidFill>
+                  <a:schemeClr val="tx1"/>
+                </a:solidFill>
+              </a:rPr>
+              <a:t>Drop pose is 0.375 m from a wall; downsampling shaved 5 cm more. Full-resolution clearance fixed it.</a:t>
+            </a:r>
+            <a:endParaRPr lang="en-US" sz="1450" dirty="0"/>
+          </a:p>
+        </p:txBody>
+      </p:sp>
+      <p:sp>
+        <p:nvSpPr>
+          <p:cNvPr id="6" name="issue-2"/>
+          <p:cNvSpPr/>
+          <p:nvPr/>
+        </p:nvSpPr>
+        <p:spPr>
+          <a:xfrm>
+            <a:off x="4297680" y="1417320"/>
+            <a:ext cx="3520440" cy="2148840"/>
+          </a:xfrm>
+          <a:prstGeom prst="roundRect">
+            <a:avLst>
+              <a:gd name="adj" fmla="val 3404"/>
+            </a:avLst>
+          </a:prstGeom>
+          <a:solidFill>
+            <a:schemeClr val="bg2"/>
+          </a:solidFill>
+          <a:ln w="12700">
+            <a:solidFill>
+              <a:schemeClr val="bg2"/>
+            </a:solidFill>
+            <a:prstDash val="solid"/>
+          </a:ln>
+        </p:spPr>
+      </p:sp>
+      <p:sp>
+        <p:nvSpPr>
+          <p:cNvPr id="7" name="Text 5"/>
+          <p:cNvSpPr txBox="1"/>
+          <p:nvPr/>
+        </p:nvSpPr>
+        <p:spPr>
+          <a:xfrm>
+            <a:off x="4526280" y="1618488"/>
+            <a:ext cx="3063240" cy="411480"/>
+          </a:xfrm>
+          <a:prstGeom prst="rect">
+            <a:avLst/>
+          </a:prstGeom>
+          <a:noFill/>
+          <a:ln/>
+        </p:spPr>
+        <p:txBody>
+          <a:bodyPr wrap="square" lIns="0" tIns="0" rIns="0" bIns="0" rtlCol="0" anchor="t"/>
+          <a:lstStyle/>
+          <a:p>
+            <a:pPr indent="0" marL="0">
+              <a:buNone/>
+            </a:pPr>
+            <a:r>
+              <a:rPr lang="en-US" sz="1800" b="1" dirty="0">
+                <a:solidFill>
+                  <a:schemeClr val="accent1"/>
+                </a:solidFill>
+              </a:rPr>
+              <a:t>Paths 2% too long</a:t>
+            </a:r>
+            <a:endParaRPr lang="en-US" sz="1800" dirty="0"/>
+          </a:p>
+        </p:txBody>
+      </p:sp>
+      <p:sp>
+        <p:nvSpPr>
+          <p:cNvPr id="8" name="Text 6"/>
+          <p:cNvSpPr txBox="1"/>
+          <p:nvPr/>
+        </p:nvSpPr>
+        <p:spPr>
+          <a:xfrm>
+            <a:off x="4526280" y="2103120"/>
+            <a:ext cx="3063240" cy="1325880"/>
+          </a:xfrm>
+          <a:prstGeom prst="rect">
+            <a:avLst/>
+          </a:prstGeom>
+          <a:noFill/>
+          <a:ln/>
+        </p:spPr>
+        <p:txBody>
+          <a:bodyPr wrap="square" lIns="0" tIns="0" rIns="0" bIns="0" rtlCol="0" anchor="t"/>
+          <a:lstStyle/>
+          <a:p>
+            <a:pPr indent="0" marL="0">
+              <a:buNone/>
+            </a:pPr>
+            <a:r>
+              <a:rPr lang="en-US" sz="1450" dirty="0">
+                <a:solidFill>
+                  <a:schemeClr val="tx1"/>
+                </a:solidFill>
+              </a:rPr>
+              <a:t>Grid-snapped corners. Fine-map checks and corner tightening reached efficiency 1.00.</a:t>
+            </a:r>
+            <a:endParaRPr lang="en-US" sz="1450" dirty="0"/>
+          </a:p>
+        </p:txBody>
+      </p:sp>
+      <p:sp>
+        <p:nvSpPr>
+          <p:cNvPr id="9" name="issue-3"/>
+          <p:cNvSpPr/>
+          <p:nvPr/>
+        </p:nvSpPr>
+        <p:spPr>
+          <a:xfrm>
+            <a:off x="8046720" y="1417320"/>
+            <a:ext cx="3520440" cy="2148840"/>
+          </a:xfrm>
+          <a:prstGeom prst="roundRect">
+            <a:avLst>
+              <a:gd name="adj" fmla="val 3404"/>
+            </a:avLst>
+          </a:prstGeom>
+          <a:solidFill>
+            <a:schemeClr val="bg2"/>
+          </a:solidFill>
+          <a:ln w="12700">
+            <a:solidFill>
+              <a:schemeClr val="bg2"/>
+            </a:solidFill>
+            <a:prstDash val="solid"/>
+          </a:ln>
+        </p:spPr>
+      </p:sp>
+      <p:sp>
+        <p:nvSpPr>
+          <p:cNvPr id="10" name="Text 8"/>
+          <p:cNvSpPr txBox="1"/>
+          <p:nvPr/>
+        </p:nvSpPr>
+        <p:spPr>
+          <a:xfrm>
+            <a:off x="8275320" y="1618488"/>
+            <a:ext cx="3063240" cy="411480"/>
+          </a:xfrm>
+          <a:prstGeom prst="rect">
+            <a:avLst/>
+          </a:prstGeom>
+          <a:noFill/>
+          <a:ln/>
+        </p:spPr>
+        <p:txBody>
+          <a:bodyPr wrap="square" lIns="0" tIns="0" rIns="0" bIns="0" rtlCol="0" anchor="t"/>
+          <a:lstStyle/>
+          <a:p>
+            <a:pPr indent="0" marL="0">
+              <a:buNone/>
+            </a:pPr>
+            <a:r>
+              <a:rPr lang="en-US" sz="1800" b="1" dirty="0">
+                <a:solidFill>
+                  <a:schemeClr val="accent1"/>
+                </a:solidFill>
+              </a:rPr>
+              <a:t>IK took minutes</a:t>
+            </a:r>
+            <a:endParaRPr lang="en-US" sz="1800" dirty="0"/>
+          </a:p>
+        </p:txBody>
+      </p:sp>
+      <p:sp>
+        <p:nvSpPr>
+          <p:cNvPr id="11" name="Text 9"/>
+          <p:cNvSpPr txBox="1"/>
+          <p:nvPr/>
+        </p:nvSpPr>
+        <p:spPr>
+          <a:xfrm>
+            <a:off x="8275320" y="2103120"/>
+            <a:ext cx="3063240" cy="1325880"/>
+          </a:xfrm>
+          <a:prstGeom prst="rect">
+            <a:avLst/>
+          </a:prstGeom>
+          <a:noFill/>
+          <a:ln/>
+        </p:spPr>
+        <p:txBody>
+          <a:bodyPr wrap="square" lIns="0" tIns="0" rIns="0" bIns="0" rtlCol="0" anchor="t"/>
+          <a:lstStyle/>
+          <a:p>
+            <a:pPr indent="0" marL="0">
+              <a:buNone/>
+            </a:pPr>
+            <a:r>
+              <a:rPr lang="en-US" sz="1450" dirty="0">
+                <a:solidFill>
+                  <a:schemeClr val="tx1"/>
+                </a:solidFill>
+              </a:rPr>
+              <a:t>Checks inside every optimiser step. DLS with one final check: 0.1-0.4 s.</a:t>
+            </a:r>
+            <a:endParaRPr lang="en-US" sz="1450" dirty="0"/>
+          </a:p>
+        </p:txBody>
+      </p:sp>
+      <p:sp>
+        <p:nvSpPr>
+          <p:cNvPr id="12" name="issue-4"/>
+          <p:cNvSpPr/>
+          <p:nvPr/>
+        </p:nvSpPr>
+        <p:spPr>
+          <a:xfrm>
+            <a:off x="548640" y="3794760"/>
+            <a:ext cx="3520440" cy="2148840"/>
+          </a:xfrm>
+          <a:prstGeom prst="roundRect">
+            <a:avLst>
+              <a:gd name="adj" fmla="val 3404"/>
+            </a:avLst>
+          </a:prstGeom>
+          <a:solidFill>
+            <a:schemeClr val="bg2"/>
+          </a:solidFill>
+          <a:ln w="12700">
+            <a:solidFill>
+              <a:schemeClr val="bg2"/>
+            </a:solidFill>
+            <a:prstDash val="solid"/>
+          </a:ln>
+        </p:spPr>
+      </p:sp>
+      <p:sp>
+        <p:nvSpPr>
+          <p:cNvPr id="13" name="Text 11"/>
+          <p:cNvSpPr txBox="1"/>
+          <p:nvPr/>
+        </p:nvSpPr>
+        <p:spPr>
+          <a:xfrm>
+            <a:off x="777240" y="3995928"/>
+            <a:ext cx="3063240" cy="411480"/>
+          </a:xfrm>
+          <a:prstGeom prst="rect">
+            <a:avLst/>
+          </a:prstGeom>
+          <a:noFill/>
+          <a:ln/>
+        </p:spPr>
+        <p:txBody>
+          <a:bodyPr wrap="square" lIns="0" tIns="0" rIns="0" bIns="0" rtlCol="0" anchor="t"/>
+          <a:lstStyle/>
+          <a:p>
+            <a:pPr indent="0" marL="0">
+              <a:buNone/>
+            </a:pPr>
+            <a:r>
+              <a:rPr lang="en-US" sz="1800" b="1" dirty="0">
+                <a:solidFill>
+                  <a:schemeClr val="accent1"/>
+                </a:solidFill>
+              </a:rPr>
+              <a:t>Arm lost after a drop</a:t>
+            </a:r>
+            <a:endParaRPr lang="en-US" sz="1800" dirty="0"/>
+          </a:p>
+        </p:txBody>
+      </p:sp>
+      <p:sp>
+        <p:nvSpPr>
+          <p:cNvPr id="14" name="Text 12"/>
+          <p:cNvSpPr txBox="1"/>
+          <p:nvPr/>
+        </p:nvSpPr>
+        <p:spPr>
+          <a:xfrm>
+            <a:off x="777240" y="4480560"/>
+            <a:ext cx="3063240" cy="1325880"/>
+          </a:xfrm>
+          <a:prstGeom prst="rect">
+            <a:avLst/>
+          </a:prstGeom>
+          <a:noFill/>
+          <a:ln/>
+        </p:spPr>
+        <p:txBody>
+          <a:bodyPr wrap="square" lIns="0" tIns="0" rIns="0" bIns="0" rtlCol="0" anchor="t"/>
+          <a:lstStyle/>
+          <a:p>
+            <a:pPr indent="0" marL="0">
+              <a:buNone/>
+            </a:pPr>
+            <a:r>
+              <a:rPr lang="en-US" sz="1450" dirty="0">
+                <a:solidFill>
+                  <a:schemeClr val="tx1"/>
+                </a:solidFill>
+              </a:rPr>
+              <a:t>No IK seed back to the conveyor. A library of solved poses fixed it.</a:t>
+            </a:r>
+            <a:endParaRPr lang="en-US" sz="1450" dirty="0"/>
+          </a:p>
+        </p:txBody>
+      </p:sp>
+      <p:sp>
+        <p:nvSpPr>
+          <p:cNvPr id="15" name="issue-5"/>
+          <p:cNvSpPr/>
+          <p:nvPr/>
+        </p:nvSpPr>
+        <p:spPr>
+          <a:xfrm>
+            <a:off x="4297680" y="3794760"/>
+            <a:ext cx="3520440" cy="2148840"/>
+          </a:xfrm>
+          <a:prstGeom prst="roundRect">
+            <a:avLst>
+              <a:gd name="adj" fmla="val 3404"/>
+            </a:avLst>
+          </a:prstGeom>
+          <a:solidFill>
+            <a:schemeClr val="bg2"/>
+          </a:solidFill>
+          <a:ln w="12700">
+            <a:solidFill>
+              <a:schemeClr val="bg2"/>
+            </a:solidFill>
+            <a:prstDash val="solid"/>
+          </a:ln>
+        </p:spPr>
+      </p:sp>
+      <p:sp>
+        <p:nvSpPr>
+          <p:cNvPr id="16" name="Text 14"/>
+          <p:cNvSpPr txBox="1"/>
+          <p:nvPr/>
+        </p:nvSpPr>
+        <p:spPr>
+          <a:xfrm>
+            <a:off x="4526280" y="3995928"/>
+            <a:ext cx="3063240" cy="411480"/>
+          </a:xfrm>
+          <a:prstGeom prst="rect">
+            <a:avLst/>
+          </a:prstGeom>
+          <a:noFill/>
+          <a:ln/>
+        </p:spPr>
+        <p:txBody>
+          <a:bodyPr wrap="square" lIns="0" tIns="0" rIns="0" bIns="0" rtlCol="0" anchor="t"/>
+          <a:lstStyle/>
+          <a:p>
+            <a:pPr indent="0" marL="0">
+              <a:buNone/>
+            </a:pPr>
+            <a:r>
+              <a:rPr lang="en-US" sz="1800" b="1" dirty="0">
+                <a:solidFill>
+                  <a:schemeClr val="accent1"/>
+                </a:solidFill>
+              </a:rPr>
+              <a:t>Vanadinite unreachable</a:t>
+            </a:r>
+            <a:endParaRPr lang="en-US" sz="1800" dirty="0"/>
+          </a:p>
+        </p:txBody>
+      </p:sp>
+      <p:sp>
+        <p:nvSpPr>
+          <p:cNvPr id="17" name="Text 15"/>
+          <p:cNvSpPr txBox="1"/>
+          <p:nvPr/>
+        </p:nvSpPr>
+        <p:spPr>
+          <a:xfrm>
+            <a:off x="4526280" y="4480560"/>
+            <a:ext cx="3063240" cy="1325880"/>
+          </a:xfrm>
+          <a:prstGeom prst="rect">
+            <a:avLst/>
+          </a:prstGeom>
+          <a:noFill/>
+          <a:ln/>
+        </p:spPr>
+        <p:txBody>
+          <a:bodyPr wrap="square" lIns="0" tIns="0" rIns="0" bIns="0" rtlCol="0" anchor="t"/>
+          <a:lstStyle/>
+          <a:p>
+            <a:pPr indent="0" marL="0">
+              <a:buNone/>
+            </a:pPr>
+            <a:r>
+              <a:rPr lang="en-US" sz="1450" dirty="0">
+                <a:solidFill>
+                  <a:schemeClr val="tx1"/>
+                </a:solidFill>
+              </a:rPr>
+              <a:t>Container centre 0.93 m away. Release at its nearest reachable point.</a:t>
+            </a:r>
+            <a:endParaRPr lang="en-US" sz="1450" dirty="0"/>
+          </a:p>
+        </p:txBody>
+      </p:sp>
+      <p:sp>
+        <p:nvSpPr>
+          <p:cNvPr id="18" name="issue-6"/>
+          <p:cNvSpPr/>
+          <p:nvPr/>
+        </p:nvSpPr>
+        <p:spPr>
+          <a:xfrm>
+            <a:off x="8046720" y="3794760"/>
+            <a:ext cx="3520440" cy="2148840"/>
+          </a:xfrm>
+          <a:prstGeom prst="roundRect">
+            <a:avLst>
+              <a:gd name="adj" fmla="val 3404"/>
+            </a:avLst>
+          </a:prstGeom>
+          <a:solidFill>
+            <a:schemeClr val="bg2"/>
+          </a:solidFill>
+          <a:ln w="12700">
+            <a:solidFill>
+              <a:schemeClr val="bg2"/>
+            </a:solidFill>
+            <a:prstDash val="solid"/>
+          </a:ln>
+        </p:spPr>
+      </p:sp>
+      <p:sp>
+        <p:nvSpPr>
+          <p:cNvPr id="19" name="Text 17"/>
+          <p:cNvSpPr txBox="1"/>
+          <p:nvPr/>
+        </p:nvSpPr>
+        <p:spPr>
+          <a:xfrm>
+            <a:off x="8275320" y="3995928"/>
+            <a:ext cx="3063240" cy="411480"/>
+          </a:xfrm>
+          <a:prstGeom prst="rect">
+            <a:avLst/>
+          </a:prstGeom>
+          <a:noFill/>
+          <a:ln/>
+        </p:spPr>
+        <p:txBody>
+          <a:bodyPr wrap="square" lIns="0" tIns="0" rIns="0" bIns="0" rtlCol="0" anchor="t"/>
+          <a:lstStyle/>
+          <a:p>
+            <a:pPr indent="0" marL="0">
+              <a:buNone/>
+            </a:pPr>
+            <a:r>
+              <a:rPr lang="en-US" sz="1800" b="1" dirty="0">
+                <a:solidFill>
+                  <a:schemeClr val="accent1"/>
+                </a:solidFill>
+              </a:rPr>
+              <a:t>Two simulations clashed</a:t>
+            </a:r>
+            <a:endParaRPr lang="en-US" sz="1800" dirty="0"/>
+          </a:p>
+        </p:txBody>
+      </p:sp>
+      <p:sp>
+        <p:nvSpPr>
+          <p:cNvPr id="20" name="Text 18"/>
+          <p:cNvSpPr txBox="1"/>
+          <p:nvPr/>
+        </p:nvSpPr>
+        <p:spPr>
+          <a:xfrm>
+            <a:off x="8275320" y="4480560"/>
+            <a:ext cx="3063240" cy="1325880"/>
+          </a:xfrm>
+          <a:prstGeom prst="rect">
+            <a:avLst/>
+          </a:prstGeom>
+          <a:noFill/>
+          <a:ln/>
+        </p:spPr>
+        <p:txBody>
+          <a:bodyPr wrap="square" lIns="0" tIns="0" rIns="0" bIns="0" rtlCol="0" anchor="t"/>
+          <a:lstStyle/>
+          <a:p>
+            <a:pPr indent="0" marL="0">
+              <a:buNone/>
+            </a:pPr>
+            <a:r>
+              <a:rPr lang="en-US" sz="1450" dirty="0">
+                <a:solidFill>
+                  <a:schemeClr val="tx1"/>
+                </a:solidFill>
+              </a:rPr>
+              <a:t>A leftover simulation on the same ROS domain. One world at a time.</a:t>
+            </a:r>
+            <a:endParaRPr lang="en-US" sz="1450" dirty="0"/>
+          </a:p>
+        </p:txBody>
+      </p:sp>
+      <p:sp>
+        <p:nvSpPr>
+          <p:cNvPr id="25" name="Slide Number Placeholder 0"/>
+          <p:cNvSpPr>
+            <a:spLocks noGrp="1"/>
+          </p:cNvSpPr>
+          <p:nvPr>
+            <p:ph type="sldNum" sz="quarter" idx="4294967295"/>
+          </p:nvPr>
+        </p:nvSpPr>
+        <p:spPr>
+          <a:xfrm>
+            <a:off x="11247120" y="6355080"/>
+            <a:ext cx="457200" cy="274320"/>
+          </a:xfrm>
+          <a:prstGeom prst="rect">
+            <a:avLst/>
+          </a:prstGeom>
+          <a:extLst>
+            <a:ext uri="{C572A759-6A51-4108-AA02-DFA0A04FC94B}">
+              <ma14:wrappingTextBoxFlag xmlns:ma14="http://schemas.microsoft.com/office/mac/drawingml/2011/main" val="0"/>
+            </a:ext>
+          </a:extLst>
+        </p:spPr>
+        <p:txBody>
+          <a:bodyPr/>
+          <a:lstStyle>
+            <a:lvl1pPr>
+              <a:defRPr sz="1000">
+                <a:solidFill>
+                  <a:srgbClr val="6B7280"/>
+                </a:solidFill>
+              </a:defRPr>
+            </a:lvl1pPr>
+          </a:lstStyle>
+          <a:p>
+            <a:pPr algn="r"/>
+            <a:fld id="{F7021451-1387-4CA6-816F-3879F97B5CBC}" type="slidenum">
+              <a:rPr b="0" lang="en-US"/>
+              <a:t>14</a:t>
+            </a:fld>
+            <a:endParaRPr lang="en-US"/>
+          </a:p>
+        </p:txBody>
+      </p:sp>
+    </p:spTree>
+  </p:cSld>
+  <p:clrMapOvr>
+    <a:masterClrMapping/>
+  </p:clrMapOvr>
+</p:sld>
+</file>
+
+<file path=ppt/slides/slide15.xml><?xml version="1.0" encoding="utf-8"?>
+<p:sld xmlns:a="http://schemas.openxmlformats.org/drawingml/2006/main" xmlns:r="http://schemas.openxmlformats.org/officeDocument/2006/relationships" xmlns:p="http://schemas.openxmlformats.org/presentationml/2006/main">
+  <p:cSld name="Slide 15">
+    <p:spTree>
+      <p:nvGrpSpPr>
+        <p:cNvPr id="1" name=""/>
+        <p:cNvGrpSpPr/>
+        <p:nvPr/>
+      </p:nvGrpSpPr>
+      <p:grpSpPr>
+        <a:xfrm>
+          <a:off x="0" y="0"/>
+          <a:ext cx="0" cy="0"/>
+          <a:chOff x="0" y="0"/>
+          <a:chExt cx="0" cy="0"/>
+        </a:xfrm>
+      </p:grpSpPr>
+      <p:sp>
+        <p:nvSpPr>
+          <p:cNvPr id="2" name="Text 0"/>
+          <p:cNvSpPr/>
+          <p:nvPr>
+            <p:ph idx="100" type="title" hasCustomPrompt="1"/>
+          </p:nvPr>
+        </p:nvSpPr>
+        <p:spPr>
+          <a:xfrm>
             <a:off x="640080" y="548640"/>
             <a:ext cx="10881360" cy="914400"/>
           </a:xfrm>
@@ -5884,7 +6202,7 @@
         </p:nvSpPr>
         <p:spPr>
           <a:xfrm>
-            <a:off x="640080" y="1828800"/>
+            <a:off x="640080" y="1737360"/>
             <a:ext cx="457200" cy="457200"/>
           </a:xfrm>
           <a:prstGeom prst="ellipse">
@@ -5909,7 +6227,7 @@
         </p:nvSpPr>
         <p:spPr>
           <a:xfrm>
-            <a:off x="640080" y="1828800"/>
+            <a:off x="640080" y="1737360"/>
             <a:ext cx="457200" cy="457200"/>
           </a:xfrm>
           <a:prstGeom prst="rect">
@@ -5945,8 +6263,8 @@
         </p:nvSpPr>
         <p:spPr>
           <a:xfrm>
-            <a:off x="1325880" y="1847088"/>
-            <a:ext cx="5120640" cy="685800"/>
+            <a:off x="1325880" y="1764792"/>
+            <a:ext cx="5120640" cy="640080"/>
           </a:xfrm>
           <a:prstGeom prst="rect">
             <a:avLst/>
@@ -5962,14 +6280,14 @@
               <a:buNone/>
             </a:pPr>
             <a:r>
-              <a:rPr lang="en-US" sz="2000" dirty="0">
+              <a:rPr lang="en-US" sz="1800" dirty="0">
                 <a:solidFill>
                   <a:schemeClr val="bg1"/>
                 </a:solidFill>
               </a:rPr>
-              <a:t>Sorting: 8 of 8 ores in the right container</a:t>
-            </a:r>
-            <a:endParaRPr lang="en-US" sz="2000" dirty="0"/>
+              <a:t>Sorting: 16 of 16 ores in the right container</a:t>
+            </a:r>
+            <a:endParaRPr lang="en-US" sz="1800" dirty="0"/>
           </a:p>
         </p:txBody>
       </p:sp>
@@ -5981,7 +6299,7 @@
         </p:nvSpPr>
         <p:spPr>
           <a:xfrm>
-            <a:off x="640080" y="2788920"/>
+            <a:off x="640080" y="2487168"/>
             <a:ext cx="457200" cy="457200"/>
           </a:xfrm>
           <a:prstGeom prst="ellipse">
@@ -6006,7 +6324,7 @@
         </p:nvSpPr>
         <p:spPr>
           <a:xfrm>
-            <a:off x="640080" y="2788920"/>
+            <a:off x="640080" y="2487168"/>
             <a:ext cx="457200" cy="457200"/>
           </a:xfrm>
           <a:prstGeom prst="rect">
@@ -6042,8 +6360,8 @@
         </p:nvSpPr>
         <p:spPr>
           <a:xfrm>
-            <a:off x="1325880" y="2807208"/>
-            <a:ext cx="5120640" cy="685800"/>
+            <a:off x="1325880" y="2514600"/>
+            <a:ext cx="5120640" cy="640080"/>
           </a:xfrm>
           <a:prstGeom prst="rect">
             <a:avLst/>
@@ -6059,14 +6377,14 @@
               <a:buNone/>
             </a:pPr>
             <a:r>
-              <a:rPr lang="en-US" sz="2000" dirty="0">
+              <a:rPr lang="en-US" sz="1800" dirty="0">
                 <a:solidFill>
                   <a:schemeClr val="bg1"/>
                 </a:solidFill>
               </a:rPr>
               <a:t>Planning: paths as short as the reference</a:t>
             </a:r>
-            <a:endParaRPr lang="en-US" sz="2000" dirty="0"/>
+            <a:endParaRPr lang="en-US" sz="1800" dirty="0"/>
           </a:p>
         </p:txBody>
       </p:sp>
@@ -6078,7 +6396,7 @@
         </p:nvSpPr>
         <p:spPr>
           <a:xfrm>
-            <a:off x="640080" y="3749040"/>
+            <a:off x="640080" y="3236976"/>
             <a:ext cx="457200" cy="457200"/>
           </a:xfrm>
           <a:prstGeom prst="ellipse">
@@ -6103,7 +6421,7 @@
         </p:nvSpPr>
         <p:spPr>
           <a:xfrm>
-            <a:off x="640080" y="3749040"/>
+            <a:off x="640080" y="3236976"/>
             <a:ext cx="457200" cy="457200"/>
           </a:xfrm>
           <a:prstGeom prst="rect">
@@ -6139,8 +6457,8 @@
         </p:nvSpPr>
         <p:spPr>
           <a:xfrm>
-            <a:off x="1325880" y="3767328"/>
-            <a:ext cx="5120640" cy="685800"/>
+            <a:off x="1325880" y="3264408"/>
+            <a:ext cx="5120640" cy="640080"/>
           </a:xfrm>
           <a:prstGeom prst="rect">
             <a:avLst/>
@@ -6156,20 +6474,214 @@
               <a:buNone/>
             </a:pPr>
             <a:r>
-              <a:rPr lang="en-US" sz="2000" dirty="0">
+              <a:rPr lang="en-US" sz="1800" dirty="0">
                 <a:solidFill>
                   <a:schemeClr val="bg1"/>
                 </a:solidFill>
               </a:rPr>
-              <a:t>Every planner and controller written from scratch</a:t>
-            </a:r>
-            <a:endParaRPr lang="en-US" sz="2000" dirty="0"/>
-          </a:p>
-        </p:txBody>
-      </p:sp>
-      <p:sp>
-        <p:nvSpPr>
-          <p:cNvPr id="12" name="Text 10"/>
+              <a:t>Hand-off: eBot to arm to conveyor</a:t>
+            </a:r>
+            <a:endParaRPr lang="en-US" sz="1800" dirty="0"/>
+          </a:p>
+        </p:txBody>
+      </p:sp>
+      <p:sp>
+        <p:nvSpPr>
+          <p:cNvPr id="12" name="done-4"/>
+          <p:cNvSpPr/>
+          <p:nvPr/>
+        </p:nvSpPr>
+        <p:spPr>
+          <a:xfrm>
+            <a:off x="640080" y="3986784"/>
+            <a:ext cx="457200" cy="457200"/>
+          </a:xfrm>
+          <a:prstGeom prst="ellipse">
+            <a:avLst/>
+          </a:prstGeom>
+          <a:solidFill>
+            <a:schemeClr val="accent1"/>
+          </a:solidFill>
+          <a:ln w="12700">
+            <a:solidFill>
+              <a:schemeClr val="accent1"/>
+            </a:solidFill>
+            <a:prstDash val="solid"/>
+          </a:ln>
+        </p:spPr>
+      </p:sp>
+      <p:sp>
+        <p:nvSpPr>
+          <p:cNvPr id="13" name="Text 11"/>
+          <p:cNvSpPr txBox="1"/>
+          <p:nvPr/>
+        </p:nvSpPr>
+        <p:spPr>
+          <a:xfrm>
+            <a:off x="640080" y="3986784"/>
+            <a:ext cx="457200" cy="457200"/>
+          </a:xfrm>
+          <a:prstGeom prst="rect">
+            <a:avLst/>
+          </a:prstGeom>
+          <a:noFill/>
+          <a:ln/>
+        </p:spPr>
+        <p:txBody>
+          <a:bodyPr wrap="square" lIns="0" tIns="0" rIns="0" bIns="0" rtlCol="0" anchor="ctr"/>
+          <a:lstStyle/>
+          <a:p>
+            <a:pPr algn="ctr" indent="0" marL="0">
+              <a:buNone/>
+            </a:pPr>
+            <a:r>
+              <a:rPr lang="en-US" sz="1600" b="1" dirty="0">
+                <a:solidFill>
+                  <a:schemeClr val="bg1"/>
+                </a:solidFill>
+              </a:rPr>
+              <a:t>4</a:t>
+            </a:r>
+            <a:endParaRPr lang="en-US" sz="1600" dirty="0"/>
+          </a:p>
+        </p:txBody>
+      </p:sp>
+      <p:sp>
+        <p:nvSpPr>
+          <p:cNvPr id="14" name="Text 12"/>
+          <p:cNvSpPr txBox="1"/>
+          <p:nvPr/>
+        </p:nvSpPr>
+        <p:spPr>
+          <a:xfrm>
+            <a:off x="1325880" y="4014216"/>
+            <a:ext cx="5120640" cy="640080"/>
+          </a:xfrm>
+          <a:prstGeom prst="rect">
+            <a:avLst/>
+          </a:prstGeom>
+          <a:noFill/>
+          <a:ln/>
+        </p:spPr>
+        <p:txBody>
+          <a:bodyPr wrap="square" lIns="0" tIns="0" rIns="0" bIns="0" rtlCol="0" anchor="t"/>
+          <a:lstStyle/>
+          <a:p>
+            <a:pPr indent="0" marL="0">
+              <a:buNone/>
+            </a:pPr>
+            <a:r>
+              <a:rPr lang="en-US" sz="1800" dirty="0">
+                <a:solidFill>
+                  <a:schemeClr val="bg1"/>
+                </a:solidFill>
+              </a:rPr>
+              <a:t>Re-planning around unmapped rocks</a:t>
+            </a:r>
+            <a:endParaRPr lang="en-US" sz="1800" dirty="0"/>
+          </a:p>
+        </p:txBody>
+      </p:sp>
+      <p:sp>
+        <p:nvSpPr>
+          <p:cNvPr id="15" name="done-5"/>
+          <p:cNvSpPr/>
+          <p:nvPr/>
+        </p:nvSpPr>
+        <p:spPr>
+          <a:xfrm>
+            <a:off x="640080" y="4736592"/>
+            <a:ext cx="457200" cy="457200"/>
+          </a:xfrm>
+          <a:prstGeom prst="ellipse">
+            <a:avLst/>
+          </a:prstGeom>
+          <a:solidFill>
+            <a:schemeClr val="accent1"/>
+          </a:solidFill>
+          <a:ln w="12700">
+            <a:solidFill>
+              <a:schemeClr val="accent1"/>
+            </a:solidFill>
+            <a:prstDash val="solid"/>
+          </a:ln>
+        </p:spPr>
+      </p:sp>
+      <p:sp>
+        <p:nvSpPr>
+          <p:cNvPr id="16" name="Text 14"/>
+          <p:cNvSpPr txBox="1"/>
+          <p:nvPr/>
+        </p:nvSpPr>
+        <p:spPr>
+          <a:xfrm>
+            <a:off x="640080" y="4736592"/>
+            <a:ext cx="457200" cy="457200"/>
+          </a:xfrm>
+          <a:prstGeom prst="rect">
+            <a:avLst/>
+          </a:prstGeom>
+          <a:noFill/>
+          <a:ln/>
+        </p:spPr>
+        <p:txBody>
+          <a:bodyPr wrap="square" lIns="0" tIns="0" rIns="0" bIns="0" rtlCol="0" anchor="ctr"/>
+          <a:lstStyle/>
+          <a:p>
+            <a:pPr algn="ctr" indent="0" marL="0">
+              <a:buNone/>
+            </a:pPr>
+            <a:r>
+              <a:rPr lang="en-US" sz="1600" b="1" dirty="0">
+                <a:solidFill>
+                  <a:schemeClr val="bg1"/>
+                </a:solidFill>
+              </a:rPr>
+              <a:t>5</a:t>
+            </a:r>
+            <a:endParaRPr lang="en-US" sz="1600" dirty="0"/>
+          </a:p>
+        </p:txBody>
+      </p:sp>
+      <p:sp>
+        <p:nvSpPr>
+          <p:cNvPr id="17" name="Text 15"/>
+          <p:cNvSpPr txBox="1"/>
+          <p:nvPr/>
+        </p:nvSpPr>
+        <p:spPr>
+          <a:xfrm>
+            <a:off x="1325880" y="4764024"/>
+            <a:ext cx="5120640" cy="640080"/>
+          </a:xfrm>
+          <a:prstGeom prst="rect">
+            <a:avLst/>
+          </a:prstGeom>
+          <a:noFill/>
+          <a:ln/>
+        </p:spPr>
+        <p:txBody>
+          <a:bodyPr wrap="square" lIns="0" tIns="0" rIns="0" bIns="0" rtlCol="0" anchor="t"/>
+          <a:lstStyle/>
+          <a:p>
+            <a:pPr indent="0" marL="0">
+              <a:buNone/>
+            </a:pPr>
+            <a:r>
+              <a:rPr lang="en-US" sz="1800" dirty="0">
+                <a:solidFill>
+                  <a:schemeClr val="bg1"/>
+                </a:solidFill>
+              </a:rPr>
+              <a:t>Every algorithm written from scratch</a:t>
+            </a:r>
+            <a:endParaRPr lang="en-US" sz="1800" dirty="0"/>
+          </a:p>
+        </p:txBody>
+      </p:sp>
+      <p:sp>
+        <p:nvSpPr>
+          <p:cNvPr id="18" name="Text 16"/>
           <p:cNvSpPr txBox="1"/>
           <p:nvPr/>
         </p:nvSpPr>
@@ -6205,7 +6717,7 @@
       </p:sp>
       <p:sp>
         <p:nvSpPr>
-          <p:cNvPr id="13" name="Text 11"/>
+          <p:cNvPr id="19" name="Text 17"/>
           <p:cNvSpPr txBox="1"/>
           <p:nvPr/>
         </p:nvSpPr>
@@ -6237,7 +6749,7 @@
                   <a:schemeClr val="bg2"/>
                 </a:solidFill>
               </a:rPr>
-              <a:t>Hand ore from the eBot to the arm</a:t>
+              <a:t>Train a classifier on real ore samples</a:t>
             </a:r>
             <a:endParaRPr lang="en-US" sz="1800" dirty="0"/>
           </a:p>
@@ -6255,51 +6767,15 @@
                   <a:schemeClr val="bg2"/>
                 </a:solidFill>
               </a:rPr>
-              <a:t>Re-plan around rocks the map misses</a:t>
+              <a:t>Move to physical robots</a:t>
             </a:r>
             <a:endParaRPr lang="en-US" sz="1800" dirty="0"/>
           </a:p>
-          <a:p>
-            <a:pPr marL="342900" indent="-342900">
-              <a:spcAft>
-                <a:spcPts val="1000"/>
-              </a:spcAft>
-              <a:buSzPct val="100000"/>
-              <a:buChar char="•"/>
-            </a:pPr>
-            <a:r>
-              <a:rPr lang="en-US" sz="1800" dirty="0">
-                <a:solidFill>
-                  <a:schemeClr val="bg2"/>
-                </a:solidFill>
-              </a:rPr>
-              <a:t>Train a classifier on real ore samples</a:t>
-            </a:r>
-            <a:endParaRPr lang="en-US" sz="1800" dirty="0"/>
-          </a:p>
-          <a:p>
-            <a:pPr marL="342900" indent="-342900">
-              <a:spcAft>
-                <a:spcPts val="1000"/>
-              </a:spcAft>
-              <a:buSzPct val="100000"/>
-              <a:buChar char="•"/>
-            </a:pPr>
-            <a:r>
-              <a:rPr lang="en-US" sz="1800" dirty="0">
-                <a:solidFill>
-                  <a:schemeClr val="bg2"/>
-                </a:solidFill>
-              </a:rPr>
-              <a:t>Move to physical robots</a:t>
-            </a:r>
-            <a:endParaRPr lang="en-US" sz="1800" dirty="0"/>
-          </a:p>
-        </p:txBody>
-      </p:sp>
-      <p:sp>
-        <p:nvSpPr>
-          <p:cNvPr id="14" name="Text 12"/>
+        </p:txBody>
+      </p:sp>
+      <p:sp>
+        <p:nvSpPr>
+          <p:cNvPr id="20" name="Text 18"/>
           <p:cNvSpPr txBox="1"/>
           <p:nvPr/>
         </p:nvSpPr>

--- a/docs/Strata_Cobot_Presentation.pptx
+++ b/docs/Strata_Cobot_Presentation.pptx
@@ -121,7 +121,7 @@
   <p:extLst>
     <p:ext uri="{521415D9-36F7-43E2-AB2F-B90AF26B5E84}">
       <p14:sectionLst xmlns:p14="http://schemas.microsoft.com/office/powerpoint/2010/main">
-        <p14:section name="Introduction" id="{5de1d366-0854-39de-df3d-80345f57665a}">
+        <p14:section name="Introduction" id="{c9a7873b-203f-02d0-018f-f8425bd7d58c}">
           <p14:sldIdLst>
             <p14:sldId id="256"/>
             <p14:sldId id="257"/>
@@ -129,7 +129,7 @@
             <p14:sldId id="259"/>
           </p14:sldIdLst>
         </p14:section>
-        <p14:section name="The manipulator" id="{0b24578b-af5f-b63a-0c6f-c4f7f6269597}">
+        <p14:section name="The manipulator" id="{6939283a-27e1-852f-4837-51aac4a9cefa}">
           <p14:sldIdLst>
             <p14:sldId id="260"/>
             <p14:sldId id="261"/>
@@ -138,13 +138,13 @@
             <p14:sldId id="264"/>
           </p14:sldIdLst>
         </p14:section>
-        <p14:section name="The mobile robot" id="{4a278b7f-aede-0643-606a-1fe985082213}">
+        <p14:section name="The mobile robot" id="{fce54d1c-6e7c-1ee0-e682-a0f7cc390057}">
           <p14:sldIdLst>
             <p14:sldId id="265"/>
             <p14:sldId id="266"/>
           </p14:sldIdLst>
         </p14:section>
-        <p14:section name="Results" id="{c8b2878b-80dd-81fb-30b4-7f7645fd9d21}">
+        <p14:section name="Results" id="{a712679d-0c89-e6ce-6e8f-49ae955d5234}">
           <p14:sldIdLst>
             <p14:sldId id="267"/>
             <p14:sldId id="268"/>
@@ -1426,7 +1426,7 @@
           <a:p>
             <a:r>
               <a:rPr lang="en-US" dirty="0"/>
-              <a:t>To sum up: both halves of the mission work end to end in simulation, using only algorithms we wrote. The natural next step is the handoff, where the eBot delivers ore to the arm. Happy to take questions, and we can run a live demo.</a:t>
+              <a:t>To sum up: both halves of the mission work end to end in simulation, using only algorithms we wrote. The two robots also work together: the eBot delivers the ore package to the arm, which lifts it onto the conveyor, and the eBot re-plans around rocks it did not expect. The natural next steps are a classifier trained on real ore samples and physical robots. Happy to take questions, and we can run a live demo.</a:t>
             </a:r>
             <a:endParaRPr lang="en-US" dirty="0"/>
           </a:p>
@@ -1690,7 +1690,7 @@
           <a:p>
             <a:r>
               <a:rPr lang="en-US" dirty="0"/>
-              <a:t>Two Python nodes per robot. Note the arrows into the simulation: the arm accepts only velocity commands and the eBot only velocity twists, so every node closes its own control loop at 20 to 50 Hz. The two highlighted nodes hold most of the algorithmic work.</a:t>
+              <a:t>Two Python nodes per robot, plus package_handoff, which extends the arm node for the full mission: the planner says the eBot is in place on /handoff/ready, the arm lifts the package onto the conveyor and answers on /handoff/done. The follower reports anything its lidar sees that the map lacks on /ebot_obstacles, and the planner re-plans. The arm accepts only velocity commands and the eBot only velocity twists, so every node closes its own control loop at 20 to 50 Hz. The two highlighted nodes hold most of the algorithmic work.</a:t>
             </a:r>
             <a:endParaRPr lang="en-US" dirty="0"/>
           </a:p>
@@ -9364,7 +9364,7 @@
                   <a:schemeClr val="tx1"/>
                 </a:solidFill>
               </a:rPr>
-              <a:t>Four nodes, two sense-plan-act pipelines</a:t>
+              <a:t>Five nodes, two sense-plan-act pipelines and a hand-off</a:t>
             </a:r>
             <a:endParaRPr lang="en-US" sz="3200" dirty="0"/>
           </a:p>
@@ -9379,7 +9379,7 @@
         <p:spPr>
           <a:xfrm>
             <a:off x="548640" y="1371600"/>
-            <a:ext cx="2377440" cy="4754880"/>
+            <a:ext cx="2377440" cy="4480560"/>
           </a:xfrm>
           <a:prstGeom prst="roundRect">
             <a:avLst>
@@ -9405,8 +9405,8 @@
         </p:nvSpPr>
         <p:spPr>
           <a:xfrm>
-            <a:off x="731520" y="1508760"/>
-            <a:ext cx="2011680" cy="365760"/>
+            <a:off x="731520" y="1481328"/>
+            <a:ext cx="2011680" cy="320040"/>
           </a:xfrm>
           <a:prstGeom prst="rect">
             <a:avLst/>
@@ -9441,8 +9441,8 @@
         </p:nvSpPr>
         <p:spPr>
           <a:xfrm>
-            <a:off x="731520" y="1920240"/>
-            <a:ext cx="2011680" cy="4114800"/>
+            <a:off x="731520" y="1828800"/>
+            <a:ext cx="2011680" cy="3977640"/>
           </a:xfrm>
           <a:prstGeom prst="rect">
             <a:avLst/>
@@ -9458,76 +9458,76 @@
               <a:buNone/>
             </a:pPr>
             <a:r>
-              <a:rPr lang="en-US" sz="1300" dirty="0">
+              <a:rPr lang="en-US" sz="1250" dirty="0">
                 <a:solidFill>
                   <a:schemeClr val="tx2"/>
                 </a:solidFill>
               </a:rPr>
               <a:t>UR7e arm + magnet</a:t>
             </a:r>
-            <a:endParaRPr lang="en-US" sz="1300" dirty="0"/>
-          </a:p>
-          <a:p>
-            <a:pPr indent="0" marL="0">
-              <a:buNone/>
-            </a:pPr>
-            <a:r>
-              <a:rPr lang="en-US" sz="1300" dirty="0">
+            <a:endParaRPr lang="en-US" sz="1250" dirty="0"/>
+          </a:p>
+          <a:p>
+            <a:pPr indent="0" marL="0">
+              <a:buNone/>
+            </a:pPr>
+            <a:r>
+              <a:rPr lang="en-US" sz="1250" dirty="0">
                 <a:solidFill>
                   <a:schemeClr val="tx2"/>
                 </a:solidFill>
               </a:rPr>
               <a:t>RealSense D435i</a:t>
             </a:r>
-            <a:endParaRPr lang="en-US" sz="1300" dirty="0"/>
-          </a:p>
-          <a:p>
-            <a:pPr indent="0" marL="0">
-              <a:buNone/>
-            </a:pPr>
-            <a:r>
-              <a:rPr lang="en-US" sz="1300" dirty="0">
+            <a:endParaRPr lang="en-US" sz="1250" dirty="0"/>
+          </a:p>
+          <a:p>
+            <a:pPr indent="0" marL="0">
+              <a:buNone/>
+            </a:pPr>
+            <a:r>
+              <a:rPr lang="en-US" sz="1250" dirty="0">
                 <a:solidFill>
                   <a:schemeClr val="tx2"/>
                 </a:solidFill>
               </a:rPr>
               <a:t>eBot + lidar</a:t>
             </a:r>
-            <a:endParaRPr lang="en-US" sz="1300" dirty="0"/>
-          </a:p>
-          <a:p>
-            <a:pPr indent="0" marL="0">
-              <a:buNone/>
-            </a:pPr>
-            <a:r>
-              <a:rPr lang="en-US" sz="1300" dirty="0">
+            <a:endParaRPr lang="en-US" sz="1250" dirty="0"/>
+          </a:p>
+          <a:p>
+            <a:pPr indent="0" marL="0">
+              <a:buNone/>
+            </a:pPr>
+            <a:r>
+              <a:rPr lang="en-US" sz="1250" dirty="0">
                 <a:solidFill>
                   <a:schemeClr val="tx2"/>
                 </a:solidFill>
               </a:rPr>
               <a:t>rocks and /map</a:t>
             </a:r>
-            <a:endParaRPr lang="en-US" sz="1300" dirty="0"/>
-          </a:p>
-          <a:p>
-            <a:pPr indent="0" marL="0">
-              <a:buNone/>
-            </a:pPr>
-            <a:endParaRPr lang="en-US" sz="1300" dirty="0"/>
-          </a:p>
-          <a:p>
-            <a:pPr indent="0" marL="0">
-              <a:buNone/>
-            </a:pPr>
-            <a:r>
-              <a:rPr lang="en-US" sz="1300" dirty="0">
+            <a:endParaRPr lang="en-US" sz="1250" dirty="0"/>
+          </a:p>
+          <a:p>
+            <a:pPr indent="0" marL="0">
+              <a:buNone/>
+            </a:pPr>
+            <a:endParaRPr lang="en-US" sz="1250" dirty="0"/>
+          </a:p>
+          <a:p>
+            <a:pPr indent="0" marL="0">
+              <a:buNone/>
+            </a:pPr>
+            <a:r>
+              <a:rPr lang="en-US" sz="1250" dirty="0">
                 <a:solidFill>
                   <a:schemeClr val="tx2"/>
                 </a:solidFill>
               </a:rPr>
               <a:t>ROS 2 Jazzy bridge</a:t>
             </a:r>
-            <a:endParaRPr lang="en-US" sz="1300" dirty="0"/>
+            <a:endParaRPr lang="en-US" sz="1250" dirty="0"/>
           </a:p>
         </p:txBody>
       </p:sp>
@@ -9539,7 +9539,7 @@
         </p:nvSpPr>
         <p:spPr>
           <a:xfrm>
-            <a:off x="4023360" y="1325880"/>
+            <a:off x="4023360" y="1280160"/>
             <a:ext cx="2743200" cy="274320"/>
           </a:xfrm>
           <a:prstGeom prst="rect">
@@ -9575,12 +9575,12 @@
         </p:nvSpPr>
         <p:spPr>
           <a:xfrm>
-            <a:off x="4023360" y="1645920"/>
-            <a:ext cx="3108960" cy="1554480"/>
+            <a:off x="4023360" y="1600200"/>
+            <a:ext cx="3108960" cy="1325880"/>
           </a:xfrm>
           <a:prstGeom prst="roundRect">
             <a:avLst>
-              <a:gd name="adj" fmla="val 4706"/>
+              <a:gd name="adj" fmla="val 5517"/>
             </a:avLst>
           </a:prstGeom>
           <a:solidFill>
@@ -9602,8 +9602,8 @@
         </p:nvSpPr>
         <p:spPr>
           <a:xfrm>
-            <a:off x="4206240" y="1783080"/>
-            <a:ext cx="2743200" cy="365760"/>
+            <a:off x="4206240" y="1709928"/>
+            <a:ext cx="2743200" cy="320040"/>
           </a:xfrm>
           <a:prstGeom prst="rect">
             <a:avLst/>
@@ -9638,8 +9638,8 @@
         </p:nvSpPr>
         <p:spPr>
           <a:xfrm>
-            <a:off x="4206240" y="2194560"/>
-            <a:ext cx="2743200" cy="914400"/>
+            <a:off x="4206240" y="2057400"/>
+            <a:ext cx="2743200" cy="822960"/>
           </a:xfrm>
           <a:prstGeom prst="rect">
             <a:avLst/>
@@ -9655,42 +9655,42 @@
               <a:buNone/>
             </a:pPr>
             <a:r>
-              <a:rPr lang="en-US" sz="1300" dirty="0">
+              <a:rPr lang="en-US" sz="1250" dirty="0">
                 <a:solidFill>
                   <a:schemeClr val="tx2"/>
                 </a:solidFill>
               </a:rPr>
-              <a:t>HSV face detection</a:t>
-            </a:r>
-            <a:endParaRPr lang="en-US" sz="1300" dirty="0"/>
-          </a:p>
-          <a:p>
-            <a:pPr indent="0" marL="0">
-              <a:buNone/>
-            </a:pPr>
-            <a:r>
-              <a:rPr lang="en-US" sz="1300" dirty="0">
+              <a:t>find each ore by depth and shape</a:t>
+            </a:r>
+            <a:endParaRPr lang="en-US" sz="1250" dirty="0"/>
+          </a:p>
+          <a:p>
+            <a:pPr indent="0" marL="0">
+              <a:buNone/>
+            </a:pPr>
+            <a:r>
+              <a:rPr lang="en-US" sz="1250" dirty="0">
                 <a:solidFill>
                   <a:schemeClr val="tx2"/>
                 </a:solidFill>
               </a:rPr>
-              <a:t>depth back-projection</a:t>
-            </a:r>
-            <a:endParaRPr lang="en-US" sz="1300" dirty="0"/>
-          </a:p>
-          <a:p>
-            <a:pPr indent="0" marL="0">
-              <a:buNone/>
-            </a:pPr>
-            <a:r>
-              <a:rPr lang="en-US" sz="1300" dirty="0">
+              <a:t>name it by a colour vote</a:t>
+            </a:r>
+            <a:endParaRPr lang="en-US" sz="1250" dirty="0"/>
+          </a:p>
+          <a:p>
+            <a:pPr indent="0" marL="0">
+              <a:buNone/>
+            </a:pPr>
+            <a:r>
+              <a:rPr lang="en-US" sz="1250" dirty="0">
                 <a:solidFill>
                   <a:schemeClr val="tx2"/>
                 </a:solidFill>
               </a:rPr>
-              <a:t>median per ore</a:t>
-            </a:r>
-            <a:endParaRPr lang="en-US" sz="1300" dirty="0"/>
+              <a:t>tf frame per ore</a:t>
+            </a:r>
+            <a:endParaRPr lang="en-US" sz="1250" dirty="0"/>
           </a:p>
         </p:txBody>
       </p:sp>
@@ -9702,12 +9702,12 @@
         </p:nvSpPr>
         <p:spPr>
           <a:xfrm>
-            <a:off x="8321040" y="1645920"/>
-            <a:ext cx="3291840" cy="1554480"/>
+            <a:off x="8321040" y="1600200"/>
+            <a:ext cx="3291840" cy="1325880"/>
           </a:xfrm>
           <a:prstGeom prst="roundRect">
             <a:avLst>
-              <a:gd name="adj" fmla="val 4706"/>
+              <a:gd name="adj" fmla="val 5517"/>
             </a:avLst>
           </a:prstGeom>
           <a:solidFill>
@@ -9729,8 +9729,8 @@
         </p:nvSpPr>
         <p:spPr>
           <a:xfrm>
-            <a:off x="8503920" y="1783080"/>
-            <a:ext cx="2926080" cy="365760"/>
+            <a:off x="8503920" y="1709928"/>
+            <a:ext cx="2926080" cy="320040"/>
           </a:xfrm>
           <a:prstGeom prst="rect">
             <a:avLst/>
@@ -9765,8 +9765,8 @@
         </p:nvSpPr>
         <p:spPr>
           <a:xfrm>
-            <a:off x="8503920" y="2194560"/>
-            <a:ext cx="2926080" cy="914400"/>
+            <a:off x="8503920" y="2057400"/>
+            <a:ext cx="2926080" cy="822960"/>
           </a:xfrm>
           <a:prstGeom prst="rect">
             <a:avLst/>
@@ -9782,95 +9782,194 @@
               <a:buNone/>
             </a:pPr>
             <a:r>
-              <a:rPr lang="en-US" sz="1300" dirty="0">
+              <a:rPr lang="en-US" sz="1250" dirty="0">
                 <a:solidFill>
                   <a:schemeClr val="tx2"/>
                 </a:solidFill>
               </a:rPr>
               <a:t>damped least-squares IK</a:t>
             </a:r>
-            <a:endParaRPr lang="en-US" sz="1300" dirty="0"/>
-          </a:p>
-          <a:p>
-            <a:pPr indent="0" marL="0">
-              <a:buNone/>
-            </a:pPr>
-            <a:r>
-              <a:rPr lang="en-US" sz="1300" dirty="0">
+            <a:endParaRPr lang="en-US" sz="1250" dirty="0"/>
+          </a:p>
+          <a:p>
+            <a:pPr indent="0" marL="0">
+              <a:buNone/>
+            </a:pPr>
+            <a:r>
+              <a:rPr lang="en-US" sz="1250" dirty="0">
                 <a:solidFill>
                   <a:schemeClr val="tx2"/>
                 </a:solidFill>
               </a:rPr>
               <a:t>collision-checked routes</a:t>
             </a:r>
-            <a:endParaRPr lang="en-US" sz="1300" dirty="0"/>
-          </a:p>
-          <a:p>
-            <a:pPr indent="0" marL="0">
-              <a:buNone/>
-            </a:pPr>
-            <a:r>
-              <a:rPr lang="en-US" sz="1300" dirty="0">
+            <a:endParaRPr lang="en-US" sz="1250" dirty="0"/>
+          </a:p>
+          <a:p>
+            <a:pPr indent="0" marL="0">
+              <a:buNone/>
+            </a:pPr>
+            <a:r>
+              <a:rPr lang="en-US" sz="1250" dirty="0">
                 <a:solidFill>
                   <a:schemeClr val="tx2"/>
                 </a:solidFill>
               </a:rPr>
               <a:t>force-checked picks</a:t>
             </a:r>
-            <a:endParaRPr lang="en-US" sz="1300" dirty="0"/>
-          </a:p>
-        </p:txBody>
-      </p:sp>
-      <p:sp>
-        <p:nvSpPr>
-          <p:cNvPr id="13" name="Text 11"/>
-          <p:cNvSpPr txBox="1"/>
-          <p:nvPr/>
-        </p:nvSpPr>
-        <p:spPr>
-          <a:xfrm>
-            <a:off x="4023360" y="3794760"/>
-            <a:ext cx="2743200" cy="274320"/>
-          </a:xfrm>
-          <a:prstGeom prst="rect">
-            <a:avLst/>
-          </a:prstGeom>
-          <a:noFill/>
-          <a:ln/>
-        </p:spPr>
-        <p:txBody>
-          <a:bodyPr wrap="square" lIns="0" tIns="0" rIns="0" bIns="0" rtlCol="0" anchor="t"/>
-          <a:lstStyle/>
-          <a:p>
-            <a:pPr indent="0" marL="0">
-              <a:buNone/>
-            </a:pPr>
-            <a:r>
-              <a:rPr lang="en-US" sz="1300" dirty="0">
-                <a:solidFill>
-                  <a:schemeClr val="accent5"/>
-                </a:solidFill>
-              </a:rPr>
-              <a:t>Mobile robot</a:t>
-            </a:r>
-            <a:endParaRPr lang="en-US" sz="1300" dirty="0"/>
-          </a:p>
-        </p:txBody>
-      </p:sp>
-      <p:sp>
-        <p:nvSpPr>
-          <p:cNvPr id="14" name="node-planning"/>
+            <a:endParaRPr lang="en-US" sz="1250" dirty="0"/>
+          </a:p>
+        </p:txBody>
+      </p:sp>
+      <p:sp>
+        <p:nvSpPr>
+          <p:cNvPr id="13" name="node-handoff"/>
           <p:cNvSpPr/>
           <p:nvPr/>
         </p:nvSpPr>
         <p:spPr>
           <a:xfrm>
-            <a:off x="4023360" y="4114800"/>
-            <a:ext cx="3108960" cy="1554480"/>
+            <a:off x="8321040" y="3429000"/>
+            <a:ext cx="3291840" cy="868680"/>
           </a:xfrm>
           <a:prstGeom prst="roundRect">
             <a:avLst>
-              <a:gd name="adj" fmla="val 4706"/>
+              <a:gd name="adj" fmla="val 8421"/>
+            </a:avLst>
+          </a:prstGeom>
+          <a:solidFill>
+            <a:srgbClr val="FFFFFF"/>
+          </a:solidFill>
+          <a:ln w="12700">
+            <a:solidFill>
+              <a:srgbClr val="6B7280"/>
+            </a:solidFill>
+            <a:prstDash val="solid"/>
+          </a:ln>
+        </p:spPr>
+      </p:sp>
+      <p:sp>
+        <p:nvSpPr>
+          <p:cNvPr id="14" name="Text 12"/>
+          <p:cNvSpPr txBox="1"/>
+          <p:nvPr/>
+        </p:nvSpPr>
+        <p:spPr>
+          <a:xfrm>
+            <a:off x="8503920" y="3538728"/>
+            <a:ext cx="2926080" cy="320040"/>
+          </a:xfrm>
+          <a:prstGeom prst="rect">
+            <a:avLst/>
+          </a:prstGeom>
+          <a:noFill/>
+          <a:ln/>
+        </p:spPr>
+        <p:txBody>
+          <a:bodyPr wrap="square" lIns="0" tIns="0" rIns="0" bIns="0" rtlCol="0" anchor="t"/>
+          <a:lstStyle/>
+          <a:p>
+            <a:pPr indent="0" marL="0">
+              <a:buNone/>
+            </a:pPr>
+            <a:r>
+              <a:rPr lang="en-US" sz="1600" b="1" dirty="0">
+                <a:solidFill>
+                  <a:schemeClr val="tx1"/>
+                </a:solidFill>
+              </a:rPr>
+              <a:t>package_handoff</a:t>
+            </a:r>
+            <a:endParaRPr lang="en-US" sz="1600" dirty="0"/>
+          </a:p>
+        </p:txBody>
+      </p:sp>
+      <p:sp>
+        <p:nvSpPr>
+          <p:cNvPr id="15" name="Text 13"/>
+          <p:cNvSpPr txBox="1"/>
+          <p:nvPr/>
+        </p:nvSpPr>
+        <p:spPr>
+          <a:xfrm>
+            <a:off x="8503920" y="3886200"/>
+            <a:ext cx="2926080" cy="365760"/>
+          </a:xfrm>
+          <a:prstGeom prst="rect">
+            <a:avLst/>
+          </a:prstGeom>
+          <a:noFill/>
+          <a:ln/>
+        </p:spPr>
+        <p:txBody>
+          <a:bodyPr wrap="square" lIns="0" tIns="0" rIns="0" bIns="0" rtlCol="0" anchor="t"/>
+          <a:lstStyle/>
+          <a:p>
+            <a:pPr indent="0" marL="0">
+              <a:buNone/>
+            </a:pPr>
+            <a:r>
+              <a:rPr lang="en-US" sz="1250" dirty="0">
+                <a:solidFill>
+                  <a:schemeClr val="tx2"/>
+                </a:solidFill>
+              </a:rPr>
+              <a:t>lifts the package off the eBot onto the conveyor</a:t>
+            </a:r>
+            <a:endParaRPr lang="en-US" sz="1250" dirty="0"/>
+          </a:p>
+        </p:txBody>
+      </p:sp>
+      <p:sp>
+        <p:nvSpPr>
+          <p:cNvPr id="16" name="Text 14"/>
+          <p:cNvSpPr txBox="1"/>
+          <p:nvPr/>
+        </p:nvSpPr>
+        <p:spPr>
+          <a:xfrm>
+            <a:off x="4023360" y="4206240"/>
+            <a:ext cx="2743200" cy="274320"/>
+          </a:xfrm>
+          <a:prstGeom prst="rect">
+            <a:avLst/>
+          </a:prstGeom>
+          <a:noFill/>
+          <a:ln/>
+        </p:spPr>
+        <p:txBody>
+          <a:bodyPr wrap="square" lIns="0" tIns="0" rIns="0" bIns="0" rtlCol="0" anchor="t"/>
+          <a:lstStyle/>
+          <a:p>
+            <a:pPr indent="0" marL="0">
+              <a:buNone/>
+            </a:pPr>
+            <a:r>
+              <a:rPr lang="en-US" sz="1300" dirty="0">
+                <a:solidFill>
+                  <a:schemeClr val="accent5"/>
+                </a:solidFill>
+              </a:rPr>
+              <a:t>Mobile robot</a:t>
+            </a:r>
+            <a:endParaRPr lang="en-US" sz="1300" dirty="0"/>
+          </a:p>
+        </p:txBody>
+      </p:sp>
+      <p:sp>
+        <p:nvSpPr>
+          <p:cNvPr id="17" name="node-planning"/>
+          <p:cNvSpPr/>
+          <p:nvPr/>
+        </p:nvSpPr>
+        <p:spPr>
+          <a:xfrm>
+            <a:off x="4023360" y="4526280"/>
+            <a:ext cx="3108960" cy="1325880"/>
+          </a:xfrm>
+          <a:prstGeom prst="roundRect">
+            <a:avLst>
+              <a:gd name="adj" fmla="val 5517"/>
             </a:avLst>
           </a:prstGeom>
           <a:solidFill>
@@ -9886,14 +9985,14 @@
       </p:sp>
       <p:sp>
         <p:nvSpPr>
-          <p:cNvPr id="15" name="Text 13"/>
+          <p:cNvPr id="18" name="Text 16"/>
           <p:cNvSpPr txBox="1"/>
           <p:nvPr/>
         </p:nvSpPr>
         <p:spPr>
           <a:xfrm>
-            <a:off x="4206240" y="4251960"/>
-            <a:ext cx="2743200" cy="365760"/>
+            <a:off x="4206240" y="4636008"/>
+            <a:ext cx="2743200" cy="320040"/>
           </a:xfrm>
           <a:prstGeom prst="rect">
             <a:avLst/>
@@ -9922,14 +10021,14 @@
       </p:sp>
       <p:sp>
         <p:nvSpPr>
-          <p:cNvPr id="16" name="Text 14"/>
+          <p:cNvPr id="19" name="Text 17"/>
           <p:cNvSpPr txBox="1"/>
           <p:nvPr/>
         </p:nvSpPr>
         <p:spPr>
           <a:xfrm>
-            <a:off x="4206240" y="4663440"/>
-            <a:ext cx="2743200" cy="914400"/>
+            <a:off x="4206240" y="4983480"/>
+            <a:ext cx="2743200" cy="822960"/>
           </a:xfrm>
           <a:prstGeom prst="rect">
             <a:avLst/>
@@ -9945,59 +10044,59 @@
               <a:buNone/>
             </a:pPr>
             <a:r>
-              <a:rPr lang="en-US" sz="1300" dirty="0">
+              <a:rPr lang="en-US" sz="1250" dirty="0">
                 <a:solidFill>
                   <a:schemeClr val="tx2"/>
                 </a:solidFill>
               </a:rPr>
               <a:t>clearance map</a:t>
             </a:r>
-            <a:endParaRPr lang="en-US" sz="1300" dirty="0"/>
-          </a:p>
-          <a:p>
-            <a:pPr indent="0" marL="0">
-              <a:buNone/>
-            </a:pPr>
-            <a:r>
-              <a:rPr lang="en-US" sz="1300" dirty="0">
+            <a:endParaRPr lang="en-US" sz="1250" dirty="0"/>
+          </a:p>
+          <a:p>
+            <a:pPr indent="0" marL="0">
+              <a:buNone/>
+            </a:pPr>
+            <a:r>
+              <a:rPr lang="en-US" sz="1250" dirty="0">
                 <a:solidFill>
                   <a:schemeClr val="tx2"/>
                 </a:solidFill>
               </a:rPr>
               <a:t>A*, shortcut, tighten</a:t>
             </a:r>
-            <a:endParaRPr lang="en-US" sz="1300" dirty="0"/>
-          </a:p>
-          <a:p>
-            <a:pPr indent="0" marL="0">
-              <a:buNone/>
-            </a:pPr>
-            <a:r>
-              <a:rPr lang="en-US" sz="1300" dirty="0">
+            <a:endParaRPr lang="en-US" sz="1250" dirty="0"/>
+          </a:p>
+          <a:p>
+            <a:pPr indent="0" marL="0">
+              <a:buNone/>
+            </a:pPr>
+            <a:r>
+              <a:rPr lang="en-US" sz="1250" dirty="0">
                 <a:solidFill>
                   <a:schemeClr val="tx2"/>
                 </a:solidFill>
               </a:rPr>
-              <a:t>lap sequencing</a:t>
-            </a:r>
-            <a:endParaRPr lang="en-US" sz="1300" dirty="0"/>
-          </a:p>
-        </p:txBody>
-      </p:sp>
-      <p:sp>
-        <p:nvSpPr>
-          <p:cNvPr id="17" name="node-navigation"/>
+              <a:t>lap sequencing, re-planning</a:t>
+            </a:r>
+            <a:endParaRPr lang="en-US" sz="1250" dirty="0"/>
+          </a:p>
+        </p:txBody>
+      </p:sp>
+      <p:sp>
+        <p:nvSpPr>
+          <p:cNvPr id="20" name="node-navigation"/>
           <p:cNvSpPr/>
           <p:nvPr/>
         </p:nvSpPr>
         <p:spPr>
           <a:xfrm>
-            <a:off x="8321040" y="4114800"/>
-            <a:ext cx="3291840" cy="1554480"/>
+            <a:off x="8321040" y="4526280"/>
+            <a:ext cx="3291840" cy="1325880"/>
           </a:xfrm>
           <a:prstGeom prst="roundRect">
             <a:avLst>
-              <a:gd name="adj" fmla="val 4706"/>
+              <a:gd name="adj" fmla="val 5517"/>
             </a:avLst>
           </a:prstGeom>
           <a:solidFill>
@@ -10013,14 +10112,14 @@
       </p:sp>
       <p:sp>
         <p:nvSpPr>
-          <p:cNvPr id="18" name="Text 16"/>
+          <p:cNvPr id="21" name="Text 19"/>
           <p:cNvSpPr txBox="1"/>
           <p:nvPr/>
         </p:nvSpPr>
         <p:spPr>
           <a:xfrm>
-            <a:off x="8503920" y="4251960"/>
-            <a:ext cx="2926080" cy="365760"/>
+            <a:off x="8503920" y="4636008"/>
+            <a:ext cx="2926080" cy="320040"/>
           </a:xfrm>
           <a:prstGeom prst="rect">
             <a:avLst/>
@@ -10049,14 +10148,14 @@
       </p:sp>
       <p:sp>
         <p:nvSpPr>
-          <p:cNvPr id="19" name="Text 17"/>
+          <p:cNvPr id="22" name="Text 20"/>
           <p:cNvSpPr txBox="1"/>
           <p:nvPr/>
         </p:nvSpPr>
         <p:spPr>
           <a:xfrm>
-            <a:off x="8503920" y="4663440"/>
-            <a:ext cx="2926080" cy="914400"/>
+            <a:off x="8503920" y="4983480"/>
+            <a:ext cx="2926080" cy="822960"/>
           </a:xfrm>
           <a:prstGeom prst="rect">
             <a:avLst/>
@@ -10072,54 +10171,54 @@
               <a:buNone/>
             </a:pPr>
             <a:r>
-              <a:rPr lang="en-US" sz="1300" dirty="0">
+              <a:rPr lang="en-US" sz="1250" dirty="0">
                 <a:solidFill>
                   <a:schemeClr val="tx2"/>
                 </a:solidFill>
               </a:rPr>
               <a:t>pure pursuit</a:t>
             </a:r>
-            <a:endParaRPr lang="en-US" sz="1300" dirty="0"/>
-          </a:p>
-          <a:p>
-            <a:pPr indent="0" marL="0">
-              <a:buNone/>
-            </a:pPr>
-            <a:r>
-              <a:rPr lang="en-US" sz="1300" dirty="0">
+            <a:endParaRPr lang="en-US" sz="1250" dirty="0"/>
+          </a:p>
+          <a:p>
+            <a:pPr indent="0" marL="0">
+              <a:buNone/>
+            </a:pPr>
+            <a:r>
+              <a:rPr lang="en-US" sz="1250" dirty="0">
                 <a:solidFill>
                   <a:schemeClr val="tx2"/>
                 </a:solidFill>
               </a:rPr>
               <a:t>turn to final heading</a:t>
             </a:r>
-            <a:endParaRPr lang="en-US" sz="1300" dirty="0"/>
-          </a:p>
-          <a:p>
-            <a:pPr indent="0" marL="0">
-              <a:buNone/>
-            </a:pPr>
-            <a:r>
-              <a:rPr lang="en-US" sz="1300" dirty="0">
+            <a:endParaRPr lang="en-US" sz="1250" dirty="0"/>
+          </a:p>
+          <a:p>
+            <a:pPr indent="0" marL="0">
+              <a:buNone/>
+            </a:pPr>
+            <a:r>
+              <a:rPr lang="en-US" sz="1250" dirty="0">
                 <a:solidFill>
                   <a:schemeClr val="tx2"/>
                 </a:solidFill>
               </a:rPr>
-              <a:t>stop on the pose</a:t>
-            </a:r>
-            <a:endParaRPr lang="en-US" sz="1300" dirty="0"/>
-          </a:p>
-        </p:txBody>
-      </p:sp>
-      <p:sp>
-        <p:nvSpPr>
-          <p:cNvPr id="20" name="a-rgbd"/>
+              <a:t>stops on unmapped obstacles</a:t>
+            </a:r>
+            <a:endParaRPr lang="en-US" sz="1250" dirty="0"/>
+          </a:p>
+        </p:txBody>
+      </p:sp>
+      <p:sp>
+        <p:nvSpPr>
+          <p:cNvPr id="23" name="a-rgbd"/>
           <p:cNvSpPr/>
           <p:nvPr/>
         </p:nvSpPr>
         <p:spPr>
           <a:xfrm>
-            <a:off x="2926080" y="2103120"/>
+            <a:off x="2926080" y="2057400"/>
             <a:ext cx="1097280" cy="0"/>
           </a:xfrm>
           <a:prstGeom prst="line">
@@ -10137,13 +10236,13 @@
       </p:sp>
       <p:sp>
         <p:nvSpPr>
-          <p:cNvPr id="21" name="Text 19"/>
+          <p:cNvPr id="24" name="Text 22"/>
           <p:cNvSpPr txBox="1"/>
           <p:nvPr/>
         </p:nvSpPr>
         <p:spPr>
           <a:xfrm>
-            <a:off x="2971800" y="1783080"/>
+            <a:off x="2971800" y="1737360"/>
             <a:ext cx="1051560" cy="274320"/>
           </a:xfrm>
           <a:prstGeom prst="rect">
@@ -10173,13 +10272,13 @@
       </p:sp>
       <p:sp>
         <p:nvSpPr>
-          <p:cNvPr id="22" name="a-tf"/>
+          <p:cNvPr id="25" name="a-tf"/>
           <p:cNvSpPr/>
           <p:nvPr/>
         </p:nvSpPr>
         <p:spPr>
           <a:xfrm>
-            <a:off x="7132320" y="2103120"/>
+            <a:off x="7132320" y="2057400"/>
             <a:ext cx="1188720" cy="0"/>
           </a:xfrm>
           <a:prstGeom prst="line">
@@ -10197,13 +10296,13 @@
       </p:sp>
       <p:sp>
         <p:nvSpPr>
-          <p:cNvPr id="23" name="Text 21"/>
+          <p:cNvPr id="26" name="Text 24"/>
           <p:cNvSpPr txBox="1"/>
           <p:nvPr/>
         </p:nvSpPr>
         <p:spPr>
           <a:xfrm>
-            <a:off x="7132320" y="1783080"/>
+            <a:off x="7132320" y="1737360"/>
             <a:ext cx="1188720" cy="274320"/>
           </a:xfrm>
           <a:prstGeom prst="rect">
@@ -10233,13 +10332,13 @@
       </p:sp>
       <p:sp>
         <p:nvSpPr>
-          <p:cNvPr id="24" name="a-map"/>
+          <p:cNvPr id="27" name="a-map"/>
           <p:cNvSpPr/>
           <p:nvPr/>
         </p:nvSpPr>
         <p:spPr>
           <a:xfrm>
-            <a:off x="2926080" y="4572000"/>
+            <a:off x="2926080" y="4937760"/>
             <a:ext cx="1097280" cy="0"/>
           </a:xfrm>
           <a:prstGeom prst="line">
@@ -10257,13 +10356,13 @@
       </p:sp>
       <p:sp>
         <p:nvSpPr>
-          <p:cNvPr id="25" name="Text 23"/>
+          <p:cNvPr id="28" name="Text 26"/>
           <p:cNvSpPr txBox="1"/>
           <p:nvPr/>
         </p:nvSpPr>
         <p:spPr>
           <a:xfrm>
-            <a:off x="2971800" y="4251960"/>
+            <a:off x="2971800" y="4617720"/>
             <a:ext cx="1051560" cy="274320"/>
           </a:xfrm>
           <a:prstGeom prst="rect">
@@ -10293,13 +10392,13 @@
       </p:sp>
       <p:sp>
         <p:nvSpPr>
-          <p:cNvPr id="26" name="a-path"/>
+          <p:cNvPr id="29" name="a-path"/>
           <p:cNvSpPr/>
           <p:nvPr/>
         </p:nvSpPr>
         <p:spPr>
           <a:xfrm>
-            <a:off x="7132320" y="4572000"/>
+            <a:off x="7132320" y="4937760"/>
             <a:ext cx="1188720" cy="0"/>
           </a:xfrm>
           <a:prstGeom prst="line">
@@ -10317,13 +10416,13 @@
       </p:sp>
       <p:sp>
         <p:nvSpPr>
-          <p:cNvPr id="27" name="Text 25"/>
+          <p:cNvPr id="30" name="Text 28"/>
           <p:cNvSpPr txBox="1"/>
           <p:nvPr/>
         </p:nvSpPr>
         <p:spPr>
           <a:xfrm>
-            <a:off x="7132320" y="4251960"/>
+            <a:off x="7132320" y="4617720"/>
             <a:ext cx="1188720" cy="274320"/>
           </a:xfrm>
           <a:prstGeom prst="rect">
@@ -10353,14 +10452,158 @@
       </p:sp>
       <p:sp>
         <p:nvSpPr>
-          <p:cNvPr id="28" name="r-arm-1"/>
+          <p:cNvPr id="31" name="a-obstacles"/>
           <p:cNvSpPr/>
           <p:nvPr/>
         </p:nvSpPr>
         <p:spPr>
           <a:xfrm>
-            <a:off x="9966960" y="3200400"/>
-            <a:ext cx="0" cy="320040"/>
+            <a:off x="7132320" y="5440680"/>
+            <a:ext cx="1188720" cy="0"/>
+          </a:xfrm>
+          <a:prstGeom prst="line">
+            <a:avLst/>
+          </a:prstGeom>
+          <a:noFill/>
+          <a:ln w="19050">
+            <a:solidFill>
+              <a:srgbClr val="6B7280"/>
+            </a:solidFill>
+            <a:prstDash val="solid"/>
+            <a:headEnd type="triangle"/>
+          </a:ln>
+        </p:spPr>
+      </p:sp>
+      <p:sp>
+        <p:nvSpPr>
+          <p:cNvPr id="32" name="Text 30"/>
+          <p:cNvSpPr txBox="1"/>
+          <p:nvPr/>
+        </p:nvSpPr>
+        <p:spPr>
+          <a:xfrm>
+            <a:off x="7132320" y="5486400"/>
+            <a:ext cx="1188720" cy="274320"/>
+          </a:xfrm>
+          <a:prstGeom prst="rect">
+            <a:avLst/>
+          </a:prstGeom>
+          <a:noFill/>
+          <a:ln/>
+        </p:spPr>
+        <p:txBody>
+          <a:bodyPr wrap="square" lIns="0" tIns="0" rIns="0" bIns="0" rtlCol="0" anchor="t"/>
+          <a:lstStyle/>
+          <a:p>
+            <a:pPr algn="ctr" indent="0" marL="0">
+              <a:buNone/>
+            </a:pPr>
+            <a:r>
+              <a:rPr lang="en-US" sz="1100" dirty="0">
+                <a:solidFill>
+                  <a:schemeClr val="tx2"/>
+                </a:solidFill>
+              </a:rPr>
+              <a:t>/ebot_obstacles</a:t>
+            </a:r>
+            <a:endParaRPr lang="en-US" sz="1100" dirty="0"/>
+          </a:p>
+        </p:txBody>
+      </p:sp>
+      <p:sp>
+        <p:nvSpPr>
+          <p:cNvPr id="33" name="h-1"/>
+          <p:cNvSpPr/>
+          <p:nvPr/>
+        </p:nvSpPr>
+        <p:spPr>
+          <a:xfrm>
+            <a:off x="5577840" y="3886200"/>
+            <a:ext cx="0" cy="640080"/>
+          </a:xfrm>
+          <a:prstGeom prst="line">
+            <a:avLst/>
+          </a:prstGeom>
+          <a:noFill/>
+          <a:ln w="19050">
+            <a:solidFill>
+              <a:srgbClr val="C4501F"/>
+            </a:solidFill>
+            <a:prstDash val="solid"/>
+            <a:tailEnd type="triangle"/>
+          </a:ln>
+        </p:spPr>
+      </p:sp>
+      <p:sp>
+        <p:nvSpPr>
+          <p:cNvPr id="34" name="h-2"/>
+          <p:cNvSpPr/>
+          <p:nvPr/>
+        </p:nvSpPr>
+        <p:spPr>
+          <a:xfrm>
+            <a:off x="5577840" y="3886200"/>
+            <a:ext cx="2743200" cy="0"/>
+          </a:xfrm>
+          <a:prstGeom prst="line">
+            <a:avLst/>
+          </a:prstGeom>
+          <a:noFill/>
+          <a:ln w="19050">
+            <a:solidFill>
+              <a:srgbClr val="C4501F"/>
+            </a:solidFill>
+            <a:prstDash val="solid"/>
+            <a:tailEnd type="triangle"/>
+          </a:ln>
+        </p:spPr>
+      </p:sp>
+      <p:sp>
+        <p:nvSpPr>
+          <p:cNvPr id="35" name="Text 33"/>
+          <p:cNvSpPr txBox="1"/>
+          <p:nvPr/>
+        </p:nvSpPr>
+        <p:spPr>
+          <a:xfrm>
+            <a:off x="5669280" y="3584448"/>
+            <a:ext cx="2651760" cy="274320"/>
+          </a:xfrm>
+          <a:prstGeom prst="rect">
+            <a:avLst/>
+          </a:prstGeom>
+          <a:noFill/>
+          <a:ln/>
+        </p:spPr>
+        <p:txBody>
+          <a:bodyPr wrap="square" lIns="0" tIns="0" rIns="0" bIns="0" rtlCol="0" anchor="t"/>
+          <a:lstStyle/>
+          <a:p>
+            <a:pPr indent="0" marL="0">
+              <a:buNone/>
+            </a:pPr>
+            <a:r>
+              <a:rPr lang="en-US" sz="1100" dirty="0">
+                <a:solidFill>
+                  <a:schemeClr val="accent1"/>
+                </a:solidFill>
+              </a:rPr>
+              <a:t>/handoff/ready  ⇄  /handoff/done</a:t>
+            </a:r>
+            <a:endParaRPr lang="en-US" sz="1100" dirty="0"/>
+          </a:p>
+        </p:txBody>
+      </p:sp>
+      <p:sp>
+        <p:nvSpPr>
+          <p:cNvPr id="36" name="r-arm-1"/>
+          <p:cNvSpPr/>
+          <p:nvPr/>
+        </p:nvSpPr>
+        <p:spPr>
+          <a:xfrm>
+            <a:off x="9966960" y="2926080"/>
+            <a:ext cx="0" cy="274320"/>
           </a:xfrm>
           <a:prstGeom prst="line">
             <a:avLst/>
@@ -10376,13 +10619,13 @@
       </p:sp>
       <p:sp>
         <p:nvSpPr>
-          <p:cNvPr id="29" name="r-arm-2"/>
+          <p:cNvPr id="37" name="r-arm-2"/>
           <p:cNvSpPr/>
           <p:nvPr/>
         </p:nvSpPr>
         <p:spPr>
           <a:xfrm>
-            <a:off x="2926080" y="3520440"/>
+            <a:off x="2926080" y="3200400"/>
             <a:ext cx="7040880" cy="0"/>
           </a:xfrm>
           <a:prstGeom prst="line">
@@ -10394,20 +10637,20 @@
               <a:srgbClr val="6B7280"/>
             </a:solidFill>
             <a:prstDash val="solid"/>
-            <a:tailEnd type="triangle"/>
+            <a:headEnd type="triangle"/>
           </a:ln>
         </p:spPr>
       </p:sp>
       <p:sp>
         <p:nvSpPr>
-          <p:cNvPr id="30" name="Text 28"/>
+          <p:cNvPr id="38" name="Text 36"/>
           <p:cNvSpPr txBox="1"/>
           <p:nvPr/>
         </p:nvSpPr>
         <p:spPr>
           <a:xfrm>
-            <a:off x="4023360" y="3246120"/>
-            <a:ext cx="3108960" cy="274320"/>
+            <a:off x="3108960" y="3246120"/>
+            <a:ext cx="2377440" cy="274320"/>
           </a:xfrm>
           <a:prstGeom prst="rect">
             <a:avLst/>
@@ -10436,14 +10679,14 @@
       </p:sp>
       <p:sp>
         <p:nvSpPr>
-          <p:cNvPr id="31" name="r-ebot-1"/>
+          <p:cNvPr id="39" name="r-ebot-1"/>
           <p:cNvSpPr/>
           <p:nvPr/>
         </p:nvSpPr>
         <p:spPr>
           <a:xfrm>
-            <a:off x="9966960" y="5669280"/>
-            <a:ext cx="0" cy="320040"/>
+            <a:off x="9966960" y="5852160"/>
+            <a:ext cx="0" cy="274320"/>
           </a:xfrm>
           <a:prstGeom prst="line">
             <a:avLst/>
@@ -10459,13 +10702,13 @@
       </p:sp>
       <p:sp>
         <p:nvSpPr>
-          <p:cNvPr id="32" name="r-ebot-2"/>
+          <p:cNvPr id="40" name="r-ebot-2"/>
           <p:cNvSpPr/>
           <p:nvPr/>
         </p:nvSpPr>
         <p:spPr>
           <a:xfrm>
-            <a:off x="2926080" y="5989320"/>
+            <a:off x="2926080" y="6126480"/>
             <a:ext cx="7040880" cy="0"/>
           </a:xfrm>
           <a:prstGeom prst="line">
@@ -10477,19 +10720,19 @@
               <a:srgbClr val="6B7280"/>
             </a:solidFill>
             <a:prstDash val="solid"/>
-            <a:tailEnd type="triangle"/>
+            <a:headEnd type="triangle"/>
           </a:ln>
         </p:spPr>
       </p:sp>
       <p:sp>
         <p:nvSpPr>
-          <p:cNvPr id="33" name="Text 31"/>
+          <p:cNvPr id="41" name="Text 39"/>
           <p:cNvSpPr txBox="1"/>
           <p:nvPr/>
         </p:nvSpPr>
         <p:spPr>
           <a:xfrm>
-            <a:off x="4023360" y="6035040"/>
+            <a:off x="4023360" y="6144768"/>
             <a:ext cx="4114800" cy="274320"/>
           </a:xfrm>
           <a:prstGeom prst="rect">
